--- a/ppt/uge40LoopsPartII.pptx
+++ b/ppt/uge40LoopsPartII.pptx
@@ -5,16 +5,29 @@
     <p:sldMasterId id="2147483648" r:id="rId4"/>
   </p:sldMasterIdLst>
   <p:notesMasterIdLst>
-    <p:notesMasterId r:id="rId12"/>
+    <p:notesMasterId r:id="rId25"/>
   </p:notesMasterIdLst>
   <p:sldIdLst>
     <p:sldId id="256" r:id="rId5"/>
     <p:sldId id="257" r:id="rId6"/>
-    <p:sldId id="258" r:id="rId7"/>
-    <p:sldId id="278" r:id="rId8"/>
-    <p:sldId id="279" r:id="rId9"/>
-    <p:sldId id="280" r:id="rId10"/>
-    <p:sldId id="277" r:id="rId11"/>
+    <p:sldId id="278" r:id="rId7"/>
+    <p:sldId id="279" r:id="rId8"/>
+    <p:sldId id="280" r:id="rId9"/>
+    <p:sldId id="277" r:id="rId10"/>
+    <p:sldId id="263" r:id="rId11"/>
+    <p:sldId id="429" r:id="rId12"/>
+    <p:sldId id="264" r:id="rId13"/>
+    <p:sldId id="265" r:id="rId14"/>
+    <p:sldId id="419" r:id="rId15"/>
+    <p:sldId id="420" r:id="rId16"/>
+    <p:sldId id="421" r:id="rId17"/>
+    <p:sldId id="423" r:id="rId18"/>
+    <p:sldId id="424" r:id="rId19"/>
+    <p:sldId id="418" r:id="rId20"/>
+    <p:sldId id="426" r:id="rId21"/>
+    <p:sldId id="428" r:id="rId22"/>
+    <p:sldId id="286" r:id="rId23"/>
+    <p:sldId id="430" r:id="rId24"/>
   </p:sldIdLst>
   <p:sldSz cx="12192000" cy="6858000"/>
   <p:notesSz cx="12192000" cy="6858000"/>
@@ -24,6 +37,46 @@
     </a:defPPr>
   </p:defaultTextStyle>
   <p:extLst>
+    <p:ext uri="{521415D9-36F7-43E2-AB2F-B90AF26B5E84}">
+      <p14:sectionLst xmlns:p14="http://schemas.microsoft.com/office/powerpoint/2010/main">
+        <p14:section name="Default Section" id="{1E03BBBE-7511-D547-A27A-4E136D696A3B}">
+          <p14:sldIdLst>
+            <p14:sldId id="256"/>
+            <p14:sldId id="257"/>
+            <p14:sldId id="278"/>
+            <p14:sldId id="279"/>
+            <p14:sldId id="280"/>
+            <p14:sldId id="277"/>
+          </p14:sldIdLst>
+        </p14:section>
+        <p14:section name="array" id="{D65C5B59-6F2C-5C4B-BD56-289642C2A173}">
+          <p14:sldIdLst>
+            <p14:sldId id="263"/>
+            <p14:sldId id="429"/>
+            <p14:sldId id="264"/>
+            <p14:sldId id="265"/>
+          </p14:sldIdLst>
+        </p14:section>
+        <p14:section name="multi dimensional array" id="{794752A5-B35F-F44E-81C7-98C16FF883BA}">
+          <p14:sldIdLst>
+            <p14:sldId id="419"/>
+            <p14:sldId id="420"/>
+            <p14:sldId id="421"/>
+            <p14:sldId id="423"/>
+            <p14:sldId id="424"/>
+            <p14:sldId id="418"/>
+          </p14:sldIdLst>
+        </p14:section>
+        <p14:section name="array list" id="{3F993799-2BB1-894C-81AE-1AD852807EEA}">
+          <p14:sldIdLst>
+            <p14:sldId id="426"/>
+            <p14:sldId id="428"/>
+            <p14:sldId id="286"/>
+            <p14:sldId id="430"/>
+          </p14:sldIdLst>
+        </p14:section>
+      </p14:sectionLst>
+    </p:ext>
     <p:ext uri="{EFAFB233-063F-42B5-8137-9DF3F51BA10A}">
       <p15:sldGuideLst xmlns:p15="http://schemas.microsoft.com/office/powerpoint/2012/main">
         <p15:guide id="1" orient="horz" pos="2880">
@@ -133,7 +186,7 @@
           <a:p>
             <a:fld id="{1129347E-893C-BE4D-82D7-086F268CE3C9}" type="datetimeFigureOut">
               <a:rPr lang="en-DK" smtClean="0"/>
-              <a:t>19/09/2026</a:t>
+              <a:t>23/09/2026</a:t>
             </a:fld>
             <a:endParaRPr lang="en-DK"/>
           </a:p>
@@ -401,6 +454,874 @@
 </p:notesMaster>
 </file>
 
+<file path=ppt/notesSlides/notesSlide1.xml><?xml version="1.0" encoding="utf-8"?>
+<p:notes xmlns:a="http://schemas.openxmlformats.org/drawingml/2006/main" xmlns:r="http://schemas.openxmlformats.org/officeDocument/2006/relationships" xmlns:p="http://schemas.openxmlformats.org/presentationml/2006/main">
+  <p:cSld>
+    <p:spTree>
+      <p:nvGrpSpPr>
+        <p:cNvPr id="1" name=""/>
+        <p:cNvGrpSpPr/>
+        <p:nvPr/>
+      </p:nvGrpSpPr>
+      <p:grpSpPr>
+        <a:xfrm>
+          <a:off x="0" y="0"/>
+          <a:ext cx="0" cy="0"/>
+          <a:chOff x="0" y="0"/>
+          <a:chExt cx="0" cy="0"/>
+        </a:xfrm>
+      </p:grpSpPr>
+      <p:sp>
+        <p:nvSpPr>
+          <p:cNvPr id="2" name="Slide Image Placeholder 1"/>
+          <p:cNvSpPr>
+            <a:spLocks noGrp="1" noRot="1" noChangeAspect="1"/>
+          </p:cNvSpPr>
+          <p:nvPr>
+            <p:ph type="sldImg"/>
+          </p:nvPr>
+        </p:nvSpPr>
+        <p:spPr/>
+      </p:sp>
+      <p:sp>
+        <p:nvSpPr>
+          <p:cNvPr id="3" name="Notes Placeholder 2"/>
+          <p:cNvSpPr>
+            <a:spLocks noGrp="1"/>
+          </p:cNvSpPr>
+          <p:nvPr>
+            <p:ph type="body" idx="1"/>
+          </p:nvPr>
+        </p:nvSpPr>
+        <p:spPr/>
+        <p:txBody>
+          <a:bodyPr/>
+          <a:lstStyle/>
+          <a:p>
+            <a:r>
+              <a:rPr lang="en-GB" dirty="0"/>
+              <a:t>S</a:t>
+            </a:r>
+            <a:r>
+              <a:rPr lang="en-DK" dirty="0"/>
+              <a:t>witch break</a:t>
+            </a:r>
+          </a:p>
+        </p:txBody>
+      </p:sp>
+      <p:sp>
+        <p:nvSpPr>
+          <p:cNvPr id="4" name="Slide Number Placeholder 3"/>
+          <p:cNvSpPr>
+            <a:spLocks noGrp="1"/>
+          </p:cNvSpPr>
+          <p:nvPr>
+            <p:ph type="sldNum" sz="quarter" idx="5"/>
+          </p:nvPr>
+        </p:nvSpPr>
+        <p:spPr/>
+        <p:txBody>
+          <a:bodyPr/>
+          <a:lstStyle/>
+          <a:p>
+            <a:fld id="{7D8C4A44-45A6-9047-80DD-6777D98D193C}" type="slidenum">
+              <a:rPr lang="en-DK" smtClean="0"/>
+              <a:t>3</a:t>
+            </a:fld>
+            <a:endParaRPr lang="en-DK"/>
+          </a:p>
+        </p:txBody>
+      </p:sp>
+    </p:spTree>
+    <p:extLst>
+      <p:ext uri="{BB962C8B-B14F-4D97-AF65-F5344CB8AC3E}">
+        <p14:creationId xmlns:p14="http://schemas.microsoft.com/office/powerpoint/2010/main" val="444083863"/>
+      </p:ext>
+    </p:extLst>
+  </p:cSld>
+  <p:clrMapOvr>
+    <a:masterClrMapping/>
+  </p:clrMapOvr>
+</p:notes>
+</file>
+
+<file path=ppt/notesSlides/notesSlide2.xml><?xml version="1.0" encoding="utf-8"?>
+<p:notes xmlns:a="http://schemas.openxmlformats.org/drawingml/2006/main" xmlns:r="http://schemas.openxmlformats.org/officeDocument/2006/relationships" xmlns:p="http://schemas.openxmlformats.org/presentationml/2006/main">
+  <p:cSld>
+    <p:spTree>
+      <p:nvGrpSpPr>
+        <p:cNvPr id="1" name=""/>
+        <p:cNvGrpSpPr/>
+        <p:nvPr/>
+      </p:nvGrpSpPr>
+      <p:grpSpPr>
+        <a:xfrm>
+          <a:off x="0" y="0"/>
+          <a:ext cx="0" cy="0"/>
+          <a:chOff x="0" y="0"/>
+          <a:chExt cx="0" cy="0"/>
+        </a:xfrm>
+      </p:grpSpPr>
+      <p:sp>
+        <p:nvSpPr>
+          <p:cNvPr id="2" name="Slide Image Placeholder 1"/>
+          <p:cNvSpPr>
+            <a:spLocks noGrp="1" noRot="1" noChangeAspect="1"/>
+          </p:cNvSpPr>
+          <p:nvPr>
+            <p:ph type="sldImg"/>
+          </p:nvPr>
+        </p:nvSpPr>
+        <p:spPr/>
+      </p:sp>
+      <p:sp>
+        <p:nvSpPr>
+          <p:cNvPr id="3" name="Notes Placeholder 2"/>
+          <p:cNvSpPr>
+            <a:spLocks noGrp="1"/>
+          </p:cNvSpPr>
+          <p:nvPr>
+            <p:ph type="body" idx="1"/>
+          </p:nvPr>
+        </p:nvSpPr>
+        <p:spPr/>
+        <p:txBody>
+          <a:bodyPr/>
+          <a:lstStyle/>
+          <a:p>
+            <a:pPr marL="0" marR="0" lvl="0" indent="0" algn="l" defTabSz="914400" rtl="0" eaLnBrk="1" fontAlgn="auto" latinLnBrk="0" hangingPunct="1">
+              <a:lnSpc>
+                <a:spcPct val="100000"/>
+              </a:lnSpc>
+              <a:spcBef>
+                <a:spcPts val="0"/>
+              </a:spcBef>
+              <a:spcAft>
+                <a:spcPts val="0"/>
+              </a:spcAft>
+              <a:buClrTx/>
+              <a:buSzTx/>
+              <a:buFontTx/>
+              <a:buNone/>
+              <a:tabLst/>
+              <a:defRPr/>
+            </a:pPr>
+            <a:r>
+              <a:rPr lang="en-DK" sz="1200" kern="1200" dirty="0">
+                <a:solidFill>
+                  <a:schemeClr val="tx1"/>
+                </a:solidFill>
+                <a:latin typeface="+mn-lt"/>
+                <a:ea typeface="+mn-ea"/>
+                <a:cs typeface="+mn-cs"/>
+              </a:rPr>
+              <a:t>int[] c = new int[] {10, 20, 30, 40};</a:t>
+            </a:r>
+          </a:p>
+          <a:p>
+            <a:pPr marL="0" marR="0" lvl="0" indent="0" algn="l" defTabSz="914400" rtl="0" eaLnBrk="1" fontAlgn="auto" latinLnBrk="0" hangingPunct="1">
+              <a:lnSpc>
+                <a:spcPct val="100000"/>
+              </a:lnSpc>
+              <a:spcBef>
+                <a:spcPts val="0"/>
+              </a:spcBef>
+              <a:spcAft>
+                <a:spcPts val="0"/>
+              </a:spcAft>
+              <a:buClrTx/>
+              <a:buSzTx/>
+              <a:buFontTx/>
+              <a:buNone/>
+              <a:tabLst/>
+              <a:defRPr/>
+            </a:pPr>
+            <a:endParaRPr lang="en-DK" sz="1200" kern="1200" dirty="0">
+              <a:solidFill>
+                <a:schemeClr val="tx1"/>
+              </a:solidFill>
+              <a:latin typeface="+mn-lt"/>
+              <a:ea typeface="+mn-ea"/>
+              <a:cs typeface="+mn-cs"/>
+            </a:endParaRPr>
+          </a:p>
+          <a:p>
+            <a:pPr rtl="0"/>
+            <a:r>
+              <a:rPr lang="en-DK" sz="1200" kern="1200" dirty="0">
+                <a:solidFill>
+                  <a:schemeClr val="tx1"/>
+                </a:solidFill>
+                <a:latin typeface="+mn-lt"/>
+                <a:ea typeface="+mn-ea"/>
+                <a:cs typeface="+mn-cs"/>
+              </a:rPr>
+              <a:t>int[] c;</a:t>
+            </a:r>
+          </a:p>
+          <a:p>
+            <a:pPr rtl="0"/>
+            <a:r>
+              <a:rPr lang="en-DK" sz="1200" kern="1200" dirty="0">
+                <a:solidFill>
+                  <a:schemeClr val="tx1"/>
+                </a:solidFill>
+                <a:latin typeface="+mn-lt"/>
+                <a:ea typeface="+mn-ea"/>
+                <a:cs typeface="+mn-cs"/>
+              </a:rPr>
+              <a:t>System.out.println(c.length); //Error</a:t>
+            </a:r>
+          </a:p>
+          <a:p>
+            <a:endParaRPr lang="en-DK" dirty="0"/>
+          </a:p>
+        </p:txBody>
+      </p:sp>
+      <p:sp>
+        <p:nvSpPr>
+          <p:cNvPr id="4" name="Slide Number Placeholder 3"/>
+          <p:cNvSpPr>
+            <a:spLocks noGrp="1"/>
+          </p:cNvSpPr>
+          <p:nvPr>
+            <p:ph type="sldNum" sz="quarter" idx="5"/>
+          </p:nvPr>
+        </p:nvSpPr>
+        <p:spPr/>
+        <p:txBody>
+          <a:bodyPr/>
+          <a:lstStyle/>
+          <a:p>
+            <a:fld id="{7D8C4A44-45A6-9047-80DD-6777D98D193C}" type="slidenum">
+              <a:rPr lang="en-DK" smtClean="0"/>
+              <a:t>7</a:t>
+            </a:fld>
+            <a:endParaRPr lang="en-DK"/>
+          </a:p>
+        </p:txBody>
+      </p:sp>
+    </p:spTree>
+    <p:extLst>
+      <p:ext uri="{BB962C8B-B14F-4D97-AF65-F5344CB8AC3E}">
+        <p14:creationId xmlns:p14="http://schemas.microsoft.com/office/powerpoint/2010/main" val="3109127546"/>
+      </p:ext>
+    </p:extLst>
+  </p:cSld>
+  <p:clrMapOvr>
+    <a:masterClrMapping/>
+  </p:clrMapOvr>
+</p:notes>
+</file>
+
+<file path=ppt/notesSlides/notesSlide3.xml><?xml version="1.0" encoding="utf-8"?>
+<p:notes xmlns:a="http://schemas.openxmlformats.org/drawingml/2006/main" xmlns:r="http://schemas.openxmlformats.org/officeDocument/2006/relationships" xmlns:p="http://schemas.openxmlformats.org/presentationml/2006/main">
+  <p:cSld>
+    <p:spTree>
+      <p:nvGrpSpPr>
+        <p:cNvPr id="1" name=""/>
+        <p:cNvGrpSpPr/>
+        <p:nvPr/>
+      </p:nvGrpSpPr>
+      <p:grpSpPr>
+        <a:xfrm>
+          <a:off x="0" y="0"/>
+          <a:ext cx="0" cy="0"/>
+          <a:chOff x="0" y="0"/>
+          <a:chExt cx="0" cy="0"/>
+        </a:xfrm>
+      </p:grpSpPr>
+      <p:sp>
+        <p:nvSpPr>
+          <p:cNvPr id="2" name="Slide Image Placeholder 1"/>
+          <p:cNvSpPr>
+            <a:spLocks noGrp="1" noRot="1" noChangeAspect="1"/>
+          </p:cNvSpPr>
+          <p:nvPr>
+            <p:ph type="sldImg"/>
+          </p:nvPr>
+        </p:nvSpPr>
+        <p:spPr/>
+      </p:sp>
+      <p:sp>
+        <p:nvSpPr>
+          <p:cNvPr id="3" name="Notes Placeholder 2"/>
+          <p:cNvSpPr>
+            <a:spLocks noGrp="1"/>
+          </p:cNvSpPr>
+          <p:nvPr>
+            <p:ph type="body" idx="1"/>
+          </p:nvPr>
+        </p:nvSpPr>
+        <p:spPr/>
+        <p:txBody>
+          <a:bodyPr/>
+          <a:lstStyle/>
+          <a:p>
+            <a:r>
+              <a:rPr lang="en-US" dirty="0"/>
+              <a:t> </a:t>
+            </a:r>
+          </a:p>
+          <a:p>
+            <a:pPr marL="0" marR="0" lvl="0" indent="0" algn="l" defTabSz="914400" rtl="0" eaLnBrk="1" fontAlgn="auto" latinLnBrk="0" hangingPunct="1">
+              <a:lnSpc>
+                <a:spcPct val="100000"/>
+              </a:lnSpc>
+              <a:spcBef>
+                <a:spcPts val="0"/>
+              </a:spcBef>
+              <a:spcAft>
+                <a:spcPts val="0"/>
+              </a:spcAft>
+              <a:buClrTx/>
+              <a:buSzTx/>
+              <a:buFontTx/>
+              <a:buNone/>
+              <a:tabLst/>
+              <a:defRPr/>
+            </a:pPr>
+            <a:r>
+              <a:rPr lang="en-US" dirty="0"/>
+              <a:t>(c) </a:t>
+            </a:r>
+            <a:r>
+              <a:rPr lang="en-DK" sz="1200" kern="1200" dirty="0">
+                <a:solidFill>
+                  <a:schemeClr val="tx1"/>
+                </a:solidFill>
+                <a:latin typeface="+mn-lt"/>
+                <a:ea typeface="+mn-ea"/>
+                <a:cs typeface="+mn-cs"/>
+              </a:rPr>
+              <a:t>number of rows</a:t>
+            </a:r>
+          </a:p>
+          <a:p>
+            <a:endParaRPr lang="en-IN" dirty="0"/>
+          </a:p>
+        </p:txBody>
+      </p:sp>
+      <p:sp>
+        <p:nvSpPr>
+          <p:cNvPr id="4" name="Slide Number Placeholder 3"/>
+          <p:cNvSpPr>
+            <a:spLocks noGrp="1"/>
+          </p:cNvSpPr>
+          <p:nvPr>
+            <p:ph type="sldNum" idx="12"/>
+          </p:nvPr>
+        </p:nvSpPr>
+        <p:spPr/>
+        <p:txBody>
+          <a:bodyPr/>
+          <a:lstStyle/>
+          <a:p>
+            <a:pPr marL="0" marR="0" lvl="0" indent="0" algn="r" rtl="0">
+              <a:spcBef>
+                <a:spcPts val="0"/>
+              </a:spcBef>
+              <a:buSzPct val="25000"/>
+              <a:buNone/>
+            </a:pPr>
+            <a:fld id="{00000000-1234-1234-1234-123412341234}" type="slidenum">
+              <a:rPr lang="en-US" sz="1200" b="0" i="0" u="none" strike="noStrike" cap="none" smtClean="0">
+                <a:solidFill>
+                  <a:schemeClr val="dk1"/>
+                </a:solidFill>
+                <a:latin typeface="Arial"/>
+                <a:ea typeface="Arial"/>
+                <a:cs typeface="Arial"/>
+                <a:sym typeface="Arial"/>
+              </a:rPr>
+              <a:t>11</a:t>
+            </a:fld>
+            <a:endParaRPr lang="en-US" sz="1200" b="0" i="0" u="none" strike="noStrike" cap="none" dirty="0">
+              <a:solidFill>
+                <a:schemeClr val="dk1"/>
+              </a:solidFill>
+              <a:latin typeface="Arial"/>
+              <a:ea typeface="Arial"/>
+              <a:cs typeface="Arial"/>
+              <a:sym typeface="Arial"/>
+            </a:endParaRPr>
+          </a:p>
+        </p:txBody>
+      </p:sp>
+    </p:spTree>
+    <p:extLst>
+      <p:ext uri="{BB962C8B-B14F-4D97-AF65-F5344CB8AC3E}">
+        <p14:creationId xmlns:p14="http://schemas.microsoft.com/office/powerpoint/2010/main" val="2609502118"/>
+      </p:ext>
+    </p:extLst>
+  </p:cSld>
+  <p:clrMapOvr>
+    <a:masterClrMapping/>
+  </p:clrMapOvr>
+</p:notes>
+</file>
+
+<file path=ppt/notesSlides/notesSlide4.xml><?xml version="1.0" encoding="utf-8"?>
+<p:notes xmlns:a="http://schemas.openxmlformats.org/drawingml/2006/main" xmlns:r="http://schemas.openxmlformats.org/officeDocument/2006/relationships" xmlns:p="http://schemas.openxmlformats.org/presentationml/2006/main">
+  <p:cSld>
+    <p:spTree>
+      <p:nvGrpSpPr>
+        <p:cNvPr id="1" name=""/>
+        <p:cNvGrpSpPr/>
+        <p:nvPr/>
+      </p:nvGrpSpPr>
+      <p:grpSpPr>
+        <a:xfrm>
+          <a:off x="0" y="0"/>
+          <a:ext cx="0" cy="0"/>
+          <a:chOff x="0" y="0"/>
+          <a:chExt cx="0" cy="0"/>
+        </a:xfrm>
+      </p:grpSpPr>
+      <p:sp>
+        <p:nvSpPr>
+          <p:cNvPr id="2" name="Slide Image Placeholder 1"/>
+          <p:cNvSpPr>
+            <a:spLocks noGrp="1" noRot="1" noChangeAspect="1"/>
+          </p:cNvSpPr>
+          <p:nvPr>
+            <p:ph type="sldImg"/>
+          </p:nvPr>
+        </p:nvSpPr>
+        <p:spPr/>
+      </p:sp>
+      <p:sp>
+        <p:nvSpPr>
+          <p:cNvPr id="3" name="Notes Placeholder 2"/>
+          <p:cNvSpPr>
+            <a:spLocks noGrp="1"/>
+          </p:cNvSpPr>
+          <p:nvPr>
+            <p:ph type="body" idx="1"/>
+          </p:nvPr>
+        </p:nvSpPr>
+        <p:spPr/>
+        <p:txBody>
+          <a:bodyPr/>
+          <a:lstStyle/>
+          <a:p>
+            <a:r>
+              <a:rPr lang="en-US" dirty="0"/>
+              <a:t> </a:t>
+            </a:r>
+            <a:endParaRPr lang="en-IN" dirty="0"/>
+          </a:p>
+        </p:txBody>
+      </p:sp>
+      <p:sp>
+        <p:nvSpPr>
+          <p:cNvPr id="4" name="Slide Number Placeholder 3"/>
+          <p:cNvSpPr>
+            <a:spLocks noGrp="1"/>
+          </p:cNvSpPr>
+          <p:nvPr>
+            <p:ph type="sldNum" idx="12"/>
+          </p:nvPr>
+        </p:nvSpPr>
+        <p:spPr/>
+        <p:txBody>
+          <a:bodyPr/>
+          <a:lstStyle/>
+          <a:p>
+            <a:pPr marL="0" marR="0" lvl="0" indent="0" algn="r" rtl="0">
+              <a:spcBef>
+                <a:spcPts val="0"/>
+              </a:spcBef>
+              <a:buSzPct val="25000"/>
+              <a:buNone/>
+            </a:pPr>
+            <a:fld id="{00000000-1234-1234-1234-123412341234}" type="slidenum">
+              <a:rPr lang="en-US" sz="1200" b="0" i="0" u="none" strike="noStrike" cap="none" smtClean="0">
+                <a:solidFill>
+                  <a:schemeClr val="dk1"/>
+                </a:solidFill>
+                <a:latin typeface="Arial"/>
+                <a:ea typeface="Arial"/>
+                <a:cs typeface="Arial"/>
+                <a:sym typeface="Arial"/>
+              </a:rPr>
+              <a:t>12</a:t>
+            </a:fld>
+            <a:endParaRPr lang="en-US" sz="1200" b="0" i="0" u="none" strike="noStrike" cap="none" dirty="0">
+              <a:solidFill>
+                <a:schemeClr val="dk1"/>
+              </a:solidFill>
+              <a:latin typeface="Arial"/>
+              <a:ea typeface="Arial"/>
+              <a:cs typeface="Arial"/>
+              <a:sym typeface="Arial"/>
+            </a:endParaRPr>
+          </a:p>
+        </p:txBody>
+      </p:sp>
+    </p:spTree>
+    <p:extLst>
+      <p:ext uri="{BB962C8B-B14F-4D97-AF65-F5344CB8AC3E}">
+        <p14:creationId xmlns:p14="http://schemas.microsoft.com/office/powerpoint/2010/main" val="2384062055"/>
+      </p:ext>
+    </p:extLst>
+  </p:cSld>
+  <p:clrMapOvr>
+    <a:masterClrMapping/>
+  </p:clrMapOvr>
+</p:notes>
+</file>
+
+<file path=ppt/notesSlides/notesSlide5.xml><?xml version="1.0" encoding="utf-8"?>
+<p:notes xmlns:a="http://schemas.openxmlformats.org/drawingml/2006/main" xmlns:r="http://schemas.openxmlformats.org/officeDocument/2006/relationships" xmlns:p="http://schemas.openxmlformats.org/presentationml/2006/main">
+  <p:cSld>
+    <p:spTree>
+      <p:nvGrpSpPr>
+        <p:cNvPr id="1" name=""/>
+        <p:cNvGrpSpPr/>
+        <p:nvPr/>
+      </p:nvGrpSpPr>
+      <p:grpSpPr>
+        <a:xfrm>
+          <a:off x="0" y="0"/>
+          <a:ext cx="0" cy="0"/>
+          <a:chOff x="0" y="0"/>
+          <a:chExt cx="0" cy="0"/>
+        </a:xfrm>
+      </p:grpSpPr>
+      <p:sp>
+        <p:nvSpPr>
+          <p:cNvPr id="2" name="Slide Image Placeholder 1"/>
+          <p:cNvSpPr>
+            <a:spLocks noGrp="1" noRot="1" noChangeAspect="1"/>
+          </p:cNvSpPr>
+          <p:nvPr>
+            <p:ph type="sldImg"/>
+          </p:nvPr>
+        </p:nvSpPr>
+        <p:spPr/>
+      </p:sp>
+      <p:sp>
+        <p:nvSpPr>
+          <p:cNvPr id="3" name="Notes Placeholder 2"/>
+          <p:cNvSpPr>
+            <a:spLocks noGrp="1"/>
+          </p:cNvSpPr>
+          <p:nvPr>
+            <p:ph type="body" idx="1"/>
+          </p:nvPr>
+        </p:nvSpPr>
+        <p:spPr/>
+        <p:txBody>
+          <a:bodyPr/>
+          <a:lstStyle/>
+          <a:p>
+            <a:r>
+              <a:rPr lang="en-US" dirty="0"/>
+              <a:t>The boxes are labeled, x 0, x 1, and x 2. The text at the bottom reads, x dot length is 3.</a:t>
+            </a:r>
+          </a:p>
+          <a:p>
+            <a:r>
+              <a:rPr lang="en-US" dirty="0"/>
+              <a:t>The first box contains four arrays as x 0 by 0, x 0 by 1, x 0 by 2, and x 0 by 3. The text reads, x 0 dot length is 4.</a:t>
+            </a:r>
+          </a:p>
+          <a:p>
+            <a:r>
+              <a:rPr lang="en-US" dirty="0"/>
+              <a:t>The second box contains four arrays as x 1 by 0, x 1 by 1, x 1 by 2, and x 1 by 3. The text reads, x 1 dot length is 4.</a:t>
+            </a:r>
+          </a:p>
+          <a:p>
+            <a:r>
+              <a:rPr lang="en-US" dirty="0"/>
+              <a:t>The third box contains four arrays as x 2 by 0, x 2 by 1, x 2 by 2, and x 2 by 3. The text reads, x 2 dot length is 4.</a:t>
+            </a:r>
+            <a:endParaRPr lang="en-IN" dirty="0"/>
+          </a:p>
+        </p:txBody>
+      </p:sp>
+      <p:sp>
+        <p:nvSpPr>
+          <p:cNvPr id="4" name="Slide Number Placeholder 3"/>
+          <p:cNvSpPr>
+            <a:spLocks noGrp="1"/>
+          </p:cNvSpPr>
+          <p:nvPr>
+            <p:ph type="sldNum" idx="12"/>
+          </p:nvPr>
+        </p:nvSpPr>
+        <p:spPr/>
+        <p:txBody>
+          <a:bodyPr/>
+          <a:lstStyle/>
+          <a:p>
+            <a:pPr marL="0" marR="0" lvl="0" indent="0" algn="r" rtl="0">
+              <a:spcBef>
+                <a:spcPts val="0"/>
+              </a:spcBef>
+              <a:buSzPct val="25000"/>
+              <a:buNone/>
+            </a:pPr>
+            <a:fld id="{00000000-1234-1234-1234-123412341234}" type="slidenum">
+              <a:rPr lang="en-US" sz="1200" b="0" i="0" u="none" strike="noStrike" cap="none" smtClean="0">
+                <a:solidFill>
+                  <a:schemeClr val="dk1"/>
+                </a:solidFill>
+                <a:latin typeface="Arial"/>
+                <a:ea typeface="Arial"/>
+                <a:cs typeface="Arial"/>
+                <a:sym typeface="Arial"/>
+              </a:rPr>
+              <a:t>13</a:t>
+            </a:fld>
+            <a:endParaRPr lang="en-US" sz="1200" b="0" i="0" u="none" strike="noStrike" cap="none" dirty="0">
+              <a:solidFill>
+                <a:schemeClr val="dk1"/>
+              </a:solidFill>
+              <a:latin typeface="Arial"/>
+              <a:ea typeface="Arial"/>
+              <a:cs typeface="Arial"/>
+              <a:sym typeface="Arial"/>
+            </a:endParaRPr>
+          </a:p>
+        </p:txBody>
+      </p:sp>
+    </p:spTree>
+    <p:extLst>
+      <p:ext uri="{BB962C8B-B14F-4D97-AF65-F5344CB8AC3E}">
+        <p14:creationId xmlns:p14="http://schemas.microsoft.com/office/powerpoint/2010/main" val="2876907598"/>
+      </p:ext>
+    </p:extLst>
+  </p:cSld>
+  <p:clrMapOvr>
+    <a:masterClrMapping/>
+  </p:clrMapOvr>
+</p:notes>
+</file>
+
+<file path=ppt/notesSlides/notesSlide6.xml><?xml version="1.0" encoding="utf-8"?>
+<p:notes xmlns:a="http://schemas.openxmlformats.org/drawingml/2006/main" xmlns:r="http://schemas.openxmlformats.org/officeDocument/2006/relationships" xmlns:p="http://schemas.openxmlformats.org/presentationml/2006/main">
+  <p:cSld>
+    <p:spTree>
+      <p:nvGrpSpPr>
+        <p:cNvPr id="1" name=""/>
+        <p:cNvGrpSpPr/>
+        <p:nvPr/>
+      </p:nvGrpSpPr>
+      <p:grpSpPr>
+        <a:xfrm>
+          <a:off x="0" y="0"/>
+          <a:ext cx="0" cy="0"/>
+          <a:chOff x="0" y="0"/>
+          <a:chExt cx="0" cy="0"/>
+        </a:xfrm>
+      </p:grpSpPr>
+      <p:sp>
+        <p:nvSpPr>
+          <p:cNvPr id="2" name="Slide Image Placeholder 1"/>
+          <p:cNvSpPr>
+            <a:spLocks noGrp="1" noRot="1" noChangeAspect="1"/>
+          </p:cNvSpPr>
+          <p:nvPr>
+            <p:ph type="sldImg"/>
+          </p:nvPr>
+        </p:nvSpPr>
+        <p:spPr/>
+      </p:sp>
+      <p:sp>
+        <p:nvSpPr>
+          <p:cNvPr id="3" name="Notes Placeholder 2"/>
+          <p:cNvSpPr>
+            <a:spLocks noGrp="1"/>
+          </p:cNvSpPr>
+          <p:nvPr>
+            <p:ph type="body" idx="1"/>
+          </p:nvPr>
+        </p:nvSpPr>
+        <p:spPr/>
+        <p:txBody>
+          <a:bodyPr/>
+          <a:lstStyle/>
+          <a:p>
+            <a:pPr lvl="0"/>
+            <a:r>
+              <a:rPr lang="en-DK" dirty="0"/>
+              <a:t>A calendar where weeks may contain different numbers of days</a:t>
+            </a:r>
+          </a:p>
+          <a:p>
+            <a:pPr lvl="0"/>
+            <a:r>
+              <a:rPr lang="en-DK" dirty="0"/>
+              <a:t>Data grouped into categories with different sizes</a:t>
+            </a:r>
+          </a:p>
+          <a:p>
+            <a:pPr lvl="0"/>
+            <a:endParaRPr lang="en-DK" dirty="0"/>
+          </a:p>
+          <a:p>
+            <a:pPr lvl="0"/>
+            <a:r>
+              <a:rPr lang="en-DK" b="1" dirty="0"/>
+              <a:t>Same number of elements per row → regular 2D array.</a:t>
+            </a:r>
+            <a:br>
+              <a:rPr lang="en-DK" dirty="0"/>
+            </a:br>
+            <a:r>
+              <a:rPr lang="en-DK" b="1" dirty="0"/>
+              <a:t>Different number of elements per row → ragged array.</a:t>
+            </a:r>
+            <a:endParaRPr lang="en-DK" dirty="0"/>
+          </a:p>
+        </p:txBody>
+      </p:sp>
+      <p:sp>
+        <p:nvSpPr>
+          <p:cNvPr id="4" name="Slide Number Placeholder 3"/>
+          <p:cNvSpPr>
+            <a:spLocks noGrp="1"/>
+          </p:cNvSpPr>
+          <p:nvPr>
+            <p:ph type="sldNum" idx="12"/>
+          </p:nvPr>
+        </p:nvSpPr>
+        <p:spPr/>
+        <p:txBody>
+          <a:bodyPr/>
+          <a:lstStyle/>
+          <a:p>
+            <a:pPr marL="0" marR="0" lvl="0" indent="0" algn="r" rtl="0">
+              <a:spcBef>
+                <a:spcPts val="0"/>
+              </a:spcBef>
+              <a:buSzPct val="25000"/>
+              <a:buNone/>
+            </a:pPr>
+            <a:fld id="{00000000-1234-1234-1234-123412341234}" type="slidenum">
+              <a:rPr lang="en-US" sz="1200" b="0" i="0" u="none" strike="noStrike" cap="none" smtClean="0">
+                <a:solidFill>
+                  <a:schemeClr val="dk1"/>
+                </a:solidFill>
+                <a:latin typeface="Arial"/>
+                <a:ea typeface="Arial"/>
+                <a:cs typeface="Arial"/>
+                <a:sym typeface="Arial"/>
+              </a:rPr>
+              <a:t>15</a:t>
+            </a:fld>
+            <a:endParaRPr lang="en-US" sz="1200" b="0" i="0" u="none" strike="noStrike" cap="none" dirty="0">
+              <a:solidFill>
+                <a:schemeClr val="dk1"/>
+              </a:solidFill>
+              <a:latin typeface="Arial"/>
+              <a:ea typeface="Arial"/>
+              <a:cs typeface="Arial"/>
+              <a:sym typeface="Arial"/>
+            </a:endParaRPr>
+          </a:p>
+        </p:txBody>
+      </p:sp>
+    </p:spTree>
+    <p:extLst>
+      <p:ext uri="{BB962C8B-B14F-4D97-AF65-F5344CB8AC3E}">
+        <p14:creationId xmlns:p14="http://schemas.microsoft.com/office/powerpoint/2010/main" val="1106090806"/>
+      </p:ext>
+    </p:extLst>
+  </p:cSld>
+  <p:clrMapOvr>
+    <a:masterClrMapping/>
+  </p:clrMapOvr>
+</p:notes>
+</file>
+
+<file path=ppt/notesSlides/notesSlide7.xml><?xml version="1.0" encoding="utf-8"?>
+<p:notes xmlns:a="http://schemas.openxmlformats.org/drawingml/2006/main" xmlns:r="http://schemas.openxmlformats.org/officeDocument/2006/relationships" xmlns:p="http://schemas.openxmlformats.org/presentationml/2006/main">
+  <p:cSld>
+    <p:spTree>
+      <p:nvGrpSpPr>
+        <p:cNvPr id="1" name=""/>
+        <p:cNvGrpSpPr/>
+        <p:nvPr/>
+      </p:nvGrpSpPr>
+      <p:grpSpPr>
+        <a:xfrm>
+          <a:off x="0" y="0"/>
+          <a:ext cx="0" cy="0"/>
+          <a:chOff x="0" y="0"/>
+          <a:chExt cx="0" cy="0"/>
+        </a:xfrm>
+      </p:grpSpPr>
+      <p:sp>
+        <p:nvSpPr>
+          <p:cNvPr id="2" name="Slide Image Placeholder 1"/>
+          <p:cNvSpPr>
+            <a:spLocks noGrp="1" noRot="1" noChangeAspect="1"/>
+          </p:cNvSpPr>
+          <p:nvPr>
+            <p:ph type="sldImg"/>
+          </p:nvPr>
+        </p:nvSpPr>
+        <p:spPr/>
+      </p:sp>
+      <p:sp>
+        <p:nvSpPr>
+          <p:cNvPr id="3" name="Notes Placeholder 2"/>
+          <p:cNvSpPr>
+            <a:spLocks noGrp="1"/>
+          </p:cNvSpPr>
+          <p:nvPr>
+            <p:ph type="body" idx="1"/>
+          </p:nvPr>
+        </p:nvSpPr>
+        <p:spPr/>
+        <p:txBody>
+          <a:bodyPr/>
+          <a:lstStyle/>
+          <a:p>
+            <a:endParaRPr lang="en-DK" dirty="0"/>
+          </a:p>
+        </p:txBody>
+      </p:sp>
+      <p:sp>
+        <p:nvSpPr>
+          <p:cNvPr id="4" name="Slide Number Placeholder 3"/>
+          <p:cNvSpPr>
+            <a:spLocks noGrp="1"/>
+          </p:cNvSpPr>
+          <p:nvPr>
+            <p:ph type="sldNum" sz="quarter" idx="5"/>
+          </p:nvPr>
+        </p:nvSpPr>
+        <p:spPr/>
+        <p:txBody>
+          <a:bodyPr/>
+          <a:lstStyle/>
+          <a:p>
+            <a:fld id="{7D8C4A44-45A6-9047-80DD-6777D98D193C}" type="slidenum">
+              <a:rPr lang="en-DK" smtClean="0"/>
+              <a:t>16</a:t>
+            </a:fld>
+            <a:endParaRPr lang="en-DK"/>
+          </a:p>
+        </p:txBody>
+      </p:sp>
+    </p:spTree>
+    <p:extLst>
+      <p:ext uri="{BB962C8B-B14F-4D97-AF65-F5344CB8AC3E}">
+        <p14:creationId xmlns:p14="http://schemas.microsoft.com/office/powerpoint/2010/main" val="3955357631"/>
+      </p:ext>
+    </p:extLst>
+  </p:cSld>
+  <p:clrMapOvr>
+    <a:masterClrMapping/>
+  </p:clrMapOvr>
+</p:notes>
+</file>
+
 <file path=ppt/slideLayouts/slideLayout1.xml><?xml version="1.0" encoding="utf-8"?>
 <p:sldLayout xmlns:a="http://schemas.openxmlformats.org/drawingml/2006/main" xmlns:r="http://schemas.openxmlformats.org/officeDocument/2006/relationships" xmlns:p="http://schemas.openxmlformats.org/presentationml/2006/main" type="obj" preserve="1">
   <p:cSld name="Title Slide">
@@ -612,7 +1533,7 @@
           <a:p>
             <a:fld id="{1D8BD707-D9CF-40AE-B4C6-C98DA3205C09}" type="datetimeFigureOut">
               <a:rPr lang="en-US"/>
-              <a:t>9/19/26</a:t>
+              <a:t>9/23/26</a:t>
             </a:fld>
             <a:endParaRPr lang="en-US"/>
           </a:p>
@@ -651,6 +1572,460 @@
         </p:txBody>
       </p:sp>
     </p:spTree>
+  </p:cSld>
+  <p:clrMapOvr>
+    <a:masterClrMapping/>
+  </p:clrMapOvr>
+</p:sldLayout>
+</file>
+
+<file path=ppt/slideLayouts/slideLayout10.xml><?xml version="1.0" encoding="utf-8"?>
+<p:sldLayout xmlns:a="http://schemas.openxmlformats.org/drawingml/2006/main" xmlns:r="http://schemas.openxmlformats.org/officeDocument/2006/relationships" xmlns:p="http://schemas.openxmlformats.org/presentationml/2006/main" userDrawn="1">
+  <p:cSld name="3_Title and Content">
+    <p:spTree>
+      <p:nvGrpSpPr>
+        <p:cNvPr id="1" name="Shape 24"/>
+        <p:cNvGrpSpPr/>
+        <p:nvPr/>
+      </p:nvGrpSpPr>
+      <p:grpSpPr>
+        <a:xfrm>
+          <a:off x="0" y="0"/>
+          <a:ext cx="0" cy="0"/>
+          <a:chOff x="0" y="0"/>
+          <a:chExt cx="0" cy="0"/>
+        </a:xfrm>
+      </p:grpSpPr>
+      <p:sp>
+        <p:nvSpPr>
+          <p:cNvPr id="25" name="Title Placeholder"/>
+          <p:cNvSpPr txBox="1">
+            <a:spLocks noGrp="1"/>
+          </p:cNvSpPr>
+          <p:nvPr>
+            <p:ph type="title"/>
+          </p:nvPr>
+        </p:nvSpPr>
+        <p:spPr>
+          <a:xfrm>
+            <a:off x="609600" y="574017"/>
+            <a:ext cx="10972800" cy="738633"/>
+          </a:xfrm>
+          <a:prstGeom prst="rect">
+            <a:avLst/>
+          </a:prstGeom>
+          <a:noFill/>
+          <a:ln>
+            <a:noFill/>
+          </a:ln>
+        </p:spPr>
+        <p:txBody>
+          <a:bodyPr lIns="91425" tIns="91425" rIns="91425" bIns="91425" anchor="b" anchorCtr="0"/>
+          <a:lstStyle>
+            <a:lvl1pPr marL="0" marR="0" lvl="0" indent="0" algn="l" rtl="0">
+              <a:lnSpc>
+                <a:spcPct val="100000"/>
+              </a:lnSpc>
+              <a:spcBef>
+                <a:spcPts val="0"/>
+              </a:spcBef>
+              <a:buClr>
+                <a:srgbClr val="007FA3"/>
+              </a:buClr>
+              <a:buFont typeface="Times New Roman"/>
+              <a:buNone/>
+              <a:defRPr sz="3600" b="1" i="0" u="none" strike="noStrike" cap="none">
+                <a:solidFill>
+                  <a:srgbClr val="007FA3"/>
+                </a:solidFill>
+                <a:latin typeface="+mj-lt"/>
+                <a:ea typeface="Times New Roman"/>
+                <a:cs typeface="Times New Roman"/>
+                <a:sym typeface="Times New Roman"/>
+              </a:defRPr>
+            </a:lvl1pPr>
+            <a:lvl2pPr lvl="1" indent="0">
+              <a:spcBef>
+                <a:spcPts val="0"/>
+              </a:spcBef>
+              <a:buNone/>
+              <a:defRPr sz="1800"/>
+            </a:lvl2pPr>
+            <a:lvl3pPr lvl="2" indent="0">
+              <a:spcBef>
+                <a:spcPts val="0"/>
+              </a:spcBef>
+              <a:buNone/>
+              <a:defRPr sz="1800"/>
+            </a:lvl3pPr>
+            <a:lvl4pPr lvl="3" indent="0">
+              <a:spcBef>
+                <a:spcPts val="0"/>
+              </a:spcBef>
+              <a:buNone/>
+              <a:defRPr sz="1800"/>
+            </a:lvl4pPr>
+            <a:lvl5pPr lvl="4" indent="0">
+              <a:spcBef>
+                <a:spcPts val="0"/>
+              </a:spcBef>
+              <a:buNone/>
+              <a:defRPr sz="1800"/>
+            </a:lvl5pPr>
+            <a:lvl6pPr lvl="5" indent="0">
+              <a:spcBef>
+                <a:spcPts val="0"/>
+              </a:spcBef>
+              <a:buNone/>
+              <a:defRPr sz="1800"/>
+            </a:lvl6pPr>
+            <a:lvl7pPr lvl="6" indent="0">
+              <a:spcBef>
+                <a:spcPts val="0"/>
+              </a:spcBef>
+              <a:buNone/>
+              <a:defRPr sz="1800"/>
+            </a:lvl7pPr>
+            <a:lvl8pPr lvl="7" indent="0">
+              <a:spcBef>
+                <a:spcPts val="0"/>
+              </a:spcBef>
+              <a:buNone/>
+              <a:defRPr sz="1800"/>
+            </a:lvl8pPr>
+            <a:lvl9pPr lvl="8" indent="0">
+              <a:spcBef>
+                <a:spcPts val="0"/>
+              </a:spcBef>
+              <a:buNone/>
+              <a:defRPr sz="1800"/>
+            </a:lvl9pPr>
+          </a:lstStyle>
+          <a:p>
+            <a:endParaRPr dirty="0"/>
+          </a:p>
+        </p:txBody>
+      </p:sp>
+      <p:sp>
+        <p:nvSpPr>
+          <p:cNvPr id="4" name="Content Placeholder 3">
+            <a:extLst>
+              <a:ext uri="{FF2B5EF4-FFF2-40B4-BE49-F238E27FC236}">
+                <a16:creationId xmlns:a16="http://schemas.microsoft.com/office/drawing/2014/main" id="{00F45AE3-EB76-41DE-97B2-CFE79B73D3C6}"/>
+              </a:ext>
+            </a:extLst>
+          </p:cNvPr>
+          <p:cNvSpPr>
+            <a:spLocks noGrp="1"/>
+          </p:cNvSpPr>
+          <p:nvPr>
+            <p:ph sz="quarter" idx="13"/>
+          </p:nvPr>
+        </p:nvSpPr>
+        <p:spPr>
+          <a:xfrm>
+            <a:off x="609601" y="1554921"/>
+            <a:ext cx="10977033" cy="1846659"/>
+          </a:xfrm>
+        </p:spPr>
+        <p:txBody>
+          <a:bodyPr/>
+          <a:lstStyle>
+            <a:lvl1pPr indent="-255600">
+              <a:defRPr sz="2400">
+                <a:latin typeface="+mn-lt"/>
+              </a:defRPr>
+            </a:lvl1pPr>
+            <a:lvl2pPr indent="-284400">
+              <a:defRPr sz="2400">
+                <a:latin typeface="+mn-lt"/>
+              </a:defRPr>
+            </a:lvl2pPr>
+            <a:lvl3pPr indent="-230400">
+              <a:defRPr sz="2400">
+                <a:latin typeface="+mn-lt"/>
+              </a:defRPr>
+            </a:lvl3pPr>
+            <a:lvl4pPr indent="-230400">
+              <a:defRPr sz="2400">
+                <a:latin typeface="+mn-lt"/>
+              </a:defRPr>
+            </a:lvl4pPr>
+            <a:lvl5pPr indent="-230400">
+              <a:defRPr sz="2400">
+                <a:latin typeface="+mn-lt"/>
+              </a:defRPr>
+            </a:lvl5pPr>
+          </a:lstStyle>
+          <a:p>
+            <a:pPr lvl="0"/>
+            <a:r>
+              <a:rPr lang="en-US" dirty="0"/>
+              <a:t>Edit Master text styles</a:t>
+            </a:r>
+          </a:p>
+          <a:p>
+            <a:pPr lvl="1"/>
+            <a:r>
+              <a:rPr lang="en-US" dirty="0"/>
+              <a:t>Second level</a:t>
+            </a:r>
+          </a:p>
+          <a:p>
+            <a:pPr lvl="2"/>
+            <a:r>
+              <a:rPr lang="en-US" dirty="0"/>
+              <a:t>Third level</a:t>
+            </a:r>
+          </a:p>
+          <a:p>
+            <a:pPr lvl="3"/>
+            <a:r>
+              <a:rPr lang="en-US" dirty="0"/>
+              <a:t>Fourth level</a:t>
+            </a:r>
+          </a:p>
+          <a:p>
+            <a:pPr lvl="4"/>
+            <a:r>
+              <a:rPr lang="en-US" dirty="0"/>
+              <a:t>Fifth level</a:t>
+            </a:r>
+          </a:p>
+        </p:txBody>
+      </p:sp>
+      <p:sp>
+        <p:nvSpPr>
+          <p:cNvPr id="28" name="Shape 28"/>
+          <p:cNvSpPr txBox="1">
+            <a:spLocks noGrp="1"/>
+          </p:cNvSpPr>
+          <p:nvPr>
+            <p:ph type="dt" idx="10"/>
+          </p:nvPr>
+        </p:nvSpPr>
+        <p:spPr>
+          <a:xfrm>
+            <a:off x="8447617" y="42943"/>
+            <a:ext cx="2844799" cy="323135"/>
+          </a:xfrm>
+          <a:prstGeom prst="rect">
+            <a:avLst/>
+          </a:prstGeom>
+          <a:noFill/>
+          <a:ln>
+            <a:noFill/>
+          </a:ln>
+        </p:spPr>
+        <p:txBody>
+          <a:bodyPr lIns="91425" tIns="91425" rIns="91425" bIns="91425" anchor="ctr" anchorCtr="0"/>
+          <a:lstStyle>
+            <a:lvl1pPr marL="0" marR="0" lvl="0" indent="0" algn="r" rtl="0">
+              <a:spcBef>
+                <a:spcPts val="0"/>
+              </a:spcBef>
+              <a:buNone/>
+              <a:defRPr sz="900" b="0" i="0" u="none" strike="noStrike" cap="none">
+                <a:solidFill>
+                  <a:schemeClr val="lt1"/>
+                </a:solidFill>
+                <a:latin typeface="Arial"/>
+                <a:ea typeface="Arial"/>
+                <a:cs typeface="Arial"/>
+                <a:sym typeface="Arial"/>
+              </a:defRPr>
+            </a:lvl1pPr>
+            <a:lvl2pPr marL="457200" marR="0" lvl="1" indent="0" algn="l" rtl="0">
+              <a:spcBef>
+                <a:spcPts val="0"/>
+              </a:spcBef>
+              <a:buNone/>
+              <a:defRPr sz="1800" b="0" i="0" u="none" strike="noStrike" cap="none">
+                <a:solidFill>
+                  <a:schemeClr val="dk1"/>
+                </a:solidFill>
+                <a:latin typeface="Arial"/>
+                <a:ea typeface="Arial"/>
+                <a:cs typeface="Arial"/>
+                <a:sym typeface="Arial"/>
+              </a:defRPr>
+            </a:lvl2pPr>
+            <a:lvl3pPr marL="914400" marR="0" lvl="2" indent="0" algn="l" rtl="0">
+              <a:spcBef>
+                <a:spcPts val="0"/>
+              </a:spcBef>
+              <a:buNone/>
+              <a:defRPr sz="1800" b="0" i="0" u="none" strike="noStrike" cap="none">
+                <a:solidFill>
+                  <a:schemeClr val="dk1"/>
+                </a:solidFill>
+                <a:latin typeface="Arial"/>
+                <a:ea typeface="Arial"/>
+                <a:cs typeface="Arial"/>
+                <a:sym typeface="Arial"/>
+              </a:defRPr>
+            </a:lvl3pPr>
+            <a:lvl4pPr marL="1371600" marR="0" lvl="3" indent="0" algn="l" rtl="0">
+              <a:spcBef>
+                <a:spcPts val="0"/>
+              </a:spcBef>
+              <a:buNone/>
+              <a:defRPr sz="1800" b="0" i="0" u="none" strike="noStrike" cap="none">
+                <a:solidFill>
+                  <a:schemeClr val="dk1"/>
+                </a:solidFill>
+                <a:latin typeface="Arial"/>
+                <a:ea typeface="Arial"/>
+                <a:cs typeface="Arial"/>
+                <a:sym typeface="Arial"/>
+              </a:defRPr>
+            </a:lvl4pPr>
+            <a:lvl5pPr marL="1828800" marR="0" lvl="4" indent="0" algn="l" rtl="0">
+              <a:spcBef>
+                <a:spcPts val="0"/>
+              </a:spcBef>
+              <a:buNone/>
+              <a:defRPr sz="1800" b="0" i="0" u="none" strike="noStrike" cap="none">
+                <a:solidFill>
+                  <a:schemeClr val="dk1"/>
+                </a:solidFill>
+                <a:latin typeface="Arial"/>
+                <a:ea typeface="Arial"/>
+                <a:cs typeface="Arial"/>
+                <a:sym typeface="Arial"/>
+              </a:defRPr>
+            </a:lvl5pPr>
+            <a:lvl6pPr marL="2286000" marR="0" lvl="5" indent="0" algn="l" rtl="0">
+              <a:spcBef>
+                <a:spcPts val="0"/>
+              </a:spcBef>
+              <a:buNone/>
+              <a:defRPr sz="1800" b="0" i="0" u="none" strike="noStrike" cap="none">
+                <a:solidFill>
+                  <a:schemeClr val="dk1"/>
+                </a:solidFill>
+                <a:latin typeface="Arial"/>
+                <a:ea typeface="Arial"/>
+                <a:cs typeface="Arial"/>
+                <a:sym typeface="Arial"/>
+              </a:defRPr>
+            </a:lvl6pPr>
+            <a:lvl7pPr marL="2743200" marR="0" lvl="6" indent="0" algn="l" rtl="0">
+              <a:spcBef>
+                <a:spcPts val="0"/>
+              </a:spcBef>
+              <a:buNone/>
+              <a:defRPr sz="1800" b="0" i="0" u="none" strike="noStrike" cap="none">
+                <a:solidFill>
+                  <a:schemeClr val="dk1"/>
+                </a:solidFill>
+                <a:latin typeface="Arial"/>
+                <a:ea typeface="Arial"/>
+                <a:cs typeface="Arial"/>
+                <a:sym typeface="Arial"/>
+              </a:defRPr>
+            </a:lvl7pPr>
+            <a:lvl8pPr marL="3200400" marR="0" lvl="7" indent="0" algn="l" rtl="0">
+              <a:spcBef>
+                <a:spcPts val="0"/>
+              </a:spcBef>
+              <a:buNone/>
+              <a:defRPr sz="1800" b="0" i="0" u="none" strike="noStrike" cap="none">
+                <a:solidFill>
+                  <a:schemeClr val="dk1"/>
+                </a:solidFill>
+                <a:latin typeface="Arial"/>
+                <a:ea typeface="Arial"/>
+                <a:cs typeface="Arial"/>
+                <a:sym typeface="Arial"/>
+              </a:defRPr>
+            </a:lvl8pPr>
+            <a:lvl9pPr marL="3657600" marR="0" lvl="8" indent="0" algn="l" rtl="0">
+              <a:spcBef>
+                <a:spcPts val="0"/>
+              </a:spcBef>
+              <a:buNone/>
+              <a:defRPr sz="1800" b="0" i="0" u="none" strike="noStrike" cap="none">
+                <a:solidFill>
+                  <a:schemeClr val="dk1"/>
+                </a:solidFill>
+                <a:latin typeface="Arial"/>
+                <a:ea typeface="Arial"/>
+                <a:cs typeface="Arial"/>
+                <a:sym typeface="Arial"/>
+              </a:defRPr>
+            </a:lvl9pPr>
+          </a:lstStyle>
+          <a:p>
+            <a:endParaRPr dirty="0"/>
+          </a:p>
+        </p:txBody>
+      </p:sp>
+      <p:sp>
+        <p:nvSpPr>
+          <p:cNvPr id="29" name="Shape 29"/>
+          <p:cNvSpPr txBox="1">
+            <a:spLocks noGrp="1"/>
+          </p:cNvSpPr>
+          <p:nvPr>
+            <p:ph type="sldNum" idx="12"/>
+          </p:nvPr>
+        </p:nvSpPr>
+        <p:spPr>
+          <a:xfrm>
+            <a:off x="11292415" y="113071"/>
+            <a:ext cx="735711" cy="182879"/>
+          </a:xfrm>
+          <a:prstGeom prst="rect">
+            <a:avLst/>
+          </a:prstGeom>
+          <a:noFill/>
+          <a:ln>
+            <a:noFill/>
+          </a:ln>
+        </p:spPr>
+        <p:txBody>
+          <a:bodyPr lIns="91425" tIns="45700" rIns="91425" bIns="45700" anchor="ctr" anchorCtr="0">
+            <a:noAutofit/>
+          </a:bodyPr>
+          <a:lstStyle/>
+          <a:p>
+            <a:pPr rtl="0">
+              <a:buSzPct val="25000"/>
+            </a:pPr>
+            <a:fld id="{00000000-1234-1234-1234-123412341234}" type="slidenum">
+              <a:rPr lang="en-US" sz="900" smtClean="0">
+                <a:solidFill>
+                  <a:schemeClr val="lt1"/>
+                </a:solidFill>
+                <a:latin typeface="Arial"/>
+                <a:ea typeface="Arial"/>
+                <a:cs typeface="Arial"/>
+                <a:sym typeface="Arial"/>
+              </a:rPr>
+              <a:pPr rtl="0">
+                <a:buSzPct val="25000"/>
+              </a:pPr>
+              <a:t>‹#›</a:t>
+            </a:fld>
+            <a:endParaRPr lang="en-US" sz="900" dirty="0">
+              <a:solidFill>
+                <a:schemeClr val="lt1"/>
+              </a:solidFill>
+              <a:latin typeface="Arial"/>
+              <a:ea typeface="Arial"/>
+              <a:cs typeface="Arial"/>
+              <a:sym typeface="Arial"/>
+            </a:endParaRPr>
+          </a:p>
+        </p:txBody>
+      </p:sp>
+    </p:spTree>
+    <p:extLst>
+      <p:ext uri="{BB962C8B-B14F-4D97-AF65-F5344CB8AC3E}">
+        <p14:creationId xmlns:p14="http://schemas.microsoft.com/office/powerpoint/2010/main" val="3282554541"/>
+      </p:ext>
+    </p:extLst>
   </p:cSld>
   <p:clrMapOvr>
     <a:masterClrMapping/>
@@ -849,7 +2224,7 @@
           <a:p>
             <a:fld id="{1D8BD707-D9CF-40AE-B4C6-C98DA3205C09}" type="datetimeFigureOut">
               <a:rPr lang="en-US"/>
-              <a:t>9/19/26</a:t>
+              <a:t>9/23/26</a:t>
             </a:fld>
             <a:endParaRPr lang="en-US"/>
           </a:p>
@@ -1129,7 +2504,7 @@
           <a:p>
             <a:fld id="{1D8BD707-D9CF-40AE-B4C6-C98DA3205C09}" type="datetimeFigureOut">
               <a:rPr lang="en-US"/>
-              <a:t>9/19/26</a:t>
+              <a:t>9/23/26</a:t>
             </a:fld>
             <a:endParaRPr lang="en-US"/>
           </a:p>
@@ -1343,7 +2718,7 @@
           <a:p>
             <a:fld id="{1D8BD707-D9CF-40AE-B4C6-C98DA3205C09}" type="datetimeFigureOut">
               <a:rPr lang="en-US"/>
-              <a:t>9/19/26</a:t>
+              <a:t>9/23/26</a:t>
             </a:fld>
             <a:endParaRPr lang="en-US"/>
           </a:p>
@@ -1534,7 +2909,7 @@
           <a:p>
             <a:fld id="{1D8BD707-D9CF-40AE-B4C6-C98DA3205C09}" type="datetimeFigureOut">
               <a:rPr lang="en-US"/>
-              <a:t>9/19/26</a:t>
+              <a:t>9/23/26</a:t>
             </a:fld>
             <a:endParaRPr lang="en-US"/>
           </a:p>
@@ -1573,6 +2948,2654 @@
         </p:txBody>
       </p:sp>
     </p:spTree>
+  </p:cSld>
+  <p:clrMapOvr>
+    <a:masterClrMapping/>
+  </p:clrMapOvr>
+</p:sldLayout>
+</file>
+
+<file path=ppt/slideLayouts/slideLayout6.xml><?xml version="1.0" encoding="utf-8"?>
+<p:sldLayout xmlns:a="http://schemas.openxmlformats.org/drawingml/2006/main" xmlns:r="http://schemas.openxmlformats.org/officeDocument/2006/relationships" xmlns:p="http://schemas.openxmlformats.org/presentationml/2006/main" userDrawn="1">
+  <p:cSld name="Title and Four Content">
+    <p:spTree>
+      <p:nvGrpSpPr>
+        <p:cNvPr id="1" name="Shape 30"/>
+        <p:cNvGrpSpPr/>
+        <p:nvPr/>
+      </p:nvGrpSpPr>
+      <p:grpSpPr>
+        <a:xfrm>
+          <a:off x="0" y="0"/>
+          <a:ext cx="0" cy="0"/>
+          <a:chOff x="0" y="0"/>
+          <a:chExt cx="0" cy="0"/>
+        </a:xfrm>
+      </p:grpSpPr>
+      <p:sp>
+        <p:nvSpPr>
+          <p:cNvPr id="31" name="Title Placeholder"/>
+          <p:cNvSpPr txBox="1">
+            <a:spLocks noGrp="1"/>
+          </p:cNvSpPr>
+          <p:nvPr>
+            <p:ph type="title"/>
+          </p:nvPr>
+        </p:nvSpPr>
+        <p:spPr>
+          <a:xfrm>
+            <a:off x="609600" y="574017"/>
+            <a:ext cx="10972800" cy="738633"/>
+          </a:xfrm>
+          <a:prstGeom prst="rect">
+            <a:avLst/>
+          </a:prstGeom>
+          <a:noFill/>
+          <a:ln>
+            <a:noFill/>
+          </a:ln>
+        </p:spPr>
+        <p:txBody>
+          <a:bodyPr lIns="91425" tIns="91425" rIns="91425" bIns="91425" anchor="b" anchorCtr="0"/>
+          <a:lstStyle>
+            <a:lvl1pPr marL="0" marR="0" lvl="0" indent="0" algn="l" rtl="0">
+              <a:lnSpc>
+                <a:spcPct val="100000"/>
+              </a:lnSpc>
+              <a:spcBef>
+                <a:spcPts val="0"/>
+              </a:spcBef>
+              <a:buClr>
+                <a:srgbClr val="007FA3"/>
+              </a:buClr>
+              <a:buFont typeface="Times New Roman"/>
+              <a:buNone/>
+              <a:defRPr sz="3600" b="1" i="0" u="none" strike="noStrike" cap="none">
+                <a:solidFill>
+                  <a:srgbClr val="007FA3"/>
+                </a:solidFill>
+                <a:latin typeface="+mj-lt"/>
+                <a:ea typeface="Times New Roman"/>
+                <a:cs typeface="Times New Roman"/>
+                <a:sym typeface="Times New Roman"/>
+              </a:defRPr>
+            </a:lvl1pPr>
+            <a:lvl2pPr lvl="1" indent="0">
+              <a:spcBef>
+                <a:spcPts val="0"/>
+              </a:spcBef>
+              <a:buNone/>
+              <a:defRPr sz="1800"/>
+            </a:lvl2pPr>
+            <a:lvl3pPr lvl="2" indent="0">
+              <a:spcBef>
+                <a:spcPts val="0"/>
+              </a:spcBef>
+              <a:buNone/>
+              <a:defRPr sz="1800"/>
+            </a:lvl3pPr>
+            <a:lvl4pPr lvl="3" indent="0">
+              <a:spcBef>
+                <a:spcPts val="0"/>
+              </a:spcBef>
+              <a:buNone/>
+              <a:defRPr sz="1800"/>
+            </a:lvl4pPr>
+            <a:lvl5pPr lvl="4" indent="0">
+              <a:spcBef>
+                <a:spcPts val="0"/>
+              </a:spcBef>
+              <a:buNone/>
+              <a:defRPr sz="1800"/>
+            </a:lvl5pPr>
+            <a:lvl6pPr lvl="5" indent="0">
+              <a:spcBef>
+                <a:spcPts val="0"/>
+              </a:spcBef>
+              <a:buNone/>
+              <a:defRPr sz="1800"/>
+            </a:lvl6pPr>
+            <a:lvl7pPr lvl="6" indent="0">
+              <a:spcBef>
+                <a:spcPts val="0"/>
+              </a:spcBef>
+              <a:buNone/>
+              <a:defRPr sz="1800"/>
+            </a:lvl7pPr>
+            <a:lvl8pPr lvl="7" indent="0">
+              <a:spcBef>
+                <a:spcPts val="0"/>
+              </a:spcBef>
+              <a:buNone/>
+              <a:defRPr sz="1800"/>
+            </a:lvl8pPr>
+            <a:lvl9pPr lvl="8" indent="0">
+              <a:spcBef>
+                <a:spcPts val="0"/>
+              </a:spcBef>
+              <a:buNone/>
+              <a:defRPr sz="1800"/>
+            </a:lvl9pPr>
+          </a:lstStyle>
+          <a:p>
+            <a:endParaRPr dirty="0"/>
+          </a:p>
+        </p:txBody>
+      </p:sp>
+      <p:sp>
+        <p:nvSpPr>
+          <p:cNvPr id="8" name="Content Placeholder 7">
+            <a:extLst>
+              <a:ext uri="{FF2B5EF4-FFF2-40B4-BE49-F238E27FC236}">
+                <a16:creationId xmlns:a16="http://schemas.microsoft.com/office/drawing/2014/main" id="{82CB7AFE-9851-46A0-B2FB-0A5EE6AEFCA6}"/>
+              </a:ext>
+            </a:extLst>
+          </p:cNvPr>
+          <p:cNvSpPr>
+            <a:spLocks noGrp="1"/>
+          </p:cNvSpPr>
+          <p:nvPr>
+            <p:ph sz="quarter" idx="13"/>
+          </p:nvPr>
+        </p:nvSpPr>
+        <p:spPr>
+          <a:xfrm>
+            <a:off x="609600" y="1552575"/>
+            <a:ext cx="2514600" cy="2954655"/>
+          </a:xfrm>
+        </p:spPr>
+        <p:txBody>
+          <a:bodyPr/>
+          <a:lstStyle>
+            <a:lvl1pPr marR="0" indent="-255600" algn="l" rtl="0">
+              <a:lnSpc>
+                <a:spcPct val="100000"/>
+              </a:lnSpc>
+              <a:spcAft>
+                <a:spcPts val="0"/>
+              </a:spcAft>
+              <a:buClr>
+                <a:srgbClr val="007FA3"/>
+              </a:buClr>
+              <a:buSzPct val="100000"/>
+              <a:defRPr lang="en-US" sz="2400" b="0" i="0" u="none" strike="noStrike" cap="none" dirty="0" smtClean="0">
+                <a:solidFill>
+                  <a:schemeClr val="dk1"/>
+                </a:solidFill>
+                <a:latin typeface="+mn-lt"/>
+                <a:ea typeface="Arial"/>
+                <a:cs typeface="Arial"/>
+                <a:sym typeface="Arial"/>
+              </a:defRPr>
+            </a:lvl1pPr>
+            <a:lvl2pPr marR="0" indent="-230400" algn="l" rtl="0">
+              <a:lnSpc>
+                <a:spcPct val="100000"/>
+              </a:lnSpc>
+              <a:spcAft>
+                <a:spcPts val="0"/>
+              </a:spcAft>
+              <a:buClr>
+                <a:srgbClr val="007FA3"/>
+              </a:buClr>
+              <a:buSzPct val="100000"/>
+              <a:defRPr lang="en-US" sz="2400" b="0" i="0" u="none" strike="noStrike" cap="none" dirty="0" smtClean="0">
+                <a:solidFill>
+                  <a:schemeClr val="dk1"/>
+                </a:solidFill>
+                <a:latin typeface="+mn-lt"/>
+                <a:ea typeface="Arial"/>
+                <a:cs typeface="Arial"/>
+                <a:sym typeface="Arial"/>
+              </a:defRPr>
+            </a:lvl2pPr>
+            <a:lvl3pPr marR="0" indent="-230400" algn="l" rtl="0">
+              <a:lnSpc>
+                <a:spcPct val="100000"/>
+              </a:lnSpc>
+              <a:spcAft>
+                <a:spcPts val="0"/>
+              </a:spcAft>
+              <a:buClr>
+                <a:srgbClr val="007FA3"/>
+              </a:buClr>
+              <a:buSzPct val="100000"/>
+              <a:defRPr lang="en-US" sz="2400" b="0" i="0" u="none" strike="noStrike" cap="none" dirty="0" smtClean="0">
+                <a:solidFill>
+                  <a:schemeClr val="dk1"/>
+                </a:solidFill>
+                <a:latin typeface="+mn-lt"/>
+                <a:ea typeface="Arial"/>
+                <a:cs typeface="Arial"/>
+                <a:sym typeface="Arial"/>
+              </a:defRPr>
+            </a:lvl3pPr>
+            <a:lvl4pPr marR="0" indent="-230400" algn="l" rtl="0">
+              <a:lnSpc>
+                <a:spcPct val="100000"/>
+              </a:lnSpc>
+              <a:spcAft>
+                <a:spcPts val="0"/>
+              </a:spcAft>
+              <a:buClr>
+                <a:srgbClr val="007FA3"/>
+              </a:buClr>
+              <a:buSzPct val="100000"/>
+              <a:defRPr lang="en-US" sz="2400" b="0" i="0" u="none" strike="noStrike" cap="none" dirty="0" smtClean="0">
+                <a:solidFill>
+                  <a:schemeClr val="dk1"/>
+                </a:solidFill>
+                <a:latin typeface="+mn-lt"/>
+                <a:ea typeface="Arial"/>
+                <a:cs typeface="Arial"/>
+                <a:sym typeface="Arial"/>
+              </a:defRPr>
+            </a:lvl4pPr>
+            <a:lvl5pPr marR="0" algn="l" rtl="0">
+              <a:lnSpc>
+                <a:spcPct val="100000"/>
+              </a:lnSpc>
+              <a:spcAft>
+                <a:spcPts val="0"/>
+              </a:spcAft>
+              <a:buClr>
+                <a:srgbClr val="007FA3"/>
+              </a:buClr>
+              <a:buSzPct val="100000"/>
+              <a:defRPr lang="en-US" sz="2400" b="0" i="0" u="none" strike="noStrike" cap="none" dirty="0">
+                <a:solidFill>
+                  <a:schemeClr val="dk1"/>
+                </a:solidFill>
+                <a:latin typeface="+mn-lt"/>
+                <a:ea typeface="Arial"/>
+                <a:cs typeface="Arial"/>
+                <a:sym typeface="Arial"/>
+              </a:defRPr>
+            </a:lvl5pPr>
+          </a:lstStyle>
+          <a:p>
+            <a:pPr lvl="0"/>
+            <a:r>
+              <a:rPr lang="en-US" dirty="0"/>
+              <a:t>Edit Master text styles</a:t>
+            </a:r>
+          </a:p>
+          <a:p>
+            <a:pPr lvl="1"/>
+            <a:r>
+              <a:rPr lang="en-US" dirty="0"/>
+              <a:t>Second level</a:t>
+            </a:r>
+          </a:p>
+          <a:p>
+            <a:pPr lvl="2"/>
+            <a:r>
+              <a:rPr lang="en-US" dirty="0"/>
+              <a:t>Third level</a:t>
+            </a:r>
+          </a:p>
+          <a:p>
+            <a:pPr lvl="3"/>
+            <a:r>
+              <a:rPr lang="en-US" dirty="0"/>
+              <a:t>Fourth level</a:t>
+            </a:r>
+          </a:p>
+          <a:p>
+            <a:pPr lvl="4"/>
+            <a:r>
+              <a:rPr lang="en-US" dirty="0"/>
+              <a:t>Fifth level</a:t>
+            </a:r>
+          </a:p>
+        </p:txBody>
+      </p:sp>
+      <p:sp>
+        <p:nvSpPr>
+          <p:cNvPr id="16" name="Content Placeholder 7">
+            <a:extLst>
+              <a:ext uri="{FF2B5EF4-FFF2-40B4-BE49-F238E27FC236}">
+                <a16:creationId xmlns:a16="http://schemas.microsoft.com/office/drawing/2014/main" id="{75D3A394-A5AF-478E-AC3D-2714CFF806D2}"/>
+              </a:ext>
+            </a:extLst>
+          </p:cNvPr>
+          <p:cNvSpPr>
+            <a:spLocks noGrp="1"/>
+          </p:cNvSpPr>
+          <p:nvPr>
+            <p:ph sz="quarter" idx="14"/>
+          </p:nvPr>
+        </p:nvSpPr>
+        <p:spPr>
+          <a:xfrm>
+            <a:off x="3430124" y="1552575"/>
+            <a:ext cx="2514600" cy="2954655"/>
+          </a:xfrm>
+        </p:spPr>
+        <p:txBody>
+          <a:bodyPr/>
+          <a:lstStyle>
+            <a:lvl1pPr marR="0" indent="-255600" algn="l" rtl="0">
+              <a:lnSpc>
+                <a:spcPct val="100000"/>
+              </a:lnSpc>
+              <a:spcAft>
+                <a:spcPts val="0"/>
+              </a:spcAft>
+              <a:buClr>
+                <a:srgbClr val="007FA3"/>
+              </a:buClr>
+              <a:buSzPct val="100000"/>
+              <a:defRPr lang="en-US" sz="2400" b="0" i="0" u="none" strike="noStrike" cap="none" dirty="0" smtClean="0">
+                <a:solidFill>
+                  <a:schemeClr val="dk1"/>
+                </a:solidFill>
+                <a:latin typeface="+mn-lt"/>
+                <a:ea typeface="Arial"/>
+                <a:cs typeface="Arial"/>
+                <a:sym typeface="Arial"/>
+              </a:defRPr>
+            </a:lvl1pPr>
+            <a:lvl2pPr marR="0" indent="-230400" algn="l" rtl="0">
+              <a:lnSpc>
+                <a:spcPct val="100000"/>
+              </a:lnSpc>
+              <a:spcAft>
+                <a:spcPts val="0"/>
+              </a:spcAft>
+              <a:buClr>
+                <a:srgbClr val="007FA3"/>
+              </a:buClr>
+              <a:buSzPct val="100000"/>
+              <a:defRPr lang="en-US" sz="2400" b="0" i="0" u="none" strike="noStrike" cap="none" dirty="0" smtClean="0">
+                <a:solidFill>
+                  <a:schemeClr val="dk1"/>
+                </a:solidFill>
+                <a:latin typeface="+mn-lt"/>
+                <a:ea typeface="Arial"/>
+                <a:cs typeface="Arial"/>
+                <a:sym typeface="Arial"/>
+              </a:defRPr>
+            </a:lvl2pPr>
+            <a:lvl3pPr marR="0" indent="-230400" algn="l" rtl="0">
+              <a:lnSpc>
+                <a:spcPct val="100000"/>
+              </a:lnSpc>
+              <a:spcAft>
+                <a:spcPts val="0"/>
+              </a:spcAft>
+              <a:buClr>
+                <a:srgbClr val="007FA3"/>
+              </a:buClr>
+              <a:buSzPct val="100000"/>
+              <a:defRPr lang="en-US" sz="2400" b="0" i="0" u="none" strike="noStrike" cap="none" dirty="0" smtClean="0">
+                <a:solidFill>
+                  <a:schemeClr val="dk1"/>
+                </a:solidFill>
+                <a:latin typeface="+mn-lt"/>
+                <a:ea typeface="Arial"/>
+                <a:cs typeface="Arial"/>
+                <a:sym typeface="Arial"/>
+              </a:defRPr>
+            </a:lvl3pPr>
+            <a:lvl4pPr marR="0" indent="-230400" algn="l" rtl="0">
+              <a:lnSpc>
+                <a:spcPct val="100000"/>
+              </a:lnSpc>
+              <a:spcAft>
+                <a:spcPts val="0"/>
+              </a:spcAft>
+              <a:buClr>
+                <a:srgbClr val="007FA3"/>
+              </a:buClr>
+              <a:buSzPct val="100000"/>
+              <a:defRPr lang="en-US" sz="2400" b="0" i="0" u="none" strike="noStrike" cap="none" dirty="0" smtClean="0">
+                <a:solidFill>
+                  <a:schemeClr val="dk1"/>
+                </a:solidFill>
+                <a:latin typeface="+mn-lt"/>
+                <a:ea typeface="Arial"/>
+                <a:cs typeface="Arial"/>
+                <a:sym typeface="Arial"/>
+              </a:defRPr>
+            </a:lvl4pPr>
+            <a:lvl5pPr marR="0" algn="l" rtl="0">
+              <a:lnSpc>
+                <a:spcPct val="100000"/>
+              </a:lnSpc>
+              <a:spcAft>
+                <a:spcPts val="0"/>
+              </a:spcAft>
+              <a:buClr>
+                <a:srgbClr val="007FA3"/>
+              </a:buClr>
+              <a:buSzPct val="100000"/>
+              <a:defRPr lang="en-US" sz="2400" b="0" i="0" u="none" strike="noStrike" cap="none" dirty="0">
+                <a:solidFill>
+                  <a:schemeClr val="dk1"/>
+                </a:solidFill>
+                <a:latin typeface="+mn-lt"/>
+                <a:ea typeface="Arial"/>
+                <a:cs typeface="Arial"/>
+                <a:sym typeface="Arial"/>
+              </a:defRPr>
+            </a:lvl5pPr>
+          </a:lstStyle>
+          <a:p>
+            <a:pPr lvl="0"/>
+            <a:r>
+              <a:rPr lang="en-US" dirty="0"/>
+              <a:t>Edit Master text styles</a:t>
+            </a:r>
+          </a:p>
+          <a:p>
+            <a:pPr lvl="1"/>
+            <a:r>
+              <a:rPr lang="en-US" dirty="0"/>
+              <a:t>Second level</a:t>
+            </a:r>
+          </a:p>
+          <a:p>
+            <a:pPr lvl="2"/>
+            <a:r>
+              <a:rPr lang="en-US" dirty="0"/>
+              <a:t>Third level</a:t>
+            </a:r>
+          </a:p>
+          <a:p>
+            <a:pPr lvl="3"/>
+            <a:r>
+              <a:rPr lang="en-US" dirty="0"/>
+              <a:t>Fourth level</a:t>
+            </a:r>
+          </a:p>
+          <a:p>
+            <a:pPr lvl="4"/>
+            <a:r>
+              <a:rPr lang="en-US" dirty="0"/>
+              <a:t>Fifth level</a:t>
+            </a:r>
+          </a:p>
+        </p:txBody>
+      </p:sp>
+      <p:sp>
+        <p:nvSpPr>
+          <p:cNvPr id="17" name="Content Placeholder 7">
+            <a:extLst>
+              <a:ext uri="{FF2B5EF4-FFF2-40B4-BE49-F238E27FC236}">
+                <a16:creationId xmlns:a16="http://schemas.microsoft.com/office/drawing/2014/main" id="{5D721EFE-2C28-4C54-8BB9-3FCF3DECD16D}"/>
+              </a:ext>
+            </a:extLst>
+          </p:cNvPr>
+          <p:cNvSpPr>
+            <a:spLocks noGrp="1"/>
+          </p:cNvSpPr>
+          <p:nvPr>
+            <p:ph sz="quarter" idx="15"/>
+          </p:nvPr>
+        </p:nvSpPr>
+        <p:spPr>
+          <a:xfrm>
+            <a:off x="6250648" y="1552575"/>
+            <a:ext cx="2514600" cy="2954655"/>
+          </a:xfrm>
+        </p:spPr>
+        <p:txBody>
+          <a:bodyPr/>
+          <a:lstStyle>
+            <a:lvl1pPr marR="0" indent="-255600" algn="l" rtl="0">
+              <a:lnSpc>
+                <a:spcPct val="100000"/>
+              </a:lnSpc>
+              <a:spcAft>
+                <a:spcPts val="0"/>
+              </a:spcAft>
+              <a:buClr>
+                <a:srgbClr val="007FA3"/>
+              </a:buClr>
+              <a:buSzPct val="100000"/>
+              <a:defRPr lang="en-US" sz="2400" b="0" i="0" u="none" strike="noStrike" cap="none" dirty="0" smtClean="0">
+                <a:solidFill>
+                  <a:schemeClr val="dk1"/>
+                </a:solidFill>
+                <a:latin typeface="+mn-lt"/>
+                <a:ea typeface="Arial"/>
+                <a:cs typeface="Arial"/>
+                <a:sym typeface="Arial"/>
+              </a:defRPr>
+            </a:lvl1pPr>
+            <a:lvl2pPr marR="0" indent="-230400" algn="l" rtl="0">
+              <a:lnSpc>
+                <a:spcPct val="100000"/>
+              </a:lnSpc>
+              <a:spcAft>
+                <a:spcPts val="0"/>
+              </a:spcAft>
+              <a:buClr>
+                <a:srgbClr val="007FA3"/>
+              </a:buClr>
+              <a:buSzPct val="100000"/>
+              <a:defRPr lang="en-US" sz="2400" b="0" i="0" u="none" strike="noStrike" cap="none" dirty="0" smtClean="0">
+                <a:solidFill>
+                  <a:schemeClr val="dk1"/>
+                </a:solidFill>
+                <a:latin typeface="+mn-lt"/>
+                <a:ea typeface="Arial"/>
+                <a:cs typeface="Arial"/>
+                <a:sym typeface="Arial"/>
+              </a:defRPr>
+            </a:lvl2pPr>
+            <a:lvl3pPr marR="0" indent="-230400" algn="l" rtl="0">
+              <a:lnSpc>
+                <a:spcPct val="100000"/>
+              </a:lnSpc>
+              <a:spcAft>
+                <a:spcPts val="0"/>
+              </a:spcAft>
+              <a:buClr>
+                <a:srgbClr val="007FA3"/>
+              </a:buClr>
+              <a:buSzPct val="100000"/>
+              <a:defRPr lang="en-US" sz="2400" b="0" i="0" u="none" strike="noStrike" cap="none" dirty="0" smtClean="0">
+                <a:solidFill>
+                  <a:schemeClr val="dk1"/>
+                </a:solidFill>
+                <a:latin typeface="+mn-lt"/>
+                <a:ea typeface="Arial"/>
+                <a:cs typeface="Arial"/>
+                <a:sym typeface="Arial"/>
+              </a:defRPr>
+            </a:lvl3pPr>
+            <a:lvl4pPr marR="0" indent="-230400" algn="l" rtl="0">
+              <a:lnSpc>
+                <a:spcPct val="100000"/>
+              </a:lnSpc>
+              <a:spcAft>
+                <a:spcPts val="0"/>
+              </a:spcAft>
+              <a:buClr>
+                <a:srgbClr val="007FA3"/>
+              </a:buClr>
+              <a:buSzPct val="100000"/>
+              <a:defRPr lang="en-US" sz="2400" b="0" i="0" u="none" strike="noStrike" cap="none" dirty="0" smtClean="0">
+                <a:solidFill>
+                  <a:schemeClr val="dk1"/>
+                </a:solidFill>
+                <a:latin typeface="+mn-lt"/>
+                <a:ea typeface="Arial"/>
+                <a:cs typeface="Arial"/>
+                <a:sym typeface="Arial"/>
+              </a:defRPr>
+            </a:lvl4pPr>
+            <a:lvl5pPr marR="0" algn="l" rtl="0">
+              <a:lnSpc>
+                <a:spcPct val="100000"/>
+              </a:lnSpc>
+              <a:spcAft>
+                <a:spcPts val="0"/>
+              </a:spcAft>
+              <a:buClr>
+                <a:srgbClr val="007FA3"/>
+              </a:buClr>
+              <a:buSzPct val="100000"/>
+              <a:defRPr lang="en-US" sz="2400" b="0" i="0" u="none" strike="noStrike" cap="none" dirty="0">
+                <a:solidFill>
+                  <a:schemeClr val="dk1"/>
+                </a:solidFill>
+                <a:latin typeface="+mn-lt"/>
+                <a:ea typeface="Arial"/>
+                <a:cs typeface="Arial"/>
+                <a:sym typeface="Arial"/>
+              </a:defRPr>
+            </a:lvl5pPr>
+          </a:lstStyle>
+          <a:p>
+            <a:pPr lvl="0"/>
+            <a:r>
+              <a:rPr lang="en-US" dirty="0"/>
+              <a:t>Edit Master text styles</a:t>
+            </a:r>
+          </a:p>
+          <a:p>
+            <a:pPr lvl="1"/>
+            <a:r>
+              <a:rPr lang="en-US" dirty="0"/>
+              <a:t>Second level</a:t>
+            </a:r>
+          </a:p>
+          <a:p>
+            <a:pPr lvl="2"/>
+            <a:r>
+              <a:rPr lang="en-US" dirty="0"/>
+              <a:t>Third level</a:t>
+            </a:r>
+          </a:p>
+          <a:p>
+            <a:pPr lvl="3"/>
+            <a:r>
+              <a:rPr lang="en-US" dirty="0"/>
+              <a:t>Fourth level</a:t>
+            </a:r>
+          </a:p>
+          <a:p>
+            <a:pPr lvl="4"/>
+            <a:r>
+              <a:rPr lang="en-US" dirty="0"/>
+              <a:t>Fifth level</a:t>
+            </a:r>
+          </a:p>
+        </p:txBody>
+      </p:sp>
+      <p:sp>
+        <p:nvSpPr>
+          <p:cNvPr id="18" name="Content Placeholder 7">
+            <a:extLst>
+              <a:ext uri="{FF2B5EF4-FFF2-40B4-BE49-F238E27FC236}">
+                <a16:creationId xmlns:a16="http://schemas.microsoft.com/office/drawing/2014/main" id="{99D20A0E-9225-48FB-91AF-C7D8DE4D66F4}"/>
+              </a:ext>
+            </a:extLst>
+          </p:cNvPr>
+          <p:cNvSpPr>
+            <a:spLocks noGrp="1"/>
+          </p:cNvSpPr>
+          <p:nvPr>
+            <p:ph sz="quarter" idx="16"/>
+          </p:nvPr>
+        </p:nvSpPr>
+        <p:spPr>
+          <a:xfrm>
+            <a:off x="9071171" y="1552575"/>
+            <a:ext cx="2514600" cy="2954655"/>
+          </a:xfrm>
+        </p:spPr>
+        <p:txBody>
+          <a:bodyPr/>
+          <a:lstStyle>
+            <a:lvl1pPr marR="0" indent="-255600" algn="l" rtl="0">
+              <a:lnSpc>
+                <a:spcPct val="100000"/>
+              </a:lnSpc>
+              <a:spcAft>
+                <a:spcPts val="0"/>
+              </a:spcAft>
+              <a:buClr>
+                <a:srgbClr val="007FA3"/>
+              </a:buClr>
+              <a:buSzPct val="100000"/>
+              <a:defRPr lang="en-US" sz="2400" b="0" i="0" u="none" strike="noStrike" cap="none" dirty="0" smtClean="0">
+                <a:solidFill>
+                  <a:schemeClr val="dk1"/>
+                </a:solidFill>
+                <a:latin typeface="+mn-lt"/>
+                <a:ea typeface="Arial"/>
+                <a:cs typeface="Arial"/>
+                <a:sym typeface="Arial"/>
+              </a:defRPr>
+            </a:lvl1pPr>
+            <a:lvl2pPr marR="0" indent="-230400" algn="l" rtl="0">
+              <a:lnSpc>
+                <a:spcPct val="100000"/>
+              </a:lnSpc>
+              <a:spcAft>
+                <a:spcPts val="0"/>
+              </a:spcAft>
+              <a:buClr>
+                <a:srgbClr val="007FA3"/>
+              </a:buClr>
+              <a:buSzPct val="100000"/>
+              <a:defRPr lang="en-US" sz="2400" b="0" i="0" u="none" strike="noStrike" cap="none" dirty="0" smtClean="0">
+                <a:solidFill>
+                  <a:schemeClr val="dk1"/>
+                </a:solidFill>
+                <a:latin typeface="+mn-lt"/>
+                <a:ea typeface="Arial"/>
+                <a:cs typeface="Arial"/>
+                <a:sym typeface="Arial"/>
+              </a:defRPr>
+            </a:lvl2pPr>
+            <a:lvl3pPr marR="0" indent="-230400" algn="l" rtl="0">
+              <a:lnSpc>
+                <a:spcPct val="100000"/>
+              </a:lnSpc>
+              <a:spcAft>
+                <a:spcPts val="0"/>
+              </a:spcAft>
+              <a:buClr>
+                <a:srgbClr val="007FA3"/>
+              </a:buClr>
+              <a:buSzPct val="100000"/>
+              <a:defRPr lang="en-US" sz="2400" b="0" i="0" u="none" strike="noStrike" cap="none" dirty="0" smtClean="0">
+                <a:solidFill>
+                  <a:schemeClr val="dk1"/>
+                </a:solidFill>
+                <a:latin typeface="+mn-lt"/>
+                <a:ea typeface="Arial"/>
+                <a:cs typeface="Arial"/>
+                <a:sym typeface="Arial"/>
+              </a:defRPr>
+            </a:lvl3pPr>
+            <a:lvl4pPr marR="0" indent="-230400" algn="l" rtl="0">
+              <a:lnSpc>
+                <a:spcPct val="100000"/>
+              </a:lnSpc>
+              <a:spcAft>
+                <a:spcPts val="0"/>
+              </a:spcAft>
+              <a:buClr>
+                <a:srgbClr val="007FA3"/>
+              </a:buClr>
+              <a:buSzPct val="100000"/>
+              <a:defRPr lang="en-US" sz="2400" b="0" i="0" u="none" strike="noStrike" cap="none" dirty="0" smtClean="0">
+                <a:solidFill>
+                  <a:schemeClr val="dk1"/>
+                </a:solidFill>
+                <a:latin typeface="+mn-lt"/>
+                <a:ea typeface="Arial"/>
+                <a:cs typeface="Arial"/>
+                <a:sym typeface="Arial"/>
+              </a:defRPr>
+            </a:lvl4pPr>
+            <a:lvl5pPr marR="0" algn="l" rtl="0">
+              <a:lnSpc>
+                <a:spcPct val="100000"/>
+              </a:lnSpc>
+              <a:spcAft>
+                <a:spcPts val="0"/>
+              </a:spcAft>
+              <a:buClr>
+                <a:srgbClr val="007FA3"/>
+              </a:buClr>
+              <a:buSzPct val="100000"/>
+              <a:defRPr lang="en-US" sz="2400" b="0" i="0" u="none" strike="noStrike" cap="none" dirty="0">
+                <a:solidFill>
+                  <a:schemeClr val="dk1"/>
+                </a:solidFill>
+                <a:latin typeface="+mn-lt"/>
+                <a:ea typeface="Arial"/>
+                <a:cs typeface="Arial"/>
+                <a:sym typeface="Arial"/>
+              </a:defRPr>
+            </a:lvl5pPr>
+          </a:lstStyle>
+          <a:p>
+            <a:pPr lvl="0"/>
+            <a:r>
+              <a:rPr lang="en-US" dirty="0"/>
+              <a:t>Edit Master text styles</a:t>
+            </a:r>
+          </a:p>
+          <a:p>
+            <a:pPr lvl="1"/>
+            <a:r>
+              <a:rPr lang="en-US" dirty="0"/>
+              <a:t>Second level</a:t>
+            </a:r>
+          </a:p>
+          <a:p>
+            <a:pPr lvl="2"/>
+            <a:r>
+              <a:rPr lang="en-US" dirty="0"/>
+              <a:t>Third level</a:t>
+            </a:r>
+          </a:p>
+          <a:p>
+            <a:pPr lvl="3"/>
+            <a:r>
+              <a:rPr lang="en-US" dirty="0"/>
+              <a:t>Fourth level</a:t>
+            </a:r>
+          </a:p>
+          <a:p>
+            <a:pPr lvl="4"/>
+            <a:r>
+              <a:rPr lang="en-US" dirty="0"/>
+              <a:t>Fifth level</a:t>
+            </a:r>
+          </a:p>
+        </p:txBody>
+      </p:sp>
+      <p:sp>
+        <p:nvSpPr>
+          <p:cNvPr id="35" name="Shape 35"/>
+          <p:cNvSpPr txBox="1">
+            <a:spLocks noGrp="1"/>
+          </p:cNvSpPr>
+          <p:nvPr>
+            <p:ph type="dt" idx="10"/>
+          </p:nvPr>
+        </p:nvSpPr>
+        <p:spPr>
+          <a:xfrm>
+            <a:off x="8447617" y="42943"/>
+            <a:ext cx="2844799" cy="323135"/>
+          </a:xfrm>
+          <a:prstGeom prst="rect">
+            <a:avLst/>
+          </a:prstGeom>
+          <a:noFill/>
+          <a:ln>
+            <a:noFill/>
+          </a:ln>
+        </p:spPr>
+        <p:txBody>
+          <a:bodyPr lIns="91425" tIns="91425" rIns="91425" bIns="91425" anchor="ctr" anchorCtr="0"/>
+          <a:lstStyle>
+            <a:lvl1pPr marL="0" marR="0" lvl="0" indent="0" algn="r" rtl="0">
+              <a:spcBef>
+                <a:spcPts val="0"/>
+              </a:spcBef>
+              <a:buNone/>
+              <a:defRPr sz="900" b="0" i="0" u="none" strike="noStrike" cap="none">
+                <a:solidFill>
+                  <a:schemeClr val="lt1"/>
+                </a:solidFill>
+                <a:latin typeface="Arial"/>
+                <a:ea typeface="Arial"/>
+                <a:cs typeface="Arial"/>
+                <a:sym typeface="Arial"/>
+              </a:defRPr>
+            </a:lvl1pPr>
+            <a:lvl2pPr marL="457200" marR="0" lvl="1" indent="0" algn="l" rtl="0">
+              <a:spcBef>
+                <a:spcPts val="0"/>
+              </a:spcBef>
+              <a:buNone/>
+              <a:defRPr sz="1800" b="0" i="0" u="none" strike="noStrike" cap="none">
+                <a:solidFill>
+                  <a:schemeClr val="dk1"/>
+                </a:solidFill>
+                <a:latin typeface="Arial"/>
+                <a:ea typeface="Arial"/>
+                <a:cs typeface="Arial"/>
+                <a:sym typeface="Arial"/>
+              </a:defRPr>
+            </a:lvl2pPr>
+            <a:lvl3pPr marL="914400" marR="0" lvl="2" indent="0" algn="l" rtl="0">
+              <a:spcBef>
+                <a:spcPts val="0"/>
+              </a:spcBef>
+              <a:buNone/>
+              <a:defRPr sz="1800" b="0" i="0" u="none" strike="noStrike" cap="none">
+                <a:solidFill>
+                  <a:schemeClr val="dk1"/>
+                </a:solidFill>
+                <a:latin typeface="Arial"/>
+                <a:ea typeface="Arial"/>
+                <a:cs typeface="Arial"/>
+                <a:sym typeface="Arial"/>
+              </a:defRPr>
+            </a:lvl3pPr>
+            <a:lvl4pPr marL="1371600" marR="0" lvl="3" indent="0" algn="l" rtl="0">
+              <a:spcBef>
+                <a:spcPts val="0"/>
+              </a:spcBef>
+              <a:buNone/>
+              <a:defRPr sz="1800" b="0" i="0" u="none" strike="noStrike" cap="none">
+                <a:solidFill>
+                  <a:schemeClr val="dk1"/>
+                </a:solidFill>
+                <a:latin typeface="Arial"/>
+                <a:ea typeface="Arial"/>
+                <a:cs typeface="Arial"/>
+                <a:sym typeface="Arial"/>
+              </a:defRPr>
+            </a:lvl4pPr>
+            <a:lvl5pPr marL="1828800" marR="0" lvl="4" indent="0" algn="l" rtl="0">
+              <a:spcBef>
+                <a:spcPts val="0"/>
+              </a:spcBef>
+              <a:buNone/>
+              <a:defRPr sz="1800" b="0" i="0" u="none" strike="noStrike" cap="none">
+                <a:solidFill>
+                  <a:schemeClr val="dk1"/>
+                </a:solidFill>
+                <a:latin typeface="Arial"/>
+                <a:ea typeface="Arial"/>
+                <a:cs typeface="Arial"/>
+                <a:sym typeface="Arial"/>
+              </a:defRPr>
+            </a:lvl5pPr>
+            <a:lvl6pPr marL="2286000" marR="0" lvl="5" indent="0" algn="l" rtl="0">
+              <a:spcBef>
+                <a:spcPts val="0"/>
+              </a:spcBef>
+              <a:buNone/>
+              <a:defRPr sz="1800" b="0" i="0" u="none" strike="noStrike" cap="none">
+                <a:solidFill>
+                  <a:schemeClr val="dk1"/>
+                </a:solidFill>
+                <a:latin typeface="Arial"/>
+                <a:ea typeface="Arial"/>
+                <a:cs typeface="Arial"/>
+                <a:sym typeface="Arial"/>
+              </a:defRPr>
+            </a:lvl6pPr>
+            <a:lvl7pPr marL="2743200" marR="0" lvl="6" indent="0" algn="l" rtl="0">
+              <a:spcBef>
+                <a:spcPts val="0"/>
+              </a:spcBef>
+              <a:buNone/>
+              <a:defRPr sz="1800" b="0" i="0" u="none" strike="noStrike" cap="none">
+                <a:solidFill>
+                  <a:schemeClr val="dk1"/>
+                </a:solidFill>
+                <a:latin typeface="Arial"/>
+                <a:ea typeface="Arial"/>
+                <a:cs typeface="Arial"/>
+                <a:sym typeface="Arial"/>
+              </a:defRPr>
+            </a:lvl7pPr>
+            <a:lvl8pPr marL="3200400" marR="0" lvl="7" indent="0" algn="l" rtl="0">
+              <a:spcBef>
+                <a:spcPts val="0"/>
+              </a:spcBef>
+              <a:buNone/>
+              <a:defRPr sz="1800" b="0" i="0" u="none" strike="noStrike" cap="none">
+                <a:solidFill>
+                  <a:schemeClr val="dk1"/>
+                </a:solidFill>
+                <a:latin typeface="Arial"/>
+                <a:ea typeface="Arial"/>
+                <a:cs typeface="Arial"/>
+                <a:sym typeface="Arial"/>
+              </a:defRPr>
+            </a:lvl8pPr>
+            <a:lvl9pPr marL="3657600" marR="0" lvl="8" indent="0" algn="l" rtl="0">
+              <a:spcBef>
+                <a:spcPts val="0"/>
+              </a:spcBef>
+              <a:buNone/>
+              <a:defRPr sz="1800" b="0" i="0" u="none" strike="noStrike" cap="none">
+                <a:solidFill>
+                  <a:schemeClr val="dk1"/>
+                </a:solidFill>
+                <a:latin typeface="Arial"/>
+                <a:ea typeface="Arial"/>
+                <a:cs typeface="Arial"/>
+                <a:sym typeface="Arial"/>
+              </a:defRPr>
+            </a:lvl9pPr>
+          </a:lstStyle>
+          <a:p>
+            <a:endParaRPr dirty="0"/>
+          </a:p>
+        </p:txBody>
+      </p:sp>
+      <p:sp>
+        <p:nvSpPr>
+          <p:cNvPr id="36" name="Shape 36"/>
+          <p:cNvSpPr txBox="1">
+            <a:spLocks noGrp="1"/>
+          </p:cNvSpPr>
+          <p:nvPr>
+            <p:ph type="sldNum" idx="12"/>
+          </p:nvPr>
+        </p:nvSpPr>
+        <p:spPr>
+          <a:xfrm>
+            <a:off x="11292415" y="113071"/>
+            <a:ext cx="735711" cy="182879"/>
+          </a:xfrm>
+          <a:prstGeom prst="rect">
+            <a:avLst/>
+          </a:prstGeom>
+          <a:noFill/>
+          <a:ln>
+            <a:noFill/>
+          </a:ln>
+        </p:spPr>
+        <p:txBody>
+          <a:bodyPr lIns="91425" tIns="45700" rIns="91425" bIns="45700" anchor="ctr" anchorCtr="0">
+            <a:noAutofit/>
+          </a:bodyPr>
+          <a:lstStyle/>
+          <a:p>
+            <a:pPr rtl="0">
+              <a:buSzPct val="25000"/>
+            </a:pPr>
+            <a:fld id="{00000000-1234-1234-1234-123412341234}" type="slidenum">
+              <a:rPr lang="en-US" sz="900" smtClean="0">
+                <a:solidFill>
+                  <a:schemeClr val="lt1"/>
+                </a:solidFill>
+                <a:latin typeface="Arial"/>
+                <a:ea typeface="Arial"/>
+                <a:cs typeface="Arial"/>
+                <a:sym typeface="Arial"/>
+              </a:rPr>
+              <a:pPr rtl="0">
+                <a:buSzPct val="25000"/>
+              </a:pPr>
+              <a:t>‹#›</a:t>
+            </a:fld>
+            <a:endParaRPr lang="en-US" sz="900" dirty="0">
+              <a:solidFill>
+                <a:schemeClr val="lt1"/>
+              </a:solidFill>
+              <a:latin typeface="Arial"/>
+              <a:ea typeface="Arial"/>
+              <a:cs typeface="Arial"/>
+              <a:sym typeface="Arial"/>
+            </a:endParaRPr>
+          </a:p>
+        </p:txBody>
+      </p:sp>
+    </p:spTree>
+    <p:extLst>
+      <p:ext uri="{BB962C8B-B14F-4D97-AF65-F5344CB8AC3E}">
+        <p14:creationId xmlns:p14="http://schemas.microsoft.com/office/powerpoint/2010/main" val="918798673"/>
+      </p:ext>
+    </p:extLst>
+  </p:cSld>
+  <p:clrMapOvr>
+    <a:masterClrMapping/>
+  </p:clrMapOvr>
+</p:sldLayout>
+</file>
+
+<file path=ppt/slideLayouts/slideLayout7.xml><?xml version="1.0" encoding="utf-8"?>
+<p:sldLayout xmlns:a="http://schemas.openxmlformats.org/drawingml/2006/main" xmlns:r="http://schemas.openxmlformats.org/officeDocument/2006/relationships" xmlns:p="http://schemas.openxmlformats.org/presentationml/2006/main" userDrawn="1">
+  <p:cSld name="1_Title and Content">
+    <p:spTree>
+      <p:nvGrpSpPr>
+        <p:cNvPr id="1" name="Shape 24"/>
+        <p:cNvGrpSpPr/>
+        <p:nvPr/>
+      </p:nvGrpSpPr>
+      <p:grpSpPr>
+        <a:xfrm>
+          <a:off x="0" y="0"/>
+          <a:ext cx="0" cy="0"/>
+          <a:chOff x="0" y="0"/>
+          <a:chExt cx="0" cy="0"/>
+        </a:xfrm>
+      </p:grpSpPr>
+      <p:sp>
+        <p:nvSpPr>
+          <p:cNvPr id="25" name="Title Placeholder"/>
+          <p:cNvSpPr txBox="1">
+            <a:spLocks noGrp="1"/>
+          </p:cNvSpPr>
+          <p:nvPr>
+            <p:ph type="title"/>
+          </p:nvPr>
+        </p:nvSpPr>
+        <p:spPr>
+          <a:xfrm>
+            <a:off x="609600" y="574017"/>
+            <a:ext cx="10972800" cy="738633"/>
+          </a:xfrm>
+          <a:prstGeom prst="rect">
+            <a:avLst/>
+          </a:prstGeom>
+          <a:noFill/>
+          <a:ln>
+            <a:noFill/>
+          </a:ln>
+        </p:spPr>
+        <p:txBody>
+          <a:bodyPr lIns="91425" tIns="91425" rIns="91425" bIns="91425" anchor="b" anchorCtr="0"/>
+          <a:lstStyle>
+            <a:lvl1pPr marL="0" marR="0" lvl="0" indent="0" algn="l" rtl="0">
+              <a:lnSpc>
+                <a:spcPct val="100000"/>
+              </a:lnSpc>
+              <a:spcBef>
+                <a:spcPts val="0"/>
+              </a:spcBef>
+              <a:buClr>
+                <a:srgbClr val="007FA3"/>
+              </a:buClr>
+              <a:buFont typeface="Times New Roman"/>
+              <a:buNone/>
+              <a:defRPr sz="3600" b="1" i="0" u="none" strike="noStrike" cap="none">
+                <a:solidFill>
+                  <a:srgbClr val="007FA3"/>
+                </a:solidFill>
+                <a:latin typeface="+mj-lt"/>
+                <a:ea typeface="Times New Roman"/>
+                <a:cs typeface="Times New Roman"/>
+                <a:sym typeface="Times New Roman"/>
+              </a:defRPr>
+            </a:lvl1pPr>
+            <a:lvl2pPr lvl="1" indent="0">
+              <a:spcBef>
+                <a:spcPts val="0"/>
+              </a:spcBef>
+              <a:buNone/>
+              <a:defRPr sz="1800"/>
+            </a:lvl2pPr>
+            <a:lvl3pPr lvl="2" indent="0">
+              <a:spcBef>
+                <a:spcPts val="0"/>
+              </a:spcBef>
+              <a:buNone/>
+              <a:defRPr sz="1800"/>
+            </a:lvl3pPr>
+            <a:lvl4pPr lvl="3" indent="0">
+              <a:spcBef>
+                <a:spcPts val="0"/>
+              </a:spcBef>
+              <a:buNone/>
+              <a:defRPr sz="1800"/>
+            </a:lvl4pPr>
+            <a:lvl5pPr lvl="4" indent="0">
+              <a:spcBef>
+                <a:spcPts val="0"/>
+              </a:spcBef>
+              <a:buNone/>
+              <a:defRPr sz="1800"/>
+            </a:lvl5pPr>
+            <a:lvl6pPr lvl="5" indent="0">
+              <a:spcBef>
+                <a:spcPts val="0"/>
+              </a:spcBef>
+              <a:buNone/>
+              <a:defRPr sz="1800"/>
+            </a:lvl6pPr>
+            <a:lvl7pPr lvl="6" indent="0">
+              <a:spcBef>
+                <a:spcPts val="0"/>
+              </a:spcBef>
+              <a:buNone/>
+              <a:defRPr sz="1800"/>
+            </a:lvl7pPr>
+            <a:lvl8pPr lvl="7" indent="0">
+              <a:spcBef>
+                <a:spcPts val="0"/>
+              </a:spcBef>
+              <a:buNone/>
+              <a:defRPr sz="1800"/>
+            </a:lvl8pPr>
+            <a:lvl9pPr lvl="8" indent="0">
+              <a:spcBef>
+                <a:spcPts val="0"/>
+              </a:spcBef>
+              <a:buNone/>
+              <a:defRPr sz="1800"/>
+            </a:lvl9pPr>
+          </a:lstStyle>
+          <a:p>
+            <a:endParaRPr dirty="0"/>
+          </a:p>
+        </p:txBody>
+      </p:sp>
+      <p:sp>
+        <p:nvSpPr>
+          <p:cNvPr id="4" name="Content Placeholder 3">
+            <a:extLst>
+              <a:ext uri="{FF2B5EF4-FFF2-40B4-BE49-F238E27FC236}">
+                <a16:creationId xmlns:a16="http://schemas.microsoft.com/office/drawing/2014/main" id="{00F45AE3-EB76-41DE-97B2-CFE79B73D3C6}"/>
+              </a:ext>
+            </a:extLst>
+          </p:cNvPr>
+          <p:cNvSpPr>
+            <a:spLocks noGrp="1"/>
+          </p:cNvSpPr>
+          <p:nvPr>
+            <p:ph sz="quarter" idx="13"/>
+          </p:nvPr>
+        </p:nvSpPr>
+        <p:spPr>
+          <a:xfrm>
+            <a:off x="609601" y="1554921"/>
+            <a:ext cx="10977033" cy="1846659"/>
+          </a:xfrm>
+        </p:spPr>
+        <p:txBody>
+          <a:bodyPr/>
+          <a:lstStyle>
+            <a:lvl1pPr indent="-255600">
+              <a:defRPr sz="2400">
+                <a:latin typeface="+mn-lt"/>
+              </a:defRPr>
+            </a:lvl1pPr>
+            <a:lvl2pPr indent="-284400">
+              <a:defRPr sz="2400">
+                <a:latin typeface="+mn-lt"/>
+              </a:defRPr>
+            </a:lvl2pPr>
+            <a:lvl3pPr indent="-230400">
+              <a:defRPr sz="2400">
+                <a:latin typeface="+mn-lt"/>
+              </a:defRPr>
+            </a:lvl3pPr>
+            <a:lvl4pPr indent="-230400">
+              <a:defRPr sz="2400">
+                <a:latin typeface="+mn-lt"/>
+              </a:defRPr>
+            </a:lvl4pPr>
+            <a:lvl5pPr indent="-230400">
+              <a:defRPr sz="2400">
+                <a:latin typeface="+mn-lt"/>
+              </a:defRPr>
+            </a:lvl5pPr>
+          </a:lstStyle>
+          <a:p>
+            <a:pPr lvl="0"/>
+            <a:r>
+              <a:rPr lang="en-US" dirty="0"/>
+              <a:t>Edit Master text styles</a:t>
+            </a:r>
+          </a:p>
+          <a:p>
+            <a:pPr lvl="1"/>
+            <a:r>
+              <a:rPr lang="en-US" dirty="0"/>
+              <a:t>Second level</a:t>
+            </a:r>
+          </a:p>
+          <a:p>
+            <a:pPr lvl="2"/>
+            <a:r>
+              <a:rPr lang="en-US" dirty="0"/>
+              <a:t>Third level</a:t>
+            </a:r>
+          </a:p>
+          <a:p>
+            <a:pPr lvl="3"/>
+            <a:r>
+              <a:rPr lang="en-US" dirty="0"/>
+              <a:t>Fourth level</a:t>
+            </a:r>
+          </a:p>
+          <a:p>
+            <a:pPr lvl="4"/>
+            <a:r>
+              <a:rPr lang="en-US" dirty="0"/>
+              <a:t>Fifth level</a:t>
+            </a:r>
+          </a:p>
+        </p:txBody>
+      </p:sp>
+      <p:sp>
+        <p:nvSpPr>
+          <p:cNvPr id="28" name="Shape 28"/>
+          <p:cNvSpPr txBox="1">
+            <a:spLocks noGrp="1"/>
+          </p:cNvSpPr>
+          <p:nvPr>
+            <p:ph type="dt" idx="10"/>
+          </p:nvPr>
+        </p:nvSpPr>
+        <p:spPr>
+          <a:xfrm>
+            <a:off x="8447617" y="42943"/>
+            <a:ext cx="2844799" cy="323135"/>
+          </a:xfrm>
+          <a:prstGeom prst="rect">
+            <a:avLst/>
+          </a:prstGeom>
+          <a:noFill/>
+          <a:ln>
+            <a:noFill/>
+          </a:ln>
+        </p:spPr>
+        <p:txBody>
+          <a:bodyPr lIns="91425" tIns="91425" rIns="91425" bIns="91425" anchor="ctr" anchorCtr="0"/>
+          <a:lstStyle>
+            <a:lvl1pPr marL="0" marR="0" lvl="0" indent="0" algn="r" rtl="0">
+              <a:spcBef>
+                <a:spcPts val="0"/>
+              </a:spcBef>
+              <a:buNone/>
+              <a:defRPr sz="900" b="0" i="0" u="none" strike="noStrike" cap="none">
+                <a:solidFill>
+                  <a:schemeClr val="lt1"/>
+                </a:solidFill>
+                <a:latin typeface="Arial"/>
+                <a:ea typeface="Arial"/>
+                <a:cs typeface="Arial"/>
+                <a:sym typeface="Arial"/>
+              </a:defRPr>
+            </a:lvl1pPr>
+            <a:lvl2pPr marL="457200" marR="0" lvl="1" indent="0" algn="l" rtl="0">
+              <a:spcBef>
+                <a:spcPts val="0"/>
+              </a:spcBef>
+              <a:buNone/>
+              <a:defRPr sz="1800" b="0" i="0" u="none" strike="noStrike" cap="none">
+                <a:solidFill>
+                  <a:schemeClr val="dk1"/>
+                </a:solidFill>
+                <a:latin typeface="Arial"/>
+                <a:ea typeface="Arial"/>
+                <a:cs typeface="Arial"/>
+                <a:sym typeface="Arial"/>
+              </a:defRPr>
+            </a:lvl2pPr>
+            <a:lvl3pPr marL="914400" marR="0" lvl="2" indent="0" algn="l" rtl="0">
+              <a:spcBef>
+                <a:spcPts val="0"/>
+              </a:spcBef>
+              <a:buNone/>
+              <a:defRPr sz="1800" b="0" i="0" u="none" strike="noStrike" cap="none">
+                <a:solidFill>
+                  <a:schemeClr val="dk1"/>
+                </a:solidFill>
+                <a:latin typeface="Arial"/>
+                <a:ea typeface="Arial"/>
+                <a:cs typeface="Arial"/>
+                <a:sym typeface="Arial"/>
+              </a:defRPr>
+            </a:lvl3pPr>
+            <a:lvl4pPr marL="1371600" marR="0" lvl="3" indent="0" algn="l" rtl="0">
+              <a:spcBef>
+                <a:spcPts val="0"/>
+              </a:spcBef>
+              <a:buNone/>
+              <a:defRPr sz="1800" b="0" i="0" u="none" strike="noStrike" cap="none">
+                <a:solidFill>
+                  <a:schemeClr val="dk1"/>
+                </a:solidFill>
+                <a:latin typeface="Arial"/>
+                <a:ea typeface="Arial"/>
+                <a:cs typeface="Arial"/>
+                <a:sym typeface="Arial"/>
+              </a:defRPr>
+            </a:lvl4pPr>
+            <a:lvl5pPr marL="1828800" marR="0" lvl="4" indent="0" algn="l" rtl="0">
+              <a:spcBef>
+                <a:spcPts val="0"/>
+              </a:spcBef>
+              <a:buNone/>
+              <a:defRPr sz="1800" b="0" i="0" u="none" strike="noStrike" cap="none">
+                <a:solidFill>
+                  <a:schemeClr val="dk1"/>
+                </a:solidFill>
+                <a:latin typeface="Arial"/>
+                <a:ea typeface="Arial"/>
+                <a:cs typeface="Arial"/>
+                <a:sym typeface="Arial"/>
+              </a:defRPr>
+            </a:lvl5pPr>
+            <a:lvl6pPr marL="2286000" marR="0" lvl="5" indent="0" algn="l" rtl="0">
+              <a:spcBef>
+                <a:spcPts val="0"/>
+              </a:spcBef>
+              <a:buNone/>
+              <a:defRPr sz="1800" b="0" i="0" u="none" strike="noStrike" cap="none">
+                <a:solidFill>
+                  <a:schemeClr val="dk1"/>
+                </a:solidFill>
+                <a:latin typeface="Arial"/>
+                <a:ea typeface="Arial"/>
+                <a:cs typeface="Arial"/>
+                <a:sym typeface="Arial"/>
+              </a:defRPr>
+            </a:lvl6pPr>
+            <a:lvl7pPr marL="2743200" marR="0" lvl="6" indent="0" algn="l" rtl="0">
+              <a:spcBef>
+                <a:spcPts val="0"/>
+              </a:spcBef>
+              <a:buNone/>
+              <a:defRPr sz="1800" b="0" i="0" u="none" strike="noStrike" cap="none">
+                <a:solidFill>
+                  <a:schemeClr val="dk1"/>
+                </a:solidFill>
+                <a:latin typeface="Arial"/>
+                <a:ea typeface="Arial"/>
+                <a:cs typeface="Arial"/>
+                <a:sym typeface="Arial"/>
+              </a:defRPr>
+            </a:lvl7pPr>
+            <a:lvl8pPr marL="3200400" marR="0" lvl="7" indent="0" algn="l" rtl="0">
+              <a:spcBef>
+                <a:spcPts val="0"/>
+              </a:spcBef>
+              <a:buNone/>
+              <a:defRPr sz="1800" b="0" i="0" u="none" strike="noStrike" cap="none">
+                <a:solidFill>
+                  <a:schemeClr val="dk1"/>
+                </a:solidFill>
+                <a:latin typeface="Arial"/>
+                <a:ea typeface="Arial"/>
+                <a:cs typeface="Arial"/>
+                <a:sym typeface="Arial"/>
+              </a:defRPr>
+            </a:lvl8pPr>
+            <a:lvl9pPr marL="3657600" marR="0" lvl="8" indent="0" algn="l" rtl="0">
+              <a:spcBef>
+                <a:spcPts val="0"/>
+              </a:spcBef>
+              <a:buNone/>
+              <a:defRPr sz="1800" b="0" i="0" u="none" strike="noStrike" cap="none">
+                <a:solidFill>
+                  <a:schemeClr val="dk1"/>
+                </a:solidFill>
+                <a:latin typeface="Arial"/>
+                <a:ea typeface="Arial"/>
+                <a:cs typeface="Arial"/>
+                <a:sym typeface="Arial"/>
+              </a:defRPr>
+            </a:lvl9pPr>
+          </a:lstStyle>
+          <a:p>
+            <a:endParaRPr dirty="0"/>
+          </a:p>
+        </p:txBody>
+      </p:sp>
+      <p:sp>
+        <p:nvSpPr>
+          <p:cNvPr id="29" name="Shape 29"/>
+          <p:cNvSpPr txBox="1">
+            <a:spLocks noGrp="1"/>
+          </p:cNvSpPr>
+          <p:nvPr>
+            <p:ph type="sldNum" idx="12"/>
+          </p:nvPr>
+        </p:nvSpPr>
+        <p:spPr>
+          <a:xfrm>
+            <a:off x="11292415" y="113071"/>
+            <a:ext cx="735711" cy="182879"/>
+          </a:xfrm>
+          <a:prstGeom prst="rect">
+            <a:avLst/>
+          </a:prstGeom>
+          <a:noFill/>
+          <a:ln>
+            <a:noFill/>
+          </a:ln>
+        </p:spPr>
+        <p:txBody>
+          <a:bodyPr lIns="91425" tIns="45700" rIns="91425" bIns="45700" anchor="ctr" anchorCtr="0">
+            <a:noAutofit/>
+          </a:bodyPr>
+          <a:lstStyle/>
+          <a:p>
+            <a:pPr rtl="0">
+              <a:buSzPct val="25000"/>
+            </a:pPr>
+            <a:fld id="{00000000-1234-1234-1234-123412341234}" type="slidenum">
+              <a:rPr lang="en-US" sz="900" smtClean="0">
+                <a:solidFill>
+                  <a:schemeClr val="lt1"/>
+                </a:solidFill>
+                <a:latin typeface="Arial"/>
+                <a:ea typeface="Arial"/>
+                <a:cs typeface="Arial"/>
+                <a:sym typeface="Arial"/>
+              </a:rPr>
+              <a:pPr rtl="0">
+                <a:buSzPct val="25000"/>
+              </a:pPr>
+              <a:t>‹#›</a:t>
+            </a:fld>
+            <a:endParaRPr lang="en-US" sz="900" dirty="0">
+              <a:solidFill>
+                <a:schemeClr val="lt1"/>
+              </a:solidFill>
+              <a:latin typeface="Arial"/>
+              <a:ea typeface="Arial"/>
+              <a:cs typeface="Arial"/>
+              <a:sym typeface="Arial"/>
+            </a:endParaRPr>
+          </a:p>
+        </p:txBody>
+      </p:sp>
+    </p:spTree>
+    <p:extLst>
+      <p:ext uri="{BB962C8B-B14F-4D97-AF65-F5344CB8AC3E}">
+        <p14:creationId xmlns:p14="http://schemas.microsoft.com/office/powerpoint/2010/main" val="3462272048"/>
+      </p:ext>
+    </p:extLst>
+  </p:cSld>
+  <p:clrMapOvr>
+    <a:masterClrMapping/>
+  </p:clrMapOvr>
+</p:sldLayout>
+</file>
+
+<file path=ppt/slideLayouts/slideLayout8.xml><?xml version="1.0" encoding="utf-8"?>
+<p:sldLayout xmlns:a="http://schemas.openxmlformats.org/drawingml/2006/main" xmlns:r="http://schemas.openxmlformats.org/officeDocument/2006/relationships" xmlns:p="http://schemas.openxmlformats.org/presentationml/2006/main" userDrawn="1">
+  <p:cSld name="Title and Two Content">
+    <p:spTree>
+      <p:nvGrpSpPr>
+        <p:cNvPr id="1" name="Shape 30"/>
+        <p:cNvGrpSpPr/>
+        <p:nvPr/>
+      </p:nvGrpSpPr>
+      <p:grpSpPr>
+        <a:xfrm>
+          <a:off x="0" y="0"/>
+          <a:ext cx="0" cy="0"/>
+          <a:chOff x="0" y="0"/>
+          <a:chExt cx="0" cy="0"/>
+        </a:xfrm>
+      </p:grpSpPr>
+      <p:sp>
+        <p:nvSpPr>
+          <p:cNvPr id="31" name="Title Placeholder"/>
+          <p:cNvSpPr txBox="1">
+            <a:spLocks noGrp="1"/>
+          </p:cNvSpPr>
+          <p:nvPr>
+            <p:ph type="title"/>
+          </p:nvPr>
+        </p:nvSpPr>
+        <p:spPr>
+          <a:xfrm>
+            <a:off x="609600" y="574017"/>
+            <a:ext cx="10972800" cy="738633"/>
+          </a:xfrm>
+          <a:prstGeom prst="rect">
+            <a:avLst/>
+          </a:prstGeom>
+          <a:noFill/>
+          <a:ln>
+            <a:noFill/>
+          </a:ln>
+        </p:spPr>
+        <p:txBody>
+          <a:bodyPr lIns="91425" tIns="91425" rIns="91425" bIns="91425" anchor="b" anchorCtr="0"/>
+          <a:lstStyle>
+            <a:lvl1pPr marL="0" marR="0" lvl="0" indent="0" algn="l" rtl="0">
+              <a:lnSpc>
+                <a:spcPct val="100000"/>
+              </a:lnSpc>
+              <a:spcBef>
+                <a:spcPts val="0"/>
+              </a:spcBef>
+              <a:buClr>
+                <a:srgbClr val="007FA3"/>
+              </a:buClr>
+              <a:buFont typeface="Times New Roman"/>
+              <a:buNone/>
+              <a:defRPr sz="3600" b="1" i="0" u="none" strike="noStrike" cap="none">
+                <a:solidFill>
+                  <a:srgbClr val="007FA3"/>
+                </a:solidFill>
+                <a:latin typeface="+mj-lt"/>
+                <a:ea typeface="Times New Roman"/>
+                <a:cs typeface="Times New Roman"/>
+                <a:sym typeface="Times New Roman"/>
+              </a:defRPr>
+            </a:lvl1pPr>
+            <a:lvl2pPr lvl="1" indent="0">
+              <a:spcBef>
+                <a:spcPts val="0"/>
+              </a:spcBef>
+              <a:buNone/>
+              <a:defRPr sz="1800"/>
+            </a:lvl2pPr>
+            <a:lvl3pPr lvl="2" indent="0">
+              <a:spcBef>
+                <a:spcPts val="0"/>
+              </a:spcBef>
+              <a:buNone/>
+              <a:defRPr sz="1800"/>
+            </a:lvl3pPr>
+            <a:lvl4pPr lvl="3" indent="0">
+              <a:spcBef>
+                <a:spcPts val="0"/>
+              </a:spcBef>
+              <a:buNone/>
+              <a:defRPr sz="1800"/>
+            </a:lvl4pPr>
+            <a:lvl5pPr lvl="4" indent="0">
+              <a:spcBef>
+                <a:spcPts val="0"/>
+              </a:spcBef>
+              <a:buNone/>
+              <a:defRPr sz="1800"/>
+            </a:lvl5pPr>
+            <a:lvl6pPr lvl="5" indent="0">
+              <a:spcBef>
+                <a:spcPts val="0"/>
+              </a:spcBef>
+              <a:buNone/>
+              <a:defRPr sz="1800"/>
+            </a:lvl6pPr>
+            <a:lvl7pPr lvl="6" indent="0">
+              <a:spcBef>
+                <a:spcPts val="0"/>
+              </a:spcBef>
+              <a:buNone/>
+              <a:defRPr sz="1800"/>
+            </a:lvl7pPr>
+            <a:lvl8pPr lvl="7" indent="0">
+              <a:spcBef>
+                <a:spcPts val="0"/>
+              </a:spcBef>
+              <a:buNone/>
+              <a:defRPr sz="1800"/>
+            </a:lvl8pPr>
+            <a:lvl9pPr lvl="8" indent="0">
+              <a:spcBef>
+                <a:spcPts val="0"/>
+              </a:spcBef>
+              <a:buNone/>
+              <a:defRPr sz="1800"/>
+            </a:lvl9pPr>
+          </a:lstStyle>
+          <a:p>
+            <a:endParaRPr dirty="0"/>
+          </a:p>
+        </p:txBody>
+      </p:sp>
+      <p:sp>
+        <p:nvSpPr>
+          <p:cNvPr id="4" name="Content Placeholder 3">
+            <a:extLst>
+              <a:ext uri="{FF2B5EF4-FFF2-40B4-BE49-F238E27FC236}">
+                <a16:creationId xmlns:a16="http://schemas.microsoft.com/office/drawing/2014/main" id="{211BB07C-705F-4113-A2C5-779D6EA64D97}"/>
+              </a:ext>
+            </a:extLst>
+          </p:cNvPr>
+          <p:cNvSpPr>
+            <a:spLocks noGrp="1"/>
+          </p:cNvSpPr>
+          <p:nvPr>
+            <p:ph sz="quarter" idx="13"/>
+          </p:nvPr>
+        </p:nvSpPr>
+        <p:spPr>
+          <a:xfrm>
+            <a:off x="609600" y="1556327"/>
+            <a:ext cx="10972800" cy="1846659"/>
+          </a:xfrm>
+        </p:spPr>
+        <p:txBody>
+          <a:bodyPr/>
+          <a:lstStyle>
+            <a:lvl1pPr marR="0" indent="-255600" algn="l" rtl="0">
+              <a:lnSpc>
+                <a:spcPct val="100000"/>
+              </a:lnSpc>
+              <a:spcAft>
+                <a:spcPts val="0"/>
+              </a:spcAft>
+              <a:buClr>
+                <a:srgbClr val="007FA3"/>
+              </a:buClr>
+              <a:buSzPct val="100000"/>
+              <a:defRPr lang="en-US" sz="2400" b="0" i="0" u="none" strike="noStrike" cap="none" dirty="0" smtClean="0">
+                <a:solidFill>
+                  <a:schemeClr val="dk1"/>
+                </a:solidFill>
+                <a:latin typeface="+mn-lt"/>
+                <a:ea typeface="Arial"/>
+                <a:cs typeface="Arial"/>
+                <a:sym typeface="Arial"/>
+              </a:defRPr>
+            </a:lvl1pPr>
+            <a:lvl2pPr marR="0" indent="-284400" algn="l" rtl="0">
+              <a:lnSpc>
+                <a:spcPct val="100000"/>
+              </a:lnSpc>
+              <a:spcAft>
+                <a:spcPts val="0"/>
+              </a:spcAft>
+              <a:buClr>
+                <a:srgbClr val="007FA3"/>
+              </a:buClr>
+              <a:buSzPct val="100000"/>
+              <a:defRPr lang="en-US" sz="2400" b="0" i="0" u="none" strike="noStrike" cap="none" dirty="0" smtClean="0">
+                <a:solidFill>
+                  <a:schemeClr val="dk1"/>
+                </a:solidFill>
+                <a:latin typeface="+mn-lt"/>
+                <a:ea typeface="Arial"/>
+                <a:cs typeface="Arial"/>
+                <a:sym typeface="Arial"/>
+              </a:defRPr>
+            </a:lvl2pPr>
+            <a:lvl3pPr marR="0" indent="-230400" algn="l" rtl="0">
+              <a:lnSpc>
+                <a:spcPct val="100000"/>
+              </a:lnSpc>
+              <a:spcAft>
+                <a:spcPts val="0"/>
+              </a:spcAft>
+              <a:buClr>
+                <a:srgbClr val="007FA3"/>
+              </a:buClr>
+              <a:buSzPct val="100000"/>
+              <a:defRPr lang="en-US" sz="2400" b="0" i="0" u="none" strike="noStrike" cap="none" dirty="0" smtClean="0">
+                <a:solidFill>
+                  <a:schemeClr val="dk1"/>
+                </a:solidFill>
+                <a:latin typeface="+mn-lt"/>
+                <a:ea typeface="Arial"/>
+                <a:cs typeface="Arial"/>
+                <a:sym typeface="Arial"/>
+              </a:defRPr>
+            </a:lvl3pPr>
+            <a:lvl4pPr marR="0" indent="-230400" algn="l" rtl="0">
+              <a:lnSpc>
+                <a:spcPct val="100000"/>
+              </a:lnSpc>
+              <a:spcAft>
+                <a:spcPts val="0"/>
+              </a:spcAft>
+              <a:buClr>
+                <a:srgbClr val="007FA3"/>
+              </a:buClr>
+              <a:buSzPct val="100000"/>
+              <a:defRPr lang="en-US" sz="2400" b="0" i="0" u="none" strike="noStrike" cap="none" dirty="0" smtClean="0">
+                <a:solidFill>
+                  <a:schemeClr val="dk1"/>
+                </a:solidFill>
+                <a:latin typeface="+mn-lt"/>
+                <a:ea typeface="Arial"/>
+                <a:cs typeface="Arial"/>
+                <a:sym typeface="Arial"/>
+              </a:defRPr>
+            </a:lvl4pPr>
+            <a:lvl5pPr marR="0" indent="-230400" algn="l" rtl="0">
+              <a:lnSpc>
+                <a:spcPct val="100000"/>
+              </a:lnSpc>
+              <a:spcAft>
+                <a:spcPts val="0"/>
+              </a:spcAft>
+              <a:buClr>
+                <a:srgbClr val="007FA3"/>
+              </a:buClr>
+              <a:buSzPct val="100000"/>
+              <a:defRPr lang="en-US" sz="2400" b="0" i="0" u="none" strike="noStrike" cap="none" dirty="0">
+                <a:solidFill>
+                  <a:schemeClr val="dk1"/>
+                </a:solidFill>
+                <a:latin typeface="+mn-lt"/>
+                <a:ea typeface="Arial"/>
+                <a:cs typeface="Arial"/>
+                <a:sym typeface="Arial"/>
+              </a:defRPr>
+            </a:lvl5pPr>
+          </a:lstStyle>
+          <a:p>
+            <a:pPr lvl="0"/>
+            <a:r>
+              <a:rPr lang="en-US" dirty="0"/>
+              <a:t>Edit Master text styles</a:t>
+            </a:r>
+          </a:p>
+          <a:p>
+            <a:pPr lvl="1"/>
+            <a:r>
+              <a:rPr lang="en-US" dirty="0"/>
+              <a:t>Second level</a:t>
+            </a:r>
+          </a:p>
+          <a:p>
+            <a:pPr lvl="2"/>
+            <a:r>
+              <a:rPr lang="en-US" dirty="0"/>
+              <a:t>Third level</a:t>
+            </a:r>
+          </a:p>
+          <a:p>
+            <a:pPr lvl="3"/>
+            <a:r>
+              <a:rPr lang="en-US" dirty="0"/>
+              <a:t>Fourth level</a:t>
+            </a:r>
+          </a:p>
+          <a:p>
+            <a:pPr lvl="4"/>
+            <a:r>
+              <a:rPr lang="en-US" dirty="0"/>
+              <a:t>Fifth level</a:t>
+            </a:r>
+          </a:p>
+        </p:txBody>
+      </p:sp>
+      <p:sp>
+        <p:nvSpPr>
+          <p:cNvPr id="7" name="Content Placeholder 6">
+            <a:extLst>
+              <a:ext uri="{FF2B5EF4-FFF2-40B4-BE49-F238E27FC236}">
+                <a16:creationId xmlns:a16="http://schemas.microsoft.com/office/drawing/2014/main" id="{820D01C0-4FD2-4065-9EC3-96A308398288}"/>
+              </a:ext>
+            </a:extLst>
+          </p:cNvPr>
+          <p:cNvSpPr>
+            <a:spLocks noGrp="1"/>
+          </p:cNvSpPr>
+          <p:nvPr>
+            <p:ph sz="quarter" idx="14"/>
+          </p:nvPr>
+        </p:nvSpPr>
+        <p:spPr>
+          <a:xfrm>
+            <a:off x="609600" y="3971925"/>
+            <a:ext cx="10972800" cy="1846659"/>
+          </a:xfrm>
+        </p:spPr>
+        <p:txBody>
+          <a:bodyPr/>
+          <a:lstStyle>
+            <a:lvl1pPr marR="0" indent="-255600" algn="l" rtl="0">
+              <a:lnSpc>
+                <a:spcPct val="100000"/>
+              </a:lnSpc>
+              <a:spcAft>
+                <a:spcPts val="0"/>
+              </a:spcAft>
+              <a:buClr>
+                <a:srgbClr val="007FA3"/>
+              </a:buClr>
+              <a:buSzPct val="100000"/>
+              <a:defRPr lang="en-US" sz="2400" b="0" i="0" u="none" strike="noStrike" cap="none" dirty="0" smtClean="0">
+                <a:solidFill>
+                  <a:schemeClr val="dk1"/>
+                </a:solidFill>
+                <a:latin typeface="+mn-lt"/>
+                <a:ea typeface="Arial"/>
+                <a:cs typeface="Arial"/>
+                <a:sym typeface="Arial"/>
+              </a:defRPr>
+            </a:lvl1pPr>
+            <a:lvl2pPr marR="0" indent="-284400" algn="l" rtl="0">
+              <a:lnSpc>
+                <a:spcPct val="100000"/>
+              </a:lnSpc>
+              <a:spcAft>
+                <a:spcPts val="0"/>
+              </a:spcAft>
+              <a:buClr>
+                <a:srgbClr val="007FA3"/>
+              </a:buClr>
+              <a:buSzPct val="100000"/>
+              <a:defRPr lang="en-US" sz="2400" b="0" i="0" u="none" strike="noStrike" cap="none" dirty="0" smtClean="0">
+                <a:solidFill>
+                  <a:schemeClr val="dk1"/>
+                </a:solidFill>
+                <a:latin typeface="+mn-lt"/>
+                <a:ea typeface="Arial"/>
+                <a:cs typeface="Arial"/>
+                <a:sym typeface="Arial"/>
+              </a:defRPr>
+            </a:lvl2pPr>
+            <a:lvl3pPr marR="0" indent="-230400" algn="l" rtl="0">
+              <a:lnSpc>
+                <a:spcPct val="100000"/>
+              </a:lnSpc>
+              <a:spcAft>
+                <a:spcPts val="0"/>
+              </a:spcAft>
+              <a:buClr>
+                <a:srgbClr val="007FA3"/>
+              </a:buClr>
+              <a:buSzPct val="100000"/>
+              <a:defRPr lang="en-US" sz="2400" b="0" i="0" u="none" strike="noStrike" cap="none" dirty="0" smtClean="0">
+                <a:solidFill>
+                  <a:schemeClr val="dk1"/>
+                </a:solidFill>
+                <a:latin typeface="+mn-lt"/>
+                <a:ea typeface="Arial"/>
+                <a:cs typeface="Arial"/>
+                <a:sym typeface="Arial"/>
+              </a:defRPr>
+            </a:lvl3pPr>
+            <a:lvl4pPr marR="0" indent="-230400" algn="l" rtl="0">
+              <a:lnSpc>
+                <a:spcPct val="100000"/>
+              </a:lnSpc>
+              <a:spcAft>
+                <a:spcPts val="0"/>
+              </a:spcAft>
+              <a:buClr>
+                <a:srgbClr val="007FA3"/>
+              </a:buClr>
+              <a:buSzPct val="100000"/>
+              <a:defRPr lang="en-US" sz="2400" b="0" i="0" u="none" strike="noStrike" cap="none" dirty="0" smtClean="0">
+                <a:solidFill>
+                  <a:schemeClr val="dk1"/>
+                </a:solidFill>
+                <a:latin typeface="+mn-lt"/>
+                <a:ea typeface="Arial"/>
+                <a:cs typeface="Arial"/>
+                <a:sym typeface="Arial"/>
+              </a:defRPr>
+            </a:lvl4pPr>
+            <a:lvl5pPr marR="0" indent="-230400" algn="l" rtl="0">
+              <a:lnSpc>
+                <a:spcPct val="100000"/>
+              </a:lnSpc>
+              <a:spcAft>
+                <a:spcPts val="0"/>
+              </a:spcAft>
+              <a:buClr>
+                <a:srgbClr val="007FA3"/>
+              </a:buClr>
+              <a:buSzPct val="100000"/>
+              <a:defRPr lang="en-US" sz="2400" b="0" i="0" u="none" strike="noStrike" cap="none" dirty="0">
+                <a:solidFill>
+                  <a:schemeClr val="dk1"/>
+                </a:solidFill>
+                <a:latin typeface="+mn-lt"/>
+                <a:ea typeface="Arial"/>
+                <a:cs typeface="Arial"/>
+                <a:sym typeface="Arial"/>
+              </a:defRPr>
+            </a:lvl5pPr>
+          </a:lstStyle>
+          <a:p>
+            <a:pPr lvl="0"/>
+            <a:r>
+              <a:rPr lang="en-US" dirty="0"/>
+              <a:t>Edit Master text styles</a:t>
+            </a:r>
+          </a:p>
+          <a:p>
+            <a:pPr lvl="1"/>
+            <a:r>
+              <a:rPr lang="en-US" dirty="0"/>
+              <a:t>Second level</a:t>
+            </a:r>
+          </a:p>
+          <a:p>
+            <a:pPr lvl="2"/>
+            <a:r>
+              <a:rPr lang="en-US" dirty="0"/>
+              <a:t>Third level</a:t>
+            </a:r>
+          </a:p>
+          <a:p>
+            <a:pPr lvl="3"/>
+            <a:r>
+              <a:rPr lang="en-US" dirty="0"/>
+              <a:t>Fourth level</a:t>
+            </a:r>
+          </a:p>
+          <a:p>
+            <a:pPr lvl="4"/>
+            <a:r>
+              <a:rPr lang="en-US" dirty="0"/>
+              <a:t>Fifth level</a:t>
+            </a:r>
+          </a:p>
+        </p:txBody>
+      </p:sp>
+      <p:sp>
+        <p:nvSpPr>
+          <p:cNvPr id="35" name="Shape 35"/>
+          <p:cNvSpPr txBox="1">
+            <a:spLocks noGrp="1"/>
+          </p:cNvSpPr>
+          <p:nvPr>
+            <p:ph type="dt" idx="10"/>
+          </p:nvPr>
+        </p:nvSpPr>
+        <p:spPr>
+          <a:xfrm>
+            <a:off x="8447617" y="42943"/>
+            <a:ext cx="2844799" cy="323135"/>
+          </a:xfrm>
+          <a:prstGeom prst="rect">
+            <a:avLst/>
+          </a:prstGeom>
+          <a:noFill/>
+          <a:ln>
+            <a:noFill/>
+          </a:ln>
+        </p:spPr>
+        <p:txBody>
+          <a:bodyPr lIns="91425" tIns="91425" rIns="91425" bIns="91425" anchor="ctr" anchorCtr="0"/>
+          <a:lstStyle>
+            <a:lvl1pPr marL="0" marR="0" lvl="0" indent="0" algn="r" rtl="0">
+              <a:spcBef>
+                <a:spcPts val="0"/>
+              </a:spcBef>
+              <a:buNone/>
+              <a:defRPr sz="900" b="0" i="0" u="none" strike="noStrike" cap="none">
+                <a:solidFill>
+                  <a:schemeClr val="lt1"/>
+                </a:solidFill>
+                <a:latin typeface="Arial"/>
+                <a:ea typeface="Arial"/>
+                <a:cs typeface="Arial"/>
+                <a:sym typeface="Arial"/>
+              </a:defRPr>
+            </a:lvl1pPr>
+            <a:lvl2pPr marL="457200" marR="0" lvl="1" indent="0" algn="l" rtl="0">
+              <a:spcBef>
+                <a:spcPts val="0"/>
+              </a:spcBef>
+              <a:buNone/>
+              <a:defRPr sz="1800" b="0" i="0" u="none" strike="noStrike" cap="none">
+                <a:solidFill>
+                  <a:schemeClr val="dk1"/>
+                </a:solidFill>
+                <a:latin typeface="Arial"/>
+                <a:ea typeface="Arial"/>
+                <a:cs typeface="Arial"/>
+                <a:sym typeface="Arial"/>
+              </a:defRPr>
+            </a:lvl2pPr>
+            <a:lvl3pPr marL="914400" marR="0" lvl="2" indent="0" algn="l" rtl="0">
+              <a:spcBef>
+                <a:spcPts val="0"/>
+              </a:spcBef>
+              <a:buNone/>
+              <a:defRPr sz="1800" b="0" i="0" u="none" strike="noStrike" cap="none">
+                <a:solidFill>
+                  <a:schemeClr val="dk1"/>
+                </a:solidFill>
+                <a:latin typeface="Arial"/>
+                <a:ea typeface="Arial"/>
+                <a:cs typeface="Arial"/>
+                <a:sym typeface="Arial"/>
+              </a:defRPr>
+            </a:lvl3pPr>
+            <a:lvl4pPr marL="1371600" marR="0" lvl="3" indent="0" algn="l" rtl="0">
+              <a:spcBef>
+                <a:spcPts val="0"/>
+              </a:spcBef>
+              <a:buNone/>
+              <a:defRPr sz="1800" b="0" i="0" u="none" strike="noStrike" cap="none">
+                <a:solidFill>
+                  <a:schemeClr val="dk1"/>
+                </a:solidFill>
+                <a:latin typeface="Arial"/>
+                <a:ea typeface="Arial"/>
+                <a:cs typeface="Arial"/>
+                <a:sym typeface="Arial"/>
+              </a:defRPr>
+            </a:lvl4pPr>
+            <a:lvl5pPr marL="1828800" marR="0" lvl="4" indent="0" algn="l" rtl="0">
+              <a:spcBef>
+                <a:spcPts val="0"/>
+              </a:spcBef>
+              <a:buNone/>
+              <a:defRPr sz="1800" b="0" i="0" u="none" strike="noStrike" cap="none">
+                <a:solidFill>
+                  <a:schemeClr val="dk1"/>
+                </a:solidFill>
+                <a:latin typeface="Arial"/>
+                <a:ea typeface="Arial"/>
+                <a:cs typeface="Arial"/>
+                <a:sym typeface="Arial"/>
+              </a:defRPr>
+            </a:lvl5pPr>
+            <a:lvl6pPr marL="2286000" marR="0" lvl="5" indent="0" algn="l" rtl="0">
+              <a:spcBef>
+                <a:spcPts val="0"/>
+              </a:spcBef>
+              <a:buNone/>
+              <a:defRPr sz="1800" b="0" i="0" u="none" strike="noStrike" cap="none">
+                <a:solidFill>
+                  <a:schemeClr val="dk1"/>
+                </a:solidFill>
+                <a:latin typeface="Arial"/>
+                <a:ea typeface="Arial"/>
+                <a:cs typeface="Arial"/>
+                <a:sym typeface="Arial"/>
+              </a:defRPr>
+            </a:lvl6pPr>
+            <a:lvl7pPr marL="2743200" marR="0" lvl="6" indent="0" algn="l" rtl="0">
+              <a:spcBef>
+                <a:spcPts val="0"/>
+              </a:spcBef>
+              <a:buNone/>
+              <a:defRPr sz="1800" b="0" i="0" u="none" strike="noStrike" cap="none">
+                <a:solidFill>
+                  <a:schemeClr val="dk1"/>
+                </a:solidFill>
+                <a:latin typeface="Arial"/>
+                <a:ea typeface="Arial"/>
+                <a:cs typeface="Arial"/>
+                <a:sym typeface="Arial"/>
+              </a:defRPr>
+            </a:lvl7pPr>
+            <a:lvl8pPr marL="3200400" marR="0" lvl="7" indent="0" algn="l" rtl="0">
+              <a:spcBef>
+                <a:spcPts val="0"/>
+              </a:spcBef>
+              <a:buNone/>
+              <a:defRPr sz="1800" b="0" i="0" u="none" strike="noStrike" cap="none">
+                <a:solidFill>
+                  <a:schemeClr val="dk1"/>
+                </a:solidFill>
+                <a:latin typeface="Arial"/>
+                <a:ea typeface="Arial"/>
+                <a:cs typeface="Arial"/>
+                <a:sym typeface="Arial"/>
+              </a:defRPr>
+            </a:lvl8pPr>
+            <a:lvl9pPr marL="3657600" marR="0" lvl="8" indent="0" algn="l" rtl="0">
+              <a:spcBef>
+                <a:spcPts val="0"/>
+              </a:spcBef>
+              <a:buNone/>
+              <a:defRPr sz="1800" b="0" i="0" u="none" strike="noStrike" cap="none">
+                <a:solidFill>
+                  <a:schemeClr val="dk1"/>
+                </a:solidFill>
+                <a:latin typeface="Arial"/>
+                <a:ea typeface="Arial"/>
+                <a:cs typeface="Arial"/>
+                <a:sym typeface="Arial"/>
+              </a:defRPr>
+            </a:lvl9pPr>
+          </a:lstStyle>
+          <a:p>
+            <a:endParaRPr dirty="0"/>
+          </a:p>
+        </p:txBody>
+      </p:sp>
+      <p:sp>
+        <p:nvSpPr>
+          <p:cNvPr id="36" name="Shape 36"/>
+          <p:cNvSpPr txBox="1">
+            <a:spLocks noGrp="1"/>
+          </p:cNvSpPr>
+          <p:nvPr>
+            <p:ph type="sldNum" idx="12"/>
+          </p:nvPr>
+        </p:nvSpPr>
+        <p:spPr>
+          <a:xfrm>
+            <a:off x="11292415" y="113071"/>
+            <a:ext cx="735711" cy="182879"/>
+          </a:xfrm>
+          <a:prstGeom prst="rect">
+            <a:avLst/>
+          </a:prstGeom>
+          <a:noFill/>
+          <a:ln>
+            <a:noFill/>
+          </a:ln>
+        </p:spPr>
+        <p:txBody>
+          <a:bodyPr lIns="91425" tIns="45700" rIns="91425" bIns="45700" anchor="ctr" anchorCtr="0">
+            <a:noAutofit/>
+          </a:bodyPr>
+          <a:lstStyle/>
+          <a:p>
+            <a:pPr rtl="0">
+              <a:buSzPct val="25000"/>
+            </a:pPr>
+            <a:fld id="{00000000-1234-1234-1234-123412341234}" type="slidenum">
+              <a:rPr lang="en-US" sz="900" smtClean="0">
+                <a:solidFill>
+                  <a:schemeClr val="lt1"/>
+                </a:solidFill>
+                <a:latin typeface="Arial"/>
+                <a:ea typeface="Arial"/>
+                <a:cs typeface="Arial"/>
+                <a:sym typeface="Arial"/>
+              </a:rPr>
+              <a:pPr rtl="0">
+                <a:buSzPct val="25000"/>
+              </a:pPr>
+              <a:t>‹#›</a:t>
+            </a:fld>
+            <a:endParaRPr lang="en-US" sz="900" dirty="0">
+              <a:solidFill>
+                <a:schemeClr val="lt1"/>
+              </a:solidFill>
+              <a:latin typeface="Arial"/>
+              <a:ea typeface="Arial"/>
+              <a:cs typeface="Arial"/>
+              <a:sym typeface="Arial"/>
+            </a:endParaRPr>
+          </a:p>
+        </p:txBody>
+      </p:sp>
+    </p:spTree>
+    <p:extLst>
+      <p:ext uri="{BB962C8B-B14F-4D97-AF65-F5344CB8AC3E}">
+        <p14:creationId xmlns:p14="http://schemas.microsoft.com/office/powerpoint/2010/main" val="3678513742"/>
+      </p:ext>
+    </p:extLst>
+  </p:cSld>
+  <p:clrMapOvr>
+    <a:masterClrMapping/>
+  </p:clrMapOvr>
+</p:sldLayout>
+</file>
+
+<file path=ppt/slideLayouts/slideLayout9.xml><?xml version="1.0" encoding="utf-8"?>
+<p:sldLayout xmlns:a="http://schemas.openxmlformats.org/drawingml/2006/main" xmlns:r="http://schemas.openxmlformats.org/officeDocument/2006/relationships" xmlns:p="http://schemas.openxmlformats.org/presentationml/2006/main" userDrawn="1">
+  <p:cSld name="2_Title and Content">
+    <p:spTree>
+      <p:nvGrpSpPr>
+        <p:cNvPr id="1" name="Shape 24"/>
+        <p:cNvGrpSpPr/>
+        <p:nvPr/>
+      </p:nvGrpSpPr>
+      <p:grpSpPr>
+        <a:xfrm>
+          <a:off x="0" y="0"/>
+          <a:ext cx="0" cy="0"/>
+          <a:chOff x="0" y="0"/>
+          <a:chExt cx="0" cy="0"/>
+        </a:xfrm>
+      </p:grpSpPr>
+      <p:sp>
+        <p:nvSpPr>
+          <p:cNvPr id="25" name="Title Placeholder"/>
+          <p:cNvSpPr txBox="1">
+            <a:spLocks noGrp="1"/>
+          </p:cNvSpPr>
+          <p:nvPr>
+            <p:ph type="title"/>
+          </p:nvPr>
+        </p:nvSpPr>
+        <p:spPr>
+          <a:xfrm>
+            <a:off x="609600" y="574017"/>
+            <a:ext cx="10972800" cy="738633"/>
+          </a:xfrm>
+          <a:prstGeom prst="rect">
+            <a:avLst/>
+          </a:prstGeom>
+          <a:noFill/>
+          <a:ln>
+            <a:noFill/>
+          </a:ln>
+        </p:spPr>
+        <p:txBody>
+          <a:bodyPr lIns="91425" tIns="91425" rIns="91425" bIns="91425" anchor="b" anchorCtr="0"/>
+          <a:lstStyle>
+            <a:lvl1pPr marL="0" marR="0" lvl="0" indent="0" algn="l" rtl="0">
+              <a:lnSpc>
+                <a:spcPct val="100000"/>
+              </a:lnSpc>
+              <a:spcBef>
+                <a:spcPts val="0"/>
+              </a:spcBef>
+              <a:buClr>
+                <a:srgbClr val="007FA3"/>
+              </a:buClr>
+              <a:buFont typeface="Times New Roman"/>
+              <a:buNone/>
+              <a:defRPr sz="3600" b="1" i="0" u="none" strike="noStrike" cap="none">
+                <a:solidFill>
+                  <a:srgbClr val="007FA3"/>
+                </a:solidFill>
+                <a:latin typeface="+mj-lt"/>
+                <a:ea typeface="Times New Roman"/>
+                <a:cs typeface="Times New Roman"/>
+                <a:sym typeface="Times New Roman"/>
+              </a:defRPr>
+            </a:lvl1pPr>
+            <a:lvl2pPr lvl="1" indent="0">
+              <a:spcBef>
+                <a:spcPts val="0"/>
+              </a:spcBef>
+              <a:buNone/>
+              <a:defRPr sz="1800"/>
+            </a:lvl2pPr>
+            <a:lvl3pPr lvl="2" indent="0">
+              <a:spcBef>
+                <a:spcPts val="0"/>
+              </a:spcBef>
+              <a:buNone/>
+              <a:defRPr sz="1800"/>
+            </a:lvl3pPr>
+            <a:lvl4pPr lvl="3" indent="0">
+              <a:spcBef>
+                <a:spcPts val="0"/>
+              </a:spcBef>
+              <a:buNone/>
+              <a:defRPr sz="1800"/>
+            </a:lvl4pPr>
+            <a:lvl5pPr lvl="4" indent="0">
+              <a:spcBef>
+                <a:spcPts val="0"/>
+              </a:spcBef>
+              <a:buNone/>
+              <a:defRPr sz="1800"/>
+            </a:lvl5pPr>
+            <a:lvl6pPr lvl="5" indent="0">
+              <a:spcBef>
+                <a:spcPts val="0"/>
+              </a:spcBef>
+              <a:buNone/>
+              <a:defRPr sz="1800"/>
+            </a:lvl6pPr>
+            <a:lvl7pPr lvl="6" indent="0">
+              <a:spcBef>
+                <a:spcPts val="0"/>
+              </a:spcBef>
+              <a:buNone/>
+              <a:defRPr sz="1800"/>
+            </a:lvl7pPr>
+            <a:lvl8pPr lvl="7" indent="0">
+              <a:spcBef>
+                <a:spcPts val="0"/>
+              </a:spcBef>
+              <a:buNone/>
+              <a:defRPr sz="1800"/>
+            </a:lvl8pPr>
+            <a:lvl9pPr lvl="8" indent="0">
+              <a:spcBef>
+                <a:spcPts val="0"/>
+              </a:spcBef>
+              <a:buNone/>
+              <a:defRPr sz="1800"/>
+            </a:lvl9pPr>
+          </a:lstStyle>
+          <a:p>
+            <a:endParaRPr dirty="0"/>
+          </a:p>
+        </p:txBody>
+      </p:sp>
+      <p:sp>
+        <p:nvSpPr>
+          <p:cNvPr id="4" name="Content Placeholder 3">
+            <a:extLst>
+              <a:ext uri="{FF2B5EF4-FFF2-40B4-BE49-F238E27FC236}">
+                <a16:creationId xmlns:a16="http://schemas.microsoft.com/office/drawing/2014/main" id="{00F45AE3-EB76-41DE-97B2-CFE79B73D3C6}"/>
+              </a:ext>
+            </a:extLst>
+          </p:cNvPr>
+          <p:cNvSpPr>
+            <a:spLocks noGrp="1"/>
+          </p:cNvSpPr>
+          <p:nvPr>
+            <p:ph sz="quarter" idx="13"/>
+          </p:nvPr>
+        </p:nvSpPr>
+        <p:spPr>
+          <a:xfrm>
+            <a:off x="609601" y="1554921"/>
+            <a:ext cx="10977033" cy="1846659"/>
+          </a:xfrm>
+        </p:spPr>
+        <p:txBody>
+          <a:bodyPr/>
+          <a:lstStyle>
+            <a:lvl1pPr indent="-255600">
+              <a:defRPr sz="2400">
+                <a:latin typeface="+mn-lt"/>
+              </a:defRPr>
+            </a:lvl1pPr>
+            <a:lvl2pPr indent="-284400">
+              <a:defRPr sz="2400">
+                <a:latin typeface="+mn-lt"/>
+              </a:defRPr>
+            </a:lvl2pPr>
+            <a:lvl3pPr indent="-230400">
+              <a:defRPr sz="2400">
+                <a:latin typeface="+mn-lt"/>
+              </a:defRPr>
+            </a:lvl3pPr>
+            <a:lvl4pPr indent="-230400">
+              <a:defRPr sz="2400">
+                <a:latin typeface="+mn-lt"/>
+              </a:defRPr>
+            </a:lvl4pPr>
+            <a:lvl5pPr indent="-230400">
+              <a:defRPr sz="2400">
+                <a:latin typeface="+mn-lt"/>
+              </a:defRPr>
+            </a:lvl5pPr>
+          </a:lstStyle>
+          <a:p>
+            <a:pPr lvl="0"/>
+            <a:r>
+              <a:rPr lang="en-US" dirty="0"/>
+              <a:t>Edit Master text styles</a:t>
+            </a:r>
+          </a:p>
+          <a:p>
+            <a:pPr lvl="1"/>
+            <a:r>
+              <a:rPr lang="en-US" dirty="0"/>
+              <a:t>Second level</a:t>
+            </a:r>
+          </a:p>
+          <a:p>
+            <a:pPr lvl="2"/>
+            <a:r>
+              <a:rPr lang="en-US" dirty="0"/>
+              <a:t>Third level</a:t>
+            </a:r>
+          </a:p>
+          <a:p>
+            <a:pPr lvl="3"/>
+            <a:r>
+              <a:rPr lang="en-US" dirty="0"/>
+              <a:t>Fourth level</a:t>
+            </a:r>
+          </a:p>
+          <a:p>
+            <a:pPr lvl="4"/>
+            <a:r>
+              <a:rPr lang="en-US" dirty="0"/>
+              <a:t>Fifth level</a:t>
+            </a:r>
+          </a:p>
+        </p:txBody>
+      </p:sp>
+      <p:sp>
+        <p:nvSpPr>
+          <p:cNvPr id="28" name="Shape 28"/>
+          <p:cNvSpPr txBox="1">
+            <a:spLocks noGrp="1"/>
+          </p:cNvSpPr>
+          <p:nvPr>
+            <p:ph type="dt" idx="10"/>
+          </p:nvPr>
+        </p:nvSpPr>
+        <p:spPr>
+          <a:xfrm>
+            <a:off x="8447617" y="42943"/>
+            <a:ext cx="2844799" cy="323135"/>
+          </a:xfrm>
+          <a:prstGeom prst="rect">
+            <a:avLst/>
+          </a:prstGeom>
+          <a:noFill/>
+          <a:ln>
+            <a:noFill/>
+          </a:ln>
+        </p:spPr>
+        <p:txBody>
+          <a:bodyPr lIns="91425" tIns="91425" rIns="91425" bIns="91425" anchor="ctr" anchorCtr="0"/>
+          <a:lstStyle>
+            <a:lvl1pPr marL="0" marR="0" lvl="0" indent="0" algn="r" rtl="0">
+              <a:spcBef>
+                <a:spcPts val="0"/>
+              </a:spcBef>
+              <a:buNone/>
+              <a:defRPr sz="900" b="0" i="0" u="none" strike="noStrike" cap="none">
+                <a:solidFill>
+                  <a:schemeClr val="lt1"/>
+                </a:solidFill>
+                <a:latin typeface="Arial"/>
+                <a:ea typeface="Arial"/>
+                <a:cs typeface="Arial"/>
+                <a:sym typeface="Arial"/>
+              </a:defRPr>
+            </a:lvl1pPr>
+            <a:lvl2pPr marL="457200" marR="0" lvl="1" indent="0" algn="l" rtl="0">
+              <a:spcBef>
+                <a:spcPts val="0"/>
+              </a:spcBef>
+              <a:buNone/>
+              <a:defRPr sz="1800" b="0" i="0" u="none" strike="noStrike" cap="none">
+                <a:solidFill>
+                  <a:schemeClr val="dk1"/>
+                </a:solidFill>
+                <a:latin typeface="Arial"/>
+                <a:ea typeface="Arial"/>
+                <a:cs typeface="Arial"/>
+                <a:sym typeface="Arial"/>
+              </a:defRPr>
+            </a:lvl2pPr>
+            <a:lvl3pPr marL="914400" marR="0" lvl="2" indent="0" algn="l" rtl="0">
+              <a:spcBef>
+                <a:spcPts val="0"/>
+              </a:spcBef>
+              <a:buNone/>
+              <a:defRPr sz="1800" b="0" i="0" u="none" strike="noStrike" cap="none">
+                <a:solidFill>
+                  <a:schemeClr val="dk1"/>
+                </a:solidFill>
+                <a:latin typeface="Arial"/>
+                <a:ea typeface="Arial"/>
+                <a:cs typeface="Arial"/>
+                <a:sym typeface="Arial"/>
+              </a:defRPr>
+            </a:lvl3pPr>
+            <a:lvl4pPr marL="1371600" marR="0" lvl="3" indent="0" algn="l" rtl="0">
+              <a:spcBef>
+                <a:spcPts val="0"/>
+              </a:spcBef>
+              <a:buNone/>
+              <a:defRPr sz="1800" b="0" i="0" u="none" strike="noStrike" cap="none">
+                <a:solidFill>
+                  <a:schemeClr val="dk1"/>
+                </a:solidFill>
+                <a:latin typeface="Arial"/>
+                <a:ea typeface="Arial"/>
+                <a:cs typeface="Arial"/>
+                <a:sym typeface="Arial"/>
+              </a:defRPr>
+            </a:lvl4pPr>
+            <a:lvl5pPr marL="1828800" marR="0" lvl="4" indent="0" algn="l" rtl="0">
+              <a:spcBef>
+                <a:spcPts val="0"/>
+              </a:spcBef>
+              <a:buNone/>
+              <a:defRPr sz="1800" b="0" i="0" u="none" strike="noStrike" cap="none">
+                <a:solidFill>
+                  <a:schemeClr val="dk1"/>
+                </a:solidFill>
+                <a:latin typeface="Arial"/>
+                <a:ea typeface="Arial"/>
+                <a:cs typeface="Arial"/>
+                <a:sym typeface="Arial"/>
+              </a:defRPr>
+            </a:lvl5pPr>
+            <a:lvl6pPr marL="2286000" marR="0" lvl="5" indent="0" algn="l" rtl="0">
+              <a:spcBef>
+                <a:spcPts val="0"/>
+              </a:spcBef>
+              <a:buNone/>
+              <a:defRPr sz="1800" b="0" i="0" u="none" strike="noStrike" cap="none">
+                <a:solidFill>
+                  <a:schemeClr val="dk1"/>
+                </a:solidFill>
+                <a:latin typeface="Arial"/>
+                <a:ea typeface="Arial"/>
+                <a:cs typeface="Arial"/>
+                <a:sym typeface="Arial"/>
+              </a:defRPr>
+            </a:lvl6pPr>
+            <a:lvl7pPr marL="2743200" marR="0" lvl="6" indent="0" algn="l" rtl="0">
+              <a:spcBef>
+                <a:spcPts val="0"/>
+              </a:spcBef>
+              <a:buNone/>
+              <a:defRPr sz="1800" b="0" i="0" u="none" strike="noStrike" cap="none">
+                <a:solidFill>
+                  <a:schemeClr val="dk1"/>
+                </a:solidFill>
+                <a:latin typeface="Arial"/>
+                <a:ea typeface="Arial"/>
+                <a:cs typeface="Arial"/>
+                <a:sym typeface="Arial"/>
+              </a:defRPr>
+            </a:lvl7pPr>
+            <a:lvl8pPr marL="3200400" marR="0" lvl="7" indent="0" algn="l" rtl="0">
+              <a:spcBef>
+                <a:spcPts val="0"/>
+              </a:spcBef>
+              <a:buNone/>
+              <a:defRPr sz="1800" b="0" i="0" u="none" strike="noStrike" cap="none">
+                <a:solidFill>
+                  <a:schemeClr val="dk1"/>
+                </a:solidFill>
+                <a:latin typeface="Arial"/>
+                <a:ea typeface="Arial"/>
+                <a:cs typeface="Arial"/>
+                <a:sym typeface="Arial"/>
+              </a:defRPr>
+            </a:lvl8pPr>
+            <a:lvl9pPr marL="3657600" marR="0" lvl="8" indent="0" algn="l" rtl="0">
+              <a:spcBef>
+                <a:spcPts val="0"/>
+              </a:spcBef>
+              <a:buNone/>
+              <a:defRPr sz="1800" b="0" i="0" u="none" strike="noStrike" cap="none">
+                <a:solidFill>
+                  <a:schemeClr val="dk1"/>
+                </a:solidFill>
+                <a:latin typeface="Arial"/>
+                <a:ea typeface="Arial"/>
+                <a:cs typeface="Arial"/>
+                <a:sym typeface="Arial"/>
+              </a:defRPr>
+            </a:lvl9pPr>
+          </a:lstStyle>
+          <a:p>
+            <a:endParaRPr dirty="0"/>
+          </a:p>
+        </p:txBody>
+      </p:sp>
+      <p:sp>
+        <p:nvSpPr>
+          <p:cNvPr id="29" name="Shape 29"/>
+          <p:cNvSpPr txBox="1">
+            <a:spLocks noGrp="1"/>
+          </p:cNvSpPr>
+          <p:nvPr>
+            <p:ph type="sldNum" idx="12"/>
+          </p:nvPr>
+        </p:nvSpPr>
+        <p:spPr>
+          <a:xfrm>
+            <a:off x="11292415" y="113071"/>
+            <a:ext cx="735711" cy="182879"/>
+          </a:xfrm>
+          <a:prstGeom prst="rect">
+            <a:avLst/>
+          </a:prstGeom>
+          <a:noFill/>
+          <a:ln>
+            <a:noFill/>
+          </a:ln>
+        </p:spPr>
+        <p:txBody>
+          <a:bodyPr lIns="91425" tIns="45700" rIns="91425" bIns="45700" anchor="ctr" anchorCtr="0">
+            <a:noAutofit/>
+          </a:bodyPr>
+          <a:lstStyle/>
+          <a:p>
+            <a:pPr rtl="0">
+              <a:buSzPct val="25000"/>
+            </a:pPr>
+            <a:fld id="{00000000-1234-1234-1234-123412341234}" type="slidenum">
+              <a:rPr lang="en-US" sz="900" smtClean="0">
+                <a:solidFill>
+                  <a:schemeClr val="lt1"/>
+                </a:solidFill>
+                <a:latin typeface="Arial"/>
+                <a:ea typeface="Arial"/>
+                <a:cs typeface="Arial"/>
+                <a:sym typeface="Arial"/>
+              </a:rPr>
+              <a:pPr rtl="0">
+                <a:buSzPct val="25000"/>
+              </a:pPr>
+              <a:t>‹#›</a:t>
+            </a:fld>
+            <a:endParaRPr lang="en-US" sz="900" dirty="0">
+              <a:solidFill>
+                <a:schemeClr val="lt1"/>
+              </a:solidFill>
+              <a:latin typeface="Arial"/>
+              <a:ea typeface="Arial"/>
+              <a:cs typeface="Arial"/>
+              <a:sym typeface="Arial"/>
+            </a:endParaRPr>
+          </a:p>
+        </p:txBody>
+      </p:sp>
+    </p:spTree>
+    <p:extLst>
+      <p:ext uri="{BB962C8B-B14F-4D97-AF65-F5344CB8AC3E}">
+        <p14:creationId xmlns:p14="http://schemas.microsoft.com/office/powerpoint/2010/main" val="2167964530"/>
+      </p:ext>
+    </p:extLst>
   </p:cSld>
   <p:clrMapOvr>
     <a:masterClrMapping/>
@@ -1819,7 +5842,7 @@
           <a:p>
             <a:fld id="{1D8BD707-D9CF-40AE-B4C6-C98DA3205C09}" type="datetimeFigureOut">
               <a:rPr lang="en-US"/>
-              <a:t>9/19/26</a:t>
+              <a:t>9/23/26</a:t>
             </a:fld>
             <a:endParaRPr lang="en-US"/>
           </a:p>
@@ -1876,6 +5899,11 @@
     <p:sldLayoutId id="2147483663" r:id="rId3"/>
     <p:sldLayoutId id="2147483664" r:id="rId4"/>
     <p:sldLayoutId id="2147483665" r:id="rId5"/>
+    <p:sldLayoutId id="2147483666" r:id="rId6"/>
+    <p:sldLayoutId id="2147483667" r:id="rId7"/>
+    <p:sldLayoutId id="2147483668" r:id="rId8"/>
+    <p:sldLayoutId id="2147483669" r:id="rId9"/>
+    <p:sldLayoutId id="2147483670" r:id="rId10"/>
   </p:sldLayoutIdLst>
   <p:txStyles>
     <p:titleStyle>
@@ -2201,8 +6229,8 @@
         </p:nvSpPr>
         <p:spPr>
           <a:xfrm>
-            <a:off x="4080434" y="2048497"/>
-            <a:ext cx="4180204" cy="10245882"/>
+            <a:off x="1962353" y="1057149"/>
+            <a:ext cx="8416366" cy="2542427"/>
           </a:xfrm>
           <a:prstGeom prst="rect">
             <a:avLst/>
@@ -2235,52 +6263,17 @@
               <a:t>    Control Statements Loops </a:t>
             </a:r>
             <a:r>
-              <a:rPr lang="en-US" sz="5400" dirty="0">
-                <a:solidFill>
-                  <a:srgbClr val="E9F6F3"/>
-                </a:solidFill>
-                <a:highlight>
-                  <a:srgbClr val="000000"/>
-                </a:highlight>
-                <a:latin typeface="Calibri" pitchFamily="34" charset="0"/>
-                <a:ea typeface="Calibri" pitchFamily="34" charset="-122"/>
-                <a:cs typeface="Calibri" pitchFamily="34" charset="-120"/>
-              </a:rPr>
-              <a:t>Multi-dimensional &amp; asymmetric arrays  ·  </a:t>
-            </a:r>
-            <a:r>
-              <a:rPr lang="en-US" sz="5400" dirty="0" err="1">
-                <a:solidFill>
-                  <a:srgbClr val="E9F6F3"/>
-                </a:solidFill>
-                <a:highlight>
-                  <a:srgbClr val="000000"/>
-                </a:highlight>
-                <a:latin typeface="Calibri" pitchFamily="34" charset="0"/>
-                <a:ea typeface="Calibri" pitchFamily="34" charset="-122"/>
-                <a:cs typeface="Calibri" pitchFamily="34" charset="-120"/>
-              </a:rPr>
-              <a:t>ArrayList</a:t>
-            </a:r>
-            <a:r>
-              <a:rPr lang="en-US" sz="5400" dirty="0">
-                <a:solidFill>
-                  <a:srgbClr val="E9F6F3"/>
-                </a:solidFill>
-                <a:highlight>
-                  <a:srgbClr val="000000"/>
-                </a:highlight>
-                <a:latin typeface="Calibri" pitchFamily="34" charset="0"/>
-                <a:ea typeface="Calibri" pitchFamily="34" charset="-122"/>
-                <a:cs typeface="Calibri" pitchFamily="34" charset="-120"/>
-              </a:rPr>
-              <a:t>  ·  do-while  ·  break &amp; continue</a:t>
-            </a:r>
-            <a:endParaRPr lang="en-US" sz="5400" dirty="0">
-              <a:highlight>
-                <a:srgbClr val="000000"/>
-              </a:highlight>
-            </a:endParaRPr>
+              <a:rPr lang="en-US" sz="5400" b="1" spc="-130" dirty="0">
+                <a:solidFill>
+                  <a:schemeClr val="accent5">
+                    <a:lumMod val="75000"/>
+                  </a:schemeClr>
+                </a:solidFill>
+                <a:latin typeface="Calibri" panose="020F0502020204030204" pitchFamily="34" charset="0"/>
+                <a:cs typeface="Calibri" panose="020F0502020204030204" pitchFamily="34" charset="0"/>
+              </a:rPr>
+              <a:t>del II</a:t>
+            </a:r>
           </a:p>
           <a:p>
             <a:pPr marL="603250" marR="5080" indent="-591185">
@@ -2500,6 +6493,4018 @@
         </p:txBody>
       </p:sp>
     </p:spTree>
+  </p:cSld>
+  <p:clrMapOvr>
+    <a:masterClrMapping/>
+  </p:clrMapOvr>
+</p:sld>
+</file>
+
+<file path=ppt/slides/slide10.xml><?xml version="1.0" encoding="utf-8"?>
+<p:sld xmlns:a="http://schemas.openxmlformats.org/drawingml/2006/main" xmlns:r="http://schemas.openxmlformats.org/officeDocument/2006/relationships" xmlns:p="http://schemas.openxmlformats.org/presentationml/2006/main">
+  <p:cSld>
+    <p:spTree>
+      <p:nvGrpSpPr>
+        <p:cNvPr id="1" name=""/>
+        <p:cNvGrpSpPr/>
+        <p:nvPr/>
+      </p:nvGrpSpPr>
+      <p:grpSpPr>
+        <a:xfrm>
+          <a:off x="0" y="0"/>
+          <a:ext cx="0" cy="0"/>
+          <a:chOff x="0" y="0"/>
+          <a:chExt cx="0" cy="0"/>
+        </a:xfrm>
+      </p:grpSpPr>
+      <p:pic>
+        <p:nvPicPr>
+          <p:cNvPr id="2" name="object 2"/>
+          <p:cNvPicPr/>
+          <p:nvPr/>
+        </p:nvPicPr>
+        <p:blipFill>
+          <a:blip r:embed="rId2" cstate="print"/>
+          <a:stretch>
+            <a:fillRect/>
+          </a:stretch>
+        </p:blipFill>
+        <p:spPr>
+          <a:xfrm>
+            <a:off x="1524000" y="652463"/>
+            <a:ext cx="9144000" cy="5551486"/>
+          </a:xfrm>
+          <a:prstGeom prst="rect">
+            <a:avLst/>
+          </a:prstGeom>
+        </p:spPr>
+      </p:pic>
+      <p:sp>
+        <p:nvSpPr>
+          <p:cNvPr id="3" name="object 3"/>
+          <p:cNvSpPr txBox="1">
+            <a:spLocks noGrp="1"/>
+          </p:cNvSpPr>
+          <p:nvPr>
+            <p:ph type="ftr" sz="quarter" idx="5"/>
+          </p:nvPr>
+        </p:nvSpPr>
+        <p:spPr>
+          <a:xfrm>
+            <a:off x="6094476" y="6624399"/>
+            <a:ext cx="2407284" cy="256480"/>
+          </a:xfrm>
+          <a:prstGeom prst="rect">
+            <a:avLst/>
+          </a:prstGeom>
+        </p:spPr>
+        <p:txBody>
+          <a:bodyPr vert="horz" wrap="square" lIns="0" tIns="0" rIns="0" bIns="0" rtlCol="0">
+            <a:spAutoFit/>
+          </a:bodyPr>
+          <a:lstStyle/>
+          <a:p>
+            <a:pPr marR="5715" algn="r">
+              <a:lnSpc>
+                <a:spcPts val="1090"/>
+              </a:lnSpc>
+            </a:pPr>
+            <a:r>
+              <a:rPr spc="-10" dirty="0"/>
+              <a:t>©1992-</a:t>
+            </a:r>
+            <a:r>
+              <a:rPr dirty="0"/>
+              <a:t>2015</a:t>
+            </a:r>
+            <a:r>
+              <a:rPr spc="-20" dirty="0"/>
+              <a:t> </a:t>
+            </a:r>
+            <a:r>
+              <a:rPr dirty="0"/>
+              <a:t>by</a:t>
+            </a:r>
+            <a:r>
+              <a:rPr spc="-15" dirty="0"/>
+              <a:t> </a:t>
+            </a:r>
+            <a:r>
+              <a:rPr dirty="0"/>
+              <a:t>Pearson</a:t>
+            </a:r>
+            <a:r>
+              <a:rPr spc="-20" dirty="0"/>
+              <a:t> </a:t>
+            </a:r>
+            <a:r>
+              <a:rPr dirty="0"/>
+              <a:t>Education,</a:t>
+            </a:r>
+            <a:r>
+              <a:rPr spc="-20" dirty="0"/>
+              <a:t> Inc.</a:t>
+            </a:r>
+          </a:p>
+          <a:p>
+            <a:pPr marR="5080" algn="r"/>
+            <a:r>
+              <a:rPr dirty="0"/>
+              <a:t>All</a:t>
+            </a:r>
+            <a:r>
+              <a:rPr spc="-30" dirty="0"/>
+              <a:t> </a:t>
+            </a:r>
+            <a:r>
+              <a:rPr dirty="0"/>
+              <a:t>Rights</a:t>
+            </a:r>
+            <a:r>
+              <a:rPr spc="-25" dirty="0"/>
+              <a:t> </a:t>
+            </a:r>
+            <a:r>
+              <a:rPr spc="-10" dirty="0"/>
+              <a:t>Reserved.</a:t>
+            </a:r>
+          </a:p>
+        </p:txBody>
+      </p:sp>
+    </p:spTree>
+  </p:cSld>
+  <p:clrMapOvr>
+    <a:masterClrMapping/>
+  </p:clrMapOvr>
+</p:sld>
+</file>
+
+<file path=ppt/slides/slide11.xml><?xml version="1.0" encoding="utf-8"?>
+<p:sld xmlns:a="http://schemas.openxmlformats.org/drawingml/2006/main" xmlns:r="http://schemas.openxmlformats.org/officeDocument/2006/relationships" xmlns:p="http://schemas.openxmlformats.org/presentationml/2006/main">
+  <p:cSld>
+    <p:spTree>
+      <p:nvGrpSpPr>
+        <p:cNvPr id="1" name=""/>
+        <p:cNvGrpSpPr/>
+        <p:nvPr/>
+      </p:nvGrpSpPr>
+      <p:grpSpPr>
+        <a:xfrm>
+          <a:off x="0" y="0"/>
+          <a:ext cx="0" cy="0"/>
+          <a:chOff x="0" y="0"/>
+          <a:chExt cx="0" cy="0"/>
+        </a:xfrm>
+      </p:grpSpPr>
+      <p:sp>
+        <p:nvSpPr>
+          <p:cNvPr id="2" name="Title 1">
+            <a:extLst>
+              <a:ext uri="{FF2B5EF4-FFF2-40B4-BE49-F238E27FC236}">
+                <a16:creationId xmlns:a16="http://schemas.microsoft.com/office/drawing/2014/main" id="{BD26CEA6-4E46-4E73-878B-F0D7BA829500}"/>
+              </a:ext>
+            </a:extLst>
+          </p:cNvPr>
+          <p:cNvSpPr>
+            <a:spLocks noGrp="1"/>
+          </p:cNvSpPr>
+          <p:nvPr>
+            <p:ph type="title"/>
+          </p:nvPr>
+        </p:nvSpPr>
+        <p:spPr/>
+        <p:txBody>
+          <a:bodyPr/>
+          <a:lstStyle/>
+          <a:p>
+            <a:r>
+              <a:rPr lang="en-US" dirty="0"/>
+              <a:t>Two-Dimensional Array Illustration</a:t>
+            </a:r>
+          </a:p>
+        </p:txBody>
+      </p:sp>
+      <p:pic>
+        <p:nvPicPr>
+          <p:cNvPr id="9" name="Picture 8" descr="A two dimensional array illustration shows three arrays as follows. For long description in Notes pane, press F6.&#10;">
+            <a:extLst>
+              <a:ext uri="{FF2B5EF4-FFF2-40B4-BE49-F238E27FC236}">
+                <a16:creationId xmlns:a16="http://schemas.microsoft.com/office/drawing/2014/main" id="{2EF6DE90-4223-48F1-9F1E-A16C969C3433}"/>
+              </a:ext>
+            </a:extLst>
+          </p:cNvPr>
+          <p:cNvPicPr>
+            <a:picLocks noChangeAspect="1"/>
+          </p:cNvPicPr>
+          <p:nvPr/>
+        </p:nvPicPr>
+        <p:blipFill>
+          <a:blip r:embed="rId3"/>
+          <a:stretch>
+            <a:fillRect/>
+          </a:stretch>
+        </p:blipFill>
+        <p:spPr>
+          <a:xfrm>
+            <a:off x="2007553" y="1607585"/>
+            <a:ext cx="8148316" cy="3499948"/>
+          </a:xfrm>
+          <a:prstGeom prst="rect">
+            <a:avLst/>
+          </a:prstGeom>
+        </p:spPr>
+      </p:pic>
+      <p:sp>
+        <p:nvSpPr>
+          <p:cNvPr id="4" name="Content Placeholder 3">
+            <a:extLst>
+              <a:ext uri="{FF2B5EF4-FFF2-40B4-BE49-F238E27FC236}">
+                <a16:creationId xmlns:a16="http://schemas.microsoft.com/office/drawing/2014/main" id="{8B2C6107-E38A-4D57-900B-422B4CA1C737}"/>
+              </a:ext>
+            </a:extLst>
+          </p:cNvPr>
+          <p:cNvSpPr>
+            <a:spLocks noGrp="1"/>
+          </p:cNvSpPr>
+          <p:nvPr>
+            <p:ph sz="quarter" idx="14"/>
+          </p:nvPr>
+        </p:nvSpPr>
+        <p:spPr>
+          <a:xfrm>
+            <a:off x="1981200" y="5243808"/>
+            <a:ext cx="2971800" cy="553998"/>
+          </a:xfrm>
+        </p:spPr>
+        <p:txBody>
+          <a:bodyPr/>
+          <a:lstStyle/>
+          <a:p>
+            <a:pPr marL="432" indent="0"/>
+            <a:r>
+              <a:rPr lang="en-US" sz="1800" dirty="0">
+                <a:latin typeface="Courier New" panose="02070309020205020404" pitchFamily="49" charset="0"/>
+                <a:cs typeface="Courier New" panose="02070309020205020404" pitchFamily="49" charset="0"/>
+              </a:rPr>
+              <a:t> </a:t>
+            </a:r>
+          </a:p>
+          <a:p>
+            <a:pPr marL="432" indent="0"/>
+            <a:r>
+              <a:rPr lang="en-US" sz="1800" dirty="0">
+                <a:latin typeface="Courier New" panose="02070309020205020404" pitchFamily="49" charset="0"/>
+                <a:cs typeface="Courier New" panose="02070309020205020404" pitchFamily="49" charset="0"/>
+              </a:rPr>
+              <a:t>matrix[0].length? 5</a:t>
+            </a:r>
+          </a:p>
+        </p:txBody>
+      </p:sp>
+      <p:sp>
+        <p:nvSpPr>
+          <p:cNvPr id="5" name="Content Placeholder 4">
+            <a:extLst>
+              <a:ext uri="{FF2B5EF4-FFF2-40B4-BE49-F238E27FC236}">
+                <a16:creationId xmlns:a16="http://schemas.microsoft.com/office/drawing/2014/main" id="{DE3D44F6-6EDE-4643-89B9-7BA43F8D4197}"/>
+              </a:ext>
+            </a:extLst>
+          </p:cNvPr>
+          <p:cNvSpPr>
+            <a:spLocks noGrp="1"/>
+          </p:cNvSpPr>
+          <p:nvPr>
+            <p:ph sz="quarter" idx="15"/>
+          </p:nvPr>
+        </p:nvSpPr>
+        <p:spPr>
+          <a:xfrm>
+            <a:off x="7448221" y="5244088"/>
+            <a:ext cx="2736827" cy="553998"/>
+          </a:xfrm>
+        </p:spPr>
+        <p:txBody>
+          <a:bodyPr/>
+          <a:lstStyle/>
+          <a:p>
+            <a:pPr marL="432" indent="0"/>
+            <a:r>
+              <a:rPr lang="en-US" sz="1800" dirty="0">
+                <a:latin typeface="Courier New" panose="02070309020205020404" pitchFamily="49" charset="0"/>
+                <a:cs typeface="Courier New" panose="02070309020205020404" pitchFamily="49" charset="0"/>
+              </a:rPr>
+              <a:t>array.length? 4</a:t>
+            </a:r>
+          </a:p>
+          <a:p>
+            <a:pPr marL="432" indent="0"/>
+            <a:r>
+              <a:rPr lang="en-US" sz="1800" dirty="0">
+                <a:latin typeface="Courier New" panose="02070309020205020404" pitchFamily="49" charset="0"/>
+                <a:cs typeface="Courier New" panose="02070309020205020404" pitchFamily="49" charset="0"/>
+              </a:rPr>
+              <a:t>array[0].length? 3</a:t>
+            </a:r>
+          </a:p>
+        </p:txBody>
+      </p:sp>
+    </p:spTree>
+    <p:extLst>
+      <p:ext uri="{BB962C8B-B14F-4D97-AF65-F5344CB8AC3E}">
+        <p14:creationId xmlns:p14="http://schemas.microsoft.com/office/powerpoint/2010/main" val="1984370941"/>
+      </p:ext>
+    </p:extLst>
+  </p:cSld>
+  <p:clrMapOvr>
+    <a:masterClrMapping/>
+  </p:clrMapOvr>
+</p:sld>
+</file>
+
+<file path=ppt/slides/slide12.xml><?xml version="1.0" encoding="utf-8"?>
+<p:sld xmlns:a="http://schemas.openxmlformats.org/drawingml/2006/main" xmlns:r="http://schemas.openxmlformats.org/officeDocument/2006/relationships" xmlns:p="http://schemas.openxmlformats.org/presentationml/2006/main">
+  <p:cSld>
+    <p:spTree>
+      <p:nvGrpSpPr>
+        <p:cNvPr id="1" name=""/>
+        <p:cNvGrpSpPr/>
+        <p:nvPr/>
+      </p:nvGrpSpPr>
+      <p:grpSpPr>
+        <a:xfrm>
+          <a:off x="0" y="0"/>
+          <a:ext cx="0" cy="0"/>
+          <a:chOff x="0" y="0"/>
+          <a:chExt cx="0" cy="0"/>
+        </a:xfrm>
+      </p:grpSpPr>
+      <p:sp>
+        <p:nvSpPr>
+          <p:cNvPr id="2" name="Title 1">
+            <a:extLst>
+              <a:ext uri="{FF2B5EF4-FFF2-40B4-BE49-F238E27FC236}">
+                <a16:creationId xmlns:a16="http://schemas.microsoft.com/office/drawing/2014/main" id="{46B66B09-D8F1-4DA0-9418-EEB60EE0DE5E}"/>
+              </a:ext>
+            </a:extLst>
+          </p:cNvPr>
+          <p:cNvSpPr>
+            <a:spLocks noGrp="1"/>
+          </p:cNvSpPr>
+          <p:nvPr>
+            <p:ph type="title"/>
+          </p:nvPr>
+        </p:nvSpPr>
+        <p:spPr>
+          <a:xfrm>
+            <a:off x="1981200" y="143130"/>
+            <a:ext cx="8309429" cy="1169521"/>
+          </a:xfrm>
+        </p:spPr>
+        <p:txBody>
+          <a:bodyPr/>
+          <a:lstStyle/>
+          <a:p>
+            <a:r>
+              <a:rPr lang="en-US" sz="3200" dirty="0"/>
+              <a:t>Declaring, Creating, and Initializing Using Shorthand Notations</a:t>
+            </a:r>
+          </a:p>
+        </p:txBody>
+      </p:sp>
+      <p:pic>
+        <p:nvPicPr>
+          <p:cNvPr id="7" name="Picture 6" descr="A left side text box shows the Two-dimensional Arrays. For long description in Notes pane, press F6.">
+            <a:extLst>
+              <a:ext uri="{FF2B5EF4-FFF2-40B4-BE49-F238E27FC236}">
+                <a16:creationId xmlns:a16="http://schemas.microsoft.com/office/drawing/2014/main" id="{4D3939B4-E065-4DB0-ADDF-642FDB2C8F60}"/>
+              </a:ext>
+            </a:extLst>
+          </p:cNvPr>
+          <p:cNvPicPr>
+            <a:picLocks noChangeAspect="1"/>
+          </p:cNvPicPr>
+          <p:nvPr/>
+        </p:nvPicPr>
+        <p:blipFill>
+          <a:blip r:embed="rId3"/>
+          <a:stretch>
+            <a:fillRect/>
+          </a:stretch>
+        </p:blipFill>
+        <p:spPr>
+          <a:xfrm>
+            <a:off x="2007553" y="1560450"/>
+            <a:ext cx="8148316" cy="3451338"/>
+          </a:xfrm>
+          <a:prstGeom prst="rect">
+            <a:avLst/>
+          </a:prstGeom>
+        </p:spPr>
+      </p:pic>
+    </p:spTree>
+    <p:extLst>
+      <p:ext uri="{BB962C8B-B14F-4D97-AF65-F5344CB8AC3E}">
+        <p14:creationId xmlns:p14="http://schemas.microsoft.com/office/powerpoint/2010/main" val="113894829"/>
+      </p:ext>
+    </p:extLst>
+  </p:cSld>
+  <p:clrMapOvr>
+    <a:masterClrMapping/>
+  </p:clrMapOvr>
+</p:sld>
+</file>
+
+<file path=ppt/slides/slide13.xml><?xml version="1.0" encoding="utf-8"?>
+<p:sld xmlns:a="http://schemas.openxmlformats.org/drawingml/2006/main" xmlns:r="http://schemas.openxmlformats.org/officeDocument/2006/relationships" xmlns:p="http://schemas.openxmlformats.org/presentationml/2006/main">
+  <p:cSld>
+    <p:spTree>
+      <p:nvGrpSpPr>
+        <p:cNvPr id="1" name=""/>
+        <p:cNvGrpSpPr/>
+        <p:nvPr/>
+      </p:nvGrpSpPr>
+      <p:grpSpPr>
+        <a:xfrm>
+          <a:off x="0" y="0"/>
+          <a:ext cx="0" cy="0"/>
+          <a:chOff x="0" y="0"/>
+          <a:chExt cx="0" cy="0"/>
+        </a:xfrm>
+      </p:grpSpPr>
+      <p:sp>
+        <p:nvSpPr>
+          <p:cNvPr id="2" name="Title 1">
+            <a:extLst>
+              <a:ext uri="{FF2B5EF4-FFF2-40B4-BE49-F238E27FC236}">
+                <a16:creationId xmlns:a16="http://schemas.microsoft.com/office/drawing/2014/main" id="{DBCD2F01-BDBA-403E-B21E-5EC6E6DD2613}"/>
+              </a:ext>
+            </a:extLst>
+          </p:cNvPr>
+          <p:cNvSpPr>
+            <a:spLocks noGrp="1"/>
+          </p:cNvSpPr>
+          <p:nvPr>
+            <p:ph type="title"/>
+          </p:nvPr>
+        </p:nvSpPr>
+        <p:spPr>
+          <a:xfrm>
+            <a:off x="2133600" y="635572"/>
+            <a:ext cx="10972800" cy="677078"/>
+          </a:xfrm>
+        </p:spPr>
+        <p:txBody>
+          <a:bodyPr/>
+          <a:lstStyle/>
+          <a:p>
+            <a:r>
+              <a:rPr lang="en-US" sz="3200" dirty="0"/>
+              <a:t>Lengths of Two-Dimensional Arrays </a:t>
+            </a:r>
+            <a:r>
+              <a:rPr lang="en-US" sz="2000" b="0" dirty="0"/>
+              <a:t>(1 of 2)</a:t>
+            </a:r>
+          </a:p>
+        </p:txBody>
+      </p:sp>
+      <p:sp>
+        <p:nvSpPr>
+          <p:cNvPr id="3" name="Content Placeholder 2">
+            <a:extLst>
+              <a:ext uri="{FF2B5EF4-FFF2-40B4-BE49-F238E27FC236}">
+                <a16:creationId xmlns:a16="http://schemas.microsoft.com/office/drawing/2014/main" id="{668451B2-6AD8-4216-9D92-4ADF37A8666E}"/>
+              </a:ext>
+            </a:extLst>
+          </p:cNvPr>
+          <p:cNvSpPr>
+            <a:spLocks noGrp="1"/>
+          </p:cNvSpPr>
+          <p:nvPr>
+            <p:ph sz="quarter" idx="13"/>
+          </p:nvPr>
+        </p:nvSpPr>
+        <p:spPr>
+          <a:xfrm>
+            <a:off x="1981200" y="1556327"/>
+            <a:ext cx="8229600" cy="369332"/>
+          </a:xfrm>
+        </p:spPr>
+        <p:txBody>
+          <a:bodyPr/>
+          <a:lstStyle/>
+          <a:p>
+            <a:pPr marL="432" indent="0"/>
+            <a:r>
+              <a:rPr lang="en-US" dirty="0">
+                <a:latin typeface="Courier New" panose="02070309020205020404" pitchFamily="49" charset="0"/>
+                <a:cs typeface="Courier New" panose="02070309020205020404" pitchFamily="49" charset="0"/>
+              </a:rPr>
+              <a:t>int[][] x = new int[3][4];</a:t>
+            </a:r>
+          </a:p>
+        </p:txBody>
+      </p:sp>
+      <p:pic>
+        <p:nvPicPr>
+          <p:cNvPr id="8" name="Picture 7" descr="A column labeled, x with three boxes. For long description in Notes pane, press F6.">
+            <a:extLst>
+              <a:ext uri="{FF2B5EF4-FFF2-40B4-BE49-F238E27FC236}">
+                <a16:creationId xmlns:a16="http://schemas.microsoft.com/office/drawing/2014/main" id="{FD9270A2-DD13-4A4A-9FEE-CE2A4678EC07}"/>
+              </a:ext>
+            </a:extLst>
+          </p:cNvPr>
+          <p:cNvPicPr>
+            <a:picLocks noChangeAspect="1"/>
+          </p:cNvPicPr>
+          <p:nvPr/>
+        </p:nvPicPr>
+        <p:blipFill>
+          <a:blip r:embed="rId3"/>
+          <a:stretch>
+            <a:fillRect/>
+          </a:stretch>
+        </p:blipFill>
+        <p:spPr>
+          <a:xfrm>
+            <a:off x="2076225" y="2427053"/>
+            <a:ext cx="8039550" cy="2344357"/>
+          </a:xfrm>
+          <a:prstGeom prst="rect">
+            <a:avLst/>
+          </a:prstGeom>
+        </p:spPr>
+      </p:pic>
+    </p:spTree>
+    <p:extLst>
+      <p:ext uri="{BB962C8B-B14F-4D97-AF65-F5344CB8AC3E}">
+        <p14:creationId xmlns:p14="http://schemas.microsoft.com/office/powerpoint/2010/main" val="2039026571"/>
+      </p:ext>
+    </p:extLst>
+  </p:cSld>
+  <p:clrMapOvr>
+    <a:masterClrMapping/>
+  </p:clrMapOvr>
+</p:sld>
+</file>
+
+<file path=ppt/slides/slide14.xml><?xml version="1.0" encoding="utf-8"?>
+<p:sld xmlns:a="http://schemas.openxmlformats.org/drawingml/2006/main" xmlns:r="http://schemas.openxmlformats.org/officeDocument/2006/relationships" xmlns:p="http://schemas.openxmlformats.org/presentationml/2006/main">
+  <p:cSld>
+    <p:spTree>
+      <p:nvGrpSpPr>
+        <p:cNvPr id="1" name=""/>
+        <p:cNvGrpSpPr/>
+        <p:nvPr/>
+      </p:nvGrpSpPr>
+      <p:grpSpPr>
+        <a:xfrm>
+          <a:off x="0" y="0"/>
+          <a:ext cx="0" cy="0"/>
+          <a:chOff x="0" y="0"/>
+          <a:chExt cx="0" cy="0"/>
+        </a:xfrm>
+      </p:grpSpPr>
+      <p:sp>
+        <p:nvSpPr>
+          <p:cNvPr id="2" name="Title 1">
+            <a:extLst>
+              <a:ext uri="{FF2B5EF4-FFF2-40B4-BE49-F238E27FC236}">
+                <a16:creationId xmlns:a16="http://schemas.microsoft.com/office/drawing/2014/main" id="{D8DB3F29-CCA3-439C-9B49-E35C23E89EDD}"/>
+              </a:ext>
+            </a:extLst>
+          </p:cNvPr>
+          <p:cNvSpPr>
+            <a:spLocks noGrp="1"/>
+          </p:cNvSpPr>
+          <p:nvPr>
+            <p:ph type="title"/>
+          </p:nvPr>
+        </p:nvSpPr>
+        <p:spPr/>
+        <p:txBody>
+          <a:bodyPr/>
+          <a:lstStyle/>
+          <a:p>
+            <a:r>
+              <a:rPr lang="en-US" dirty="0"/>
+              <a:t>Ragged Arrays -</a:t>
+            </a:r>
+            <a:r>
+              <a:rPr lang="en-DK" dirty="0"/>
+              <a:t>Asymmetriske arrays</a:t>
+            </a:r>
+            <a:endParaRPr lang="en-US" dirty="0"/>
+          </a:p>
+        </p:txBody>
+      </p:sp>
+      <p:sp>
+        <p:nvSpPr>
+          <p:cNvPr id="3" name="Content Placeholder 2">
+            <a:extLst>
+              <a:ext uri="{FF2B5EF4-FFF2-40B4-BE49-F238E27FC236}">
+                <a16:creationId xmlns:a16="http://schemas.microsoft.com/office/drawing/2014/main" id="{B8E77A37-3150-4790-8FCD-13B5C995FE7D}"/>
+              </a:ext>
+            </a:extLst>
+          </p:cNvPr>
+          <p:cNvSpPr>
+            <a:spLocks noGrp="1"/>
+          </p:cNvSpPr>
+          <p:nvPr>
+            <p:ph sz="quarter" idx="13"/>
+          </p:nvPr>
+        </p:nvSpPr>
+        <p:spPr>
+          <a:xfrm>
+            <a:off x="1981200" y="1556327"/>
+            <a:ext cx="4734232" cy="4608000"/>
+          </a:xfrm>
+        </p:spPr>
+        <p:txBody>
+          <a:bodyPr/>
+          <a:lstStyle/>
+          <a:p>
+            <a:pPr marL="432" indent="0">
+              <a:spcBef>
+                <a:spcPts val="1200"/>
+              </a:spcBef>
+            </a:pPr>
+            <a:r>
+              <a:rPr lang="en-US" sz="2000" dirty="0"/>
+              <a:t>Each row in a two-dimensional array is itself an array. So, the rows can have different lengths. Such an array is known as a </a:t>
+            </a:r>
+            <a:r>
+              <a:rPr lang="en-US" sz="2000" b="1" dirty="0"/>
+              <a:t>ragged array</a:t>
+            </a:r>
+            <a:r>
+              <a:rPr lang="en-US" sz="2000" dirty="0"/>
+              <a:t>. For example,</a:t>
+            </a:r>
+          </a:p>
+          <a:p>
+            <a:pPr marL="432" indent="0">
+              <a:spcBef>
+                <a:spcPts val="1200"/>
+              </a:spcBef>
+            </a:pPr>
+            <a:r>
+              <a:rPr lang="en-US" sz="2000" dirty="0">
+                <a:latin typeface="Courier New" panose="02070309020205020404" pitchFamily="49" charset="0"/>
+                <a:cs typeface="Courier New" panose="02070309020205020404" pitchFamily="49" charset="0"/>
+              </a:rPr>
+              <a:t>int[][] matrix = {</a:t>
+            </a:r>
+          </a:p>
+          <a:p>
+            <a:pPr marL="432" indent="0">
+              <a:spcBef>
+                <a:spcPts val="1200"/>
+              </a:spcBef>
+            </a:pPr>
+            <a:r>
+              <a:rPr lang="en-US" sz="2000" dirty="0">
+                <a:latin typeface="Courier New" panose="02070309020205020404" pitchFamily="49" charset="0"/>
+                <a:cs typeface="Courier New" panose="02070309020205020404" pitchFamily="49" charset="0"/>
+              </a:rPr>
+              <a:t>{1, 2, 3, 4, 5},</a:t>
+            </a:r>
+          </a:p>
+          <a:p>
+            <a:pPr marL="180000" indent="0">
+              <a:spcBef>
+                <a:spcPts val="1200"/>
+              </a:spcBef>
+            </a:pPr>
+            <a:r>
+              <a:rPr lang="en-US" sz="2000" dirty="0">
+                <a:latin typeface="Courier New" panose="02070309020205020404" pitchFamily="49" charset="0"/>
+                <a:cs typeface="Courier New" panose="02070309020205020404" pitchFamily="49" charset="0"/>
+              </a:rPr>
+              <a:t>{2, 3, 4, 5},</a:t>
+            </a:r>
+          </a:p>
+          <a:p>
+            <a:pPr marL="180000" indent="0">
+              <a:spcBef>
+                <a:spcPts val="1200"/>
+              </a:spcBef>
+            </a:pPr>
+            <a:r>
+              <a:rPr lang="en-US" sz="2000" dirty="0">
+                <a:latin typeface="Courier New" panose="02070309020205020404" pitchFamily="49" charset="0"/>
+                <a:cs typeface="Courier New" panose="02070309020205020404" pitchFamily="49" charset="0"/>
+              </a:rPr>
+              <a:t>{3, 4, 5},</a:t>
+            </a:r>
+          </a:p>
+          <a:p>
+            <a:pPr marL="180000" indent="0">
+              <a:spcBef>
+                <a:spcPts val="1200"/>
+              </a:spcBef>
+            </a:pPr>
+            <a:r>
+              <a:rPr lang="en-US" sz="2000" dirty="0">
+                <a:latin typeface="Courier New" panose="02070309020205020404" pitchFamily="49" charset="0"/>
+                <a:cs typeface="Courier New" panose="02070309020205020404" pitchFamily="49" charset="0"/>
+              </a:rPr>
+              <a:t>{4, 5},</a:t>
+            </a:r>
+          </a:p>
+          <a:p>
+            <a:pPr marL="180000" indent="0">
+              <a:spcBef>
+                <a:spcPts val="1200"/>
+              </a:spcBef>
+            </a:pPr>
+            <a:r>
+              <a:rPr lang="en-US" sz="2000" dirty="0">
+                <a:latin typeface="Courier New" panose="02070309020205020404" pitchFamily="49" charset="0"/>
+                <a:cs typeface="Courier New" panose="02070309020205020404" pitchFamily="49" charset="0"/>
+              </a:rPr>
+              <a:t>{5}</a:t>
+            </a:r>
+          </a:p>
+          <a:p>
+            <a:pPr marL="432" indent="0">
+              <a:spcBef>
+                <a:spcPts val="1200"/>
+              </a:spcBef>
+            </a:pPr>
+            <a:r>
+              <a:rPr lang="en-US" sz="2000" dirty="0">
+                <a:latin typeface="Courier New" panose="02070309020205020404" pitchFamily="49" charset="0"/>
+                <a:cs typeface="Courier New" panose="02070309020205020404" pitchFamily="49" charset="0"/>
+              </a:rPr>
+              <a:t>};</a:t>
+            </a:r>
+          </a:p>
+        </p:txBody>
+      </p:sp>
+      <p:sp>
+        <p:nvSpPr>
+          <p:cNvPr id="4" name="Content Placeholder 3">
+            <a:extLst>
+              <a:ext uri="{FF2B5EF4-FFF2-40B4-BE49-F238E27FC236}">
+                <a16:creationId xmlns:a16="http://schemas.microsoft.com/office/drawing/2014/main" id="{5EE1D8BB-72BD-4C3A-AE5D-02C4C3ACE018}"/>
+              </a:ext>
+            </a:extLst>
+          </p:cNvPr>
+          <p:cNvSpPr>
+            <a:spLocks noGrp="1"/>
+          </p:cNvSpPr>
+          <p:nvPr>
+            <p:ph sz="quarter" idx="14"/>
+          </p:nvPr>
+        </p:nvSpPr>
+        <p:spPr>
+          <a:xfrm>
+            <a:off x="6907162" y="3252610"/>
+            <a:ext cx="3303639" cy="1846659"/>
+          </a:xfrm>
+        </p:spPr>
+        <p:txBody>
+          <a:bodyPr/>
+          <a:lstStyle/>
+          <a:p>
+            <a:pPr marL="432" indent="0" algn="ctr"/>
+            <a:r>
+              <a:rPr lang="en-US" sz="2000" dirty="0">
+                <a:latin typeface="Courier New" panose="02070309020205020404" pitchFamily="49" charset="0"/>
+                <a:cs typeface="Courier New" panose="02070309020205020404" pitchFamily="49" charset="0"/>
+              </a:rPr>
+              <a:t>matrix.length </a:t>
+            </a:r>
+            <a:r>
+              <a:rPr lang="en-US" sz="2000" dirty="0"/>
+              <a:t>is 5</a:t>
+            </a:r>
+          </a:p>
+          <a:p>
+            <a:pPr marL="432" indent="0" algn="ctr"/>
+            <a:r>
+              <a:rPr lang="en-US" sz="2000" dirty="0">
+                <a:latin typeface="Courier New" panose="02070309020205020404" pitchFamily="49" charset="0"/>
+                <a:cs typeface="Courier New" panose="02070309020205020404" pitchFamily="49" charset="0"/>
+              </a:rPr>
+              <a:t>matrix[0].length </a:t>
+            </a:r>
+            <a:r>
+              <a:rPr lang="en-US" sz="2000" dirty="0"/>
+              <a:t>is 5</a:t>
+            </a:r>
+          </a:p>
+          <a:p>
+            <a:pPr marL="432" indent="0" algn="ctr"/>
+            <a:r>
+              <a:rPr lang="en-US" sz="2000" dirty="0">
+                <a:latin typeface="Courier New" panose="02070309020205020404" pitchFamily="49" charset="0"/>
+                <a:cs typeface="Courier New" panose="02070309020205020404" pitchFamily="49" charset="0"/>
+              </a:rPr>
+              <a:t>matrix[1].length </a:t>
+            </a:r>
+            <a:r>
+              <a:rPr lang="en-US" sz="2000" dirty="0"/>
+              <a:t>is 4</a:t>
+            </a:r>
+          </a:p>
+          <a:p>
+            <a:pPr marL="432" indent="0" algn="ctr"/>
+            <a:r>
+              <a:rPr lang="en-US" sz="2000" dirty="0">
+                <a:latin typeface="Courier New" panose="02070309020205020404" pitchFamily="49" charset="0"/>
+                <a:cs typeface="Courier New" panose="02070309020205020404" pitchFamily="49" charset="0"/>
+              </a:rPr>
+              <a:t>matrix[2].length </a:t>
+            </a:r>
+            <a:r>
+              <a:rPr lang="en-US" sz="2000" dirty="0"/>
+              <a:t>is 3</a:t>
+            </a:r>
+          </a:p>
+          <a:p>
+            <a:pPr marL="432" indent="0" algn="ctr"/>
+            <a:r>
+              <a:rPr lang="en-US" sz="2000" dirty="0">
+                <a:latin typeface="Courier New" panose="02070309020205020404" pitchFamily="49" charset="0"/>
+                <a:cs typeface="Courier New" panose="02070309020205020404" pitchFamily="49" charset="0"/>
+              </a:rPr>
+              <a:t>matrix[3].length </a:t>
+            </a:r>
+            <a:r>
+              <a:rPr lang="en-US" sz="2000" dirty="0"/>
+              <a:t>is 2</a:t>
+            </a:r>
+          </a:p>
+          <a:p>
+            <a:pPr marL="432" indent="0" algn="ctr"/>
+            <a:r>
+              <a:rPr lang="en-US" sz="2000" dirty="0">
+                <a:latin typeface="Courier New" panose="02070309020205020404" pitchFamily="49" charset="0"/>
+                <a:cs typeface="Courier New" panose="02070309020205020404" pitchFamily="49" charset="0"/>
+              </a:rPr>
+              <a:t>matrix[4].length </a:t>
+            </a:r>
+            <a:r>
+              <a:rPr lang="en-US" sz="2000" dirty="0"/>
+              <a:t>is 1</a:t>
+            </a:r>
+          </a:p>
+        </p:txBody>
+      </p:sp>
+    </p:spTree>
+    <p:extLst>
+      <p:ext uri="{BB962C8B-B14F-4D97-AF65-F5344CB8AC3E}">
+        <p14:creationId xmlns:p14="http://schemas.microsoft.com/office/powerpoint/2010/main" val="1769298302"/>
+      </p:ext>
+    </p:extLst>
+  </p:cSld>
+  <p:clrMapOvr>
+    <a:masterClrMapping/>
+  </p:clrMapOvr>
+</p:sld>
+</file>
+
+<file path=ppt/slides/slide15.xml><?xml version="1.0" encoding="utf-8"?>
+<p:sld xmlns:a="http://schemas.openxmlformats.org/drawingml/2006/main" xmlns:r="http://schemas.openxmlformats.org/officeDocument/2006/relationships" xmlns:p="http://schemas.openxmlformats.org/presentationml/2006/main">
+  <p:cSld>
+    <p:spTree>
+      <p:nvGrpSpPr>
+        <p:cNvPr id="1" name=""/>
+        <p:cNvGrpSpPr/>
+        <p:nvPr/>
+      </p:nvGrpSpPr>
+      <p:grpSpPr>
+        <a:xfrm>
+          <a:off x="0" y="0"/>
+          <a:ext cx="0" cy="0"/>
+          <a:chOff x="0" y="0"/>
+          <a:chExt cx="0" cy="0"/>
+        </a:xfrm>
+      </p:grpSpPr>
+      <p:sp>
+        <p:nvSpPr>
+          <p:cNvPr id="2" name="Title 1">
+            <a:extLst>
+              <a:ext uri="{FF2B5EF4-FFF2-40B4-BE49-F238E27FC236}">
+                <a16:creationId xmlns:a16="http://schemas.microsoft.com/office/drawing/2014/main" id="{83E566C5-24B1-4E61-A5A3-59A40E75944D}"/>
+              </a:ext>
+            </a:extLst>
+          </p:cNvPr>
+          <p:cNvSpPr>
+            <a:spLocks noGrp="1"/>
+          </p:cNvSpPr>
+          <p:nvPr>
+            <p:ph type="title"/>
+          </p:nvPr>
+        </p:nvSpPr>
+        <p:spPr/>
+        <p:txBody>
+          <a:bodyPr/>
+          <a:lstStyle/>
+          <a:p>
+            <a:r>
+              <a:rPr lang="en-US" dirty="0"/>
+              <a:t>Ragged Arrays </a:t>
+            </a:r>
+            <a:r>
+              <a:rPr lang="en-US" sz="2000" b="0" dirty="0"/>
+              <a:t>(2 of 2)</a:t>
+            </a:r>
+            <a:endParaRPr lang="en-US" b="0" dirty="0"/>
+          </a:p>
+        </p:txBody>
+      </p:sp>
+      <p:pic>
+        <p:nvPicPr>
+          <p:cNvPr id="7" name="Picture 6" descr="int left bracket right bracket, left bracket right bracket triangleArray = left brace. For long description in Notes pane, press F6.">
+            <a:extLst>
+              <a:ext uri="{FF2B5EF4-FFF2-40B4-BE49-F238E27FC236}">
+                <a16:creationId xmlns:a16="http://schemas.microsoft.com/office/drawing/2014/main" id="{13D2AE24-9F89-4536-963B-94E209F5D81B}"/>
+              </a:ext>
+            </a:extLst>
+          </p:cNvPr>
+          <p:cNvPicPr>
+            <a:picLocks noChangeAspect="1"/>
+          </p:cNvPicPr>
+          <p:nvPr/>
+        </p:nvPicPr>
+        <p:blipFill>
+          <a:blip r:embed="rId3"/>
+          <a:stretch>
+            <a:fillRect/>
+          </a:stretch>
+        </p:blipFill>
+        <p:spPr>
+          <a:xfrm>
+            <a:off x="2138714" y="1863189"/>
+            <a:ext cx="7914572" cy="3131623"/>
+          </a:xfrm>
+          <a:prstGeom prst="rect">
+            <a:avLst/>
+          </a:prstGeom>
+        </p:spPr>
+      </p:pic>
+    </p:spTree>
+    <p:extLst>
+      <p:ext uri="{BB962C8B-B14F-4D97-AF65-F5344CB8AC3E}">
+        <p14:creationId xmlns:p14="http://schemas.microsoft.com/office/powerpoint/2010/main" val="2301384093"/>
+      </p:ext>
+    </p:extLst>
+  </p:cSld>
+  <p:clrMapOvr>
+    <a:masterClrMapping/>
+  </p:clrMapOvr>
+</p:sld>
+</file>
+
+<file path=ppt/slides/slide16.xml><?xml version="1.0" encoding="utf-8"?>
+<p:sld xmlns:a="http://schemas.openxmlformats.org/drawingml/2006/main" xmlns:r="http://schemas.openxmlformats.org/officeDocument/2006/relationships" xmlns:p="http://schemas.openxmlformats.org/presentationml/2006/main">
+  <p:cSld>
+    <p:spTree>
+      <p:nvGrpSpPr>
+        <p:cNvPr id="1" name=""/>
+        <p:cNvGrpSpPr/>
+        <p:nvPr/>
+      </p:nvGrpSpPr>
+      <p:grpSpPr>
+        <a:xfrm>
+          <a:off x="0" y="0"/>
+          <a:ext cx="0" cy="0"/>
+          <a:chOff x="0" y="0"/>
+          <a:chExt cx="0" cy="0"/>
+        </a:xfrm>
+      </p:grpSpPr>
+      <p:sp>
+        <p:nvSpPr>
+          <p:cNvPr id="2" name="Title 1">
+            <a:extLst>
+              <a:ext uri="{FF2B5EF4-FFF2-40B4-BE49-F238E27FC236}">
+                <a16:creationId xmlns:a16="http://schemas.microsoft.com/office/drawing/2014/main" id="{22EEE1E3-365C-4ECC-8B21-BD5FDC2EF176}"/>
+              </a:ext>
+            </a:extLst>
+          </p:cNvPr>
+          <p:cNvSpPr>
+            <a:spLocks noGrp="1"/>
+          </p:cNvSpPr>
+          <p:nvPr>
+            <p:ph type="title"/>
+          </p:nvPr>
+        </p:nvSpPr>
+        <p:spPr>
+          <a:xfrm>
+            <a:off x="2133600" y="266240"/>
+            <a:ext cx="10972800" cy="1046410"/>
+          </a:xfrm>
+        </p:spPr>
+        <p:txBody>
+          <a:bodyPr/>
+          <a:lstStyle/>
+          <a:p>
+            <a:r>
+              <a:rPr lang="en-US" sz="2800" dirty="0"/>
+              <a:t>Declaring Variables of Two-Dimensional Arrays and Creating Two-Dimensional Arrays</a:t>
+            </a:r>
+          </a:p>
+        </p:txBody>
+      </p:sp>
+      <p:sp>
+        <p:nvSpPr>
+          <p:cNvPr id="3" name="Content Placeholder 2">
+            <a:extLst>
+              <a:ext uri="{FF2B5EF4-FFF2-40B4-BE49-F238E27FC236}">
+                <a16:creationId xmlns:a16="http://schemas.microsoft.com/office/drawing/2014/main" id="{4F299C23-F0B4-4D59-A45B-A62D15516645}"/>
+              </a:ext>
+            </a:extLst>
+          </p:cNvPr>
+          <p:cNvSpPr>
+            <a:spLocks noGrp="1"/>
+          </p:cNvSpPr>
+          <p:nvPr>
+            <p:ph sz="quarter" idx="13"/>
+          </p:nvPr>
+        </p:nvSpPr>
+        <p:spPr>
+          <a:xfrm>
+            <a:off x="2590800" y="1582340"/>
+            <a:ext cx="7272000" cy="3693319"/>
+          </a:xfrm>
+        </p:spPr>
+        <p:txBody>
+          <a:bodyPr/>
+          <a:lstStyle/>
+          <a:p>
+            <a:r>
+              <a:rPr lang="en-DK" dirty="0"/>
+              <a:t>int[][] toArray = { { 3, 8, 3, 5, 1 },</a:t>
+            </a:r>
+          </a:p>
+          <a:p>
+            <a:r>
+              <a:rPr lang="en-DK" dirty="0"/>
+              <a:t>{ 5, 2, 4, 7, 2 },</a:t>
+            </a:r>
+          </a:p>
+          <a:p>
+            <a:r>
+              <a:rPr lang="en-DK" dirty="0"/>
+              <a:t>{ 6, 1, 4, 0, 9 } };</a:t>
+            </a:r>
+          </a:p>
+          <a:p>
+            <a:br>
+              <a:rPr lang="en-DK" dirty="0"/>
+            </a:br>
+            <a:endParaRPr lang="en-DK" dirty="0"/>
+          </a:p>
+          <a:p>
+            <a:r>
+              <a:rPr lang="en-DK" dirty="0"/>
+              <a:t>for (int række = 0; række &lt; </a:t>
+            </a:r>
+            <a:r>
+              <a:rPr lang="en-DK" dirty="0">
+                <a:solidFill>
+                  <a:srgbClr val="FF0000"/>
+                </a:solidFill>
+              </a:rPr>
+              <a:t>3</a:t>
+            </a:r>
+            <a:r>
+              <a:rPr lang="en-DK" dirty="0"/>
+              <a:t>; række++) {</a:t>
+            </a:r>
+          </a:p>
+          <a:p>
+            <a:r>
+              <a:rPr lang="en-DK" dirty="0"/>
+              <a:t>	for (int kolonne = 0; kolonne &lt; </a:t>
+            </a:r>
+            <a:r>
+              <a:rPr lang="en-DK" dirty="0">
+                <a:solidFill>
+                  <a:srgbClr val="FF0000"/>
+                </a:solidFill>
+              </a:rPr>
+              <a:t>5</a:t>
+            </a:r>
+            <a:r>
+              <a:rPr lang="en-DK" dirty="0"/>
+              <a:t>; kolonne++)</a:t>
+            </a:r>
+          </a:p>
+          <a:p>
+            <a:r>
+              <a:rPr lang="en-DK" dirty="0"/>
+              <a:t>	System.out.print(toArray[række][kolonne] + " ");</a:t>
+            </a:r>
+          </a:p>
+          <a:p>
+            <a:r>
+              <a:rPr lang="en-DK" dirty="0"/>
+              <a:t>	System.out.println();</a:t>
+            </a:r>
+          </a:p>
+          <a:p>
+            <a:r>
+              <a:rPr lang="en-DK" dirty="0"/>
+              <a:t>}</a:t>
+            </a:r>
+          </a:p>
+        </p:txBody>
+      </p:sp>
+      <p:sp>
+        <p:nvSpPr>
+          <p:cNvPr id="4" name="TextBox 3">
+            <a:extLst>
+              <a:ext uri="{FF2B5EF4-FFF2-40B4-BE49-F238E27FC236}">
+                <a16:creationId xmlns:a16="http://schemas.microsoft.com/office/drawing/2014/main" id="{F968F019-1FD1-81D6-A20C-F548FB57C701}"/>
+              </a:ext>
+            </a:extLst>
+          </p:cNvPr>
+          <p:cNvSpPr txBox="1"/>
+          <p:nvPr/>
+        </p:nvSpPr>
+        <p:spPr>
+          <a:xfrm>
+            <a:off x="2590800" y="6096000"/>
+            <a:ext cx="5250155" cy="369332"/>
+          </a:xfrm>
+          <a:prstGeom prst="rect">
+            <a:avLst/>
+          </a:prstGeom>
+          <a:noFill/>
+        </p:spPr>
+        <p:txBody>
+          <a:bodyPr wrap="none" rtlCol="0">
+            <a:spAutoFit/>
+          </a:bodyPr>
+          <a:lstStyle/>
+          <a:p>
+            <a:r>
+              <a:rPr lang="en-GB" dirty="0">
+                <a:solidFill>
+                  <a:srgbClr val="FF0000"/>
+                </a:solidFill>
+              </a:rPr>
+              <a:t>C</a:t>
+            </a:r>
+            <a:r>
+              <a:rPr lang="en-DK" dirty="0">
+                <a:solidFill>
+                  <a:srgbClr val="FF0000"/>
+                </a:solidFill>
+              </a:rPr>
+              <a:t>an you make a better version? Hint ArrayLength</a:t>
+            </a:r>
+          </a:p>
+        </p:txBody>
+      </p:sp>
+    </p:spTree>
+    <p:extLst>
+      <p:ext uri="{BB962C8B-B14F-4D97-AF65-F5344CB8AC3E}">
+        <p14:creationId xmlns:p14="http://schemas.microsoft.com/office/powerpoint/2010/main" val="1619515246"/>
+      </p:ext>
+    </p:extLst>
+  </p:cSld>
+  <p:clrMapOvr>
+    <a:masterClrMapping/>
+  </p:clrMapOvr>
+</p:sld>
+</file>
+
+<file path=ppt/slides/slide17.xml><?xml version="1.0" encoding="utf-8"?>
+<p:sld xmlns:a="http://schemas.openxmlformats.org/drawingml/2006/main" xmlns:r="http://schemas.openxmlformats.org/officeDocument/2006/relationships" xmlns:p="http://schemas.openxmlformats.org/presentationml/2006/main">
+  <p:cSld>
+    <p:spTree>
+      <p:nvGrpSpPr>
+        <p:cNvPr id="1" name=""/>
+        <p:cNvGrpSpPr/>
+        <p:nvPr/>
+      </p:nvGrpSpPr>
+      <p:grpSpPr>
+        <a:xfrm>
+          <a:off x="0" y="0"/>
+          <a:ext cx="0" cy="0"/>
+          <a:chOff x="0" y="0"/>
+          <a:chExt cx="0" cy="0"/>
+        </a:xfrm>
+      </p:grpSpPr>
+      <p:sp>
+        <p:nvSpPr>
+          <p:cNvPr id="8" name="object 8"/>
+          <p:cNvSpPr txBox="1">
+            <a:spLocks noGrp="1"/>
+          </p:cNvSpPr>
+          <p:nvPr>
+            <p:ph type="ftr" sz="quarter" idx="5"/>
+          </p:nvPr>
+        </p:nvSpPr>
+        <p:spPr>
+          <a:xfrm>
+            <a:off x="6094476" y="6624399"/>
+            <a:ext cx="2407284" cy="256480"/>
+          </a:xfrm>
+          <a:prstGeom prst="rect">
+            <a:avLst/>
+          </a:prstGeom>
+        </p:spPr>
+        <p:txBody>
+          <a:bodyPr vert="horz" wrap="square" lIns="0" tIns="0" rIns="0" bIns="0" rtlCol="0">
+            <a:spAutoFit/>
+          </a:bodyPr>
+          <a:lstStyle/>
+          <a:p>
+            <a:pPr marR="5715" algn="r">
+              <a:lnSpc>
+                <a:spcPts val="1090"/>
+              </a:lnSpc>
+            </a:pPr>
+            <a:r>
+              <a:rPr spc="-10" dirty="0"/>
+              <a:t>©1992-</a:t>
+            </a:r>
+            <a:r>
+              <a:rPr dirty="0"/>
+              <a:t>2015</a:t>
+            </a:r>
+            <a:r>
+              <a:rPr spc="-20" dirty="0"/>
+              <a:t> </a:t>
+            </a:r>
+            <a:r>
+              <a:rPr dirty="0"/>
+              <a:t>by</a:t>
+            </a:r>
+            <a:r>
+              <a:rPr spc="-15" dirty="0"/>
+              <a:t> </a:t>
+            </a:r>
+            <a:r>
+              <a:rPr dirty="0"/>
+              <a:t>Pearson</a:t>
+            </a:r>
+            <a:r>
+              <a:rPr spc="-20" dirty="0"/>
+              <a:t> </a:t>
+            </a:r>
+            <a:r>
+              <a:rPr dirty="0"/>
+              <a:t>Education,</a:t>
+            </a:r>
+            <a:r>
+              <a:rPr spc="-20" dirty="0"/>
+              <a:t> Inc.</a:t>
+            </a:r>
+          </a:p>
+          <a:p>
+            <a:pPr marR="5080" algn="r"/>
+            <a:r>
+              <a:rPr dirty="0"/>
+              <a:t>All</a:t>
+            </a:r>
+            <a:r>
+              <a:rPr spc="-30" dirty="0"/>
+              <a:t> </a:t>
+            </a:r>
+            <a:r>
+              <a:rPr dirty="0"/>
+              <a:t>Rights</a:t>
+            </a:r>
+            <a:r>
+              <a:rPr spc="-25" dirty="0"/>
+              <a:t> </a:t>
+            </a:r>
+            <a:r>
+              <a:rPr spc="-10" dirty="0"/>
+              <a:t>Reserved.</a:t>
+            </a:r>
+          </a:p>
+        </p:txBody>
+      </p:sp>
+      <p:sp>
+        <p:nvSpPr>
+          <p:cNvPr id="4" name="object 4"/>
+          <p:cNvSpPr txBox="1"/>
+          <p:nvPr/>
+        </p:nvSpPr>
+        <p:spPr>
+          <a:xfrm>
+            <a:off x="2169160" y="2427732"/>
+            <a:ext cx="2902585" cy="421640"/>
+          </a:xfrm>
+          <a:prstGeom prst="rect">
+            <a:avLst/>
+          </a:prstGeom>
+        </p:spPr>
+        <p:txBody>
+          <a:bodyPr vert="horz" wrap="square" lIns="0" tIns="12700" rIns="0" bIns="0" rtlCol="0">
+            <a:spAutoFit/>
+          </a:bodyPr>
+          <a:lstStyle/>
+          <a:p>
+            <a:pPr marL="267970" indent="-255270">
+              <a:spcBef>
+                <a:spcPts val="100"/>
+              </a:spcBef>
+              <a:buClr>
+                <a:srgbClr val="2DA2BF"/>
+              </a:buClr>
+              <a:buSzPct val="69230"/>
+              <a:buFont typeface="Arial"/>
+              <a:buChar char="►"/>
+              <a:tabLst>
+                <a:tab pos="267970" algn="l"/>
+              </a:tabLst>
+            </a:pPr>
+            <a:r>
+              <a:rPr sz="2600" dirty="0">
+                <a:latin typeface="Times New Roman"/>
+                <a:cs typeface="Times New Roman"/>
+              </a:rPr>
+              <a:t>The</a:t>
+            </a:r>
+            <a:r>
+              <a:rPr sz="2600" spc="-40" dirty="0">
+                <a:latin typeface="Times New Roman"/>
+                <a:cs typeface="Times New Roman"/>
+              </a:rPr>
+              <a:t> </a:t>
+            </a:r>
+            <a:r>
+              <a:rPr sz="2600" dirty="0">
+                <a:latin typeface="Times New Roman"/>
+                <a:cs typeface="Times New Roman"/>
+              </a:rPr>
+              <a:t>collection</a:t>
+            </a:r>
+            <a:r>
+              <a:rPr sz="2600" spc="-30" dirty="0">
+                <a:latin typeface="Times New Roman"/>
+                <a:cs typeface="Times New Roman"/>
+              </a:rPr>
+              <a:t> </a:t>
+            </a:r>
+            <a:r>
+              <a:rPr sz="2600" spc="-20" dirty="0">
+                <a:latin typeface="Times New Roman"/>
+                <a:cs typeface="Times New Roman"/>
+              </a:rPr>
+              <a:t>class</a:t>
+            </a:r>
+            <a:endParaRPr sz="2600">
+              <a:latin typeface="Times New Roman"/>
+              <a:cs typeface="Times New Roman"/>
+            </a:endParaRPr>
+          </a:p>
+        </p:txBody>
+      </p:sp>
+      <p:sp>
+        <p:nvSpPr>
+          <p:cNvPr id="5" name="object 5"/>
+          <p:cNvSpPr txBox="1"/>
+          <p:nvPr/>
+        </p:nvSpPr>
+        <p:spPr>
+          <a:xfrm>
+            <a:off x="5141277" y="2431852"/>
+            <a:ext cx="1657350" cy="408445"/>
+          </a:xfrm>
+          <a:prstGeom prst="rect">
+            <a:avLst/>
+          </a:prstGeom>
+          <a:solidFill>
+            <a:srgbClr val="FF6100">
+              <a:alpha val="39999"/>
+            </a:srgbClr>
+          </a:solidFill>
+        </p:spPr>
+        <p:txBody>
+          <a:bodyPr vert="horz" wrap="square" lIns="0" tIns="8255" rIns="0" bIns="0" rtlCol="0">
+            <a:spAutoFit/>
+          </a:bodyPr>
+          <a:lstStyle/>
+          <a:p>
+            <a:pPr>
+              <a:spcBef>
+                <a:spcPts val="65"/>
+              </a:spcBef>
+            </a:pPr>
+            <a:r>
+              <a:rPr sz="2600" spc="-165" dirty="0">
+                <a:solidFill>
+                  <a:srgbClr val="0000FF"/>
+                </a:solidFill>
+                <a:latin typeface="Arial"/>
+                <a:cs typeface="Arial"/>
+              </a:rPr>
+              <a:t>ArrayList&lt;T&gt;</a:t>
+            </a:r>
+            <a:endParaRPr sz="2600">
+              <a:latin typeface="Arial"/>
+              <a:cs typeface="Arial"/>
+            </a:endParaRPr>
+          </a:p>
+        </p:txBody>
+      </p:sp>
+      <p:sp>
+        <p:nvSpPr>
+          <p:cNvPr id="6" name="object 6"/>
+          <p:cNvSpPr txBox="1"/>
+          <p:nvPr/>
+        </p:nvSpPr>
+        <p:spPr>
+          <a:xfrm>
+            <a:off x="6869367" y="2427732"/>
+            <a:ext cx="3193415" cy="421640"/>
+          </a:xfrm>
+          <a:prstGeom prst="rect">
+            <a:avLst/>
+          </a:prstGeom>
+        </p:spPr>
+        <p:txBody>
+          <a:bodyPr vert="horz" wrap="square" lIns="0" tIns="12700" rIns="0" bIns="0" rtlCol="0">
+            <a:spAutoFit/>
+          </a:bodyPr>
+          <a:lstStyle/>
+          <a:p>
+            <a:pPr marL="12700">
+              <a:spcBef>
+                <a:spcPts val="100"/>
+              </a:spcBef>
+            </a:pPr>
+            <a:r>
+              <a:rPr sz="2600" dirty="0">
+                <a:latin typeface="Times New Roman"/>
+                <a:cs typeface="Times New Roman"/>
+              </a:rPr>
+              <a:t>(package</a:t>
+            </a:r>
+            <a:r>
+              <a:rPr sz="2600" spc="-25" dirty="0">
+                <a:latin typeface="Times New Roman"/>
+                <a:cs typeface="Times New Roman"/>
+              </a:rPr>
+              <a:t> </a:t>
+            </a:r>
+            <a:r>
+              <a:rPr sz="2600" spc="-10" dirty="0">
+                <a:latin typeface="Monaco"/>
+                <a:cs typeface="Monaco"/>
+              </a:rPr>
+              <a:t>java.util</a:t>
+            </a:r>
+            <a:r>
+              <a:rPr sz="2600" spc="-10" dirty="0">
+                <a:latin typeface="Times New Roman"/>
+                <a:cs typeface="Times New Roman"/>
+              </a:rPr>
+              <a:t>)</a:t>
+            </a:r>
+            <a:endParaRPr sz="2600">
+              <a:latin typeface="Times New Roman"/>
+              <a:cs typeface="Times New Roman"/>
+            </a:endParaRPr>
+          </a:p>
+        </p:txBody>
+      </p:sp>
+      <p:sp>
+        <p:nvSpPr>
+          <p:cNvPr id="7" name="object 7"/>
+          <p:cNvSpPr txBox="1"/>
+          <p:nvPr/>
+        </p:nvSpPr>
+        <p:spPr>
+          <a:xfrm>
+            <a:off x="2169160" y="2744724"/>
+            <a:ext cx="7801609" cy="1086964"/>
+          </a:xfrm>
+          <a:prstGeom prst="rect">
+            <a:avLst/>
+          </a:prstGeom>
+        </p:spPr>
+        <p:txBody>
+          <a:bodyPr vert="horz" wrap="square" lIns="0" tIns="86360" rIns="0" bIns="0" rtlCol="0">
+            <a:spAutoFit/>
+          </a:bodyPr>
+          <a:lstStyle/>
+          <a:p>
+            <a:pPr marL="268605" marR="350520" algn="just">
+              <a:lnSpc>
+                <a:spcPts val="2520"/>
+              </a:lnSpc>
+              <a:spcBef>
+                <a:spcPts val="680"/>
+              </a:spcBef>
+            </a:pPr>
+            <a:r>
+              <a:rPr sz="2600" dirty="0">
+                <a:latin typeface="Times New Roman"/>
+                <a:cs typeface="Times New Roman"/>
+              </a:rPr>
+              <a:t>can</a:t>
+            </a:r>
+            <a:r>
+              <a:rPr sz="2600" spc="-35" dirty="0">
+                <a:latin typeface="Times New Roman"/>
+                <a:cs typeface="Times New Roman"/>
+              </a:rPr>
+              <a:t> </a:t>
+            </a:r>
+            <a:r>
+              <a:rPr sz="2600" i="1" dirty="0">
+                <a:latin typeface="Times New Roman"/>
+                <a:cs typeface="Times New Roman"/>
+              </a:rPr>
+              <a:t>dynamically</a:t>
+            </a:r>
+            <a:r>
+              <a:rPr sz="2600" i="1" spc="-35" dirty="0">
+                <a:latin typeface="Times New Roman"/>
+                <a:cs typeface="Times New Roman"/>
+              </a:rPr>
+              <a:t> </a:t>
+            </a:r>
+            <a:r>
+              <a:rPr sz="2600" dirty="0">
+                <a:latin typeface="Times New Roman"/>
+                <a:cs typeface="Times New Roman"/>
+              </a:rPr>
+              <a:t>change</a:t>
+            </a:r>
+            <a:r>
+              <a:rPr sz="2600" spc="-35" dirty="0">
+                <a:latin typeface="Times New Roman"/>
+                <a:cs typeface="Times New Roman"/>
+              </a:rPr>
+              <a:t> </a:t>
+            </a:r>
+            <a:r>
+              <a:rPr sz="2600" dirty="0">
+                <a:latin typeface="Times New Roman"/>
+                <a:cs typeface="Times New Roman"/>
+              </a:rPr>
+              <a:t>its</a:t>
+            </a:r>
+            <a:r>
+              <a:rPr sz="2600" spc="-30" dirty="0">
+                <a:latin typeface="Times New Roman"/>
+                <a:cs typeface="Times New Roman"/>
+              </a:rPr>
+              <a:t> </a:t>
+            </a:r>
+            <a:r>
+              <a:rPr sz="2600" dirty="0">
+                <a:latin typeface="Times New Roman"/>
+                <a:cs typeface="Times New Roman"/>
+              </a:rPr>
+              <a:t>size</a:t>
+            </a:r>
+            <a:r>
+              <a:rPr sz="2600" spc="-35" dirty="0">
+                <a:latin typeface="Times New Roman"/>
+                <a:cs typeface="Times New Roman"/>
+              </a:rPr>
+              <a:t> </a:t>
+            </a:r>
+            <a:r>
+              <a:rPr sz="2600" dirty="0">
+                <a:latin typeface="Times New Roman"/>
+                <a:cs typeface="Times New Roman"/>
+              </a:rPr>
+              <a:t>to</a:t>
+            </a:r>
+            <a:r>
+              <a:rPr sz="2600" spc="-30" dirty="0">
+                <a:latin typeface="Times New Roman"/>
+                <a:cs typeface="Times New Roman"/>
+              </a:rPr>
+              <a:t> </a:t>
+            </a:r>
+            <a:r>
+              <a:rPr sz="2600" dirty="0">
+                <a:latin typeface="Times New Roman"/>
+                <a:cs typeface="Times New Roman"/>
+              </a:rPr>
+              <a:t>accommodate</a:t>
+            </a:r>
+            <a:r>
+              <a:rPr sz="2600" spc="-35" dirty="0">
+                <a:latin typeface="Times New Roman"/>
+                <a:cs typeface="Times New Roman"/>
+              </a:rPr>
+              <a:t> </a:t>
+            </a:r>
+            <a:r>
+              <a:rPr sz="2600" spc="-20" dirty="0">
+                <a:latin typeface="Times New Roman"/>
+                <a:cs typeface="Times New Roman"/>
+              </a:rPr>
+              <a:t>more </a:t>
+            </a:r>
+            <a:r>
+              <a:rPr sz="2600" spc="-10" dirty="0">
+                <a:latin typeface="Times New Roman"/>
+                <a:cs typeface="Times New Roman"/>
+              </a:rPr>
+              <a:t>elements.</a:t>
+            </a:r>
+            <a:endParaRPr sz="2600" dirty="0">
+              <a:latin typeface="Times New Roman"/>
+              <a:cs typeface="Times New Roman"/>
+            </a:endParaRPr>
+          </a:p>
+          <a:p>
+            <a:pPr marL="12701" marR="5080" algn="just">
+              <a:lnSpc>
+                <a:spcPct val="80400"/>
+              </a:lnSpc>
+              <a:spcBef>
+                <a:spcPts val="295"/>
+              </a:spcBef>
+              <a:buClr>
+                <a:srgbClr val="2DA2BF"/>
+              </a:buClr>
+              <a:buSzPct val="69230"/>
+              <a:tabLst>
+                <a:tab pos="268605" algn="l"/>
+              </a:tabLst>
+            </a:pPr>
+            <a:endParaRPr sz="2600" dirty="0">
+              <a:latin typeface="Times New Roman"/>
+              <a:cs typeface="Times New Roman"/>
+            </a:endParaRPr>
+          </a:p>
+        </p:txBody>
+      </p:sp>
+      <p:sp>
+        <p:nvSpPr>
+          <p:cNvPr id="9" name="TextBox 8">
+            <a:extLst>
+              <a:ext uri="{FF2B5EF4-FFF2-40B4-BE49-F238E27FC236}">
+                <a16:creationId xmlns:a16="http://schemas.microsoft.com/office/drawing/2014/main" id="{F40880DD-387B-A5B4-678F-6CEE0AE527F0}"/>
+              </a:ext>
+            </a:extLst>
+          </p:cNvPr>
+          <p:cNvSpPr txBox="1"/>
+          <p:nvPr/>
+        </p:nvSpPr>
+        <p:spPr>
+          <a:xfrm>
+            <a:off x="2023745" y="442625"/>
+            <a:ext cx="6096000" cy="485902"/>
+          </a:xfrm>
+          <a:prstGeom prst="rect">
+            <a:avLst/>
+          </a:prstGeom>
+          <a:noFill/>
+        </p:spPr>
+        <p:txBody>
+          <a:bodyPr wrap="square">
+            <a:spAutoFit/>
+          </a:bodyPr>
+          <a:lstStyle/>
+          <a:p>
+            <a:pPr marL="12701">
+              <a:lnSpc>
+                <a:spcPts val="3010"/>
+              </a:lnSpc>
+              <a:spcBef>
+                <a:spcPts val="100"/>
+              </a:spcBef>
+              <a:buClr>
+                <a:srgbClr val="2DA2BF"/>
+              </a:buClr>
+              <a:buSzPct val="69230"/>
+              <a:tabLst>
+                <a:tab pos="762000" algn="l"/>
+              </a:tabLst>
+            </a:pPr>
+            <a:r>
+              <a:rPr lang="en-GB" sz="3600" dirty="0" err="1"/>
+              <a:t>ArrayList</a:t>
+            </a:r>
+            <a:endParaRPr lang="en-GB" sz="3600" dirty="0"/>
+          </a:p>
+        </p:txBody>
+      </p:sp>
+    </p:spTree>
+  </p:cSld>
+  <p:clrMapOvr>
+    <a:masterClrMapping/>
+  </p:clrMapOvr>
+</p:sld>
+</file>
+
+<file path=ppt/slides/slide18.xml><?xml version="1.0" encoding="utf-8"?>
+<p:sld xmlns:a="http://schemas.openxmlformats.org/drawingml/2006/main" xmlns:r="http://schemas.openxmlformats.org/officeDocument/2006/relationships" xmlns:p="http://schemas.openxmlformats.org/presentationml/2006/main">
+  <p:cSld>
+    <p:spTree>
+      <p:nvGrpSpPr>
+        <p:cNvPr id="1" name=""/>
+        <p:cNvGrpSpPr/>
+        <p:nvPr/>
+      </p:nvGrpSpPr>
+      <p:grpSpPr>
+        <a:xfrm>
+          <a:off x="0" y="0"/>
+          <a:ext cx="0" cy="0"/>
+          <a:chOff x="0" y="0"/>
+          <a:chExt cx="0" cy="0"/>
+        </a:xfrm>
+      </p:grpSpPr>
+      <p:pic>
+        <p:nvPicPr>
+          <p:cNvPr id="2" name="object 2"/>
+          <p:cNvPicPr/>
+          <p:nvPr/>
+        </p:nvPicPr>
+        <p:blipFill>
+          <a:blip r:embed="rId2" cstate="print"/>
+          <a:stretch>
+            <a:fillRect/>
+          </a:stretch>
+        </p:blipFill>
+        <p:spPr>
+          <a:xfrm>
+            <a:off x="1524000" y="652463"/>
+            <a:ext cx="9144000" cy="5551486"/>
+          </a:xfrm>
+          <a:prstGeom prst="rect">
+            <a:avLst/>
+          </a:prstGeom>
+        </p:spPr>
+      </p:pic>
+      <p:sp>
+        <p:nvSpPr>
+          <p:cNvPr id="3" name="object 3"/>
+          <p:cNvSpPr txBox="1">
+            <a:spLocks noGrp="1"/>
+          </p:cNvSpPr>
+          <p:nvPr>
+            <p:ph type="ftr" sz="quarter" idx="5"/>
+          </p:nvPr>
+        </p:nvSpPr>
+        <p:spPr>
+          <a:xfrm>
+            <a:off x="6094476" y="6624399"/>
+            <a:ext cx="2407284" cy="256480"/>
+          </a:xfrm>
+          <a:prstGeom prst="rect">
+            <a:avLst/>
+          </a:prstGeom>
+        </p:spPr>
+        <p:txBody>
+          <a:bodyPr vert="horz" wrap="square" lIns="0" tIns="0" rIns="0" bIns="0" rtlCol="0">
+            <a:spAutoFit/>
+          </a:bodyPr>
+          <a:lstStyle/>
+          <a:p>
+            <a:pPr marR="5715" algn="r">
+              <a:lnSpc>
+                <a:spcPts val="1090"/>
+              </a:lnSpc>
+            </a:pPr>
+            <a:r>
+              <a:rPr spc="-10" dirty="0"/>
+              <a:t>©1992-</a:t>
+            </a:r>
+            <a:r>
+              <a:rPr dirty="0"/>
+              <a:t>2015</a:t>
+            </a:r>
+            <a:r>
+              <a:rPr spc="-20" dirty="0"/>
+              <a:t> </a:t>
+            </a:r>
+            <a:r>
+              <a:rPr dirty="0"/>
+              <a:t>by</a:t>
+            </a:r>
+            <a:r>
+              <a:rPr spc="-15" dirty="0"/>
+              <a:t> </a:t>
+            </a:r>
+            <a:r>
+              <a:rPr dirty="0"/>
+              <a:t>Pearson</a:t>
+            </a:r>
+            <a:r>
+              <a:rPr spc="-20" dirty="0"/>
+              <a:t> </a:t>
+            </a:r>
+            <a:r>
+              <a:rPr dirty="0"/>
+              <a:t>Education,</a:t>
+            </a:r>
+            <a:r>
+              <a:rPr spc="-20" dirty="0"/>
+              <a:t> Inc.</a:t>
+            </a:r>
+          </a:p>
+          <a:p>
+            <a:pPr marR="5080" algn="r"/>
+            <a:r>
+              <a:rPr dirty="0"/>
+              <a:t>All</a:t>
+            </a:r>
+            <a:r>
+              <a:rPr spc="-30" dirty="0"/>
+              <a:t> </a:t>
+            </a:r>
+            <a:r>
+              <a:rPr dirty="0"/>
+              <a:t>Rights</a:t>
+            </a:r>
+            <a:r>
+              <a:rPr spc="-25" dirty="0"/>
+              <a:t> </a:t>
+            </a:r>
+            <a:r>
+              <a:rPr spc="-10" dirty="0"/>
+              <a:t>Reserved.</a:t>
+            </a:r>
+          </a:p>
+        </p:txBody>
+      </p:sp>
+    </p:spTree>
+  </p:cSld>
+  <p:clrMapOvr>
+    <a:masterClrMapping/>
+  </p:clrMapOvr>
+</p:sld>
+</file>
+
+<file path=ppt/slides/slide19.xml><?xml version="1.0" encoding="utf-8"?>
+<p:sld xmlns:a="http://schemas.openxmlformats.org/drawingml/2006/main" xmlns:r="http://schemas.openxmlformats.org/officeDocument/2006/relationships" xmlns:p="http://schemas.openxmlformats.org/presentationml/2006/main">
+  <p:cSld>
+    <p:spTree>
+      <p:nvGrpSpPr>
+        <p:cNvPr id="1" name=""/>
+        <p:cNvGrpSpPr/>
+        <p:nvPr/>
+      </p:nvGrpSpPr>
+      <p:grpSpPr>
+        <a:xfrm>
+          <a:off x="0" y="0"/>
+          <a:ext cx="0" cy="0"/>
+          <a:chOff x="0" y="0"/>
+          <a:chExt cx="0" cy="0"/>
+        </a:xfrm>
+      </p:grpSpPr>
+      <p:sp>
+        <p:nvSpPr>
+          <p:cNvPr id="3" name="TextBox 2">
+            <a:extLst>
+              <a:ext uri="{FF2B5EF4-FFF2-40B4-BE49-F238E27FC236}">
+                <a16:creationId xmlns:a16="http://schemas.microsoft.com/office/drawing/2014/main" id="{C085AADD-4122-DC56-D179-420BD0CF37B5}"/>
+              </a:ext>
+            </a:extLst>
+          </p:cNvPr>
+          <p:cNvSpPr txBox="1"/>
+          <p:nvPr/>
+        </p:nvSpPr>
+        <p:spPr>
+          <a:xfrm>
+            <a:off x="3048000" y="381000"/>
+            <a:ext cx="6096000" cy="10895290"/>
+          </a:xfrm>
+          <a:prstGeom prst="rect">
+            <a:avLst/>
+          </a:prstGeom>
+          <a:noFill/>
+        </p:spPr>
+        <p:txBody>
+          <a:bodyPr wrap="square">
+            <a:spAutoFit/>
+          </a:bodyPr>
+          <a:lstStyle/>
+          <a:p>
+            <a:pPr>
+              <a:buNone/>
+            </a:pPr>
+            <a:r>
+              <a:rPr lang="en-GB" dirty="0">
+                <a:solidFill>
+                  <a:srgbClr val="0033B3"/>
+                </a:solidFill>
+                <a:effectLst/>
+                <a:latin typeface="JetBrains Mono"/>
+              </a:rPr>
+              <a:t>import </a:t>
+            </a:r>
+            <a:r>
+              <a:rPr lang="en-GB" dirty="0" err="1">
+                <a:solidFill>
+                  <a:srgbClr val="000000"/>
+                </a:solidFill>
+                <a:effectLst/>
+                <a:latin typeface="JetBrains Mono"/>
+              </a:rPr>
+              <a:t>java.util.ArrayList</a:t>
+            </a:r>
+            <a:r>
+              <a:rPr lang="en-GB" dirty="0">
+                <a:solidFill>
+                  <a:srgbClr val="080808"/>
+                </a:solidFill>
+                <a:effectLst/>
+                <a:latin typeface="JetBrains Mono"/>
+              </a:rPr>
+              <a:t>;</a:t>
+            </a:r>
+            <a:br>
+              <a:rPr lang="en-GB" dirty="0">
+                <a:solidFill>
+                  <a:srgbClr val="080808"/>
+                </a:solidFill>
+                <a:effectLst/>
+                <a:latin typeface="JetBrains Mono"/>
+              </a:rPr>
+            </a:br>
+            <a:br>
+              <a:rPr lang="en-GB" dirty="0">
+                <a:solidFill>
+                  <a:srgbClr val="080808"/>
+                </a:solidFill>
+                <a:effectLst/>
+                <a:latin typeface="JetBrains Mono"/>
+              </a:rPr>
+            </a:br>
+            <a:r>
+              <a:rPr lang="en-GB" dirty="0">
+                <a:solidFill>
+                  <a:srgbClr val="0033B3"/>
+                </a:solidFill>
+                <a:effectLst/>
+                <a:latin typeface="JetBrains Mono"/>
+              </a:rPr>
+              <a:t>public class </a:t>
+            </a:r>
+            <a:r>
+              <a:rPr lang="en-GB" dirty="0" err="1">
+                <a:solidFill>
+                  <a:srgbClr val="000000"/>
+                </a:solidFill>
+                <a:effectLst/>
+                <a:latin typeface="JetBrains Mono"/>
+              </a:rPr>
+              <a:t>ArrayListFruit</a:t>
+            </a:r>
+            <a:r>
+              <a:rPr lang="en-GB" dirty="0">
+                <a:solidFill>
+                  <a:srgbClr val="000000"/>
+                </a:solidFill>
+                <a:effectLst/>
+                <a:latin typeface="JetBrains Mono"/>
+              </a:rPr>
+              <a:t> </a:t>
+            </a:r>
+            <a:r>
+              <a:rPr lang="en-GB" dirty="0">
+                <a:solidFill>
+                  <a:srgbClr val="080808"/>
+                </a:solidFill>
+                <a:effectLst/>
+                <a:latin typeface="JetBrains Mono"/>
+              </a:rPr>
+              <a:t>{</a:t>
+            </a:r>
+            <a:br>
+              <a:rPr lang="en-GB" dirty="0">
+                <a:solidFill>
+                  <a:srgbClr val="080808"/>
+                </a:solidFill>
+                <a:effectLst/>
+                <a:latin typeface="JetBrains Mono"/>
+              </a:rPr>
+            </a:br>
+            <a:r>
+              <a:rPr lang="en-GB" dirty="0">
+                <a:solidFill>
+                  <a:srgbClr val="080808"/>
+                </a:solidFill>
+                <a:effectLst/>
+                <a:latin typeface="JetBrains Mono"/>
+              </a:rPr>
+              <a:t>    </a:t>
+            </a:r>
+            <a:r>
+              <a:rPr lang="en-GB" dirty="0">
+                <a:solidFill>
+                  <a:srgbClr val="0033B3"/>
+                </a:solidFill>
+                <a:effectLst/>
+                <a:latin typeface="JetBrains Mono"/>
+              </a:rPr>
+              <a:t>public static void </a:t>
+            </a:r>
+            <a:r>
+              <a:rPr lang="en-GB" dirty="0">
+                <a:solidFill>
+                  <a:srgbClr val="00627A"/>
+                </a:solidFill>
+                <a:effectLst/>
+                <a:latin typeface="JetBrains Mono"/>
+              </a:rPr>
+              <a:t>main</a:t>
+            </a:r>
+            <a:r>
+              <a:rPr lang="en-GB" dirty="0">
+                <a:solidFill>
+                  <a:srgbClr val="080808"/>
+                </a:solidFill>
+                <a:effectLst/>
+                <a:latin typeface="JetBrains Mono"/>
+              </a:rPr>
+              <a:t>(</a:t>
+            </a:r>
+            <a:r>
+              <a:rPr lang="en-GB" dirty="0">
+                <a:solidFill>
+                  <a:srgbClr val="000000"/>
+                </a:solidFill>
+                <a:effectLst/>
+                <a:latin typeface="JetBrains Mono"/>
+              </a:rPr>
+              <a:t>String</a:t>
+            </a:r>
+            <a:r>
+              <a:rPr lang="en-GB" dirty="0">
+                <a:solidFill>
+                  <a:srgbClr val="080808"/>
+                </a:solidFill>
+                <a:effectLst/>
+                <a:latin typeface="JetBrains Mono"/>
+              </a:rPr>
+              <a:t>[] </a:t>
+            </a:r>
+            <a:r>
+              <a:rPr lang="en-GB" dirty="0" err="1">
+                <a:solidFill>
+                  <a:srgbClr val="000000"/>
+                </a:solidFill>
+                <a:effectLst/>
+                <a:latin typeface="JetBrains Mono"/>
+              </a:rPr>
+              <a:t>args</a:t>
+            </a:r>
+            <a:r>
+              <a:rPr lang="en-GB" dirty="0">
+                <a:solidFill>
+                  <a:srgbClr val="080808"/>
+                </a:solidFill>
+                <a:effectLst/>
+                <a:latin typeface="JetBrains Mono"/>
+              </a:rPr>
+              <a:t>) {</a:t>
+            </a:r>
+            <a:br>
+              <a:rPr lang="en-GB" dirty="0">
+                <a:solidFill>
+                  <a:srgbClr val="080808"/>
+                </a:solidFill>
+                <a:effectLst/>
+                <a:latin typeface="JetBrains Mono"/>
+              </a:rPr>
+            </a:br>
+            <a:r>
+              <a:rPr lang="en-GB" dirty="0">
+                <a:solidFill>
+                  <a:srgbClr val="080808"/>
+                </a:solidFill>
+                <a:effectLst/>
+                <a:latin typeface="JetBrains Mono"/>
+              </a:rPr>
+              <a:t>        </a:t>
+            </a:r>
+            <a:r>
+              <a:rPr lang="en-GB" i="1" dirty="0">
+                <a:solidFill>
+                  <a:srgbClr val="8C8C8C"/>
+                </a:solidFill>
+                <a:effectLst/>
+                <a:latin typeface="JetBrains Mono"/>
+              </a:rPr>
+              <a:t>// Create an </a:t>
+            </a:r>
+            <a:r>
+              <a:rPr lang="en-GB" i="1" dirty="0" err="1">
+                <a:solidFill>
+                  <a:srgbClr val="8C8C8C"/>
+                </a:solidFill>
+                <a:effectLst/>
+                <a:latin typeface="JetBrains Mono"/>
+              </a:rPr>
+              <a:t>ArrayList</a:t>
+            </a:r>
+            <a:r>
+              <a:rPr lang="en-GB" i="1" dirty="0">
+                <a:solidFill>
+                  <a:srgbClr val="8C8C8C"/>
+                </a:solidFill>
+                <a:effectLst/>
+                <a:latin typeface="JetBrains Mono"/>
+              </a:rPr>
+              <a:t> of Strings</a:t>
+            </a:r>
+            <a:br>
+              <a:rPr lang="en-GB" i="1" dirty="0">
+                <a:solidFill>
+                  <a:srgbClr val="8C8C8C"/>
+                </a:solidFill>
+                <a:effectLst/>
+                <a:latin typeface="JetBrains Mono"/>
+              </a:rPr>
+            </a:br>
+            <a:r>
+              <a:rPr lang="en-GB" i="1" dirty="0">
+                <a:solidFill>
+                  <a:srgbClr val="8C8C8C"/>
+                </a:solidFill>
+                <a:effectLst/>
+                <a:latin typeface="JetBrains Mono"/>
+              </a:rPr>
+              <a:t>        </a:t>
+            </a:r>
+            <a:r>
+              <a:rPr lang="en-GB" dirty="0" err="1">
+                <a:solidFill>
+                  <a:srgbClr val="000000"/>
+                </a:solidFill>
+                <a:effectLst/>
+                <a:latin typeface="JetBrains Mono"/>
+              </a:rPr>
+              <a:t>ArrayList</a:t>
+            </a:r>
+            <a:r>
+              <a:rPr lang="en-GB" dirty="0">
+                <a:solidFill>
+                  <a:srgbClr val="080808"/>
+                </a:solidFill>
+                <a:effectLst/>
+                <a:latin typeface="JetBrains Mono"/>
+              </a:rPr>
+              <a:t>&lt;</a:t>
+            </a:r>
+            <a:r>
+              <a:rPr lang="en-GB" dirty="0">
+                <a:solidFill>
+                  <a:srgbClr val="000000"/>
+                </a:solidFill>
+                <a:effectLst/>
+                <a:latin typeface="JetBrains Mono"/>
+              </a:rPr>
+              <a:t>String</a:t>
+            </a:r>
+            <a:r>
+              <a:rPr lang="en-GB" dirty="0">
+                <a:solidFill>
+                  <a:srgbClr val="080808"/>
+                </a:solidFill>
+                <a:effectLst/>
+                <a:latin typeface="JetBrains Mono"/>
+              </a:rPr>
+              <a:t>&gt; </a:t>
+            </a:r>
+            <a:r>
+              <a:rPr lang="en-GB" dirty="0">
+                <a:solidFill>
+                  <a:srgbClr val="000000"/>
+                </a:solidFill>
+                <a:effectLst/>
+                <a:latin typeface="JetBrains Mono"/>
+              </a:rPr>
+              <a:t>fruits </a:t>
+            </a:r>
+            <a:r>
+              <a:rPr lang="en-GB" dirty="0">
+                <a:solidFill>
+                  <a:srgbClr val="080808"/>
+                </a:solidFill>
+                <a:effectLst/>
+                <a:latin typeface="JetBrains Mono"/>
+              </a:rPr>
+              <a:t>= </a:t>
+            </a:r>
+            <a:r>
+              <a:rPr lang="en-GB" dirty="0">
+                <a:solidFill>
+                  <a:srgbClr val="0033B3"/>
+                </a:solidFill>
+                <a:effectLst/>
+                <a:latin typeface="JetBrains Mono"/>
+              </a:rPr>
+              <a:t>new </a:t>
+            </a:r>
+            <a:r>
+              <a:rPr lang="en-GB" dirty="0" err="1">
+                <a:solidFill>
+                  <a:srgbClr val="080808"/>
+                </a:solidFill>
+                <a:effectLst/>
+                <a:latin typeface="JetBrains Mono"/>
+              </a:rPr>
+              <a:t>ArrayList</a:t>
+            </a:r>
+            <a:r>
+              <a:rPr lang="en-GB" dirty="0">
+                <a:solidFill>
+                  <a:srgbClr val="080808"/>
+                </a:solidFill>
+                <a:effectLst/>
+                <a:latin typeface="JetBrains Mono"/>
+              </a:rPr>
+              <a:t>&lt;&gt;();</a:t>
+            </a:r>
+            <a:br>
+              <a:rPr lang="en-GB" dirty="0">
+                <a:solidFill>
+                  <a:srgbClr val="080808"/>
+                </a:solidFill>
+                <a:effectLst/>
+                <a:latin typeface="JetBrains Mono"/>
+              </a:rPr>
+            </a:br>
+            <a:br>
+              <a:rPr lang="en-GB" dirty="0">
+                <a:solidFill>
+                  <a:srgbClr val="080808"/>
+                </a:solidFill>
+                <a:effectLst/>
+                <a:latin typeface="JetBrains Mono"/>
+              </a:rPr>
+            </a:br>
+            <a:r>
+              <a:rPr lang="en-GB" dirty="0">
+                <a:solidFill>
+                  <a:srgbClr val="080808"/>
+                </a:solidFill>
+                <a:effectLst/>
+                <a:latin typeface="JetBrains Mono"/>
+              </a:rPr>
+              <a:t>        </a:t>
+            </a:r>
+            <a:r>
+              <a:rPr lang="en-GB" i="1" dirty="0">
+                <a:solidFill>
+                  <a:srgbClr val="8C8C8C"/>
+                </a:solidFill>
+                <a:effectLst/>
+                <a:latin typeface="JetBrains Mono"/>
+              </a:rPr>
+              <a:t>// Add elements</a:t>
+            </a:r>
+            <a:br>
+              <a:rPr lang="en-GB" i="1" dirty="0">
+                <a:solidFill>
+                  <a:srgbClr val="8C8C8C"/>
+                </a:solidFill>
+                <a:effectLst/>
+                <a:latin typeface="JetBrains Mono"/>
+              </a:rPr>
+            </a:br>
+            <a:r>
+              <a:rPr lang="en-GB" i="1" dirty="0">
+                <a:solidFill>
+                  <a:srgbClr val="8C8C8C"/>
+                </a:solidFill>
+                <a:effectLst/>
+                <a:latin typeface="JetBrains Mono"/>
+              </a:rPr>
+              <a:t>        </a:t>
+            </a:r>
+            <a:r>
+              <a:rPr lang="en-GB" dirty="0" err="1">
+                <a:solidFill>
+                  <a:srgbClr val="000000"/>
+                </a:solidFill>
+                <a:effectLst/>
+                <a:latin typeface="JetBrains Mono"/>
+              </a:rPr>
+              <a:t>fruits</a:t>
+            </a:r>
+            <a:r>
+              <a:rPr lang="en-GB" dirty="0" err="1">
+                <a:solidFill>
+                  <a:srgbClr val="080808"/>
+                </a:solidFill>
+                <a:effectLst/>
+                <a:latin typeface="JetBrains Mono"/>
+              </a:rPr>
+              <a:t>.add</a:t>
+            </a:r>
+            <a:r>
+              <a:rPr lang="en-GB" dirty="0">
+                <a:solidFill>
+                  <a:srgbClr val="080808"/>
+                </a:solidFill>
+                <a:effectLst/>
+                <a:latin typeface="JetBrains Mono"/>
+              </a:rPr>
+              <a:t>(</a:t>
+            </a:r>
+            <a:r>
+              <a:rPr lang="en-GB" dirty="0">
+                <a:solidFill>
+                  <a:srgbClr val="067D17"/>
+                </a:solidFill>
+                <a:effectLst/>
+                <a:latin typeface="JetBrains Mono"/>
+              </a:rPr>
+              <a:t>"Apple"</a:t>
+            </a:r>
+            <a:r>
+              <a:rPr lang="en-GB" dirty="0">
+                <a:solidFill>
+                  <a:srgbClr val="080808"/>
+                </a:solidFill>
+                <a:effectLst/>
+                <a:latin typeface="JetBrains Mono"/>
+              </a:rPr>
+              <a:t>);          </a:t>
+            </a:r>
+            <a:r>
+              <a:rPr lang="en-GB" i="1" dirty="0">
+                <a:solidFill>
+                  <a:srgbClr val="8C8C8C"/>
+                </a:solidFill>
+                <a:effectLst/>
+                <a:latin typeface="JetBrains Mono"/>
+              </a:rPr>
+              <a:t>// Add at the end</a:t>
+            </a:r>
+            <a:br>
+              <a:rPr lang="en-GB" i="1" dirty="0">
+                <a:solidFill>
+                  <a:srgbClr val="8C8C8C"/>
+                </a:solidFill>
+                <a:effectLst/>
+                <a:latin typeface="JetBrains Mono"/>
+              </a:rPr>
+            </a:br>
+            <a:r>
+              <a:rPr lang="en-GB" i="1" dirty="0">
+                <a:solidFill>
+                  <a:srgbClr val="8C8C8C"/>
+                </a:solidFill>
+                <a:effectLst/>
+                <a:latin typeface="JetBrains Mono"/>
+              </a:rPr>
+              <a:t>        </a:t>
+            </a:r>
+            <a:r>
+              <a:rPr lang="en-GB" dirty="0" err="1">
+                <a:solidFill>
+                  <a:srgbClr val="000000"/>
+                </a:solidFill>
+                <a:effectLst/>
+                <a:latin typeface="JetBrains Mono"/>
+              </a:rPr>
+              <a:t>fruits</a:t>
+            </a:r>
+            <a:r>
+              <a:rPr lang="en-GB" dirty="0" err="1">
+                <a:solidFill>
+                  <a:srgbClr val="080808"/>
+                </a:solidFill>
+                <a:effectLst/>
+                <a:latin typeface="JetBrains Mono"/>
+              </a:rPr>
+              <a:t>.add</a:t>
+            </a:r>
+            <a:r>
+              <a:rPr lang="en-GB" dirty="0">
+                <a:solidFill>
+                  <a:srgbClr val="080808"/>
+                </a:solidFill>
+                <a:effectLst/>
+                <a:latin typeface="JetBrains Mono"/>
+              </a:rPr>
+              <a:t>(</a:t>
+            </a:r>
+            <a:r>
+              <a:rPr lang="en-GB" dirty="0">
+                <a:solidFill>
+                  <a:srgbClr val="067D17"/>
+                </a:solidFill>
+                <a:effectLst/>
+                <a:latin typeface="JetBrains Mono"/>
+              </a:rPr>
+              <a:t>"Banana"</a:t>
+            </a:r>
+            <a:r>
+              <a:rPr lang="en-GB" dirty="0">
+                <a:solidFill>
+                  <a:srgbClr val="080808"/>
+                </a:solidFill>
+                <a:effectLst/>
+                <a:latin typeface="JetBrains Mono"/>
+              </a:rPr>
+              <a:t>);</a:t>
+            </a:r>
+            <a:br>
+              <a:rPr lang="en-GB" dirty="0">
+                <a:solidFill>
+                  <a:srgbClr val="080808"/>
+                </a:solidFill>
+                <a:effectLst/>
+                <a:latin typeface="JetBrains Mono"/>
+              </a:rPr>
+            </a:br>
+            <a:r>
+              <a:rPr lang="en-GB" dirty="0">
+                <a:solidFill>
+                  <a:srgbClr val="080808"/>
+                </a:solidFill>
+                <a:effectLst/>
+                <a:latin typeface="JetBrains Mono"/>
+              </a:rPr>
+              <a:t>        </a:t>
+            </a:r>
+            <a:r>
+              <a:rPr lang="en-GB" dirty="0" err="1">
+                <a:solidFill>
+                  <a:srgbClr val="000000"/>
+                </a:solidFill>
+                <a:effectLst/>
+                <a:latin typeface="JetBrains Mono"/>
+              </a:rPr>
+              <a:t>fruits</a:t>
+            </a:r>
+            <a:r>
+              <a:rPr lang="en-GB" dirty="0" err="1">
+                <a:solidFill>
+                  <a:srgbClr val="080808"/>
+                </a:solidFill>
+                <a:effectLst/>
+                <a:latin typeface="JetBrains Mono"/>
+              </a:rPr>
+              <a:t>.add</a:t>
+            </a:r>
+            <a:r>
+              <a:rPr lang="en-GB" dirty="0">
+                <a:solidFill>
+                  <a:srgbClr val="080808"/>
+                </a:solidFill>
+                <a:effectLst/>
+                <a:latin typeface="JetBrains Mono"/>
+              </a:rPr>
+              <a:t>(</a:t>
+            </a:r>
+            <a:r>
+              <a:rPr lang="en-GB" dirty="0">
+                <a:solidFill>
+                  <a:srgbClr val="067D17"/>
+                </a:solidFill>
+                <a:effectLst/>
+                <a:latin typeface="JetBrains Mono"/>
+              </a:rPr>
+              <a:t>"Orange"</a:t>
+            </a:r>
+            <a:r>
+              <a:rPr lang="en-GB" dirty="0">
+                <a:solidFill>
+                  <a:srgbClr val="080808"/>
+                </a:solidFill>
+                <a:effectLst/>
+                <a:latin typeface="JetBrains Mono"/>
+              </a:rPr>
+              <a:t>);</a:t>
+            </a:r>
+            <a:br>
+              <a:rPr lang="en-GB" dirty="0">
+                <a:solidFill>
+                  <a:srgbClr val="080808"/>
+                </a:solidFill>
+                <a:effectLst/>
+                <a:latin typeface="JetBrains Mono"/>
+              </a:rPr>
+            </a:br>
+            <a:r>
+              <a:rPr lang="en-GB" dirty="0">
+                <a:solidFill>
+                  <a:srgbClr val="080808"/>
+                </a:solidFill>
+                <a:effectLst/>
+                <a:latin typeface="JetBrains Mono"/>
+              </a:rPr>
+              <a:t>        </a:t>
+            </a:r>
+            <a:r>
+              <a:rPr lang="en-GB" dirty="0" err="1">
+                <a:solidFill>
+                  <a:srgbClr val="000000"/>
+                </a:solidFill>
+                <a:effectLst/>
+                <a:latin typeface="JetBrains Mono"/>
+              </a:rPr>
+              <a:t>fruits</a:t>
+            </a:r>
+            <a:r>
+              <a:rPr lang="en-GB" dirty="0" err="1">
+                <a:solidFill>
+                  <a:srgbClr val="080808"/>
+                </a:solidFill>
+                <a:effectLst/>
+                <a:latin typeface="JetBrains Mono"/>
+              </a:rPr>
+              <a:t>.add</a:t>
+            </a:r>
+            <a:r>
+              <a:rPr lang="en-GB" dirty="0">
+                <a:solidFill>
+                  <a:srgbClr val="080808"/>
+                </a:solidFill>
+                <a:effectLst/>
+                <a:latin typeface="JetBrains Mono"/>
+              </a:rPr>
+              <a:t>(</a:t>
+            </a:r>
+            <a:r>
+              <a:rPr lang="en-GB" dirty="0">
+                <a:solidFill>
+                  <a:srgbClr val="1750EB"/>
+                </a:solidFill>
+                <a:effectLst/>
+                <a:latin typeface="JetBrains Mono"/>
+              </a:rPr>
+              <a:t>1</a:t>
+            </a:r>
+            <a:r>
+              <a:rPr lang="en-GB" dirty="0">
+                <a:solidFill>
+                  <a:srgbClr val="080808"/>
+                </a:solidFill>
+                <a:effectLst/>
+                <a:latin typeface="JetBrains Mono"/>
+              </a:rPr>
+              <a:t>, </a:t>
+            </a:r>
+            <a:r>
+              <a:rPr lang="en-GB" dirty="0">
+                <a:solidFill>
+                  <a:srgbClr val="067D17"/>
+                </a:solidFill>
+                <a:effectLst/>
+                <a:latin typeface="JetBrains Mono"/>
+              </a:rPr>
+              <a:t>"Mango"</a:t>
+            </a:r>
+            <a:r>
+              <a:rPr lang="en-GB" dirty="0">
+                <a:solidFill>
+                  <a:srgbClr val="080808"/>
+                </a:solidFill>
+                <a:effectLst/>
+                <a:latin typeface="JetBrains Mono"/>
+              </a:rPr>
+              <a:t>);       </a:t>
+            </a:r>
+            <a:r>
+              <a:rPr lang="en-GB" i="1" dirty="0">
+                <a:solidFill>
+                  <a:srgbClr val="8C8C8C"/>
+                </a:solidFill>
+                <a:effectLst/>
+                <a:latin typeface="JetBrains Mono"/>
+              </a:rPr>
+              <a:t>// Add at specific index</a:t>
+            </a:r>
+            <a:br>
+              <a:rPr lang="en-GB" i="1" dirty="0">
+                <a:solidFill>
+                  <a:srgbClr val="8C8C8C"/>
+                </a:solidFill>
+                <a:effectLst/>
+                <a:latin typeface="JetBrains Mono"/>
+              </a:rPr>
+            </a:br>
+            <a:br>
+              <a:rPr lang="en-GB" i="1" dirty="0">
+                <a:solidFill>
+                  <a:srgbClr val="8C8C8C"/>
+                </a:solidFill>
+                <a:effectLst/>
+                <a:latin typeface="JetBrains Mono"/>
+              </a:rPr>
+            </a:br>
+            <a:r>
+              <a:rPr lang="en-GB" i="1" dirty="0">
+                <a:solidFill>
+                  <a:srgbClr val="8C8C8C"/>
+                </a:solidFill>
+                <a:effectLst/>
+                <a:latin typeface="JetBrains Mono"/>
+              </a:rPr>
+              <a:t>        </a:t>
+            </a:r>
+            <a:r>
+              <a:rPr lang="en-GB" dirty="0" err="1">
+                <a:solidFill>
+                  <a:srgbClr val="000000"/>
+                </a:solidFill>
+                <a:effectLst/>
+                <a:latin typeface="JetBrains Mono"/>
+              </a:rPr>
+              <a:t>System</a:t>
+            </a:r>
+            <a:r>
+              <a:rPr lang="en-GB" dirty="0" err="1">
+                <a:solidFill>
+                  <a:srgbClr val="080808"/>
+                </a:solidFill>
+                <a:effectLst/>
+                <a:latin typeface="JetBrains Mono"/>
+              </a:rPr>
+              <a:t>.</a:t>
+            </a:r>
+            <a:r>
+              <a:rPr lang="en-GB" i="1" dirty="0" err="1">
+                <a:solidFill>
+                  <a:srgbClr val="871094"/>
+                </a:solidFill>
+                <a:effectLst/>
+                <a:latin typeface="JetBrains Mono"/>
+              </a:rPr>
+              <a:t>out</a:t>
+            </a:r>
+            <a:r>
+              <a:rPr lang="en-GB" dirty="0" err="1">
+                <a:solidFill>
+                  <a:srgbClr val="080808"/>
+                </a:solidFill>
+                <a:effectLst/>
+                <a:latin typeface="JetBrains Mono"/>
+              </a:rPr>
+              <a:t>.println</a:t>
+            </a:r>
+            <a:r>
+              <a:rPr lang="en-GB" dirty="0">
+                <a:solidFill>
+                  <a:srgbClr val="080808"/>
+                </a:solidFill>
+                <a:effectLst/>
+                <a:latin typeface="JetBrains Mono"/>
+              </a:rPr>
+              <a:t>(</a:t>
+            </a:r>
+            <a:r>
+              <a:rPr lang="en-GB" dirty="0">
+                <a:solidFill>
+                  <a:srgbClr val="067D17"/>
+                </a:solidFill>
+                <a:effectLst/>
+                <a:latin typeface="JetBrains Mono"/>
+              </a:rPr>
+              <a:t>"Fruits: " </a:t>
+            </a:r>
+            <a:r>
+              <a:rPr lang="en-GB" dirty="0">
+                <a:solidFill>
+                  <a:srgbClr val="080808"/>
+                </a:solidFill>
+                <a:effectLst/>
+                <a:latin typeface="JetBrains Mono"/>
+              </a:rPr>
+              <a:t>+ </a:t>
+            </a:r>
+            <a:r>
+              <a:rPr lang="en-GB" dirty="0">
+                <a:solidFill>
+                  <a:srgbClr val="000000"/>
+                </a:solidFill>
+                <a:effectLst/>
+                <a:latin typeface="JetBrains Mono"/>
+              </a:rPr>
+              <a:t>fruits</a:t>
+            </a:r>
+            <a:r>
+              <a:rPr lang="en-GB" dirty="0">
+                <a:solidFill>
+                  <a:srgbClr val="080808"/>
+                </a:solidFill>
+                <a:effectLst/>
+                <a:latin typeface="JetBrains Mono"/>
+              </a:rPr>
+              <a:t>);</a:t>
+            </a:r>
+            <a:br>
+              <a:rPr lang="en-GB" dirty="0">
+                <a:solidFill>
+                  <a:srgbClr val="080808"/>
+                </a:solidFill>
+                <a:effectLst/>
+                <a:latin typeface="JetBrains Mono"/>
+              </a:rPr>
+            </a:br>
+            <a:br>
+              <a:rPr lang="en-GB" dirty="0">
+                <a:solidFill>
+                  <a:srgbClr val="080808"/>
+                </a:solidFill>
+                <a:effectLst/>
+                <a:latin typeface="JetBrains Mono"/>
+              </a:rPr>
+            </a:br>
+            <a:r>
+              <a:rPr lang="en-GB" dirty="0">
+                <a:solidFill>
+                  <a:srgbClr val="080808"/>
+                </a:solidFill>
+                <a:effectLst/>
+                <a:latin typeface="JetBrains Mono"/>
+              </a:rPr>
+              <a:t>        </a:t>
+            </a:r>
+            <a:r>
+              <a:rPr lang="en-GB" i="1" dirty="0">
+                <a:solidFill>
+                  <a:srgbClr val="8C8C8C"/>
+                </a:solidFill>
+                <a:effectLst/>
+                <a:latin typeface="JetBrains Mono"/>
+              </a:rPr>
+              <a:t>// Access an element</a:t>
+            </a:r>
+            <a:br>
+              <a:rPr lang="en-GB" i="1" dirty="0">
+                <a:solidFill>
+                  <a:srgbClr val="8C8C8C"/>
+                </a:solidFill>
+                <a:effectLst/>
+                <a:latin typeface="JetBrains Mono"/>
+              </a:rPr>
+            </a:br>
+            <a:r>
+              <a:rPr lang="en-GB" i="1" dirty="0">
+                <a:solidFill>
+                  <a:srgbClr val="8C8C8C"/>
+                </a:solidFill>
+                <a:effectLst/>
+                <a:latin typeface="JetBrains Mono"/>
+              </a:rPr>
+              <a:t>        </a:t>
+            </a:r>
+            <a:r>
+              <a:rPr lang="en-GB" dirty="0">
+                <a:solidFill>
+                  <a:srgbClr val="000000"/>
+                </a:solidFill>
+                <a:effectLst/>
+                <a:latin typeface="JetBrains Mono"/>
+              </a:rPr>
+              <a:t>String </a:t>
+            </a:r>
+            <a:r>
+              <a:rPr lang="en-GB" dirty="0" err="1">
+                <a:solidFill>
+                  <a:srgbClr val="000000"/>
+                </a:solidFill>
+                <a:effectLst/>
+                <a:latin typeface="JetBrains Mono"/>
+              </a:rPr>
+              <a:t>firstFruit</a:t>
+            </a:r>
+            <a:r>
+              <a:rPr lang="en-GB" dirty="0">
+                <a:solidFill>
+                  <a:srgbClr val="000000"/>
+                </a:solidFill>
+                <a:effectLst/>
+                <a:latin typeface="JetBrains Mono"/>
+              </a:rPr>
+              <a:t> </a:t>
+            </a:r>
+            <a:r>
+              <a:rPr lang="en-GB" dirty="0">
+                <a:solidFill>
+                  <a:srgbClr val="080808"/>
+                </a:solidFill>
+                <a:effectLst/>
+                <a:latin typeface="JetBrains Mono"/>
+              </a:rPr>
+              <a:t>= </a:t>
+            </a:r>
+            <a:r>
+              <a:rPr lang="en-GB" dirty="0" err="1">
+                <a:solidFill>
+                  <a:srgbClr val="000000"/>
+                </a:solidFill>
+                <a:effectLst/>
+                <a:latin typeface="JetBrains Mono"/>
+              </a:rPr>
+              <a:t>fruits</a:t>
+            </a:r>
+            <a:r>
+              <a:rPr lang="en-GB" dirty="0" err="1">
+                <a:solidFill>
+                  <a:srgbClr val="080808"/>
+                </a:solidFill>
+                <a:effectLst/>
+                <a:latin typeface="JetBrains Mono"/>
+              </a:rPr>
+              <a:t>.get</a:t>
+            </a:r>
+            <a:r>
+              <a:rPr lang="en-GB" dirty="0">
+                <a:solidFill>
+                  <a:srgbClr val="080808"/>
+                </a:solidFill>
+                <a:effectLst/>
+                <a:latin typeface="JetBrains Mono"/>
+              </a:rPr>
+              <a:t>(</a:t>
+            </a:r>
+            <a:r>
+              <a:rPr lang="en-GB" dirty="0">
+                <a:solidFill>
+                  <a:srgbClr val="1750EB"/>
+                </a:solidFill>
+                <a:effectLst/>
+                <a:latin typeface="JetBrains Mono"/>
+              </a:rPr>
+              <a:t>0</a:t>
+            </a:r>
+            <a:r>
+              <a:rPr lang="en-GB" dirty="0">
+                <a:solidFill>
+                  <a:srgbClr val="080808"/>
+                </a:solidFill>
+                <a:effectLst/>
+                <a:latin typeface="JetBrains Mono"/>
+              </a:rPr>
+              <a:t>);</a:t>
+            </a:r>
+            <a:br>
+              <a:rPr lang="en-GB" dirty="0">
+                <a:solidFill>
+                  <a:srgbClr val="080808"/>
+                </a:solidFill>
+                <a:effectLst/>
+                <a:latin typeface="JetBrains Mono"/>
+              </a:rPr>
+            </a:br>
+            <a:r>
+              <a:rPr lang="en-GB" dirty="0">
+                <a:solidFill>
+                  <a:srgbClr val="080808"/>
+                </a:solidFill>
+                <a:effectLst/>
+                <a:latin typeface="JetBrains Mono"/>
+              </a:rPr>
+              <a:t>        </a:t>
+            </a:r>
+            <a:r>
+              <a:rPr lang="en-GB" dirty="0" err="1">
+                <a:solidFill>
+                  <a:srgbClr val="000000"/>
+                </a:solidFill>
+                <a:effectLst/>
+                <a:latin typeface="JetBrains Mono"/>
+              </a:rPr>
+              <a:t>System</a:t>
+            </a:r>
+            <a:r>
+              <a:rPr lang="en-GB" dirty="0" err="1">
+                <a:solidFill>
+                  <a:srgbClr val="080808"/>
+                </a:solidFill>
+                <a:effectLst/>
+                <a:latin typeface="JetBrains Mono"/>
+              </a:rPr>
+              <a:t>.</a:t>
+            </a:r>
+            <a:r>
+              <a:rPr lang="en-GB" i="1" dirty="0" err="1">
+                <a:solidFill>
+                  <a:srgbClr val="871094"/>
+                </a:solidFill>
+                <a:effectLst/>
+                <a:latin typeface="JetBrains Mono"/>
+              </a:rPr>
+              <a:t>out</a:t>
+            </a:r>
+            <a:r>
+              <a:rPr lang="en-GB" dirty="0" err="1">
+                <a:solidFill>
+                  <a:srgbClr val="080808"/>
+                </a:solidFill>
+                <a:effectLst/>
+                <a:latin typeface="JetBrains Mono"/>
+              </a:rPr>
+              <a:t>.println</a:t>
+            </a:r>
+            <a:r>
+              <a:rPr lang="en-GB" dirty="0">
+                <a:solidFill>
+                  <a:srgbClr val="080808"/>
+                </a:solidFill>
+                <a:effectLst/>
+                <a:latin typeface="JetBrains Mono"/>
+              </a:rPr>
+              <a:t>(</a:t>
+            </a:r>
+            <a:r>
+              <a:rPr lang="en-GB" dirty="0">
+                <a:solidFill>
+                  <a:srgbClr val="067D17"/>
+                </a:solidFill>
+                <a:effectLst/>
+                <a:latin typeface="JetBrains Mono"/>
+              </a:rPr>
+              <a:t>"First fruit: " </a:t>
+            </a:r>
+            <a:r>
+              <a:rPr lang="en-GB" dirty="0">
+                <a:solidFill>
+                  <a:srgbClr val="080808"/>
+                </a:solidFill>
+                <a:effectLst/>
+                <a:latin typeface="JetBrains Mono"/>
+              </a:rPr>
+              <a:t>+ </a:t>
+            </a:r>
+            <a:r>
+              <a:rPr lang="en-GB" dirty="0" err="1">
+                <a:solidFill>
+                  <a:srgbClr val="000000"/>
+                </a:solidFill>
+                <a:effectLst/>
+                <a:latin typeface="JetBrains Mono"/>
+              </a:rPr>
+              <a:t>firstFruit</a:t>
+            </a:r>
+            <a:r>
+              <a:rPr lang="en-GB" dirty="0">
+                <a:solidFill>
+                  <a:srgbClr val="080808"/>
+                </a:solidFill>
+                <a:effectLst/>
+                <a:latin typeface="JetBrains Mono"/>
+              </a:rPr>
+              <a:t>);</a:t>
+            </a:r>
+            <a:br>
+              <a:rPr lang="en-GB" dirty="0">
+                <a:solidFill>
+                  <a:srgbClr val="080808"/>
+                </a:solidFill>
+                <a:effectLst/>
+                <a:latin typeface="JetBrains Mono"/>
+              </a:rPr>
+            </a:br>
+            <a:br>
+              <a:rPr lang="en-GB" dirty="0">
+                <a:solidFill>
+                  <a:srgbClr val="080808"/>
+                </a:solidFill>
+                <a:effectLst/>
+                <a:latin typeface="JetBrains Mono"/>
+              </a:rPr>
+            </a:br>
+            <a:r>
+              <a:rPr lang="en-GB" dirty="0">
+                <a:solidFill>
+                  <a:srgbClr val="080808"/>
+                </a:solidFill>
+                <a:effectLst/>
+                <a:latin typeface="JetBrains Mono"/>
+              </a:rPr>
+              <a:t>        </a:t>
+            </a:r>
+            <a:r>
+              <a:rPr lang="en-GB" i="1" dirty="0">
+                <a:solidFill>
+                  <a:srgbClr val="8C8C8C"/>
+                </a:solidFill>
+                <a:effectLst/>
+                <a:latin typeface="JetBrains Mono"/>
+              </a:rPr>
+              <a:t>// Remove an element by value</a:t>
+            </a:r>
+            <a:br>
+              <a:rPr lang="en-GB" i="1" dirty="0">
+                <a:solidFill>
+                  <a:srgbClr val="8C8C8C"/>
+                </a:solidFill>
+                <a:effectLst/>
+                <a:latin typeface="JetBrains Mono"/>
+              </a:rPr>
+            </a:br>
+            <a:r>
+              <a:rPr lang="en-GB" i="1" dirty="0">
+                <a:solidFill>
+                  <a:srgbClr val="8C8C8C"/>
+                </a:solidFill>
+                <a:effectLst/>
+                <a:latin typeface="JetBrains Mono"/>
+              </a:rPr>
+              <a:t>        </a:t>
+            </a:r>
+            <a:r>
+              <a:rPr lang="en-GB" dirty="0" err="1">
+                <a:solidFill>
+                  <a:srgbClr val="000000"/>
+                </a:solidFill>
+                <a:effectLst/>
+                <a:latin typeface="JetBrains Mono"/>
+              </a:rPr>
+              <a:t>fruits</a:t>
+            </a:r>
+            <a:r>
+              <a:rPr lang="en-GB" dirty="0" err="1">
+                <a:solidFill>
+                  <a:srgbClr val="080808"/>
+                </a:solidFill>
+                <a:effectLst/>
+                <a:latin typeface="JetBrains Mono"/>
+              </a:rPr>
+              <a:t>.remove</a:t>
+            </a:r>
+            <a:r>
+              <a:rPr lang="en-GB" dirty="0">
+                <a:solidFill>
+                  <a:srgbClr val="080808"/>
+                </a:solidFill>
+                <a:effectLst/>
+                <a:latin typeface="JetBrains Mono"/>
+              </a:rPr>
+              <a:t>(</a:t>
+            </a:r>
+            <a:r>
+              <a:rPr lang="en-GB" dirty="0">
+                <a:solidFill>
+                  <a:srgbClr val="067D17"/>
+                </a:solidFill>
+                <a:effectLst/>
+                <a:latin typeface="JetBrains Mono"/>
+              </a:rPr>
+              <a:t>"Banana"</a:t>
+            </a:r>
+            <a:r>
+              <a:rPr lang="en-GB" dirty="0">
+                <a:solidFill>
+                  <a:srgbClr val="080808"/>
+                </a:solidFill>
+                <a:effectLst/>
+                <a:latin typeface="JetBrains Mono"/>
+              </a:rPr>
+              <a:t>);</a:t>
+            </a:r>
+            <a:br>
+              <a:rPr lang="en-GB" dirty="0">
+                <a:solidFill>
+                  <a:srgbClr val="080808"/>
+                </a:solidFill>
+                <a:effectLst/>
+                <a:latin typeface="JetBrains Mono"/>
+              </a:rPr>
+            </a:br>
+            <a:r>
+              <a:rPr lang="en-GB" dirty="0">
+                <a:solidFill>
+                  <a:srgbClr val="080808"/>
+                </a:solidFill>
+                <a:effectLst/>
+                <a:latin typeface="JetBrains Mono"/>
+              </a:rPr>
+              <a:t>        </a:t>
+            </a:r>
+            <a:r>
+              <a:rPr lang="en-GB" dirty="0" err="1">
+                <a:solidFill>
+                  <a:srgbClr val="000000"/>
+                </a:solidFill>
+                <a:effectLst/>
+                <a:latin typeface="JetBrains Mono"/>
+              </a:rPr>
+              <a:t>System</a:t>
+            </a:r>
+            <a:r>
+              <a:rPr lang="en-GB" dirty="0" err="1">
+                <a:solidFill>
+                  <a:srgbClr val="080808"/>
+                </a:solidFill>
+                <a:effectLst/>
+                <a:latin typeface="JetBrains Mono"/>
+              </a:rPr>
+              <a:t>.</a:t>
+            </a:r>
+            <a:r>
+              <a:rPr lang="en-GB" i="1" dirty="0" err="1">
+                <a:solidFill>
+                  <a:srgbClr val="871094"/>
+                </a:solidFill>
+                <a:effectLst/>
+                <a:latin typeface="JetBrains Mono"/>
+              </a:rPr>
+              <a:t>out</a:t>
+            </a:r>
+            <a:r>
+              <a:rPr lang="en-GB" dirty="0" err="1">
+                <a:solidFill>
+                  <a:srgbClr val="080808"/>
+                </a:solidFill>
+                <a:effectLst/>
+                <a:latin typeface="JetBrains Mono"/>
+              </a:rPr>
+              <a:t>.println</a:t>
+            </a:r>
+            <a:r>
+              <a:rPr lang="en-GB" dirty="0">
+                <a:solidFill>
+                  <a:srgbClr val="080808"/>
+                </a:solidFill>
+                <a:effectLst/>
+                <a:latin typeface="JetBrains Mono"/>
+              </a:rPr>
+              <a:t>(</a:t>
+            </a:r>
+            <a:r>
+              <a:rPr lang="en-GB" dirty="0">
+                <a:solidFill>
+                  <a:srgbClr val="067D17"/>
+                </a:solidFill>
+                <a:effectLst/>
+                <a:latin typeface="JetBrains Mono"/>
+              </a:rPr>
+              <a:t>"After removing Banana: " </a:t>
+            </a:r>
+            <a:r>
+              <a:rPr lang="en-GB" dirty="0">
+                <a:solidFill>
+                  <a:srgbClr val="080808"/>
+                </a:solidFill>
+                <a:effectLst/>
+                <a:latin typeface="JetBrains Mono"/>
+              </a:rPr>
+              <a:t>+ </a:t>
+            </a:r>
+            <a:r>
+              <a:rPr lang="en-GB" dirty="0">
+                <a:solidFill>
+                  <a:srgbClr val="000000"/>
+                </a:solidFill>
+                <a:effectLst/>
+                <a:latin typeface="JetBrains Mono"/>
+              </a:rPr>
+              <a:t>fruits</a:t>
+            </a:r>
+            <a:r>
+              <a:rPr lang="en-GB" dirty="0">
+                <a:solidFill>
+                  <a:srgbClr val="080808"/>
+                </a:solidFill>
+                <a:effectLst/>
+                <a:latin typeface="JetBrains Mono"/>
+              </a:rPr>
+              <a:t>);</a:t>
+            </a:r>
+            <a:br>
+              <a:rPr lang="en-GB" dirty="0">
+                <a:solidFill>
+                  <a:srgbClr val="080808"/>
+                </a:solidFill>
+                <a:effectLst/>
+                <a:latin typeface="JetBrains Mono"/>
+              </a:rPr>
+            </a:br>
+            <a:br>
+              <a:rPr lang="en-GB" dirty="0">
+                <a:solidFill>
+                  <a:srgbClr val="080808"/>
+                </a:solidFill>
+                <a:effectLst/>
+                <a:latin typeface="JetBrains Mono"/>
+              </a:rPr>
+            </a:br>
+            <a:r>
+              <a:rPr lang="en-GB" dirty="0">
+                <a:solidFill>
+                  <a:srgbClr val="080808"/>
+                </a:solidFill>
+                <a:effectLst/>
+                <a:latin typeface="JetBrains Mono"/>
+              </a:rPr>
+              <a:t>        </a:t>
+            </a:r>
+            <a:r>
+              <a:rPr lang="en-GB" i="1" dirty="0">
+                <a:solidFill>
+                  <a:srgbClr val="8C8C8C"/>
+                </a:solidFill>
+                <a:effectLst/>
+                <a:latin typeface="JetBrains Mono"/>
+              </a:rPr>
+              <a:t>// Remove an element by index</a:t>
+            </a:r>
+            <a:br>
+              <a:rPr lang="en-GB" i="1" dirty="0">
+                <a:solidFill>
+                  <a:srgbClr val="8C8C8C"/>
+                </a:solidFill>
+                <a:effectLst/>
+                <a:latin typeface="JetBrains Mono"/>
+              </a:rPr>
+            </a:br>
+            <a:r>
+              <a:rPr lang="en-GB" i="1" dirty="0">
+                <a:solidFill>
+                  <a:srgbClr val="8C8C8C"/>
+                </a:solidFill>
+                <a:effectLst/>
+                <a:latin typeface="JetBrains Mono"/>
+              </a:rPr>
+              <a:t>        </a:t>
+            </a:r>
+            <a:r>
+              <a:rPr lang="en-GB" dirty="0" err="1">
+                <a:solidFill>
+                  <a:srgbClr val="000000"/>
+                </a:solidFill>
+                <a:effectLst/>
+                <a:latin typeface="JetBrains Mono"/>
+              </a:rPr>
+              <a:t>fruits</a:t>
+            </a:r>
+            <a:r>
+              <a:rPr lang="en-GB" dirty="0" err="1">
+                <a:solidFill>
+                  <a:srgbClr val="080808"/>
+                </a:solidFill>
+                <a:effectLst/>
+                <a:latin typeface="JetBrains Mono"/>
+              </a:rPr>
+              <a:t>.remove</a:t>
+            </a:r>
+            <a:r>
+              <a:rPr lang="en-GB" dirty="0">
+                <a:solidFill>
+                  <a:srgbClr val="080808"/>
+                </a:solidFill>
+                <a:effectLst/>
+                <a:latin typeface="JetBrains Mono"/>
+              </a:rPr>
+              <a:t>(</a:t>
+            </a:r>
+            <a:r>
+              <a:rPr lang="en-GB" dirty="0">
+                <a:solidFill>
+                  <a:srgbClr val="1750EB"/>
+                </a:solidFill>
+                <a:effectLst/>
+                <a:latin typeface="JetBrains Mono"/>
+              </a:rPr>
+              <a:t>1</a:t>
+            </a:r>
+            <a:r>
+              <a:rPr lang="en-GB" dirty="0">
+                <a:solidFill>
+                  <a:srgbClr val="080808"/>
+                </a:solidFill>
+                <a:effectLst/>
+                <a:latin typeface="JetBrains Mono"/>
+              </a:rPr>
+              <a:t>);              </a:t>
+            </a:r>
+            <a:r>
+              <a:rPr lang="en-GB" i="1" dirty="0">
+                <a:solidFill>
+                  <a:srgbClr val="8C8C8C"/>
+                </a:solidFill>
+                <a:effectLst/>
+                <a:latin typeface="JetBrains Mono"/>
+              </a:rPr>
+              <a:t>// Removes Mango</a:t>
+            </a:r>
+            <a:br>
+              <a:rPr lang="en-GB" i="1" dirty="0">
+                <a:solidFill>
+                  <a:srgbClr val="8C8C8C"/>
+                </a:solidFill>
+                <a:effectLst/>
+                <a:latin typeface="JetBrains Mono"/>
+              </a:rPr>
+            </a:br>
+            <a:r>
+              <a:rPr lang="en-GB" i="1" dirty="0">
+                <a:solidFill>
+                  <a:srgbClr val="8C8C8C"/>
+                </a:solidFill>
+                <a:effectLst/>
+                <a:latin typeface="JetBrains Mono"/>
+              </a:rPr>
+              <a:t>        </a:t>
+            </a:r>
+            <a:r>
+              <a:rPr lang="en-GB" dirty="0" err="1">
+                <a:solidFill>
+                  <a:srgbClr val="000000"/>
+                </a:solidFill>
+                <a:effectLst/>
+                <a:latin typeface="JetBrains Mono"/>
+              </a:rPr>
+              <a:t>System</a:t>
+            </a:r>
+            <a:r>
+              <a:rPr lang="en-GB" dirty="0" err="1">
+                <a:solidFill>
+                  <a:srgbClr val="080808"/>
+                </a:solidFill>
+                <a:effectLst/>
+                <a:latin typeface="JetBrains Mono"/>
+              </a:rPr>
+              <a:t>.</a:t>
+            </a:r>
+            <a:r>
+              <a:rPr lang="en-GB" i="1" dirty="0" err="1">
+                <a:solidFill>
+                  <a:srgbClr val="871094"/>
+                </a:solidFill>
+                <a:effectLst/>
+                <a:latin typeface="JetBrains Mono"/>
+              </a:rPr>
+              <a:t>out</a:t>
+            </a:r>
+            <a:r>
+              <a:rPr lang="en-GB" dirty="0" err="1">
+                <a:solidFill>
+                  <a:srgbClr val="080808"/>
+                </a:solidFill>
+                <a:effectLst/>
+                <a:latin typeface="JetBrains Mono"/>
+              </a:rPr>
+              <a:t>.println</a:t>
+            </a:r>
+            <a:r>
+              <a:rPr lang="en-GB" dirty="0">
+                <a:solidFill>
+                  <a:srgbClr val="080808"/>
+                </a:solidFill>
+                <a:effectLst/>
+                <a:latin typeface="JetBrains Mono"/>
+              </a:rPr>
+              <a:t>(</a:t>
+            </a:r>
+            <a:r>
+              <a:rPr lang="en-GB" dirty="0">
+                <a:solidFill>
+                  <a:srgbClr val="067D17"/>
+                </a:solidFill>
+                <a:effectLst/>
+                <a:latin typeface="JetBrains Mono"/>
+              </a:rPr>
+              <a:t>"After removing index 1: " </a:t>
+            </a:r>
+            <a:r>
+              <a:rPr lang="en-GB" dirty="0">
+                <a:solidFill>
+                  <a:srgbClr val="080808"/>
+                </a:solidFill>
+                <a:effectLst/>
+                <a:latin typeface="JetBrains Mono"/>
+              </a:rPr>
+              <a:t>+ </a:t>
+            </a:r>
+            <a:r>
+              <a:rPr lang="en-GB" dirty="0">
+                <a:solidFill>
+                  <a:srgbClr val="000000"/>
+                </a:solidFill>
+                <a:effectLst/>
+                <a:latin typeface="JetBrains Mono"/>
+              </a:rPr>
+              <a:t>fruits</a:t>
+            </a:r>
+            <a:r>
+              <a:rPr lang="en-GB" dirty="0">
+                <a:solidFill>
+                  <a:srgbClr val="080808"/>
+                </a:solidFill>
+                <a:effectLst/>
+                <a:latin typeface="JetBrains Mono"/>
+              </a:rPr>
+              <a:t>);</a:t>
+            </a:r>
+            <a:br>
+              <a:rPr lang="en-GB" dirty="0">
+                <a:solidFill>
+                  <a:srgbClr val="080808"/>
+                </a:solidFill>
+                <a:effectLst/>
+                <a:latin typeface="JetBrains Mono"/>
+              </a:rPr>
+            </a:br>
+            <a:br>
+              <a:rPr lang="en-GB" dirty="0">
+                <a:solidFill>
+                  <a:srgbClr val="080808"/>
+                </a:solidFill>
+                <a:effectLst/>
+                <a:latin typeface="JetBrains Mono"/>
+              </a:rPr>
+            </a:br>
+            <a:r>
+              <a:rPr lang="en-GB" dirty="0">
+                <a:solidFill>
+                  <a:srgbClr val="080808"/>
+                </a:solidFill>
+                <a:effectLst/>
+                <a:latin typeface="JetBrains Mono"/>
+              </a:rPr>
+              <a:t>        </a:t>
+            </a:r>
+            <a:r>
+              <a:rPr lang="en-GB" i="1" dirty="0">
+                <a:solidFill>
+                  <a:srgbClr val="8C8C8C"/>
+                </a:solidFill>
+                <a:effectLst/>
+                <a:latin typeface="JetBrains Mono"/>
+              </a:rPr>
+              <a:t>// Get the size</a:t>
+            </a:r>
+            <a:br>
+              <a:rPr lang="en-GB" i="1" dirty="0">
+                <a:solidFill>
+                  <a:srgbClr val="8C8C8C"/>
+                </a:solidFill>
+                <a:effectLst/>
+                <a:latin typeface="JetBrains Mono"/>
+              </a:rPr>
+            </a:br>
+            <a:r>
+              <a:rPr lang="en-GB" i="1" dirty="0">
+                <a:solidFill>
+                  <a:srgbClr val="8C8C8C"/>
+                </a:solidFill>
+                <a:effectLst/>
+                <a:latin typeface="JetBrains Mono"/>
+              </a:rPr>
+              <a:t>        </a:t>
+            </a:r>
+            <a:r>
+              <a:rPr lang="en-GB" dirty="0" err="1">
+                <a:solidFill>
+                  <a:srgbClr val="000000"/>
+                </a:solidFill>
+                <a:effectLst/>
+                <a:latin typeface="JetBrains Mono"/>
+              </a:rPr>
+              <a:t>System</a:t>
+            </a:r>
+            <a:r>
+              <a:rPr lang="en-GB" dirty="0" err="1">
+                <a:solidFill>
+                  <a:srgbClr val="080808"/>
+                </a:solidFill>
+                <a:effectLst/>
+                <a:latin typeface="JetBrains Mono"/>
+              </a:rPr>
+              <a:t>.</a:t>
+            </a:r>
+            <a:r>
+              <a:rPr lang="en-GB" i="1" dirty="0" err="1">
+                <a:solidFill>
+                  <a:srgbClr val="871094"/>
+                </a:solidFill>
+                <a:effectLst/>
+                <a:latin typeface="JetBrains Mono"/>
+              </a:rPr>
+              <a:t>out</a:t>
+            </a:r>
+            <a:r>
+              <a:rPr lang="en-GB" dirty="0" err="1">
+                <a:solidFill>
+                  <a:srgbClr val="080808"/>
+                </a:solidFill>
+                <a:effectLst/>
+                <a:latin typeface="JetBrains Mono"/>
+              </a:rPr>
+              <a:t>.println</a:t>
+            </a:r>
+            <a:r>
+              <a:rPr lang="en-GB" dirty="0">
+                <a:solidFill>
+                  <a:srgbClr val="080808"/>
+                </a:solidFill>
+                <a:effectLst/>
+                <a:latin typeface="JetBrains Mono"/>
+              </a:rPr>
+              <a:t>(</a:t>
+            </a:r>
+            <a:r>
+              <a:rPr lang="en-GB" dirty="0">
+                <a:solidFill>
+                  <a:srgbClr val="067D17"/>
+                </a:solidFill>
+                <a:effectLst/>
+                <a:latin typeface="JetBrains Mono"/>
+              </a:rPr>
+              <a:t>"Number of fruits: " </a:t>
+            </a:r>
+            <a:r>
+              <a:rPr lang="en-GB" dirty="0">
+                <a:solidFill>
+                  <a:srgbClr val="080808"/>
+                </a:solidFill>
+                <a:effectLst/>
+                <a:latin typeface="JetBrains Mono"/>
+              </a:rPr>
+              <a:t>+ </a:t>
+            </a:r>
+            <a:r>
+              <a:rPr lang="en-GB" dirty="0" err="1">
+                <a:solidFill>
+                  <a:srgbClr val="000000"/>
+                </a:solidFill>
+                <a:effectLst/>
+                <a:latin typeface="JetBrains Mono"/>
+              </a:rPr>
+              <a:t>fruits</a:t>
+            </a:r>
+            <a:r>
+              <a:rPr lang="en-GB" dirty="0" err="1">
+                <a:solidFill>
+                  <a:srgbClr val="080808"/>
+                </a:solidFill>
+                <a:effectLst/>
+                <a:latin typeface="JetBrains Mono"/>
+              </a:rPr>
+              <a:t>.size</a:t>
+            </a:r>
+            <a:r>
+              <a:rPr lang="en-GB" dirty="0">
+                <a:solidFill>
+                  <a:srgbClr val="080808"/>
+                </a:solidFill>
+                <a:effectLst/>
+                <a:latin typeface="JetBrains Mono"/>
+              </a:rPr>
+              <a:t>());</a:t>
+            </a:r>
+            <a:br>
+              <a:rPr lang="en-GB" dirty="0">
+                <a:solidFill>
+                  <a:srgbClr val="080808"/>
+                </a:solidFill>
+                <a:effectLst/>
+                <a:latin typeface="JetBrains Mono"/>
+              </a:rPr>
+            </a:br>
+            <a:br>
+              <a:rPr lang="en-GB" dirty="0">
+                <a:solidFill>
+                  <a:srgbClr val="080808"/>
+                </a:solidFill>
+                <a:effectLst/>
+                <a:latin typeface="JetBrains Mono"/>
+              </a:rPr>
+            </a:br>
+            <a:r>
+              <a:rPr lang="en-GB" dirty="0">
+                <a:solidFill>
+                  <a:srgbClr val="080808"/>
+                </a:solidFill>
+                <a:effectLst/>
+                <a:latin typeface="JetBrains Mono"/>
+              </a:rPr>
+              <a:t>        </a:t>
+            </a:r>
+            <a:r>
+              <a:rPr lang="en-GB" i="1" dirty="0">
+                <a:solidFill>
+                  <a:srgbClr val="8C8C8C"/>
+                </a:solidFill>
+                <a:effectLst/>
+                <a:latin typeface="JetBrains Mono"/>
+              </a:rPr>
+              <a:t>// Check if </a:t>
+            </a:r>
+            <a:r>
+              <a:rPr lang="en-GB" i="1" dirty="0" err="1">
+                <a:solidFill>
+                  <a:srgbClr val="8C8C8C"/>
+                </a:solidFill>
+                <a:effectLst/>
+                <a:latin typeface="JetBrains Mono"/>
+              </a:rPr>
+              <a:t>ArrayList</a:t>
+            </a:r>
+            <a:r>
+              <a:rPr lang="en-GB" i="1" dirty="0">
+                <a:solidFill>
+                  <a:srgbClr val="8C8C8C"/>
+                </a:solidFill>
+                <a:effectLst/>
+                <a:latin typeface="JetBrains Mono"/>
+              </a:rPr>
+              <a:t> contains an element</a:t>
+            </a:r>
+            <a:br>
+              <a:rPr lang="en-GB" i="1" dirty="0">
+                <a:solidFill>
+                  <a:srgbClr val="8C8C8C"/>
+                </a:solidFill>
+                <a:effectLst/>
+                <a:latin typeface="JetBrains Mono"/>
+              </a:rPr>
+            </a:br>
+            <a:r>
+              <a:rPr lang="en-GB" i="1" dirty="0">
+                <a:solidFill>
+                  <a:srgbClr val="8C8C8C"/>
+                </a:solidFill>
+                <a:effectLst/>
+                <a:latin typeface="JetBrains Mono"/>
+              </a:rPr>
+              <a:t>        </a:t>
+            </a:r>
+            <a:r>
+              <a:rPr lang="en-GB" dirty="0">
+                <a:solidFill>
+                  <a:srgbClr val="0033B3"/>
+                </a:solidFill>
+                <a:effectLst/>
+                <a:latin typeface="JetBrains Mono"/>
+              </a:rPr>
+              <a:t>if </a:t>
+            </a:r>
+            <a:r>
+              <a:rPr lang="en-GB" dirty="0">
+                <a:solidFill>
+                  <a:srgbClr val="080808"/>
+                </a:solidFill>
+                <a:effectLst/>
+                <a:latin typeface="JetBrains Mono"/>
+              </a:rPr>
+              <a:t>(</a:t>
+            </a:r>
+            <a:r>
+              <a:rPr lang="en-GB" dirty="0" err="1">
+                <a:solidFill>
+                  <a:srgbClr val="000000"/>
+                </a:solidFill>
+                <a:effectLst/>
+                <a:latin typeface="JetBrains Mono"/>
+              </a:rPr>
+              <a:t>fruits</a:t>
+            </a:r>
+            <a:r>
+              <a:rPr lang="en-GB" dirty="0" err="1">
+                <a:solidFill>
+                  <a:srgbClr val="080808"/>
+                </a:solidFill>
+                <a:effectLst/>
+                <a:latin typeface="JetBrains Mono"/>
+              </a:rPr>
+              <a:t>.contains</a:t>
+            </a:r>
+            <a:r>
+              <a:rPr lang="en-GB" dirty="0">
+                <a:solidFill>
+                  <a:srgbClr val="080808"/>
+                </a:solidFill>
+                <a:effectLst/>
+                <a:latin typeface="JetBrains Mono"/>
+              </a:rPr>
+              <a:t>(</a:t>
+            </a:r>
+            <a:r>
+              <a:rPr lang="en-GB" dirty="0">
+                <a:solidFill>
+                  <a:srgbClr val="067D17"/>
+                </a:solidFill>
+                <a:effectLst/>
+                <a:latin typeface="JetBrains Mono"/>
+              </a:rPr>
+              <a:t>"Orange"</a:t>
+            </a:r>
+            <a:r>
+              <a:rPr lang="en-GB" dirty="0">
+                <a:solidFill>
+                  <a:srgbClr val="080808"/>
+                </a:solidFill>
+                <a:effectLst/>
+                <a:latin typeface="JetBrains Mono"/>
+              </a:rPr>
+              <a:t>)) {</a:t>
+            </a:r>
+            <a:br>
+              <a:rPr lang="en-GB" dirty="0">
+                <a:solidFill>
+                  <a:srgbClr val="080808"/>
+                </a:solidFill>
+                <a:effectLst/>
+                <a:latin typeface="JetBrains Mono"/>
+              </a:rPr>
+            </a:br>
+            <a:r>
+              <a:rPr lang="en-GB" dirty="0">
+                <a:solidFill>
+                  <a:srgbClr val="080808"/>
+                </a:solidFill>
+                <a:effectLst/>
+                <a:latin typeface="JetBrains Mono"/>
+              </a:rPr>
+              <a:t>            </a:t>
+            </a:r>
+            <a:r>
+              <a:rPr lang="en-GB" dirty="0" err="1">
+                <a:solidFill>
+                  <a:srgbClr val="000000"/>
+                </a:solidFill>
+                <a:effectLst/>
+                <a:latin typeface="JetBrains Mono"/>
+              </a:rPr>
+              <a:t>System</a:t>
+            </a:r>
+            <a:r>
+              <a:rPr lang="en-GB" dirty="0" err="1">
+                <a:solidFill>
+                  <a:srgbClr val="080808"/>
+                </a:solidFill>
+                <a:effectLst/>
+                <a:latin typeface="JetBrains Mono"/>
+              </a:rPr>
+              <a:t>.</a:t>
+            </a:r>
+            <a:r>
+              <a:rPr lang="en-GB" i="1" dirty="0" err="1">
+                <a:solidFill>
+                  <a:srgbClr val="871094"/>
+                </a:solidFill>
+                <a:effectLst/>
+                <a:latin typeface="JetBrains Mono"/>
+              </a:rPr>
+              <a:t>out</a:t>
+            </a:r>
+            <a:r>
+              <a:rPr lang="en-GB" dirty="0" err="1">
+                <a:solidFill>
+                  <a:srgbClr val="080808"/>
+                </a:solidFill>
+                <a:effectLst/>
+                <a:latin typeface="JetBrains Mono"/>
+              </a:rPr>
+              <a:t>.println</a:t>
+            </a:r>
+            <a:r>
+              <a:rPr lang="en-GB" dirty="0">
+                <a:solidFill>
+                  <a:srgbClr val="080808"/>
+                </a:solidFill>
+                <a:effectLst/>
+                <a:latin typeface="JetBrains Mono"/>
+              </a:rPr>
+              <a:t>(</a:t>
+            </a:r>
+            <a:r>
+              <a:rPr lang="en-GB" dirty="0">
+                <a:solidFill>
+                  <a:srgbClr val="067D17"/>
+                </a:solidFill>
+                <a:effectLst/>
+                <a:latin typeface="JetBrains Mono"/>
+              </a:rPr>
+              <a:t>"Orange is in the list!"</a:t>
+            </a:r>
+            <a:r>
+              <a:rPr lang="en-GB" dirty="0">
+                <a:solidFill>
+                  <a:srgbClr val="080808"/>
+                </a:solidFill>
+                <a:effectLst/>
+                <a:latin typeface="JetBrains Mono"/>
+              </a:rPr>
+              <a:t>);</a:t>
+            </a:r>
+            <a:br>
+              <a:rPr lang="en-GB" dirty="0">
+                <a:solidFill>
+                  <a:srgbClr val="080808"/>
+                </a:solidFill>
+                <a:effectLst/>
+                <a:latin typeface="JetBrains Mono"/>
+              </a:rPr>
+            </a:br>
+            <a:r>
+              <a:rPr lang="en-GB" dirty="0">
+                <a:solidFill>
+                  <a:srgbClr val="080808"/>
+                </a:solidFill>
+                <a:effectLst/>
+                <a:latin typeface="JetBrains Mono"/>
+              </a:rPr>
+              <a:t>        }</a:t>
+            </a:r>
+            <a:br>
+              <a:rPr lang="en-GB" dirty="0">
+                <a:solidFill>
+                  <a:srgbClr val="080808"/>
+                </a:solidFill>
+                <a:effectLst/>
+                <a:latin typeface="JetBrains Mono"/>
+              </a:rPr>
+            </a:br>
+            <a:br>
+              <a:rPr lang="en-GB" dirty="0">
+                <a:solidFill>
+                  <a:srgbClr val="080808"/>
+                </a:solidFill>
+                <a:effectLst/>
+                <a:latin typeface="JetBrains Mono"/>
+              </a:rPr>
+            </a:br>
+            <a:r>
+              <a:rPr lang="en-GB" dirty="0">
+                <a:solidFill>
+                  <a:srgbClr val="080808"/>
+                </a:solidFill>
+                <a:effectLst/>
+                <a:latin typeface="JetBrains Mono"/>
+              </a:rPr>
+              <a:t>        </a:t>
+            </a:r>
+            <a:r>
+              <a:rPr lang="en-GB" i="1" dirty="0">
+                <a:solidFill>
+                  <a:srgbClr val="8C8C8C"/>
+                </a:solidFill>
+                <a:effectLst/>
+                <a:latin typeface="JetBrains Mono"/>
+              </a:rPr>
+              <a:t>// Loop through </a:t>
+            </a:r>
+            <a:r>
+              <a:rPr lang="en-GB" i="1" dirty="0" err="1">
+                <a:solidFill>
+                  <a:srgbClr val="8C8C8C"/>
+                </a:solidFill>
+                <a:effectLst/>
+                <a:latin typeface="JetBrains Mono"/>
+              </a:rPr>
+              <a:t>ArrayList</a:t>
+            </a:r>
+            <a:br>
+              <a:rPr lang="en-GB" i="1" dirty="0">
+                <a:solidFill>
+                  <a:srgbClr val="8C8C8C"/>
+                </a:solidFill>
+                <a:effectLst/>
+                <a:latin typeface="JetBrains Mono"/>
+              </a:rPr>
+            </a:br>
+            <a:r>
+              <a:rPr lang="en-GB" i="1" dirty="0">
+                <a:solidFill>
+                  <a:srgbClr val="8C8C8C"/>
+                </a:solidFill>
+                <a:effectLst/>
+                <a:latin typeface="JetBrains Mono"/>
+              </a:rPr>
+              <a:t>        </a:t>
+            </a:r>
+            <a:r>
+              <a:rPr lang="en-GB" dirty="0" err="1">
+                <a:solidFill>
+                  <a:srgbClr val="000000"/>
+                </a:solidFill>
+                <a:effectLst/>
+                <a:latin typeface="JetBrains Mono"/>
+              </a:rPr>
+              <a:t>fruits</a:t>
+            </a:r>
+            <a:r>
+              <a:rPr lang="en-GB" dirty="0" err="1">
+                <a:solidFill>
+                  <a:srgbClr val="080808"/>
+                </a:solidFill>
+                <a:effectLst/>
+                <a:latin typeface="JetBrains Mono"/>
+              </a:rPr>
+              <a:t>.forEach</a:t>
+            </a:r>
+            <a:r>
+              <a:rPr lang="en-GB" dirty="0">
+                <a:solidFill>
+                  <a:srgbClr val="080808"/>
+                </a:solidFill>
+                <a:effectLst/>
+                <a:latin typeface="JetBrains Mono"/>
+              </a:rPr>
+              <a:t>(</a:t>
+            </a:r>
+            <a:r>
+              <a:rPr lang="en-GB" dirty="0" err="1">
+                <a:solidFill>
+                  <a:srgbClr val="000000"/>
+                </a:solidFill>
+                <a:effectLst/>
+                <a:latin typeface="JetBrains Mono"/>
+              </a:rPr>
+              <a:t>System</a:t>
+            </a:r>
+            <a:r>
+              <a:rPr lang="en-GB" dirty="0" err="1">
+                <a:solidFill>
+                  <a:srgbClr val="080808"/>
+                </a:solidFill>
+                <a:effectLst/>
+                <a:latin typeface="JetBrains Mono"/>
+              </a:rPr>
+              <a:t>.</a:t>
+            </a:r>
+            <a:r>
+              <a:rPr lang="en-GB" i="1" dirty="0" err="1">
+                <a:solidFill>
+                  <a:srgbClr val="871094"/>
+                </a:solidFill>
+                <a:effectLst/>
+                <a:latin typeface="JetBrains Mono"/>
+              </a:rPr>
+              <a:t>out</a:t>
+            </a:r>
+            <a:r>
+              <a:rPr lang="en-GB" dirty="0">
+                <a:solidFill>
+                  <a:srgbClr val="080808"/>
+                </a:solidFill>
+                <a:effectLst/>
+                <a:latin typeface="JetBrains Mono"/>
+              </a:rPr>
+              <a:t>::</a:t>
+            </a:r>
+            <a:r>
+              <a:rPr lang="en-GB" dirty="0" err="1">
+                <a:solidFill>
+                  <a:srgbClr val="080808"/>
+                </a:solidFill>
+                <a:effectLst/>
+                <a:latin typeface="JetBrains Mono"/>
+              </a:rPr>
+              <a:t>println</a:t>
+            </a:r>
+            <a:r>
+              <a:rPr lang="en-GB" dirty="0">
+                <a:solidFill>
+                  <a:srgbClr val="080808"/>
+                </a:solidFill>
+                <a:effectLst/>
+                <a:latin typeface="JetBrains Mono"/>
+              </a:rPr>
+              <a:t>);</a:t>
+            </a:r>
+            <a:br>
+              <a:rPr lang="en-GB" dirty="0">
+                <a:solidFill>
+                  <a:srgbClr val="080808"/>
+                </a:solidFill>
+                <a:effectLst/>
+                <a:latin typeface="JetBrains Mono"/>
+              </a:rPr>
+            </a:br>
+            <a:r>
+              <a:rPr lang="en-GB" dirty="0">
+                <a:solidFill>
+                  <a:srgbClr val="080808"/>
+                </a:solidFill>
+                <a:effectLst/>
+                <a:latin typeface="JetBrains Mono"/>
+              </a:rPr>
+              <a:t>    }</a:t>
+            </a:r>
+            <a:br>
+              <a:rPr lang="en-GB" dirty="0">
+                <a:solidFill>
+                  <a:srgbClr val="080808"/>
+                </a:solidFill>
+                <a:effectLst/>
+                <a:latin typeface="JetBrains Mono"/>
+              </a:rPr>
+            </a:br>
+            <a:r>
+              <a:rPr lang="en-GB" dirty="0">
+                <a:solidFill>
+                  <a:srgbClr val="080808"/>
+                </a:solidFill>
+                <a:effectLst/>
+                <a:latin typeface="JetBrains Mono"/>
+              </a:rPr>
+              <a:t>}</a:t>
+            </a:r>
+          </a:p>
+        </p:txBody>
+      </p:sp>
+    </p:spTree>
+    <p:extLst>
+      <p:ext uri="{BB962C8B-B14F-4D97-AF65-F5344CB8AC3E}">
+        <p14:creationId xmlns:p14="http://schemas.microsoft.com/office/powerpoint/2010/main" val="265123862"/>
+      </p:ext>
+    </p:extLst>
   </p:cSld>
   <p:clrMapOvr>
     <a:masterClrMapping/>
@@ -2703,7 +10708,7 @@
 </p:sld>
 </file>
 
-<file path=ppt/slides/slide3.xml><?xml version="1.0" encoding="utf-8"?>
+<file path=ppt/slides/slide20.xml><?xml version="1.0" encoding="utf-8"?>
 <p:sld xmlns:a="http://schemas.openxmlformats.org/drawingml/2006/main" xmlns:r="http://schemas.openxmlformats.org/officeDocument/2006/relationships" xmlns:p="http://schemas.openxmlformats.org/presentationml/2006/main">
   <p:cSld>
     <p:spTree>
@@ -2720,12 +10725,399 @@
           <a:chExt cx="0" cy="0"/>
         </a:xfrm>
       </p:grpSpPr>
+      <p:graphicFrame>
+        <p:nvGraphicFramePr>
+          <p:cNvPr id="2" name="Table 1">
+            <a:extLst>
+              <a:ext uri="{FF2B5EF4-FFF2-40B4-BE49-F238E27FC236}">
+                <a16:creationId xmlns:a16="http://schemas.microsoft.com/office/drawing/2014/main" id="{69F50CBA-00D5-8763-664B-53D059D1F9D5}"/>
+              </a:ext>
+            </a:extLst>
+          </p:cNvPr>
+          <p:cNvGraphicFramePr>
+            <a:graphicFrameLocks noGrp="1"/>
+          </p:cNvGraphicFramePr>
+          <p:nvPr>
+            <p:extLst>
+              <p:ext uri="{D42A27DB-BD31-4B8C-83A1-F6EECF244321}">
+                <p14:modId xmlns:p14="http://schemas.microsoft.com/office/powerpoint/2010/main" val="2313909610"/>
+              </p:ext>
+            </p:extLst>
+          </p:nvPr>
+        </p:nvGraphicFramePr>
+        <p:xfrm>
+          <a:off x="1331828" y="1748551"/>
+          <a:ext cx="7146258" cy="4582274"/>
+        </p:xfrm>
+        <a:graphic>
+          <a:graphicData uri="http://schemas.openxmlformats.org/drawingml/2006/table">
+            <a:tbl>
+              <a:tblPr>
+                <a:tableStyleId>{5C22544A-7EE6-4342-B048-85BDC9FD1C3A}</a:tableStyleId>
+              </a:tblPr>
+              <a:tblGrid>
+                <a:gridCol w="2382086">
+                  <a:extLst>
+                    <a:ext uri="{9D8B030D-6E8A-4147-A177-3AD203B41FA5}">
+                      <a16:colId xmlns:a16="http://schemas.microsoft.com/office/drawing/2014/main" val="868601729"/>
+                    </a:ext>
+                  </a:extLst>
+                </a:gridCol>
+                <a:gridCol w="2382086">
+                  <a:extLst>
+                    <a:ext uri="{9D8B030D-6E8A-4147-A177-3AD203B41FA5}">
+                      <a16:colId xmlns:a16="http://schemas.microsoft.com/office/drawing/2014/main" val="2735808270"/>
+                    </a:ext>
+                  </a:extLst>
+                </a:gridCol>
+                <a:gridCol w="2382086">
+                  <a:extLst>
+                    <a:ext uri="{9D8B030D-6E8A-4147-A177-3AD203B41FA5}">
+                      <a16:colId xmlns:a16="http://schemas.microsoft.com/office/drawing/2014/main" val="2147202293"/>
+                    </a:ext>
+                  </a:extLst>
+                </a:gridCol>
+              </a:tblGrid>
+              <a:tr h="0">
+                <a:tc>
+                  <a:txBody>
+                    <a:bodyPr/>
+                    <a:lstStyle/>
+                    <a:p>
+                      <a:pPr>
+                        <a:buNone/>
+                      </a:pPr>
+                      <a:r>
+                        <a:rPr lang="en-DK" sz="1600"/>
+                        <a:t>Gruppe</a:t>
+                      </a:r>
+                    </a:p>
+                  </a:txBody>
+                  <a:tcPr marL="79403" marR="79403" marT="39701" marB="39701" anchor="ctr"/>
+                </a:tc>
+                <a:tc>
+                  <a:txBody>
+                    <a:bodyPr/>
+                    <a:lstStyle/>
+                    <a:p>
+                      <a:pPr>
+                        <a:buNone/>
+                      </a:pPr>
+                      <a:r>
+                        <a:rPr lang="en-DK" sz="1600"/>
+                        <a:t>Emne</a:t>
+                      </a:r>
+                    </a:p>
+                  </a:txBody>
+                  <a:tcPr marL="79403" marR="79403" marT="39701" marB="39701" anchor="ctr"/>
+                </a:tc>
+                <a:tc>
+                  <a:txBody>
+                    <a:bodyPr/>
+                    <a:lstStyle/>
+                    <a:p>
+                      <a:pPr>
+                        <a:buNone/>
+                      </a:pPr>
+                      <a:r>
+                        <a:rPr lang="en-DK" sz="1600"/>
+                        <a:t>Centrale begreber</a:t>
+                      </a:r>
+                    </a:p>
+                  </a:txBody>
+                  <a:tcPr marL="79403" marR="79403" marT="39701" marB="39701" anchor="ctr"/>
+                </a:tc>
+                <a:extLst>
+                  <a:ext uri="{0D108BD9-81ED-4DB2-BD59-A6C34878D82A}">
+                    <a16:rowId xmlns:a16="http://schemas.microsoft.com/office/drawing/2014/main" val="2136787598"/>
+                  </a:ext>
+                </a:extLst>
+              </a:tr>
+              <a:tr h="794029">
+                <a:tc>
+                  <a:txBody>
+                    <a:bodyPr/>
+                    <a:lstStyle/>
+                    <a:p>
+                      <a:pPr>
+                        <a:buNone/>
+                      </a:pPr>
+                      <a:r>
+                        <a:rPr lang="en-DK" sz="1600"/>
+                        <a:t>1</a:t>
+                      </a:r>
+                    </a:p>
+                  </a:txBody>
+                  <a:tcPr marL="79403" marR="79403" marT="39701" marB="39701" anchor="ctr"/>
+                </a:tc>
+                <a:tc>
+                  <a:txBody>
+                    <a:bodyPr/>
+                    <a:lstStyle/>
+                    <a:p>
+                      <a:pPr>
+                        <a:buNone/>
+                      </a:pPr>
+                      <a:r>
+                        <a:rPr lang="en-DK" sz="1600"/>
+                        <a:t>Arrays</a:t>
+                      </a:r>
+                    </a:p>
+                  </a:txBody>
+                  <a:tcPr marL="79403" marR="79403" marT="39701" marB="39701" anchor="ctr"/>
+                </a:tc>
+                <a:tc>
+                  <a:txBody>
+                    <a:bodyPr/>
+                    <a:lstStyle/>
+                    <a:p>
+                      <a:pPr>
+                        <a:buNone/>
+                      </a:pPr>
+                      <a:r>
+                        <a:rPr lang="en-DK" sz="1600"/>
+                        <a:t>Array, index, .length, oprettelse, adgang til elementer</a:t>
+                      </a:r>
+                    </a:p>
+                  </a:txBody>
+                  <a:tcPr marL="79403" marR="79403" marT="39701" marB="39701" anchor="ctr"/>
+                </a:tc>
+                <a:extLst>
+                  <a:ext uri="{0D108BD9-81ED-4DB2-BD59-A6C34878D82A}">
+                    <a16:rowId xmlns:a16="http://schemas.microsoft.com/office/drawing/2014/main" val="3544554770"/>
+                  </a:ext>
+                </a:extLst>
+              </a:tr>
+              <a:tr h="1032237">
+                <a:tc>
+                  <a:txBody>
+                    <a:bodyPr/>
+                    <a:lstStyle/>
+                    <a:p>
+                      <a:pPr>
+                        <a:buNone/>
+                      </a:pPr>
+                      <a:r>
+                        <a:rPr lang="en-DK" sz="1600"/>
+                        <a:t>2</a:t>
+                      </a:r>
+                    </a:p>
+                  </a:txBody>
+                  <a:tcPr marL="79403" marR="79403" marT="39701" marB="39701" anchor="ctr"/>
+                </a:tc>
+                <a:tc>
+                  <a:txBody>
+                    <a:bodyPr/>
+                    <a:lstStyle/>
+                    <a:p>
+                      <a:pPr>
+                        <a:buNone/>
+                      </a:pPr>
+                      <a:r>
+                        <a:rPr lang="en-DK" sz="1600"/>
+                        <a:t>Continue &amp; Break</a:t>
+                      </a:r>
+                    </a:p>
+                  </a:txBody>
+                  <a:tcPr marL="79403" marR="79403" marT="39701" marB="39701" anchor="ctr"/>
+                </a:tc>
+                <a:tc>
+                  <a:txBody>
+                    <a:bodyPr/>
+                    <a:lstStyle/>
+                    <a:p>
+                      <a:pPr>
+                        <a:buNone/>
+                      </a:pPr>
+                      <a:r>
+                        <a:rPr lang="en-DK" sz="1600"/>
+                        <a:t>break, continue, kontrol af loops, hvornår en iteration stopper eller springes over</a:t>
+                      </a:r>
+                    </a:p>
+                  </a:txBody>
+                  <a:tcPr marL="79403" marR="79403" marT="39701" marB="39701" anchor="ctr"/>
+                </a:tc>
+                <a:extLst>
+                  <a:ext uri="{0D108BD9-81ED-4DB2-BD59-A6C34878D82A}">
+                    <a16:rowId xmlns:a16="http://schemas.microsoft.com/office/drawing/2014/main" val="1672578455"/>
+                  </a:ext>
+                </a:extLst>
+              </a:tr>
+              <a:tr h="555820">
+                <a:tc>
+                  <a:txBody>
+                    <a:bodyPr/>
+                    <a:lstStyle/>
+                    <a:p>
+                      <a:pPr>
+                        <a:buNone/>
+                      </a:pPr>
+                      <a:r>
+                        <a:rPr lang="en-DK" sz="1600"/>
+                        <a:t>3</a:t>
+                      </a:r>
+                    </a:p>
+                  </a:txBody>
+                  <a:tcPr marL="79403" marR="79403" marT="39701" marB="39701" anchor="ctr"/>
+                </a:tc>
+                <a:tc>
+                  <a:txBody>
+                    <a:bodyPr/>
+                    <a:lstStyle/>
+                    <a:p>
+                      <a:pPr>
+                        <a:buNone/>
+                      </a:pPr>
+                      <a:r>
+                        <a:rPr lang="en-DK" sz="1600"/>
+                        <a:t>Multidimensional Arrays</a:t>
+                      </a:r>
+                    </a:p>
+                  </a:txBody>
+                  <a:tcPr marL="79403" marR="79403" marT="39701" marB="39701" anchor="ctr"/>
+                </a:tc>
+                <a:tc>
+                  <a:txBody>
+                    <a:bodyPr/>
+                    <a:lstStyle/>
+                    <a:p>
+                      <a:pPr>
+                        <a:buNone/>
+                      </a:pPr>
+                      <a:r>
+                        <a:rPr lang="en-DK" sz="1600"/>
+                        <a:t>2D arrays, rows, columns, index, .length</a:t>
+                      </a:r>
+                    </a:p>
+                  </a:txBody>
+                  <a:tcPr marL="79403" marR="79403" marT="39701" marB="39701" anchor="ctr"/>
+                </a:tc>
+                <a:extLst>
+                  <a:ext uri="{0D108BD9-81ED-4DB2-BD59-A6C34878D82A}">
+                    <a16:rowId xmlns:a16="http://schemas.microsoft.com/office/drawing/2014/main" val="4200528255"/>
+                  </a:ext>
+                </a:extLst>
+              </a:tr>
+              <a:tr h="1032237">
+                <a:tc>
+                  <a:txBody>
+                    <a:bodyPr/>
+                    <a:lstStyle/>
+                    <a:p>
+                      <a:pPr>
+                        <a:buNone/>
+                      </a:pPr>
+                      <a:r>
+                        <a:rPr lang="en-DK" sz="1600"/>
+                        <a:t>4</a:t>
+                      </a:r>
+                    </a:p>
+                  </a:txBody>
+                  <a:tcPr marL="79403" marR="79403" marT="39701" marB="39701" anchor="ctr"/>
+                </a:tc>
+                <a:tc>
+                  <a:txBody>
+                    <a:bodyPr/>
+                    <a:lstStyle/>
+                    <a:p>
+                      <a:pPr>
+                        <a:buNone/>
+                      </a:pPr>
+                      <a:r>
+                        <a:rPr lang="en-DK" sz="1600"/>
+                        <a:t>Ragged Arrays</a:t>
+                      </a:r>
+                    </a:p>
+                  </a:txBody>
+                  <a:tcPr marL="79403" marR="79403" marT="39701" marB="39701" anchor="ctr"/>
+                </a:tc>
+                <a:tc>
+                  <a:txBody>
+                    <a:bodyPr/>
+                    <a:lstStyle/>
+                    <a:p>
+                      <a:pPr>
+                        <a:buNone/>
+                      </a:pPr>
+                      <a:r>
+                        <a:rPr lang="en-DK" sz="1600"/>
+                        <a:t>Arrays med forskellige rækkelængder, nested arrays, .length på individuelle rækker</a:t>
+                      </a:r>
+                    </a:p>
+                  </a:txBody>
+                  <a:tcPr marL="79403" marR="79403" marT="39701" marB="39701" anchor="ctr"/>
+                </a:tc>
+                <a:extLst>
+                  <a:ext uri="{0D108BD9-81ED-4DB2-BD59-A6C34878D82A}">
+                    <a16:rowId xmlns:a16="http://schemas.microsoft.com/office/drawing/2014/main" val="508680088"/>
+                  </a:ext>
+                </a:extLst>
+              </a:tr>
+              <a:tr h="794029">
+                <a:tc>
+                  <a:txBody>
+                    <a:bodyPr/>
+                    <a:lstStyle/>
+                    <a:p>
+                      <a:pPr>
+                        <a:buNone/>
+                      </a:pPr>
+                      <a:r>
+                        <a:rPr lang="en-DK" sz="1600"/>
+                        <a:t>5</a:t>
+                      </a:r>
+                    </a:p>
+                  </a:txBody>
+                  <a:tcPr marL="79403" marR="79403" marT="39701" marB="39701" anchor="ctr"/>
+                </a:tc>
+                <a:tc>
+                  <a:txBody>
+                    <a:bodyPr/>
+                    <a:lstStyle/>
+                    <a:p>
+                      <a:pPr>
+                        <a:buNone/>
+                      </a:pPr>
+                      <a:r>
+                        <a:rPr lang="en-DK" sz="1600"/>
+                        <a:t>ArrayList</a:t>
+                      </a:r>
+                    </a:p>
+                  </a:txBody>
+                  <a:tcPr marL="79403" marR="79403" marT="39701" marB="39701" anchor="ctr"/>
+                </a:tc>
+                <a:tc>
+                  <a:txBody>
+                    <a:bodyPr/>
+                    <a:lstStyle/>
+                    <a:p>
+                      <a:pPr>
+                        <a:buNone/>
+                      </a:pPr>
+                      <a:r>
+                        <a:rPr lang="en-DK" sz="1600" dirty="0"/>
+                        <a:t>ArrayList, add(), get(), remove(), size(), contains()</a:t>
+                      </a:r>
+                    </a:p>
+                  </a:txBody>
+                  <a:tcPr marL="79403" marR="79403" marT="39701" marB="39701" anchor="ctr"/>
+                </a:tc>
+                <a:extLst>
+                  <a:ext uri="{0D108BD9-81ED-4DB2-BD59-A6C34878D82A}">
+                    <a16:rowId xmlns:a16="http://schemas.microsoft.com/office/drawing/2014/main" val="242732128"/>
+                  </a:ext>
+                </a:extLst>
+              </a:tr>
+            </a:tbl>
+          </a:graphicData>
+        </a:graphic>
+      </p:graphicFrame>
       <p:sp>
         <p:nvSpPr>
-          <p:cNvPr id="2" name="TextBox 1">
+          <p:cNvPr id="4" name="TextBox 3">
             <a:extLst>
               <a:ext uri="{FF2B5EF4-FFF2-40B4-BE49-F238E27FC236}">
-                <a16:creationId xmlns:a16="http://schemas.microsoft.com/office/drawing/2014/main" id="{6706B4B1-1C53-36B4-57DE-051A6A489DBC}"/>
+                <a16:creationId xmlns:a16="http://schemas.microsoft.com/office/drawing/2014/main" id="{9FD96243-D385-1454-90E6-749FBDEAD479}"/>
               </a:ext>
             </a:extLst>
           </p:cNvPr>
@@ -2734,8 +11126,8 @@
         </p:nvSpPr>
         <p:spPr>
           <a:xfrm>
-            <a:off x="2528024" y="1676400"/>
-            <a:ext cx="4762842" cy="369332"/>
+            <a:off x="1143000" y="527175"/>
+            <a:ext cx="6096000" cy="485902"/>
           </a:xfrm>
           <a:prstGeom prst="rect">
             <a:avLst/>
@@ -2743,14 +11135,29 @@
           <a:noFill/>
         </p:spPr>
         <p:txBody>
-          <a:bodyPr wrap="none" rtlCol="0">
+          <a:bodyPr wrap="square">
             <a:spAutoFit/>
           </a:bodyPr>
           <a:lstStyle/>
           <a:p>
-            <a:r>
-              <a:rPr lang="en-DK" dirty="0"/>
-              <a:t>Break and continue in doc java with 2 demos</a:t>
+            <a:pPr marL="12701">
+              <a:lnSpc>
+                <a:spcPts val="3010"/>
+              </a:lnSpc>
+              <a:spcBef>
+                <a:spcPts val="100"/>
+              </a:spcBef>
+              <a:buClr>
+                <a:srgbClr val="2DA2BF"/>
+              </a:buClr>
+              <a:buSzPct val="69230"/>
+              <a:tabLst>
+                <a:tab pos="762000" algn="l"/>
+              </a:tabLst>
+            </a:pPr>
+            <a:r>
+              <a:rPr lang="en-GB" sz="3600" dirty="0"/>
+              <a:t>Check Out</a:t>
             </a:r>
           </a:p>
         </p:txBody>
@@ -2758,7 +11165,7 @@
     </p:spTree>
     <p:extLst>
       <p:ext uri="{BB962C8B-B14F-4D97-AF65-F5344CB8AC3E}">
-        <p14:creationId xmlns:p14="http://schemas.microsoft.com/office/powerpoint/2010/main" val="2204142818"/>
+        <p14:creationId xmlns:p14="http://schemas.microsoft.com/office/powerpoint/2010/main" val="711175962"/>
       </p:ext>
     </p:extLst>
   </p:cSld>
@@ -2768,7 +11175,7 @@
 </p:sld>
 </file>
 
-<file path=ppt/slides/slide4.xml><?xml version="1.0" encoding="utf-8"?>
+<file path=ppt/slides/slide3.xml><?xml version="1.0" encoding="utf-8"?>
 <p:sld xmlns:a="http://schemas.openxmlformats.org/drawingml/2006/main" xmlns:r="http://schemas.openxmlformats.org/officeDocument/2006/relationships" xmlns:p="http://schemas.openxmlformats.org/presentationml/2006/main">
   <p:cSld>
     <p:spTree>
@@ -2792,7 +11199,7 @@
           <p:nvPr/>
         </p:nvPicPr>
         <p:blipFill>
-          <a:blip r:embed="rId2" cstate="print"/>
+          <a:blip r:embed="rId3" cstate="print"/>
           <a:stretch>
             <a:fillRect/>
           </a:stretch>
@@ -2963,7 +11370,7 @@
 </p:sld>
 </file>
 
-<file path=ppt/slides/slide5.xml><?xml version="1.0" encoding="utf-8"?>
+<file path=ppt/slides/slide4.xml><?xml version="1.0" encoding="utf-8"?>
 <p:sld xmlns:a="http://schemas.openxmlformats.org/drawingml/2006/main" xmlns:r="http://schemas.openxmlformats.org/officeDocument/2006/relationships" xmlns:p="http://schemas.openxmlformats.org/presentationml/2006/main">
   <p:cSld>
     <p:spTree>
@@ -4131,7 +12538,7 @@
 </p:sld>
 </file>
 
-<file path=ppt/slides/slide6.xml><?xml version="1.0" encoding="utf-8"?>
+<file path=ppt/slides/slide5.xml><?xml version="1.0" encoding="utf-8"?>
 <p:sld xmlns:a="http://schemas.openxmlformats.org/drawingml/2006/main" xmlns:r="http://schemas.openxmlformats.org/officeDocument/2006/relationships" xmlns:p="http://schemas.openxmlformats.org/presentationml/2006/main">
   <p:cSld>
     <p:spTree>
@@ -4326,7 +12733,7 @@
 </p:sld>
 </file>
 
-<file path=ppt/slides/slide7.xml><?xml version="1.0" encoding="utf-8"?>
+<file path=ppt/slides/slide6.xml><?xml version="1.0" encoding="utf-8"?>
 <p:sld xmlns:a="http://schemas.openxmlformats.org/drawingml/2006/main" xmlns:r="http://schemas.openxmlformats.org/officeDocument/2006/relationships" xmlns:p="http://schemas.openxmlformats.org/presentationml/2006/main">
   <p:cSld>
     <p:spTree>
@@ -5266,6 +13673,712 @@
         <p14:creationId xmlns:p14="http://schemas.microsoft.com/office/powerpoint/2010/main" val="602803590"/>
       </p:ext>
     </p:extLst>
+  </p:cSld>
+  <p:clrMapOvr>
+    <a:masterClrMapping/>
+  </p:clrMapOvr>
+</p:sld>
+</file>
+
+<file path=ppt/slides/slide7.xml><?xml version="1.0" encoding="utf-8"?>
+<p:sld xmlns:a="http://schemas.openxmlformats.org/drawingml/2006/main" xmlns:r="http://schemas.openxmlformats.org/officeDocument/2006/relationships" xmlns:p="http://schemas.openxmlformats.org/presentationml/2006/main">
+  <p:cSld>
+    <p:spTree>
+      <p:nvGrpSpPr>
+        <p:cNvPr id="1" name=""/>
+        <p:cNvGrpSpPr/>
+        <p:nvPr/>
+      </p:nvGrpSpPr>
+      <p:grpSpPr>
+        <a:xfrm>
+          <a:off x="0" y="0"/>
+          <a:ext cx="0" cy="0"/>
+          <a:chOff x="0" y="0"/>
+          <a:chExt cx="0" cy="0"/>
+        </a:xfrm>
+      </p:grpSpPr>
+      <p:sp>
+        <p:nvSpPr>
+          <p:cNvPr id="3" name="object 3"/>
+          <p:cNvSpPr txBox="1"/>
+          <p:nvPr/>
+        </p:nvSpPr>
+        <p:spPr>
+          <a:xfrm>
+            <a:off x="2169159" y="1424940"/>
+            <a:ext cx="7658100" cy="3449662"/>
+          </a:xfrm>
+          <a:prstGeom prst="rect">
+            <a:avLst/>
+          </a:prstGeom>
+        </p:spPr>
+        <p:txBody>
+          <a:bodyPr vert="horz" wrap="square" lIns="0" tIns="12700" rIns="0" bIns="0" rtlCol="0">
+            <a:spAutoFit/>
+          </a:bodyPr>
+          <a:lstStyle/>
+          <a:p>
+            <a:pPr marL="12701">
+              <a:lnSpc>
+                <a:spcPts val="3010"/>
+              </a:lnSpc>
+              <a:spcBef>
+                <a:spcPts val="100"/>
+              </a:spcBef>
+              <a:buClr>
+                <a:srgbClr val="2DA2BF"/>
+              </a:buClr>
+              <a:buSzPct val="69230"/>
+              <a:tabLst>
+                <a:tab pos="762000" algn="l"/>
+              </a:tabLst>
+            </a:pPr>
+            <a:r>
+              <a:rPr lang="en-GB" sz="3600" dirty="0"/>
+              <a:t>Initiate array</a:t>
+            </a:r>
+          </a:p>
+          <a:p>
+            <a:pPr marL="534035">
+              <a:lnSpc>
+                <a:spcPts val="3010"/>
+              </a:lnSpc>
+              <a:spcBef>
+                <a:spcPts val="100"/>
+              </a:spcBef>
+              <a:buClr>
+                <a:srgbClr val="DA1F28"/>
+              </a:buClr>
+              <a:tabLst>
+                <a:tab pos="762000" algn="l"/>
+              </a:tabLst>
+            </a:pPr>
+            <a:endParaRPr lang="da-DK" sz="2600" dirty="0">
+              <a:solidFill>
+                <a:srgbClr val="0000FF"/>
+              </a:solidFill>
+              <a:latin typeface="Monaco"/>
+              <a:cs typeface="Monaco"/>
+            </a:endParaRPr>
+          </a:p>
+          <a:p>
+            <a:pPr marL="534035">
+              <a:lnSpc>
+                <a:spcPts val="3010"/>
+              </a:lnSpc>
+              <a:spcBef>
+                <a:spcPts val="100"/>
+              </a:spcBef>
+              <a:buClr>
+                <a:srgbClr val="DA1F28"/>
+              </a:buClr>
+              <a:tabLst>
+                <a:tab pos="762000" algn="l"/>
+              </a:tabLst>
+            </a:pPr>
+            <a:endParaRPr lang="en-DK" sz="2600" dirty="0">
+              <a:solidFill>
+                <a:srgbClr val="0000FF"/>
+              </a:solidFill>
+              <a:latin typeface="Monaco"/>
+              <a:cs typeface="Monaco"/>
+            </a:endParaRPr>
+          </a:p>
+          <a:p>
+            <a:pPr marL="534035">
+              <a:lnSpc>
+                <a:spcPts val="3010"/>
+              </a:lnSpc>
+              <a:spcBef>
+                <a:spcPts val="100"/>
+              </a:spcBef>
+              <a:buClr>
+                <a:srgbClr val="DA1F28"/>
+              </a:buClr>
+              <a:tabLst>
+                <a:tab pos="762000" algn="l"/>
+              </a:tabLst>
+            </a:pPr>
+            <a:r>
+              <a:rPr sz="2600" dirty="0">
+                <a:solidFill>
+                  <a:srgbClr val="0000FF"/>
+                </a:solidFill>
+                <a:latin typeface="Monaco"/>
+                <a:cs typeface="Monaco"/>
+              </a:rPr>
+              <a:t>int</a:t>
+            </a:r>
+            <a:r>
+              <a:rPr sz="2600" dirty="0">
+                <a:latin typeface="Monaco"/>
+                <a:cs typeface="Monaco"/>
+              </a:rPr>
+              <a:t>[]</a:t>
+            </a:r>
+            <a:r>
+              <a:rPr sz="2600" spc="-25" dirty="0">
+                <a:latin typeface="Monaco"/>
+                <a:cs typeface="Monaco"/>
+              </a:rPr>
+              <a:t> </a:t>
+            </a:r>
+            <a:r>
+              <a:rPr sz="2600" dirty="0">
+                <a:latin typeface="Monaco"/>
+                <a:cs typeface="Monaco"/>
+              </a:rPr>
+              <a:t>c</a:t>
+            </a:r>
+            <a:r>
+              <a:rPr sz="2600" spc="-10" dirty="0">
+                <a:latin typeface="Monaco"/>
+                <a:cs typeface="Monaco"/>
+              </a:rPr>
+              <a:t> </a:t>
+            </a:r>
+            <a:r>
+              <a:rPr sz="2600" dirty="0">
+                <a:latin typeface="Monaco"/>
+                <a:cs typeface="Monaco"/>
+              </a:rPr>
+              <a:t>=</a:t>
+            </a:r>
+            <a:r>
+              <a:rPr sz="2600" spc="-15" dirty="0">
+                <a:latin typeface="Monaco"/>
+                <a:cs typeface="Monaco"/>
+              </a:rPr>
+              <a:t> </a:t>
+            </a:r>
+            <a:r>
+              <a:rPr sz="2600" dirty="0">
+                <a:solidFill>
+                  <a:srgbClr val="0000FF"/>
+                </a:solidFill>
+                <a:latin typeface="Monaco"/>
+                <a:cs typeface="Monaco"/>
+              </a:rPr>
+              <a:t>new</a:t>
+            </a:r>
+            <a:r>
+              <a:rPr sz="2600" spc="-10" dirty="0">
+                <a:solidFill>
+                  <a:srgbClr val="0000FF"/>
+                </a:solidFill>
+                <a:latin typeface="Monaco"/>
+                <a:cs typeface="Monaco"/>
+              </a:rPr>
+              <a:t> int</a:t>
+            </a:r>
+            <a:r>
+              <a:rPr sz="2600" spc="-10" dirty="0">
+                <a:latin typeface="Monaco"/>
+                <a:cs typeface="Monaco"/>
+              </a:rPr>
+              <a:t>[</a:t>
+            </a:r>
+            <a:r>
+              <a:rPr sz="2600" spc="-10" dirty="0">
+                <a:solidFill>
+                  <a:srgbClr val="128AFF"/>
+                </a:solidFill>
+                <a:latin typeface="Monaco"/>
+                <a:cs typeface="Monaco"/>
+              </a:rPr>
+              <a:t>12</a:t>
+            </a:r>
+            <a:r>
+              <a:rPr sz="2600" spc="-10" dirty="0">
+                <a:latin typeface="Monaco"/>
+                <a:cs typeface="Monaco"/>
+              </a:rPr>
+              <a:t>];</a:t>
+            </a:r>
+            <a:endParaRPr sz="2600" dirty="0">
+              <a:latin typeface="Monaco"/>
+              <a:cs typeface="Monaco"/>
+            </a:endParaRPr>
+          </a:p>
+          <a:p>
+            <a:pPr marL="268605" marR="5080" indent="-255904">
+              <a:lnSpc>
+                <a:spcPts val="2500"/>
+              </a:lnSpc>
+              <a:spcBef>
+                <a:spcPts val="490"/>
+              </a:spcBef>
+              <a:buClr>
+                <a:srgbClr val="2DA2BF"/>
+              </a:buClr>
+              <a:buSzPct val="69230"/>
+              <a:buFont typeface="Arial"/>
+              <a:buChar char="►"/>
+              <a:tabLst>
+                <a:tab pos="268605" algn="l"/>
+              </a:tabLst>
+            </a:pPr>
+            <a:endParaRPr lang="en-DK" sz="2600" dirty="0">
+              <a:latin typeface="Monaco"/>
+              <a:cs typeface="Times New Roman"/>
+            </a:endParaRPr>
+          </a:p>
+          <a:p>
+            <a:pPr marL="268605" marR="5080" indent="-255904">
+              <a:lnSpc>
+                <a:spcPts val="2500"/>
+              </a:lnSpc>
+              <a:spcBef>
+                <a:spcPts val="490"/>
+              </a:spcBef>
+              <a:buClr>
+                <a:srgbClr val="2DA2BF"/>
+              </a:buClr>
+              <a:buSzPct val="69230"/>
+              <a:buFont typeface="Arial"/>
+              <a:buChar char="►"/>
+              <a:tabLst>
+                <a:tab pos="268605" algn="l"/>
+              </a:tabLst>
+            </a:pPr>
+            <a:endParaRPr lang="en-DK" sz="2600" dirty="0">
+              <a:latin typeface="Monaco"/>
+              <a:cs typeface="Times New Roman"/>
+            </a:endParaRPr>
+          </a:p>
+          <a:p>
+            <a:pPr marL="268605" marR="5080" indent="-255904">
+              <a:lnSpc>
+                <a:spcPts val="2500"/>
+              </a:lnSpc>
+              <a:spcBef>
+                <a:spcPts val="490"/>
+              </a:spcBef>
+              <a:buClr>
+                <a:srgbClr val="2DA2BF"/>
+              </a:buClr>
+              <a:buSzPct val="69230"/>
+              <a:buFont typeface="Arial"/>
+              <a:buChar char="►"/>
+              <a:tabLst>
+                <a:tab pos="268605" algn="l"/>
+              </a:tabLst>
+            </a:pPr>
+            <a:r>
+              <a:rPr lang="en-GB" sz="2800" dirty="0"/>
+              <a:t>Java arrays are </a:t>
+            </a:r>
+            <a:r>
+              <a:rPr lang="en-GB" sz="2800" b="1" dirty="0"/>
+              <a:t>fixed in size</a:t>
+            </a:r>
+            <a:r>
+              <a:rPr lang="en-GB" sz="2800" dirty="0"/>
+              <a:t>, so once created, you </a:t>
+            </a:r>
+            <a:r>
+              <a:rPr lang="en-GB" sz="2800" b="1" dirty="0"/>
+              <a:t>cannot change its length</a:t>
+            </a:r>
+            <a:r>
+              <a:rPr lang="en-GB" sz="2800" dirty="0"/>
+              <a:t>.</a:t>
+            </a:r>
+          </a:p>
+          <a:p>
+            <a:pPr marL="268605" marR="5080" indent="-255904">
+              <a:lnSpc>
+                <a:spcPts val="2500"/>
+              </a:lnSpc>
+              <a:spcBef>
+                <a:spcPts val="490"/>
+              </a:spcBef>
+              <a:buClr>
+                <a:srgbClr val="2DA2BF"/>
+              </a:buClr>
+              <a:buSzPct val="69230"/>
+              <a:buFont typeface="Arial"/>
+              <a:buChar char="►"/>
+              <a:tabLst>
+                <a:tab pos="268605" algn="l"/>
+              </a:tabLst>
+            </a:pPr>
+            <a:endParaRPr lang="da-DK" sz="2600" dirty="0">
+              <a:latin typeface="Times New Roman"/>
+              <a:cs typeface="Times New Roman"/>
+            </a:endParaRPr>
+          </a:p>
+        </p:txBody>
+      </p:sp>
+      <p:sp>
+        <p:nvSpPr>
+          <p:cNvPr id="4" name="object 4"/>
+          <p:cNvSpPr txBox="1">
+            <a:spLocks noGrp="1"/>
+          </p:cNvSpPr>
+          <p:nvPr>
+            <p:ph type="ftr" sz="quarter" idx="5"/>
+          </p:nvPr>
+        </p:nvSpPr>
+        <p:spPr>
+          <a:xfrm>
+            <a:off x="6094476" y="6624399"/>
+            <a:ext cx="2407284" cy="256480"/>
+          </a:xfrm>
+          <a:prstGeom prst="rect">
+            <a:avLst/>
+          </a:prstGeom>
+        </p:spPr>
+        <p:txBody>
+          <a:bodyPr vert="horz" wrap="square" lIns="0" tIns="0" rIns="0" bIns="0" rtlCol="0">
+            <a:spAutoFit/>
+          </a:bodyPr>
+          <a:lstStyle/>
+          <a:p>
+            <a:pPr marR="5715" algn="r">
+              <a:lnSpc>
+                <a:spcPts val="1090"/>
+              </a:lnSpc>
+            </a:pPr>
+            <a:r>
+              <a:rPr spc="-10" dirty="0"/>
+              <a:t>©1992-</a:t>
+            </a:r>
+            <a:r>
+              <a:rPr dirty="0"/>
+              <a:t>2015</a:t>
+            </a:r>
+            <a:r>
+              <a:rPr spc="-20" dirty="0"/>
+              <a:t> </a:t>
+            </a:r>
+            <a:r>
+              <a:rPr dirty="0"/>
+              <a:t>by</a:t>
+            </a:r>
+            <a:r>
+              <a:rPr spc="-15" dirty="0"/>
+              <a:t> </a:t>
+            </a:r>
+            <a:r>
+              <a:rPr dirty="0"/>
+              <a:t>Pearson</a:t>
+            </a:r>
+            <a:r>
+              <a:rPr spc="-20" dirty="0"/>
+              <a:t> </a:t>
+            </a:r>
+            <a:r>
+              <a:rPr dirty="0"/>
+              <a:t>Education,</a:t>
+            </a:r>
+            <a:r>
+              <a:rPr spc="-20" dirty="0"/>
+              <a:t> Inc.</a:t>
+            </a:r>
+          </a:p>
+          <a:p>
+            <a:pPr marR="5080" algn="r"/>
+            <a:r>
+              <a:rPr dirty="0"/>
+              <a:t>All</a:t>
+            </a:r>
+            <a:r>
+              <a:rPr spc="-30" dirty="0"/>
+              <a:t> </a:t>
+            </a:r>
+            <a:r>
+              <a:rPr dirty="0"/>
+              <a:t>Rights</a:t>
+            </a:r>
+            <a:r>
+              <a:rPr spc="-25" dirty="0"/>
+              <a:t> </a:t>
+            </a:r>
+            <a:r>
+              <a:rPr spc="-10" dirty="0"/>
+              <a:t>Reserved.</a:t>
+            </a:r>
+          </a:p>
+        </p:txBody>
+      </p:sp>
+    </p:spTree>
+  </p:cSld>
+  <p:clrMapOvr>
+    <a:masterClrMapping/>
+  </p:clrMapOvr>
+</p:sld>
+</file>
+
+<file path=ppt/slides/slide8.xml><?xml version="1.0" encoding="utf-8"?>
+<p:sld xmlns:a="http://schemas.openxmlformats.org/drawingml/2006/main" xmlns:r="http://schemas.openxmlformats.org/officeDocument/2006/relationships" xmlns:p="http://schemas.openxmlformats.org/presentationml/2006/main">
+  <p:cSld>
+    <p:spTree>
+      <p:nvGrpSpPr>
+        <p:cNvPr id="1" name=""/>
+        <p:cNvGrpSpPr/>
+        <p:nvPr/>
+      </p:nvGrpSpPr>
+      <p:grpSpPr>
+        <a:xfrm>
+          <a:off x="0" y="0"/>
+          <a:ext cx="0" cy="0"/>
+          <a:chOff x="0" y="0"/>
+          <a:chExt cx="0" cy="0"/>
+        </a:xfrm>
+      </p:grpSpPr>
+      <p:sp>
+        <p:nvSpPr>
+          <p:cNvPr id="3" name="TextBox 2">
+            <a:extLst>
+              <a:ext uri="{FF2B5EF4-FFF2-40B4-BE49-F238E27FC236}">
+                <a16:creationId xmlns:a16="http://schemas.microsoft.com/office/drawing/2014/main" id="{D18D178F-0B00-E530-B746-36196C1F8D9D}"/>
+              </a:ext>
+            </a:extLst>
+          </p:cNvPr>
+          <p:cNvSpPr txBox="1"/>
+          <p:nvPr/>
+        </p:nvSpPr>
+        <p:spPr>
+          <a:xfrm>
+            <a:off x="3048000" y="3198168"/>
+            <a:ext cx="6096000" cy="830997"/>
+          </a:xfrm>
+          <a:prstGeom prst="rect">
+            <a:avLst/>
+          </a:prstGeom>
+          <a:noFill/>
+        </p:spPr>
+        <p:txBody>
+          <a:bodyPr wrap="square">
+            <a:spAutoFit/>
+          </a:bodyPr>
+          <a:lstStyle/>
+          <a:p>
+            <a:pPr rtl="0"/>
+            <a:r>
+              <a:rPr lang="en-DK" sz="2400" kern="1200" dirty="0">
+                <a:solidFill>
+                  <a:schemeClr val="tx1"/>
+                </a:solidFill>
+                <a:latin typeface="+mn-lt"/>
+                <a:ea typeface="+mn-ea"/>
+                <a:cs typeface="+mn-cs"/>
+              </a:rPr>
+              <a:t>int[] c;</a:t>
+            </a:r>
+          </a:p>
+          <a:p>
+            <a:pPr rtl="0"/>
+            <a:r>
+              <a:rPr lang="en-DK" sz="2400" kern="1200" dirty="0">
+                <a:solidFill>
+                  <a:schemeClr val="tx1"/>
+                </a:solidFill>
+                <a:latin typeface="+mn-lt"/>
+                <a:ea typeface="+mn-ea"/>
+                <a:cs typeface="+mn-cs"/>
+              </a:rPr>
+              <a:t>System.out.println(c.length); //Error</a:t>
+            </a:r>
+          </a:p>
+        </p:txBody>
+      </p:sp>
+      <p:sp>
+        <p:nvSpPr>
+          <p:cNvPr id="5" name="TextBox 4">
+            <a:extLst>
+              <a:ext uri="{FF2B5EF4-FFF2-40B4-BE49-F238E27FC236}">
+                <a16:creationId xmlns:a16="http://schemas.microsoft.com/office/drawing/2014/main" id="{74AA9CCF-6C8A-8EA7-EB58-1B869A248DF5}"/>
+              </a:ext>
+            </a:extLst>
+          </p:cNvPr>
+          <p:cNvSpPr txBox="1"/>
+          <p:nvPr/>
+        </p:nvSpPr>
+        <p:spPr>
+          <a:xfrm>
+            <a:off x="2819400" y="1600200"/>
+            <a:ext cx="6096000" cy="485902"/>
+          </a:xfrm>
+          <a:prstGeom prst="rect">
+            <a:avLst/>
+          </a:prstGeom>
+          <a:noFill/>
+        </p:spPr>
+        <p:txBody>
+          <a:bodyPr wrap="square">
+            <a:spAutoFit/>
+          </a:bodyPr>
+          <a:lstStyle/>
+          <a:p>
+            <a:pPr marL="12701">
+              <a:lnSpc>
+                <a:spcPts val="3010"/>
+              </a:lnSpc>
+              <a:spcBef>
+                <a:spcPts val="100"/>
+              </a:spcBef>
+              <a:buClr>
+                <a:srgbClr val="2DA2BF"/>
+              </a:buClr>
+              <a:buSzPct val="69230"/>
+              <a:tabLst>
+                <a:tab pos="762000" algn="l"/>
+              </a:tabLst>
+            </a:pPr>
+            <a:r>
+              <a:rPr lang="en-GB" sz="3600" dirty="0"/>
+              <a:t>What is the error in java</a:t>
+            </a:r>
+          </a:p>
+        </p:txBody>
+      </p:sp>
+    </p:spTree>
+    <p:extLst>
+      <p:ext uri="{BB962C8B-B14F-4D97-AF65-F5344CB8AC3E}">
+        <p14:creationId xmlns:p14="http://schemas.microsoft.com/office/powerpoint/2010/main" val="2283716893"/>
+      </p:ext>
+    </p:extLst>
+  </p:cSld>
+  <p:clrMapOvr>
+    <a:masterClrMapping/>
+  </p:clrMapOvr>
+</p:sld>
+</file>
+
+<file path=ppt/slides/slide9.xml><?xml version="1.0" encoding="utf-8"?>
+<p:sld xmlns:a="http://schemas.openxmlformats.org/drawingml/2006/main" xmlns:r="http://schemas.openxmlformats.org/officeDocument/2006/relationships" xmlns:p="http://schemas.openxmlformats.org/presentationml/2006/main">
+  <p:cSld>
+    <p:spTree>
+      <p:nvGrpSpPr>
+        <p:cNvPr id="1" name=""/>
+        <p:cNvGrpSpPr/>
+        <p:nvPr/>
+      </p:nvGrpSpPr>
+      <p:grpSpPr>
+        <a:xfrm>
+          <a:off x="0" y="0"/>
+          <a:ext cx="0" cy="0"/>
+          <a:chOff x="0" y="0"/>
+          <a:chExt cx="0" cy="0"/>
+        </a:xfrm>
+      </p:grpSpPr>
+      <p:pic>
+        <p:nvPicPr>
+          <p:cNvPr id="2" name="object 2"/>
+          <p:cNvPicPr/>
+          <p:nvPr/>
+        </p:nvPicPr>
+        <p:blipFill>
+          <a:blip r:embed="rId2" cstate="print"/>
+          <a:stretch>
+            <a:fillRect/>
+          </a:stretch>
+        </p:blipFill>
+        <p:spPr>
+          <a:xfrm>
+            <a:off x="1524000" y="652463"/>
+            <a:ext cx="9144000" cy="5551486"/>
+          </a:xfrm>
+          <a:prstGeom prst="rect">
+            <a:avLst/>
+          </a:prstGeom>
+        </p:spPr>
+      </p:pic>
+      <p:sp>
+        <p:nvSpPr>
+          <p:cNvPr id="3" name="object 3"/>
+          <p:cNvSpPr txBox="1">
+            <a:spLocks noGrp="1"/>
+          </p:cNvSpPr>
+          <p:nvPr>
+            <p:ph type="ftr" sz="quarter" idx="5"/>
+          </p:nvPr>
+        </p:nvSpPr>
+        <p:spPr>
+          <a:xfrm>
+            <a:off x="6094476" y="6624399"/>
+            <a:ext cx="2407284" cy="256480"/>
+          </a:xfrm>
+          <a:prstGeom prst="rect">
+            <a:avLst/>
+          </a:prstGeom>
+        </p:spPr>
+        <p:txBody>
+          <a:bodyPr vert="horz" wrap="square" lIns="0" tIns="0" rIns="0" bIns="0" rtlCol="0">
+            <a:spAutoFit/>
+          </a:bodyPr>
+          <a:lstStyle/>
+          <a:p>
+            <a:pPr marR="5715" algn="r">
+              <a:lnSpc>
+                <a:spcPts val="1090"/>
+              </a:lnSpc>
+            </a:pPr>
+            <a:r>
+              <a:rPr spc="-10" dirty="0"/>
+              <a:t>©1992-</a:t>
+            </a:r>
+            <a:r>
+              <a:rPr dirty="0"/>
+              <a:t>2015</a:t>
+            </a:r>
+            <a:r>
+              <a:rPr spc="-20" dirty="0"/>
+              <a:t> </a:t>
+            </a:r>
+            <a:r>
+              <a:rPr dirty="0"/>
+              <a:t>by</a:t>
+            </a:r>
+            <a:r>
+              <a:rPr spc="-15" dirty="0"/>
+              <a:t> </a:t>
+            </a:r>
+            <a:r>
+              <a:rPr dirty="0"/>
+              <a:t>Pearson</a:t>
+            </a:r>
+            <a:r>
+              <a:rPr spc="-20" dirty="0"/>
+              <a:t> </a:t>
+            </a:r>
+            <a:r>
+              <a:rPr dirty="0"/>
+              <a:t>Education,</a:t>
+            </a:r>
+            <a:r>
+              <a:rPr spc="-20" dirty="0"/>
+              <a:t> Inc.</a:t>
+            </a:r>
+          </a:p>
+          <a:p>
+            <a:pPr marR="5080" algn="r"/>
+            <a:r>
+              <a:rPr dirty="0"/>
+              <a:t>All</a:t>
+            </a:r>
+            <a:r>
+              <a:rPr spc="-30" dirty="0"/>
+              <a:t> </a:t>
+            </a:r>
+            <a:r>
+              <a:rPr dirty="0"/>
+              <a:t>Rights</a:t>
+            </a:r>
+            <a:r>
+              <a:rPr spc="-25" dirty="0"/>
+              <a:t> </a:t>
+            </a:r>
+            <a:r>
+              <a:rPr spc="-10" dirty="0"/>
+              <a:t>Reserved.</a:t>
+            </a:r>
+          </a:p>
+        </p:txBody>
+      </p:sp>
+    </p:spTree>
   </p:cSld>
   <p:clrMapOvr>
     <a:masterClrMapping/>
@@ -5872,6 +14985,21 @@
 </file>
 
 <file path=customXml/item1.xml><?xml version="1.0" encoding="utf-8"?>
+<?mso-contentType ?>
+<FormTemplates xmlns="http://schemas.microsoft.com/sharepoint/v3/contenttype/forms">
+  <Display>DocumentLibraryForm</Display>
+  <Edit>DocumentLibraryForm</Edit>
+  <New>DocumentLibraryForm</New>
+</FormTemplates>
+</file>
+
+<file path=customXml/item2.xml><?xml version="1.0" encoding="utf-8"?>
+<p:properties xmlns:p="http://schemas.microsoft.com/office/2006/metadata/properties" xmlns:xsi="http://www.w3.org/2001/XMLSchema-instance" xmlns:pc="http://schemas.microsoft.com/office/infopath/2007/PartnerControls">
+  <documentManagement/>
+</p:properties>
+</file>
+
+<file path=customXml/item3.xml><?xml version="1.0" encoding="utf-8"?>
 <ct:contentTypeSchema xmlns:ct="http://schemas.microsoft.com/office/2006/metadata/contentType" xmlns:ma="http://schemas.microsoft.com/office/2006/metadata/properties/metaAttributes" ct:_="" ma:_="" ma:contentTypeName="Document" ma:contentTypeID="0x010100E57D341C545B0A44A26A103333756E90" ma:contentTypeVersion="3" ma:contentTypeDescription="Create a new document." ma:contentTypeScope="" ma:versionID="a6ec9fbdc07486795f51e30fe74f98ab">
   <xsd:schema xmlns:xsd="http://www.w3.org/2001/XMLSchema" xmlns:xs="http://www.w3.org/2001/XMLSchema" xmlns:p="http://schemas.microsoft.com/office/2006/metadata/properties" xmlns:ns2="324ab4a6-501d-4b19-a031-862034374e5f" targetNamespace="http://schemas.microsoft.com/office/2006/metadata/properties" ma:root="true" ma:fieldsID="af1894268a3b1d0258822da1f8692495" ns2:_="">
     <xsd:import namespace="324ab4a6-501d-4b19-a031-862034374e5f"/>
@@ -6009,22 +15137,24 @@
 </ct:contentTypeSchema>
 </file>
 
-<file path=customXml/item2.xml><?xml version="1.0" encoding="utf-8"?>
-<?mso-contentType ?>
-<FormTemplates xmlns="http://schemas.microsoft.com/sharepoint/v3/contenttype/forms">
-  <Display>DocumentLibraryForm</Display>
-  <Edit>DocumentLibraryForm</Edit>
-  <New>DocumentLibraryForm</New>
-</FormTemplates>
+<file path=customXml/itemProps1.xml><?xml version="1.0" encoding="utf-8"?>
+<ds:datastoreItem xmlns:ds="http://schemas.openxmlformats.org/officeDocument/2006/customXml" ds:itemID="{77646C84-701A-4061-B977-6AA8F23187E4}">
+  <ds:schemaRefs>
+    <ds:schemaRef ds:uri="http://schemas.microsoft.com/sharepoint/v3/contenttype/forms"/>
+  </ds:schemaRefs>
+</ds:datastoreItem>
 </file>
 
-<file path=customXml/item3.xml><?xml version="1.0" encoding="utf-8"?>
-<p:properties xmlns:p="http://schemas.microsoft.com/office/2006/metadata/properties" xmlns:xsi="http://www.w3.org/2001/XMLSchema-instance" xmlns:pc="http://schemas.microsoft.com/office/infopath/2007/PartnerControls">
-  <documentManagement/>
-</p:properties>
+<file path=customXml/itemProps2.xml><?xml version="1.0" encoding="utf-8"?>
+<ds:datastoreItem xmlns:ds="http://schemas.openxmlformats.org/officeDocument/2006/customXml" ds:itemID="{551C73E0-21DE-44C0-AC09-20B6FA27554C}">
+  <ds:schemaRefs>
+    <ds:schemaRef ds:uri="http://schemas.microsoft.com/office/2006/metadata/properties"/>
+    <ds:schemaRef ds:uri="http://schemas.microsoft.com/office/infopath/2007/PartnerControls"/>
+  </ds:schemaRefs>
+</ds:datastoreItem>
 </file>
 
-<file path=customXml/itemProps1.xml><?xml version="1.0" encoding="utf-8"?>
+<file path=customXml/itemProps3.xml><?xml version="1.0" encoding="utf-8"?>
 <ds:datastoreItem xmlns:ds="http://schemas.openxmlformats.org/officeDocument/2006/customXml" ds:itemID="{DDC95283-C95E-4740-9B60-A5D5E7C0A0D2}">
   <ds:schemaRefs>
     <ds:schemaRef ds:uri="http://schemas.microsoft.com/office/2006/metadata/contentType"/>
@@ -6040,21 +15170,4 @@
     <ds:schemaRef ds:uri="http://schemas.microsoft.com/internal/obd"/>
   </ds:schemaRefs>
 </ds:datastoreItem>
-</file>
-
-<file path=customXml/itemProps2.xml><?xml version="1.0" encoding="utf-8"?>
-<ds:datastoreItem xmlns:ds="http://schemas.openxmlformats.org/officeDocument/2006/customXml" ds:itemID="{77646C84-701A-4061-B977-6AA8F23187E4}">
-  <ds:schemaRefs>
-    <ds:schemaRef ds:uri="http://schemas.microsoft.com/sharepoint/v3/contenttype/forms"/>
-  </ds:schemaRefs>
-</ds:datastoreItem>
-</file>
-
-<file path=customXml/itemProps3.xml><?xml version="1.0" encoding="utf-8"?>
-<ds:datastoreItem xmlns:ds="http://schemas.openxmlformats.org/officeDocument/2006/customXml" ds:itemID="{551C73E0-21DE-44C0-AC09-20B6FA27554C}">
-  <ds:schemaRefs>
-    <ds:schemaRef ds:uri="http://schemas.microsoft.com/office/2006/metadata/properties"/>
-    <ds:schemaRef ds:uri="http://schemas.microsoft.com/office/infopath/2007/PartnerControls"/>
-  </ds:schemaRefs>
-</ds:datastoreItem>
 </file>
--- a/ppt/uge40LoopsPartII.pptx
+++ b/ppt/uge40LoopsPartII.pptx
@@ -5,29 +5,30 @@
     <p:sldMasterId id="2147483648" r:id="rId4"/>
   </p:sldMasterIdLst>
   <p:notesMasterIdLst>
-    <p:notesMasterId r:id="rId25"/>
+    <p:notesMasterId r:id="rId26"/>
   </p:notesMasterIdLst>
   <p:sldIdLst>
     <p:sldId id="256" r:id="rId5"/>
     <p:sldId id="257" r:id="rId6"/>
-    <p:sldId id="278" r:id="rId7"/>
-    <p:sldId id="279" r:id="rId8"/>
-    <p:sldId id="280" r:id="rId9"/>
-    <p:sldId id="277" r:id="rId10"/>
-    <p:sldId id="263" r:id="rId11"/>
-    <p:sldId id="429" r:id="rId12"/>
-    <p:sldId id="264" r:id="rId13"/>
-    <p:sldId id="265" r:id="rId14"/>
-    <p:sldId id="419" r:id="rId15"/>
-    <p:sldId id="420" r:id="rId16"/>
-    <p:sldId id="421" r:id="rId17"/>
-    <p:sldId id="423" r:id="rId18"/>
-    <p:sldId id="424" r:id="rId19"/>
-    <p:sldId id="418" r:id="rId20"/>
-    <p:sldId id="426" r:id="rId21"/>
-    <p:sldId id="428" r:id="rId22"/>
-    <p:sldId id="286" r:id="rId23"/>
-    <p:sldId id="430" r:id="rId24"/>
+    <p:sldId id="1130" r:id="rId7"/>
+    <p:sldId id="278" r:id="rId8"/>
+    <p:sldId id="279" r:id="rId9"/>
+    <p:sldId id="280" r:id="rId10"/>
+    <p:sldId id="277" r:id="rId11"/>
+    <p:sldId id="263" r:id="rId12"/>
+    <p:sldId id="429" r:id="rId13"/>
+    <p:sldId id="264" r:id="rId14"/>
+    <p:sldId id="265" r:id="rId15"/>
+    <p:sldId id="419" r:id="rId16"/>
+    <p:sldId id="420" r:id="rId17"/>
+    <p:sldId id="421" r:id="rId18"/>
+    <p:sldId id="423" r:id="rId19"/>
+    <p:sldId id="424" r:id="rId20"/>
+    <p:sldId id="418" r:id="rId21"/>
+    <p:sldId id="426" r:id="rId22"/>
+    <p:sldId id="428" r:id="rId23"/>
+    <p:sldId id="286" r:id="rId24"/>
+    <p:sldId id="430" r:id="rId25"/>
   </p:sldIdLst>
   <p:sldSz cx="12192000" cy="6858000"/>
   <p:notesSz cx="12192000" cy="6858000"/>
@@ -43,6 +44,11 @@
           <p14:sldIdLst>
             <p14:sldId id="256"/>
             <p14:sldId id="257"/>
+            <p14:sldId id="1130"/>
+          </p14:sldIdLst>
+        </p14:section>
+        <p14:section name="break and continue" id="{F2CACFE0-96EF-0E48-9FC1-BACB624D87C2}">
+          <p14:sldIdLst>
             <p14:sldId id="278"/>
             <p14:sldId id="279"/>
             <p14:sldId id="280"/>
@@ -526,7 +532,7 @@
           <a:p>
             <a:fld id="{7D8C4A44-45A6-9047-80DD-6777D98D193C}" type="slidenum">
               <a:rPr lang="en-DK" smtClean="0"/>
-              <a:t>3</a:t>
+              <a:t>4</a:t>
             </a:fld>
             <a:endParaRPr lang="en-DK"/>
           </a:p>
@@ -695,7 +701,7 @@
           <a:p>
             <a:fld id="{7D8C4A44-45A6-9047-80DD-6777D98D193C}" type="slidenum">
               <a:rPr lang="en-DK" smtClean="0"/>
-              <a:t>7</a:t>
+              <a:t>8</a:t>
             </a:fld>
             <a:endParaRPr lang="en-DK"/>
           </a:p>
@@ -834,7 +840,7 @@
                 <a:cs typeface="Arial"/>
                 <a:sym typeface="Arial"/>
               </a:rPr>
-              <a:t>11</a:t>
+              <a:t>12</a:t>
             </a:fld>
             <a:endParaRPr lang="en-US" sz="1200" b="0" i="0" u="none" strike="noStrike" cap="none" dirty="0">
               <a:solidFill>
@@ -945,7 +951,7 @@
                 <a:cs typeface="Arial"/>
                 <a:sym typeface="Arial"/>
               </a:rPr>
-              <a:t>12</a:t>
+              <a:t>13</a:t>
             </a:fld>
             <a:endParaRPr lang="en-US" sz="1200" b="0" i="0" u="none" strike="noStrike" cap="none" dirty="0">
               <a:solidFill>
@@ -1074,7 +1080,7 @@
                 <a:cs typeface="Arial"/>
                 <a:sym typeface="Arial"/>
               </a:rPr>
-              <a:t>13</a:t>
+              <a:t>14</a:t>
             </a:fld>
             <a:endParaRPr lang="en-US" sz="1200" b="0" i="0" u="none" strike="noStrike" cap="none" dirty="0">
               <a:solidFill>
@@ -1211,7 +1217,7 @@
                 <a:cs typeface="Arial"/>
                 <a:sym typeface="Arial"/>
               </a:rPr>
-              <a:t>15</a:t>
+              <a:t>16</a:t>
             </a:fld>
             <a:endParaRPr lang="en-US" sz="1200" b="0" i="0" u="none" strike="noStrike" cap="none" dirty="0">
               <a:solidFill>
@@ -1303,7 +1309,7 @@
           <a:p>
             <a:fld id="{7D8C4A44-45A6-9047-80DD-6777D98D193C}" type="slidenum">
               <a:rPr lang="en-DK" smtClean="0"/>
-              <a:t>16</a:t>
+              <a:t>17</a:t>
             </a:fld>
             <a:endParaRPr lang="en-DK"/>
           </a:p>
@@ -2030,6 +2036,426 @@
   <p:clrMapOvr>
     <a:masterClrMapping/>
   </p:clrMapOvr>
+</p:sldLayout>
+</file>
+
+<file path=ppt/slideLayouts/slideLayout11.xml><?xml version="1.0" encoding="utf-8"?>
+<p:sldLayout xmlns:a="http://schemas.openxmlformats.org/drawingml/2006/main" xmlns:r="http://schemas.openxmlformats.org/officeDocument/2006/relationships" xmlns:p="http://schemas.openxmlformats.org/presentationml/2006/main" userDrawn="1">
+  <p:cSld name="4_Title and Content">
+    <p:spTree>
+      <p:nvGrpSpPr>
+        <p:cNvPr id="1" name="Shape 30"/>
+        <p:cNvGrpSpPr/>
+        <p:nvPr/>
+      </p:nvGrpSpPr>
+      <p:grpSpPr>
+        <a:xfrm>
+          <a:off x="0" y="0"/>
+          <a:ext cx="0" cy="0"/>
+          <a:chOff x="0" y="0"/>
+          <a:chExt cx="0" cy="0"/>
+        </a:xfrm>
+      </p:grpSpPr>
+      <p:sp>
+        <p:nvSpPr>
+          <p:cNvPr id="31" name="Title Placeholder"/>
+          <p:cNvSpPr txBox="1">
+            <a:spLocks noGrp="1"/>
+          </p:cNvSpPr>
+          <p:nvPr>
+            <p:ph type="title"/>
+          </p:nvPr>
+        </p:nvSpPr>
+        <p:spPr>
+          <a:xfrm>
+            <a:off x="609600" y="574017"/>
+            <a:ext cx="10972800" cy="738633"/>
+          </a:xfrm>
+          <a:prstGeom prst="rect">
+            <a:avLst/>
+          </a:prstGeom>
+          <a:noFill/>
+          <a:ln>
+            <a:noFill/>
+          </a:ln>
+        </p:spPr>
+        <p:txBody>
+          <a:bodyPr lIns="91425" tIns="91425" rIns="91425" bIns="91425" anchor="b" anchorCtr="0"/>
+          <a:lstStyle>
+            <a:lvl1pPr marL="0" marR="0" lvl="0" indent="0" algn="l" rtl="0">
+              <a:lnSpc>
+                <a:spcPct val="100000"/>
+              </a:lnSpc>
+              <a:spcBef>
+                <a:spcPts val="0"/>
+              </a:spcBef>
+              <a:buClr>
+                <a:srgbClr val="007FA3"/>
+              </a:buClr>
+              <a:buFont typeface="Times New Roman"/>
+              <a:buNone/>
+              <a:defRPr sz="3600" b="1" i="0" u="none" strike="noStrike" cap="none">
+                <a:solidFill>
+                  <a:srgbClr val="007FA3"/>
+                </a:solidFill>
+                <a:latin typeface="+mj-lt"/>
+                <a:ea typeface="Times New Roman"/>
+                <a:cs typeface="Times New Roman"/>
+                <a:sym typeface="Times New Roman"/>
+              </a:defRPr>
+            </a:lvl1pPr>
+            <a:lvl2pPr lvl="1" indent="0">
+              <a:spcBef>
+                <a:spcPts val="0"/>
+              </a:spcBef>
+              <a:buNone/>
+              <a:defRPr sz="1800"/>
+            </a:lvl2pPr>
+            <a:lvl3pPr lvl="2" indent="0">
+              <a:spcBef>
+                <a:spcPts val="0"/>
+              </a:spcBef>
+              <a:buNone/>
+              <a:defRPr sz="1800"/>
+            </a:lvl3pPr>
+            <a:lvl4pPr lvl="3" indent="0">
+              <a:spcBef>
+                <a:spcPts val="0"/>
+              </a:spcBef>
+              <a:buNone/>
+              <a:defRPr sz="1800"/>
+            </a:lvl4pPr>
+            <a:lvl5pPr lvl="4" indent="0">
+              <a:spcBef>
+                <a:spcPts val="0"/>
+              </a:spcBef>
+              <a:buNone/>
+              <a:defRPr sz="1800"/>
+            </a:lvl5pPr>
+            <a:lvl6pPr lvl="5" indent="0">
+              <a:spcBef>
+                <a:spcPts val="0"/>
+              </a:spcBef>
+              <a:buNone/>
+              <a:defRPr sz="1800"/>
+            </a:lvl6pPr>
+            <a:lvl7pPr lvl="6" indent="0">
+              <a:spcBef>
+                <a:spcPts val="0"/>
+              </a:spcBef>
+              <a:buNone/>
+              <a:defRPr sz="1800"/>
+            </a:lvl7pPr>
+            <a:lvl8pPr lvl="7" indent="0">
+              <a:spcBef>
+                <a:spcPts val="0"/>
+              </a:spcBef>
+              <a:buNone/>
+              <a:defRPr sz="1800"/>
+            </a:lvl8pPr>
+            <a:lvl9pPr lvl="8" indent="0">
+              <a:spcBef>
+                <a:spcPts val="0"/>
+              </a:spcBef>
+              <a:buNone/>
+              <a:defRPr sz="1800"/>
+            </a:lvl9pPr>
+          </a:lstStyle>
+          <a:p>
+            <a:endParaRPr dirty="0"/>
+          </a:p>
+        </p:txBody>
+      </p:sp>
+      <p:sp>
+        <p:nvSpPr>
+          <p:cNvPr id="8" name="Content Placeholder 7">
+            <a:extLst>
+              <a:ext uri="{FF2B5EF4-FFF2-40B4-BE49-F238E27FC236}">
+                <a16:creationId xmlns:a16="http://schemas.microsoft.com/office/drawing/2014/main" id="{82CB7AFE-9851-46A0-B2FB-0A5EE6AEFCA6}"/>
+              </a:ext>
+            </a:extLst>
+          </p:cNvPr>
+          <p:cNvSpPr>
+            <a:spLocks noGrp="1"/>
+          </p:cNvSpPr>
+          <p:nvPr>
+            <p:ph sz="quarter" idx="13" hasCustomPrompt="1"/>
+          </p:nvPr>
+        </p:nvSpPr>
+        <p:spPr>
+          <a:xfrm>
+            <a:off x="609600" y="1552575"/>
+            <a:ext cx="5322627" cy="276999"/>
+          </a:xfrm>
+        </p:spPr>
+        <p:txBody>
+          <a:bodyPr/>
+          <a:lstStyle>
+            <a:lvl1pPr>
+              <a:defRPr/>
+            </a:lvl1pPr>
+          </a:lstStyle>
+          <a:p>
+            <a:pPr lvl="0"/>
+            <a:r>
+              <a:rPr lang="en-US" dirty="0"/>
+              <a:t>Click to add text</a:t>
+            </a:r>
+          </a:p>
+        </p:txBody>
+      </p:sp>
+      <p:sp>
+        <p:nvSpPr>
+          <p:cNvPr id="35" name="Shape 35"/>
+          <p:cNvSpPr txBox="1">
+            <a:spLocks noGrp="1"/>
+          </p:cNvSpPr>
+          <p:nvPr>
+            <p:ph type="dt" idx="10"/>
+          </p:nvPr>
+        </p:nvSpPr>
+        <p:spPr>
+          <a:xfrm>
+            <a:off x="8447617" y="42943"/>
+            <a:ext cx="2844799" cy="323135"/>
+          </a:xfrm>
+          <a:prstGeom prst="rect">
+            <a:avLst/>
+          </a:prstGeom>
+          <a:noFill/>
+          <a:ln>
+            <a:noFill/>
+          </a:ln>
+        </p:spPr>
+        <p:txBody>
+          <a:bodyPr lIns="91425" tIns="91425" rIns="91425" bIns="91425" anchor="ctr" anchorCtr="0"/>
+          <a:lstStyle>
+            <a:lvl1pPr marL="0" marR="0" lvl="0" indent="0" algn="r" rtl="0">
+              <a:spcBef>
+                <a:spcPts val="0"/>
+              </a:spcBef>
+              <a:buNone/>
+              <a:defRPr sz="900" b="0" i="0" u="none" strike="noStrike" cap="none">
+                <a:solidFill>
+                  <a:schemeClr val="lt1"/>
+                </a:solidFill>
+                <a:latin typeface="Arial"/>
+                <a:ea typeface="Arial"/>
+                <a:cs typeface="Arial"/>
+                <a:sym typeface="Arial"/>
+              </a:defRPr>
+            </a:lvl1pPr>
+            <a:lvl2pPr marL="457200" marR="0" lvl="1" indent="0" algn="l" rtl="0">
+              <a:spcBef>
+                <a:spcPts val="0"/>
+              </a:spcBef>
+              <a:buNone/>
+              <a:defRPr sz="1800" b="0" i="0" u="none" strike="noStrike" cap="none">
+                <a:solidFill>
+                  <a:schemeClr val="dk1"/>
+                </a:solidFill>
+                <a:latin typeface="Arial"/>
+                <a:ea typeface="Arial"/>
+                <a:cs typeface="Arial"/>
+                <a:sym typeface="Arial"/>
+              </a:defRPr>
+            </a:lvl2pPr>
+            <a:lvl3pPr marL="914400" marR="0" lvl="2" indent="0" algn="l" rtl="0">
+              <a:spcBef>
+                <a:spcPts val="0"/>
+              </a:spcBef>
+              <a:buNone/>
+              <a:defRPr sz="1800" b="0" i="0" u="none" strike="noStrike" cap="none">
+                <a:solidFill>
+                  <a:schemeClr val="dk1"/>
+                </a:solidFill>
+                <a:latin typeface="Arial"/>
+                <a:ea typeface="Arial"/>
+                <a:cs typeface="Arial"/>
+                <a:sym typeface="Arial"/>
+              </a:defRPr>
+            </a:lvl3pPr>
+            <a:lvl4pPr marL="1371600" marR="0" lvl="3" indent="0" algn="l" rtl="0">
+              <a:spcBef>
+                <a:spcPts val="0"/>
+              </a:spcBef>
+              <a:buNone/>
+              <a:defRPr sz="1800" b="0" i="0" u="none" strike="noStrike" cap="none">
+                <a:solidFill>
+                  <a:schemeClr val="dk1"/>
+                </a:solidFill>
+                <a:latin typeface="Arial"/>
+                <a:ea typeface="Arial"/>
+                <a:cs typeface="Arial"/>
+                <a:sym typeface="Arial"/>
+              </a:defRPr>
+            </a:lvl4pPr>
+            <a:lvl5pPr marL="1828800" marR="0" lvl="4" indent="0" algn="l" rtl="0">
+              <a:spcBef>
+                <a:spcPts val="0"/>
+              </a:spcBef>
+              <a:buNone/>
+              <a:defRPr sz="1800" b="0" i="0" u="none" strike="noStrike" cap="none">
+                <a:solidFill>
+                  <a:schemeClr val="dk1"/>
+                </a:solidFill>
+                <a:latin typeface="Arial"/>
+                <a:ea typeface="Arial"/>
+                <a:cs typeface="Arial"/>
+                <a:sym typeface="Arial"/>
+              </a:defRPr>
+            </a:lvl5pPr>
+            <a:lvl6pPr marL="2286000" marR="0" lvl="5" indent="0" algn="l" rtl="0">
+              <a:spcBef>
+                <a:spcPts val="0"/>
+              </a:spcBef>
+              <a:buNone/>
+              <a:defRPr sz="1800" b="0" i="0" u="none" strike="noStrike" cap="none">
+                <a:solidFill>
+                  <a:schemeClr val="dk1"/>
+                </a:solidFill>
+                <a:latin typeface="Arial"/>
+                <a:ea typeface="Arial"/>
+                <a:cs typeface="Arial"/>
+                <a:sym typeface="Arial"/>
+              </a:defRPr>
+            </a:lvl6pPr>
+            <a:lvl7pPr marL="2743200" marR="0" lvl="6" indent="0" algn="l" rtl="0">
+              <a:spcBef>
+                <a:spcPts val="0"/>
+              </a:spcBef>
+              <a:buNone/>
+              <a:defRPr sz="1800" b="0" i="0" u="none" strike="noStrike" cap="none">
+                <a:solidFill>
+                  <a:schemeClr val="dk1"/>
+                </a:solidFill>
+                <a:latin typeface="Arial"/>
+                <a:ea typeface="Arial"/>
+                <a:cs typeface="Arial"/>
+                <a:sym typeface="Arial"/>
+              </a:defRPr>
+            </a:lvl7pPr>
+            <a:lvl8pPr marL="3200400" marR="0" lvl="7" indent="0" algn="l" rtl="0">
+              <a:spcBef>
+                <a:spcPts val="0"/>
+              </a:spcBef>
+              <a:buNone/>
+              <a:defRPr sz="1800" b="0" i="0" u="none" strike="noStrike" cap="none">
+                <a:solidFill>
+                  <a:schemeClr val="dk1"/>
+                </a:solidFill>
+                <a:latin typeface="Arial"/>
+                <a:ea typeface="Arial"/>
+                <a:cs typeface="Arial"/>
+                <a:sym typeface="Arial"/>
+              </a:defRPr>
+            </a:lvl8pPr>
+            <a:lvl9pPr marL="3657600" marR="0" lvl="8" indent="0" algn="l" rtl="0">
+              <a:spcBef>
+                <a:spcPts val="0"/>
+              </a:spcBef>
+              <a:buNone/>
+              <a:defRPr sz="1800" b="0" i="0" u="none" strike="noStrike" cap="none">
+                <a:solidFill>
+                  <a:schemeClr val="dk1"/>
+                </a:solidFill>
+                <a:latin typeface="Arial"/>
+                <a:ea typeface="Arial"/>
+                <a:cs typeface="Arial"/>
+                <a:sym typeface="Arial"/>
+              </a:defRPr>
+            </a:lvl9pPr>
+          </a:lstStyle>
+          <a:p>
+            <a:endParaRPr/>
+          </a:p>
+        </p:txBody>
+      </p:sp>
+      <p:sp>
+        <p:nvSpPr>
+          <p:cNvPr id="36" name="Shape 36"/>
+          <p:cNvSpPr txBox="1">
+            <a:spLocks noGrp="1"/>
+          </p:cNvSpPr>
+          <p:nvPr>
+            <p:ph type="sldNum" idx="12"/>
+          </p:nvPr>
+        </p:nvSpPr>
+        <p:spPr>
+          <a:xfrm>
+            <a:off x="11292415" y="113071"/>
+            <a:ext cx="735711" cy="182879"/>
+          </a:xfrm>
+          <a:prstGeom prst="rect">
+            <a:avLst/>
+          </a:prstGeom>
+          <a:noFill/>
+          <a:ln>
+            <a:noFill/>
+          </a:ln>
+        </p:spPr>
+        <p:txBody>
+          <a:bodyPr lIns="91425" tIns="45700" rIns="91425" bIns="45700" anchor="ctr" anchorCtr="0">
+            <a:noAutofit/>
+          </a:bodyPr>
+          <a:lstStyle/>
+          <a:p>
+            <a:pPr rtl="0">
+              <a:buSzPct val="25000"/>
+            </a:pPr>
+            <a:fld id="{00000000-1234-1234-1234-123412341234}" type="slidenum">
+              <a:rPr lang="en-US" sz="900" smtClean="0">
+                <a:solidFill>
+                  <a:schemeClr val="lt1"/>
+                </a:solidFill>
+                <a:latin typeface="Arial"/>
+                <a:ea typeface="Arial"/>
+                <a:cs typeface="Arial"/>
+                <a:sym typeface="Arial"/>
+              </a:rPr>
+              <a:pPr rtl="0">
+                <a:buSzPct val="25000"/>
+              </a:pPr>
+              <a:t>‹#›</a:t>
+            </a:fld>
+            <a:endParaRPr lang="en-US" sz="900">
+              <a:solidFill>
+                <a:schemeClr val="lt1"/>
+              </a:solidFill>
+              <a:latin typeface="Arial"/>
+              <a:ea typeface="Arial"/>
+              <a:cs typeface="Arial"/>
+              <a:sym typeface="Arial"/>
+            </a:endParaRPr>
+          </a:p>
+        </p:txBody>
+      </p:sp>
+    </p:spTree>
+    <p:extLst>
+      <p:ext uri="{BB962C8B-B14F-4D97-AF65-F5344CB8AC3E}">
+        <p14:creationId xmlns:p14="http://schemas.microsoft.com/office/powerpoint/2010/main" val="1473479562"/>
+      </p:ext>
+    </p:extLst>
+  </p:cSld>
+  <p:clrMapOvr>
+    <a:masterClrMapping/>
+  </p:clrMapOvr>
+  <p:extLst>
+    <p:ext uri="{DCECCB84-F9BA-43D5-87BE-67443E8EF086}">
+      <p15:sldGuideLst xmlns:p15="http://schemas.microsoft.com/office/powerpoint/2012/main">
+        <p15:guide id="1" orient="horz" pos="2160">
+          <p15:clr>
+            <a:srgbClr val="FBAE40"/>
+          </p15:clr>
+        </p15:guide>
+        <p15:guide id="2" pos="2880">
+          <p15:clr>
+            <a:srgbClr val="FBAE40"/>
+          </p15:clr>
+        </p15:guide>
+      </p15:sldGuideLst>
+    </p:ext>
+  </p:extLst>
 </p:sldLayout>
 </file>
 
@@ -5904,6 +6330,7 @@
     <p:sldLayoutId id="2147483668" r:id="rId8"/>
     <p:sldLayoutId id="2147483669" r:id="rId9"/>
     <p:sldLayoutId id="2147483670" r:id="rId10"/>
+    <p:sldLayoutId id="2147483671" r:id="rId11"/>
   </p:sldLayoutIdLst>
   <p:txStyles>
     <p:titleStyle>
@@ -6656,6 +7083,145 @@
           <a:chExt cx="0" cy="0"/>
         </a:xfrm>
       </p:grpSpPr>
+      <p:pic>
+        <p:nvPicPr>
+          <p:cNvPr id="2" name="object 2"/>
+          <p:cNvPicPr/>
+          <p:nvPr/>
+        </p:nvPicPr>
+        <p:blipFill>
+          <a:blip r:embed="rId2" cstate="print"/>
+          <a:stretch>
+            <a:fillRect/>
+          </a:stretch>
+        </p:blipFill>
+        <p:spPr>
+          <a:xfrm>
+            <a:off x="1524000" y="652463"/>
+            <a:ext cx="9144000" cy="5551486"/>
+          </a:xfrm>
+          <a:prstGeom prst="rect">
+            <a:avLst/>
+          </a:prstGeom>
+        </p:spPr>
+      </p:pic>
+      <p:sp>
+        <p:nvSpPr>
+          <p:cNvPr id="3" name="object 3"/>
+          <p:cNvSpPr txBox="1">
+            <a:spLocks noGrp="1"/>
+          </p:cNvSpPr>
+          <p:nvPr>
+            <p:ph type="ftr" sz="quarter" idx="5"/>
+          </p:nvPr>
+        </p:nvSpPr>
+        <p:spPr>
+          <a:xfrm>
+            <a:off x="6094476" y="6624399"/>
+            <a:ext cx="2407284" cy="256480"/>
+          </a:xfrm>
+          <a:prstGeom prst="rect">
+            <a:avLst/>
+          </a:prstGeom>
+        </p:spPr>
+        <p:txBody>
+          <a:bodyPr vert="horz" wrap="square" lIns="0" tIns="0" rIns="0" bIns="0" rtlCol="0">
+            <a:spAutoFit/>
+          </a:bodyPr>
+          <a:lstStyle/>
+          <a:p>
+            <a:pPr marR="5715" algn="r">
+              <a:lnSpc>
+                <a:spcPts val="1090"/>
+              </a:lnSpc>
+            </a:pPr>
+            <a:r>
+              <a:rPr spc="-10" dirty="0"/>
+              <a:t>©1992-</a:t>
+            </a:r>
+            <a:r>
+              <a:rPr dirty="0"/>
+              <a:t>2015</a:t>
+            </a:r>
+            <a:r>
+              <a:rPr spc="-20" dirty="0"/>
+              <a:t> </a:t>
+            </a:r>
+            <a:r>
+              <a:rPr dirty="0"/>
+              <a:t>by</a:t>
+            </a:r>
+            <a:r>
+              <a:rPr spc="-15" dirty="0"/>
+              <a:t> </a:t>
+            </a:r>
+            <a:r>
+              <a:rPr dirty="0"/>
+              <a:t>Pearson</a:t>
+            </a:r>
+            <a:r>
+              <a:rPr spc="-20" dirty="0"/>
+              <a:t> </a:t>
+            </a:r>
+            <a:r>
+              <a:rPr dirty="0"/>
+              <a:t>Education,</a:t>
+            </a:r>
+            <a:r>
+              <a:rPr spc="-20" dirty="0"/>
+              <a:t> Inc.</a:t>
+            </a:r>
+          </a:p>
+          <a:p>
+            <a:pPr marR="5080" algn="r"/>
+            <a:r>
+              <a:rPr dirty="0"/>
+              <a:t>All</a:t>
+            </a:r>
+            <a:r>
+              <a:rPr spc="-30" dirty="0"/>
+              <a:t> </a:t>
+            </a:r>
+            <a:r>
+              <a:rPr dirty="0"/>
+              <a:t>Rights</a:t>
+            </a:r>
+            <a:r>
+              <a:rPr spc="-25" dirty="0"/>
+              <a:t> </a:t>
+            </a:r>
+            <a:r>
+              <a:rPr spc="-10" dirty="0"/>
+              <a:t>Reserved.</a:t>
+            </a:r>
+          </a:p>
+        </p:txBody>
+      </p:sp>
+    </p:spTree>
+  </p:cSld>
+  <p:clrMapOvr>
+    <a:masterClrMapping/>
+  </p:clrMapOvr>
+</p:sld>
+</file>
+
+<file path=ppt/slides/slide12.xml><?xml version="1.0" encoding="utf-8"?>
+<p:sld xmlns:a="http://schemas.openxmlformats.org/drawingml/2006/main" xmlns:r="http://schemas.openxmlformats.org/officeDocument/2006/relationships" xmlns:p="http://schemas.openxmlformats.org/presentationml/2006/main">
+  <p:cSld>
+    <p:spTree>
+      <p:nvGrpSpPr>
+        <p:cNvPr id="1" name=""/>
+        <p:cNvGrpSpPr/>
+        <p:nvPr/>
+      </p:nvGrpSpPr>
+      <p:grpSpPr>
+        <a:xfrm>
+          <a:off x="0" y="0"/>
+          <a:ext cx="0" cy="0"/>
+          <a:chOff x="0" y="0"/>
+          <a:chExt cx="0" cy="0"/>
+        </a:xfrm>
+      </p:grpSpPr>
       <p:sp>
         <p:nvSpPr>
           <p:cNvPr id="2" name="Title 1">
@@ -6821,7 +7387,7 @@
 </p:sld>
 </file>
 
-<file path=ppt/slides/slide12.xml><?xml version="1.0" encoding="utf-8"?>
+<file path=ppt/slides/slide13.xml><?xml version="1.0" encoding="utf-8"?>
 <p:sld xmlns:a="http://schemas.openxmlformats.org/drawingml/2006/main" xmlns:r="http://schemas.openxmlformats.org/officeDocument/2006/relationships" xmlns:p="http://schemas.openxmlformats.org/presentationml/2006/main">
   <p:cSld>
     <p:spTree>
@@ -6914,7 +7480,7 @@
 </p:sld>
 </file>
 
-<file path=ppt/slides/slide13.xml><?xml version="1.0" encoding="utf-8"?>
+<file path=ppt/slides/slide14.xml><?xml version="1.0" encoding="utf-8"?>
 <p:sld xmlns:a="http://schemas.openxmlformats.org/drawingml/2006/main" xmlns:r="http://schemas.openxmlformats.org/officeDocument/2006/relationships" xmlns:p="http://schemas.openxmlformats.org/presentationml/2006/main">
   <p:cSld>
     <p:spTree>
@@ -7048,7 +7614,7 @@
 </p:sld>
 </file>
 
-<file path=ppt/slides/slide14.xml><?xml version="1.0" encoding="utf-8"?>
+<file path=ppt/slides/slide15.xml><?xml version="1.0" encoding="utf-8"?>
 <p:sld xmlns:a="http://schemas.openxmlformats.org/drawingml/2006/main" xmlns:r="http://schemas.openxmlformats.org/officeDocument/2006/relationships" xmlns:p="http://schemas.openxmlformats.org/presentationml/2006/main">
   <p:cSld>
     <p:spTree>
@@ -7366,7 +7932,7 @@
 </p:sld>
 </file>
 
-<file path=ppt/slides/slide15.xml><?xml version="1.0" encoding="utf-8"?>
+<file path=ppt/slides/slide16.xml><?xml version="1.0" encoding="utf-8"?>
 <p:sld xmlns:a="http://schemas.openxmlformats.org/drawingml/2006/main" xmlns:r="http://schemas.openxmlformats.org/officeDocument/2006/relationships" xmlns:p="http://schemas.openxmlformats.org/presentationml/2006/main">
   <p:cSld>
     <p:spTree>
@@ -7459,7 +8025,7 @@
 </p:sld>
 </file>
 
-<file path=ppt/slides/slide16.xml><?xml version="1.0" encoding="utf-8"?>
+<file path=ppt/slides/slide17.xml><?xml version="1.0" encoding="utf-8"?>
 <p:sld xmlns:a="http://schemas.openxmlformats.org/drawingml/2006/main" xmlns:r="http://schemas.openxmlformats.org/officeDocument/2006/relationships" xmlns:p="http://schemas.openxmlformats.org/presentationml/2006/main">
   <p:cSld>
     <p:spTree>
@@ -7674,7 +8240,7 @@
 </p:sld>
 </file>
 
-<file path=ppt/slides/slide17.xml><?xml version="1.0" encoding="utf-8"?>
+<file path=ppt/slides/slide18.xml><?xml version="1.0" encoding="utf-8"?>
 <p:sld xmlns:a="http://schemas.openxmlformats.org/drawingml/2006/main" xmlns:r="http://schemas.openxmlformats.org/officeDocument/2006/relationships" xmlns:p="http://schemas.openxmlformats.org/presentationml/2006/main">
   <p:cSld>
     <p:spTree>
@@ -8153,7 +8719,7 @@
         <p:spPr>
           <a:xfrm>
             <a:off x="2023745" y="442625"/>
-            <a:ext cx="6096000" cy="485902"/>
+            <a:ext cx="6096000" cy="502766"/>
           </a:xfrm>
           <a:prstGeom prst="rect">
             <a:avLst/>
@@ -8182,10 +8748,24 @@
               </a:tabLst>
             </a:pPr>
             <a:r>
-              <a:rPr lang="en-GB" sz="3600" dirty="0" err="1"/>
+              <a:rPr lang="en-GB" sz="3600" b="1" dirty="0" err="1">
+                <a:solidFill>
+                  <a:srgbClr val="007FA3"/>
+                </a:solidFill>
+                <a:latin typeface="+mj-lt"/>
+                <a:ea typeface="+mj-ea"/>
+                <a:cs typeface="Times New Roman"/>
+              </a:rPr>
               <a:t>ArrayList</a:t>
             </a:r>
-            <a:endParaRPr lang="en-GB" sz="3600" dirty="0"/>
+            <a:endParaRPr lang="en-GB" sz="3600" b="1" dirty="0">
+              <a:solidFill>
+                <a:srgbClr val="007FA3"/>
+              </a:solidFill>
+              <a:latin typeface="+mj-lt"/>
+              <a:ea typeface="+mj-ea"/>
+              <a:cs typeface="Times New Roman"/>
+            </a:endParaRPr>
           </a:p>
         </p:txBody>
       </p:sp>
@@ -8197,7 +8777,7 @@
 </p:sld>
 </file>
 
-<file path=ppt/slides/slide18.xml><?xml version="1.0" encoding="utf-8"?>
+<file path=ppt/slides/slide19.xml><?xml version="1.0" encoding="utf-8"?>
 <p:sld xmlns:a="http://schemas.openxmlformats.org/drawingml/2006/main" xmlns:r="http://schemas.openxmlformats.org/officeDocument/2006/relationships" xmlns:p="http://schemas.openxmlformats.org/presentationml/2006/main">
   <p:cSld>
     <p:spTree>
@@ -8328,6 +8908,71 @@
           </a:p>
         </p:txBody>
       </p:sp>
+      <p:sp>
+        <p:nvSpPr>
+          <p:cNvPr id="4" name="TextBox 3">
+            <a:extLst>
+              <a:ext uri="{FF2B5EF4-FFF2-40B4-BE49-F238E27FC236}">
+                <a16:creationId xmlns:a16="http://schemas.microsoft.com/office/drawing/2014/main" id="{2C29AD70-7479-88F2-1B70-544A96D0211E}"/>
+              </a:ext>
+            </a:extLst>
+          </p:cNvPr>
+          <p:cNvSpPr txBox="1"/>
+          <p:nvPr/>
+        </p:nvSpPr>
+        <p:spPr>
+          <a:xfrm>
+            <a:off x="2023745" y="442625"/>
+            <a:ext cx="6096000" cy="502766"/>
+          </a:xfrm>
+          <a:prstGeom prst="rect">
+            <a:avLst/>
+          </a:prstGeom>
+          <a:noFill/>
+        </p:spPr>
+        <p:txBody>
+          <a:bodyPr wrap="square">
+            <a:spAutoFit/>
+          </a:bodyPr>
+          <a:lstStyle/>
+          <a:p>
+            <a:pPr marL="12701">
+              <a:lnSpc>
+                <a:spcPts val="3010"/>
+              </a:lnSpc>
+              <a:spcBef>
+                <a:spcPts val="100"/>
+              </a:spcBef>
+              <a:buClr>
+                <a:srgbClr val="2DA2BF"/>
+              </a:buClr>
+              <a:buSzPct val="69230"/>
+              <a:tabLst>
+                <a:tab pos="762000" algn="l"/>
+              </a:tabLst>
+            </a:pPr>
+            <a:r>
+              <a:rPr lang="en-GB" sz="3600" b="1" dirty="0" err="1">
+                <a:solidFill>
+                  <a:srgbClr val="007FA3"/>
+                </a:solidFill>
+                <a:latin typeface="+mj-lt"/>
+                <a:ea typeface="+mj-ea"/>
+                <a:cs typeface="Times New Roman"/>
+              </a:rPr>
+              <a:t>ArrayList.method</a:t>
+            </a:r>
+            <a:endParaRPr lang="en-GB" sz="3600" b="1" dirty="0">
+              <a:solidFill>
+                <a:srgbClr val="007FA3"/>
+              </a:solidFill>
+              <a:latin typeface="+mj-lt"/>
+              <a:ea typeface="+mj-ea"/>
+              <a:cs typeface="Times New Roman"/>
+            </a:endParaRPr>
+          </a:p>
+        </p:txBody>
+      </p:sp>
     </p:spTree>
   </p:cSld>
   <p:clrMapOvr>
@@ -8336,7 +8981,235 @@
 </p:sld>
 </file>
 
-<file path=ppt/slides/slide19.xml><?xml version="1.0" encoding="utf-8"?>
+<file path=ppt/slides/slide2.xml><?xml version="1.0" encoding="utf-8"?>
+<p:sld xmlns:a="http://schemas.openxmlformats.org/drawingml/2006/main" xmlns:r="http://schemas.openxmlformats.org/officeDocument/2006/relationships" xmlns:p="http://schemas.openxmlformats.org/presentationml/2006/main" showMasterSp="0">
+  <p:cSld>
+    <p:spTree>
+      <p:nvGrpSpPr>
+        <p:cNvPr id="1" name=""/>
+        <p:cNvGrpSpPr/>
+        <p:nvPr/>
+      </p:nvGrpSpPr>
+      <p:grpSpPr>
+        <a:xfrm>
+          <a:off x="0" y="0"/>
+          <a:ext cx="0" cy="0"/>
+          <a:chOff x="0" y="0"/>
+          <a:chExt cx="0" cy="0"/>
+        </a:xfrm>
+      </p:grpSpPr>
+      <p:sp>
+        <p:nvSpPr>
+          <p:cNvPr id="3" name="object 3"/>
+          <p:cNvSpPr txBox="1"/>
+          <p:nvPr/>
+        </p:nvSpPr>
+        <p:spPr>
+          <a:xfrm>
+            <a:off x="688975" y="6610032"/>
+            <a:ext cx="2542540" cy="140335"/>
+          </a:xfrm>
+          <a:prstGeom prst="rect">
+            <a:avLst/>
+          </a:prstGeom>
+        </p:spPr>
+        <p:txBody>
+          <a:bodyPr vert="horz" wrap="square" lIns="0" tIns="12700" rIns="0" bIns="0" rtlCol="0">
+            <a:spAutoFit/>
+          </a:bodyPr>
+          <a:lstStyle/>
+          <a:p>
+            <a:pPr marL="12700">
+              <a:lnSpc>
+                <a:spcPct val="100000"/>
+              </a:lnSpc>
+              <a:spcBef>
+                <a:spcPts val="100"/>
+              </a:spcBef>
+            </a:pPr>
+            <a:r>
+              <a:rPr sz="750" dirty="0">
+                <a:latin typeface="Times New Roman"/>
+                <a:cs typeface="Times New Roman"/>
+              </a:rPr>
+              <a:t>Copyright</a:t>
+            </a:r>
+            <a:r>
+              <a:rPr sz="750" spc="-20" dirty="0">
+                <a:latin typeface="Times New Roman"/>
+                <a:cs typeface="Times New Roman"/>
+              </a:rPr>
+              <a:t> </a:t>
+            </a:r>
+            <a:r>
+              <a:rPr sz="750" spc="60" dirty="0">
+                <a:latin typeface="Times New Roman"/>
+                <a:cs typeface="Times New Roman"/>
+              </a:rPr>
+              <a:t>©</a:t>
+            </a:r>
+            <a:r>
+              <a:rPr sz="750" spc="80" dirty="0">
+                <a:latin typeface="Times New Roman"/>
+                <a:cs typeface="Times New Roman"/>
+              </a:rPr>
+              <a:t> </a:t>
+            </a:r>
+            <a:r>
+              <a:rPr sz="750" spc="60" dirty="0">
+                <a:latin typeface="Times New Roman"/>
+                <a:cs typeface="Times New Roman"/>
+              </a:rPr>
+              <a:t>2020</a:t>
+            </a:r>
+            <a:r>
+              <a:rPr sz="750" spc="70" dirty="0">
+                <a:latin typeface="Times New Roman"/>
+                <a:cs typeface="Times New Roman"/>
+              </a:rPr>
+              <a:t> </a:t>
+            </a:r>
+            <a:r>
+              <a:rPr sz="750" dirty="0">
+                <a:latin typeface="Times New Roman"/>
+                <a:cs typeface="Times New Roman"/>
+              </a:rPr>
+              <a:t>Pearson</a:t>
+            </a:r>
+            <a:r>
+              <a:rPr sz="750" spc="75" dirty="0">
+                <a:latin typeface="Times New Roman"/>
+                <a:cs typeface="Times New Roman"/>
+              </a:rPr>
+              <a:t> </a:t>
+            </a:r>
+            <a:r>
+              <a:rPr sz="750" dirty="0">
+                <a:latin typeface="Times New Roman"/>
+                <a:cs typeface="Times New Roman"/>
+              </a:rPr>
+              <a:t>Education</a:t>
+            </a:r>
+            <a:r>
+              <a:rPr sz="750" spc="70" dirty="0">
+                <a:latin typeface="Times New Roman"/>
+                <a:cs typeface="Times New Roman"/>
+              </a:rPr>
+              <a:t> </a:t>
+            </a:r>
+            <a:r>
+              <a:rPr sz="750" spc="-20" dirty="0">
+                <a:latin typeface="Times New Roman"/>
+                <a:cs typeface="Times New Roman"/>
+              </a:rPr>
+              <a:t>Ltd.</a:t>
+            </a:r>
+            <a:r>
+              <a:rPr sz="750" spc="20" dirty="0">
+                <a:latin typeface="Times New Roman"/>
+                <a:cs typeface="Times New Roman"/>
+              </a:rPr>
+              <a:t> </a:t>
+            </a:r>
+            <a:r>
+              <a:rPr sz="750" spc="-30" dirty="0">
+                <a:latin typeface="Times New Roman"/>
+                <a:cs typeface="Times New Roman"/>
+              </a:rPr>
+              <a:t>All</a:t>
+            </a:r>
+            <a:r>
+              <a:rPr sz="750" spc="60" dirty="0">
+                <a:latin typeface="Times New Roman"/>
+                <a:cs typeface="Times New Roman"/>
+              </a:rPr>
+              <a:t> </a:t>
+            </a:r>
+            <a:r>
+              <a:rPr sz="750" dirty="0">
+                <a:latin typeface="Times New Roman"/>
+                <a:cs typeface="Times New Roman"/>
+              </a:rPr>
+              <a:t>Rights</a:t>
+            </a:r>
+            <a:r>
+              <a:rPr sz="750" spc="-10" dirty="0">
+                <a:latin typeface="Times New Roman"/>
+                <a:cs typeface="Times New Roman"/>
+              </a:rPr>
+              <a:t> Reserved</a:t>
+            </a:r>
+            <a:endParaRPr sz="750">
+              <a:latin typeface="Times New Roman"/>
+              <a:cs typeface="Times New Roman"/>
+            </a:endParaRPr>
+          </a:p>
+        </p:txBody>
+      </p:sp>
+      <p:sp>
+        <p:nvSpPr>
+          <p:cNvPr id="4" name="Title 5">
+            <a:extLst>
+              <a:ext uri="{FF2B5EF4-FFF2-40B4-BE49-F238E27FC236}">
+                <a16:creationId xmlns:a16="http://schemas.microsoft.com/office/drawing/2014/main" id="{25A2C277-D5EA-91CC-8A2F-47714389F182}"/>
+              </a:ext>
+            </a:extLst>
+          </p:cNvPr>
+          <p:cNvSpPr txBox="1">
+            <a:spLocks/>
+          </p:cNvSpPr>
+          <p:nvPr/>
+        </p:nvSpPr>
+        <p:spPr>
+          <a:xfrm>
+            <a:off x="1952626" y="378052"/>
+            <a:ext cx="8229600" cy="590349"/>
+          </a:xfrm>
+          <a:prstGeom prst="rect">
+            <a:avLst/>
+          </a:prstGeom>
+        </p:spPr>
+        <p:txBody>
+          <a:bodyPr wrap="square" lIns="0" tIns="18000" rIns="0" bIns="18000" anchor="b" anchorCtr="0">
+            <a:spAutoFit/>
+          </a:bodyPr>
+          <a:lstStyle>
+            <a:lvl1pPr>
+              <a:defRPr>
+                <a:latin typeface="+mj-lt"/>
+                <a:ea typeface="+mj-ea"/>
+                <a:cs typeface="+mj-cs"/>
+              </a:defRPr>
+            </a:lvl1pPr>
+          </a:lstStyle>
+          <a:p>
+            <a:r>
+              <a:rPr lang="en-US" sz="3600" b="1" dirty="0">
+                <a:solidFill>
+                  <a:srgbClr val="007FA3"/>
+                </a:solidFill>
+                <a:cs typeface="Times New Roman"/>
+                <a:sym typeface="Times New Roman"/>
+              </a:rPr>
+              <a:t>Review Challenge </a:t>
+            </a:r>
+            <a:r>
+              <a:rPr lang="en-US" dirty="0"/>
+              <a:t>  </a:t>
+            </a:r>
+            <a:endParaRPr lang="en-US" sz="2800" dirty="0"/>
+          </a:p>
+        </p:txBody>
+      </p:sp>
+    </p:spTree>
+  </p:cSld>
+  <p:clrMapOvr>
+    <a:masterClrMapping/>
+  </p:clrMapOvr>
+</p:sld>
+</file>
+
+<file path=ppt/slides/slide20.xml><?xml version="1.0" encoding="utf-8"?>
 <p:sld xmlns:a="http://schemas.openxmlformats.org/drawingml/2006/main" xmlns:r="http://schemas.openxmlformats.org/officeDocument/2006/relationships" xmlns:p="http://schemas.openxmlformats.org/presentationml/2006/main">
   <p:cSld>
     <p:spTree>
@@ -10512,203 +11385,7 @@
 </p:sld>
 </file>
 
-<file path=ppt/slides/slide2.xml><?xml version="1.0" encoding="utf-8"?>
-<p:sld xmlns:a="http://schemas.openxmlformats.org/drawingml/2006/main" xmlns:r="http://schemas.openxmlformats.org/officeDocument/2006/relationships" xmlns:p="http://schemas.openxmlformats.org/presentationml/2006/main" showMasterSp="0">
-  <p:cSld>
-    <p:spTree>
-      <p:nvGrpSpPr>
-        <p:cNvPr id="1" name=""/>
-        <p:cNvGrpSpPr/>
-        <p:nvPr/>
-      </p:nvGrpSpPr>
-      <p:grpSpPr>
-        <a:xfrm>
-          <a:off x="0" y="0"/>
-          <a:ext cx="0" cy="0"/>
-          <a:chOff x="0" y="0"/>
-          <a:chExt cx="0" cy="0"/>
-        </a:xfrm>
-      </p:grpSpPr>
-      <p:pic>
-        <p:nvPicPr>
-          <p:cNvPr id="2" name="object 2"/>
-          <p:cNvPicPr/>
-          <p:nvPr/>
-        </p:nvPicPr>
-        <p:blipFill>
-          <a:blip r:embed="rId2" cstate="print"/>
-          <a:srcRect l="-567" r="101" b="19137"/>
-          <a:stretch>
-            <a:fillRect/>
-          </a:stretch>
-        </p:blipFill>
-        <p:spPr>
-          <a:xfrm>
-            <a:off x="2023476" y="1269389"/>
-            <a:ext cx="8091341" cy="3492656"/>
-          </a:xfrm>
-          <a:prstGeom prst="rect">
-            <a:avLst/>
-          </a:prstGeom>
-        </p:spPr>
-      </p:pic>
-      <p:sp>
-        <p:nvSpPr>
-          <p:cNvPr id="3" name="object 3"/>
-          <p:cNvSpPr txBox="1"/>
-          <p:nvPr/>
-        </p:nvSpPr>
-        <p:spPr>
-          <a:xfrm>
-            <a:off x="688975" y="6610032"/>
-            <a:ext cx="2542540" cy="140335"/>
-          </a:xfrm>
-          <a:prstGeom prst="rect">
-            <a:avLst/>
-          </a:prstGeom>
-        </p:spPr>
-        <p:txBody>
-          <a:bodyPr vert="horz" wrap="square" lIns="0" tIns="12700" rIns="0" bIns="0" rtlCol="0">
-            <a:spAutoFit/>
-          </a:bodyPr>
-          <a:lstStyle/>
-          <a:p>
-            <a:pPr marL="12700">
-              <a:lnSpc>
-                <a:spcPct val="100000"/>
-              </a:lnSpc>
-              <a:spcBef>
-                <a:spcPts val="100"/>
-              </a:spcBef>
-            </a:pPr>
-            <a:r>
-              <a:rPr sz="750" dirty="0">
-                <a:latin typeface="Times New Roman"/>
-                <a:cs typeface="Times New Roman"/>
-              </a:rPr>
-              <a:t>Copyright</a:t>
-            </a:r>
-            <a:r>
-              <a:rPr sz="750" spc="-20" dirty="0">
-                <a:latin typeface="Times New Roman"/>
-                <a:cs typeface="Times New Roman"/>
-              </a:rPr>
-              <a:t> </a:t>
-            </a:r>
-            <a:r>
-              <a:rPr sz="750" spc="60" dirty="0">
-                <a:latin typeface="Times New Roman"/>
-                <a:cs typeface="Times New Roman"/>
-              </a:rPr>
-              <a:t>©</a:t>
-            </a:r>
-            <a:r>
-              <a:rPr sz="750" spc="80" dirty="0">
-                <a:latin typeface="Times New Roman"/>
-                <a:cs typeface="Times New Roman"/>
-              </a:rPr>
-              <a:t> </a:t>
-            </a:r>
-            <a:r>
-              <a:rPr sz="750" spc="60" dirty="0">
-                <a:latin typeface="Times New Roman"/>
-                <a:cs typeface="Times New Roman"/>
-              </a:rPr>
-              <a:t>2020</a:t>
-            </a:r>
-            <a:r>
-              <a:rPr sz="750" spc="70" dirty="0">
-                <a:latin typeface="Times New Roman"/>
-                <a:cs typeface="Times New Roman"/>
-              </a:rPr>
-              <a:t> </a:t>
-            </a:r>
-            <a:r>
-              <a:rPr sz="750" dirty="0">
-                <a:latin typeface="Times New Roman"/>
-                <a:cs typeface="Times New Roman"/>
-              </a:rPr>
-              <a:t>Pearson</a:t>
-            </a:r>
-            <a:r>
-              <a:rPr sz="750" spc="75" dirty="0">
-                <a:latin typeface="Times New Roman"/>
-                <a:cs typeface="Times New Roman"/>
-              </a:rPr>
-              <a:t> </a:t>
-            </a:r>
-            <a:r>
-              <a:rPr sz="750" dirty="0">
-                <a:latin typeface="Times New Roman"/>
-                <a:cs typeface="Times New Roman"/>
-              </a:rPr>
-              <a:t>Education</a:t>
-            </a:r>
-            <a:r>
-              <a:rPr sz="750" spc="70" dirty="0">
-                <a:latin typeface="Times New Roman"/>
-                <a:cs typeface="Times New Roman"/>
-              </a:rPr>
-              <a:t> </a:t>
-            </a:r>
-            <a:r>
-              <a:rPr sz="750" spc="-20" dirty="0">
-                <a:latin typeface="Times New Roman"/>
-                <a:cs typeface="Times New Roman"/>
-              </a:rPr>
-              <a:t>Ltd.</a:t>
-            </a:r>
-            <a:r>
-              <a:rPr sz="750" spc="20" dirty="0">
-                <a:latin typeface="Times New Roman"/>
-                <a:cs typeface="Times New Roman"/>
-              </a:rPr>
-              <a:t> </a:t>
-            </a:r>
-            <a:r>
-              <a:rPr sz="750" spc="-30" dirty="0">
-                <a:latin typeface="Times New Roman"/>
-                <a:cs typeface="Times New Roman"/>
-              </a:rPr>
-              <a:t>All</a:t>
-            </a:r>
-            <a:r>
-              <a:rPr sz="750" spc="60" dirty="0">
-                <a:latin typeface="Times New Roman"/>
-                <a:cs typeface="Times New Roman"/>
-              </a:rPr>
-              <a:t> </a:t>
-            </a:r>
-            <a:r>
-              <a:rPr sz="750" dirty="0">
-                <a:latin typeface="Times New Roman"/>
-                <a:cs typeface="Times New Roman"/>
-              </a:rPr>
-              <a:t>Rights</a:t>
-            </a:r>
-            <a:r>
-              <a:rPr sz="750" spc="-10" dirty="0">
-                <a:latin typeface="Times New Roman"/>
-                <a:cs typeface="Times New Roman"/>
-              </a:rPr>
-              <a:t> Reserved</a:t>
-            </a:r>
-            <a:endParaRPr sz="750">
-              <a:latin typeface="Times New Roman"/>
-              <a:cs typeface="Times New Roman"/>
-            </a:endParaRPr>
-          </a:p>
-        </p:txBody>
-      </p:sp>
-    </p:spTree>
-  </p:cSld>
-  <p:clrMapOvr>
-    <a:masterClrMapping/>
-  </p:clrMapOvr>
-</p:sld>
-</file>
-
-<file path=ppt/slides/slide20.xml><?xml version="1.0" encoding="utf-8"?>
+<file path=ppt/slides/slide21.xml><?xml version="1.0" encoding="utf-8"?>
 <p:sld xmlns:a="http://schemas.openxmlformats.org/drawingml/2006/main" xmlns:r="http://schemas.openxmlformats.org/officeDocument/2006/relationships" xmlns:p="http://schemas.openxmlformats.org/presentationml/2006/main">
   <p:cSld>
     <p:spTree>
@@ -11192,6 +11869,320 @@
           <a:chExt cx="0" cy="0"/>
         </a:xfrm>
       </p:grpSpPr>
+      <p:sp>
+        <p:nvSpPr>
+          <p:cNvPr id="6" name="Title 5">
+            <a:extLst>
+              <a:ext uri="{FF2B5EF4-FFF2-40B4-BE49-F238E27FC236}">
+                <a16:creationId xmlns:a16="http://schemas.microsoft.com/office/drawing/2014/main" id="{175909D6-A296-E241-EEA2-76B97946AD2C}"/>
+              </a:ext>
+            </a:extLst>
+          </p:cNvPr>
+          <p:cNvSpPr>
+            <a:spLocks noGrp="1"/>
+          </p:cNvSpPr>
+          <p:nvPr>
+            <p:ph type="title"/>
+          </p:nvPr>
+        </p:nvSpPr>
+        <p:spPr>
+          <a:xfrm>
+            <a:off x="1952626" y="378052"/>
+            <a:ext cx="8229600" cy="590349"/>
+          </a:xfrm>
+        </p:spPr>
+        <p:txBody>
+          <a:bodyPr wrap="square" lIns="0" tIns="18000" rIns="0" bIns="18000" anchor="b" anchorCtr="0">
+            <a:spAutoFit/>
+          </a:bodyPr>
+          <a:lstStyle/>
+          <a:p>
+            <a:r>
+              <a:rPr lang="en-US" noProof="0" dirty="0"/>
+              <a:t>The </a:t>
+            </a:r>
+            <a:r>
+              <a:rPr lang="en-US" noProof="0" dirty="0">
+                <a:latin typeface="Consolas" panose="020B0609020204030204" pitchFamily="49" charset="0"/>
+              </a:rPr>
+              <a:t>try catch </a:t>
+            </a:r>
+            <a:r>
+              <a:rPr lang="en-US" noProof="0" dirty="0"/>
+              <a:t> Statement</a:t>
+            </a:r>
+            <a:endParaRPr lang="en-US" sz="2800" dirty="0"/>
+          </a:p>
+        </p:txBody>
+      </p:sp>
+      <p:sp>
+        <p:nvSpPr>
+          <p:cNvPr id="7" name="Content Placeholder 6">
+            <a:extLst>
+              <a:ext uri="{FF2B5EF4-FFF2-40B4-BE49-F238E27FC236}">
+                <a16:creationId xmlns:a16="http://schemas.microsoft.com/office/drawing/2014/main" id="{820FA4CC-CF9B-0CF4-A205-E646AF0DC072}"/>
+              </a:ext>
+            </a:extLst>
+          </p:cNvPr>
+          <p:cNvSpPr>
+            <a:spLocks noGrp="1"/>
+          </p:cNvSpPr>
+          <p:nvPr>
+            <p:ph sz="quarter" idx="13"/>
+          </p:nvPr>
+        </p:nvSpPr>
+        <p:spPr>
+          <a:xfrm>
+            <a:off x="2009774" y="1450776"/>
+            <a:ext cx="9954627" cy="6191883"/>
+          </a:xfrm>
+        </p:spPr>
+        <p:txBody>
+          <a:bodyPr wrap="square" lIns="0" tIns="18000" rIns="0" bIns="18000" anchor="ctr">
+            <a:spAutoFit/>
+          </a:bodyPr>
+          <a:lstStyle/>
+          <a:p>
+            <a:pPr marL="285750" indent="-285750">
+              <a:spcBef>
+                <a:spcPts val="600"/>
+              </a:spcBef>
+            </a:pPr>
+            <a:r>
+              <a:rPr lang="en-US" sz="2400" dirty="0">
+                <a:latin typeface="Consolas" panose="020B0609020204030204" pitchFamily="49" charset="0"/>
+                <a:sym typeface="Times New Roman"/>
+              </a:rPr>
+              <a:t>try</a:t>
+            </a:r>
+            <a:r>
+              <a:rPr lang="en-US" sz="2400" dirty="0">
+                <a:sym typeface="Times New Roman"/>
+              </a:rPr>
+              <a:t> block contains code that might throw exception</a:t>
+            </a:r>
+          </a:p>
+          <a:p>
+            <a:pPr marL="285750" indent="-285750">
+              <a:spcBef>
+                <a:spcPts val="600"/>
+              </a:spcBef>
+            </a:pPr>
+            <a:r>
+              <a:rPr lang="en-US" sz="2400" dirty="0">
+                <a:latin typeface="Consolas" panose="020B0609020204030204" pitchFamily="49" charset="0"/>
+                <a:sym typeface="Times New Roman"/>
+              </a:rPr>
+              <a:t>catch</a:t>
+            </a:r>
+            <a:r>
+              <a:rPr lang="en-US" sz="2400" dirty="0">
+                <a:sym typeface="Times New Roman"/>
+              </a:rPr>
+              <a:t> block contains code that handles exception</a:t>
+            </a:r>
+          </a:p>
+          <a:p>
+            <a:pPr marL="285750" indent="-285750">
+              <a:spcBef>
+                <a:spcPts val="600"/>
+              </a:spcBef>
+            </a:pPr>
+            <a:r>
+              <a:rPr lang="en-US" sz="2400" dirty="0">
+                <a:sym typeface="Times New Roman"/>
+              </a:rPr>
+              <a:t> </a:t>
+            </a:r>
+          </a:p>
+          <a:p>
+            <a:pPr marL="285750" indent="-285750">
+              <a:spcBef>
+                <a:spcPts val="600"/>
+              </a:spcBef>
+            </a:pPr>
+            <a:r>
+              <a:rPr lang="en-US" sz="2400" dirty="0">
+                <a:sym typeface="Times New Roman"/>
+              </a:rPr>
+              <a:t>When exception occurs, </a:t>
+            </a:r>
+            <a:r>
+              <a:rPr lang="en-US" sz="2400" dirty="0">
+                <a:latin typeface="Consolas" panose="020B0609020204030204" pitchFamily="49" charset="0"/>
+                <a:sym typeface="Times New Roman"/>
+              </a:rPr>
+              <a:t>try</a:t>
+            </a:r>
+            <a:r>
+              <a:rPr lang="en-US" sz="2400" dirty="0">
+                <a:sym typeface="Times New Roman"/>
+              </a:rPr>
+              <a:t> block terminates and </a:t>
+            </a:r>
+            <a:r>
+              <a:rPr lang="en-US" sz="2400" dirty="0">
+                <a:latin typeface="Consolas" panose="020B0609020204030204" pitchFamily="49" charset="0"/>
+                <a:sym typeface="Times New Roman"/>
+              </a:rPr>
+              <a:t>catch</a:t>
+            </a:r>
+            <a:r>
+              <a:rPr lang="en-US" sz="2400" dirty="0">
+                <a:sym typeface="Times New Roman"/>
+              </a:rPr>
+              <a:t> block executes</a:t>
+            </a:r>
+          </a:p>
+          <a:p>
+            <a:pPr marL="285750" indent="-285750">
+              <a:spcBef>
+                <a:spcPts val="600"/>
+              </a:spcBef>
+            </a:pPr>
+            <a:r>
+              <a:rPr lang="en-US" sz="2400" dirty="0">
+                <a:sym typeface="Times New Roman"/>
+              </a:rPr>
+              <a:t>Braces required for </a:t>
+            </a:r>
+            <a:r>
+              <a:rPr lang="en-US" sz="2400" dirty="0">
+                <a:latin typeface="Consolas" panose="020B0609020204030204" pitchFamily="49" charset="0"/>
+                <a:sym typeface="Times New Roman"/>
+              </a:rPr>
+              <a:t>try</a:t>
+            </a:r>
+            <a:r>
+              <a:rPr lang="en-US" sz="2400" dirty="0">
+                <a:sym typeface="Times New Roman"/>
+              </a:rPr>
+              <a:t> and </a:t>
+            </a:r>
+            <a:r>
+              <a:rPr lang="en-US" sz="2400" dirty="0">
+                <a:latin typeface="Consolas" panose="020B0609020204030204" pitchFamily="49" charset="0"/>
+                <a:sym typeface="Times New Roman"/>
+              </a:rPr>
+              <a:t>catch</a:t>
+            </a:r>
+            <a:r>
+              <a:rPr lang="en-US" sz="2400" dirty="0">
+                <a:sym typeface="Times New Roman"/>
+              </a:rPr>
+              <a:t> blocks </a:t>
+            </a:r>
+          </a:p>
+          <a:p>
+            <a:pPr marL="285750" indent="-285750">
+              <a:spcBef>
+                <a:spcPts val="600"/>
+              </a:spcBef>
+            </a:pPr>
+            <a:r>
+              <a:rPr lang="en-US" sz="4000" dirty="0">
+                <a:solidFill>
+                  <a:schemeClr val="accent2"/>
+                </a:solidFill>
+                <a:sym typeface="Times New Roman"/>
+              </a:rPr>
+              <a:t>try{</a:t>
+            </a:r>
+          </a:p>
+          <a:p>
+            <a:pPr marL="285750" indent="-285750">
+              <a:spcBef>
+                <a:spcPts val="600"/>
+              </a:spcBef>
+            </a:pPr>
+            <a:endParaRPr lang="en-US" sz="4000" dirty="0">
+              <a:solidFill>
+                <a:schemeClr val="accent2"/>
+              </a:solidFill>
+              <a:sym typeface="Times New Roman"/>
+            </a:endParaRPr>
+          </a:p>
+          <a:p>
+            <a:pPr marL="285750" indent="-285750">
+              <a:spcBef>
+                <a:spcPts val="600"/>
+              </a:spcBef>
+            </a:pPr>
+            <a:r>
+              <a:rPr lang="en-US" sz="4000" dirty="0">
+                <a:solidFill>
+                  <a:schemeClr val="accent2"/>
+                </a:solidFill>
+                <a:sym typeface="Times New Roman"/>
+              </a:rPr>
+              <a:t>}</a:t>
+            </a:r>
+          </a:p>
+          <a:p>
+            <a:r>
+              <a:rPr lang="en-DK" sz="4000" dirty="0">
+                <a:solidFill>
+                  <a:schemeClr val="accent2"/>
+                </a:solidFill>
+              </a:rPr>
+              <a:t>catch (InputMismatchException e) {</a:t>
+            </a:r>
+          </a:p>
+          <a:p>
+            <a:r>
+              <a:rPr lang="en-DK" sz="4000" dirty="0">
+                <a:solidFill>
+                  <a:schemeClr val="accent2"/>
+                </a:solidFill>
+              </a:rPr>
+              <a:t>}</a:t>
+            </a:r>
+          </a:p>
+          <a:p>
+            <a:pPr marL="285750" indent="-285750">
+              <a:spcBef>
+                <a:spcPts val="600"/>
+              </a:spcBef>
+            </a:pPr>
+            <a:endParaRPr lang="en-US" sz="4000" dirty="0">
+              <a:solidFill>
+                <a:schemeClr val="accent2"/>
+              </a:solidFill>
+              <a:sym typeface="Times New Roman"/>
+            </a:endParaRPr>
+          </a:p>
+        </p:txBody>
+      </p:sp>
+    </p:spTree>
+    <p:extLst>
+      <p:ext uri="{BB962C8B-B14F-4D97-AF65-F5344CB8AC3E}">
+        <p14:creationId xmlns:p14="http://schemas.microsoft.com/office/powerpoint/2010/main" val="1684996113"/>
+      </p:ext>
+    </p:extLst>
+  </p:cSld>
+  <p:clrMapOvr>
+    <a:masterClrMapping/>
+  </p:clrMapOvr>
+</p:sld>
+</file>
+
+<file path=ppt/slides/slide4.xml><?xml version="1.0" encoding="utf-8"?>
+<p:sld xmlns:a="http://schemas.openxmlformats.org/drawingml/2006/main" xmlns:r="http://schemas.openxmlformats.org/officeDocument/2006/relationships" xmlns:p="http://schemas.openxmlformats.org/presentationml/2006/main">
+  <p:cSld>
+    <p:spTree>
+      <p:nvGrpSpPr>
+        <p:cNvPr id="1" name=""/>
+        <p:cNvGrpSpPr/>
+        <p:nvPr/>
+      </p:nvGrpSpPr>
+      <p:grpSpPr>
+        <a:xfrm>
+          <a:off x="0" y="0"/>
+          <a:ext cx="0" cy="0"/>
+          <a:chOff x="0" y="0"/>
+          <a:chExt cx="0" cy="0"/>
+        </a:xfrm>
+      </p:grpSpPr>
       <p:pic>
         <p:nvPicPr>
           <p:cNvPr id="2" name="object 2" descr="jhtp_04_CS2_Page_45"/>
@@ -11370,7 +12361,7 @@
 </p:sld>
 </file>
 
-<file path=ppt/slides/slide4.xml><?xml version="1.0" encoding="utf-8"?>
+<file path=ppt/slides/slide5.xml><?xml version="1.0" encoding="utf-8"?>
 <p:sld xmlns:a="http://schemas.openxmlformats.org/drawingml/2006/main" xmlns:r="http://schemas.openxmlformats.org/officeDocument/2006/relationships" xmlns:p="http://schemas.openxmlformats.org/presentationml/2006/main">
   <p:cSld>
     <p:spTree>
@@ -12538,7 +13529,7 @@
 </p:sld>
 </file>
 
-<file path=ppt/slides/slide5.xml><?xml version="1.0" encoding="utf-8"?>
+<file path=ppt/slides/slide6.xml><?xml version="1.0" encoding="utf-8"?>
 <p:sld xmlns:a="http://schemas.openxmlformats.org/drawingml/2006/main" xmlns:r="http://schemas.openxmlformats.org/officeDocument/2006/relationships" xmlns:p="http://schemas.openxmlformats.org/presentationml/2006/main">
   <p:cSld>
     <p:spTree>
@@ -12733,7 +13724,7 @@
 </p:sld>
 </file>
 
-<file path=ppt/slides/slide6.xml><?xml version="1.0" encoding="utf-8"?>
+<file path=ppt/slides/slide7.xml><?xml version="1.0" encoding="utf-8"?>
 <p:sld xmlns:a="http://schemas.openxmlformats.org/drawingml/2006/main" xmlns:r="http://schemas.openxmlformats.org/officeDocument/2006/relationships" xmlns:p="http://schemas.openxmlformats.org/presentationml/2006/main">
   <p:cSld>
     <p:spTree>
@@ -13680,7 +14671,7 @@
 </p:sld>
 </file>
 
-<file path=ppt/slides/slide7.xml><?xml version="1.0" encoding="utf-8"?>
+<file path=ppt/slides/slide8.xml><?xml version="1.0" encoding="utf-8"?>
 <p:sld xmlns:a="http://schemas.openxmlformats.org/drawingml/2006/main" xmlns:r="http://schemas.openxmlformats.org/officeDocument/2006/relationships" xmlns:p="http://schemas.openxmlformats.org/presentationml/2006/main">
   <p:cSld>
     <p:spTree>
@@ -13734,7 +14725,14 @@
               </a:tabLst>
             </a:pPr>
             <a:r>
-              <a:rPr lang="en-GB" sz="3600" dirty="0"/>
+              <a:rPr lang="en-GB" sz="3600" b="1" dirty="0">
+                <a:solidFill>
+                  <a:srgbClr val="007FA3"/>
+                </a:solidFill>
+                <a:latin typeface="+mj-lt"/>
+                <a:ea typeface="+mj-ea"/>
+                <a:cs typeface="Times New Roman"/>
+              </a:rPr>
               <a:t>Initiate array</a:t>
             </a:r>
           </a:p>
@@ -14110,7 +15108,7 @@
 </p:sld>
 </file>
 
-<file path=ppt/slides/slide8.xml><?xml version="1.0" encoding="utf-8"?>
+<file path=ppt/slides/slide9.xml><?xml version="1.0" encoding="utf-8"?>
 <p:sld xmlns:a="http://schemas.openxmlformats.org/drawingml/2006/main" xmlns:r="http://schemas.openxmlformats.org/officeDocument/2006/relationships" xmlns:p="http://schemas.openxmlformats.org/presentationml/2006/main">
   <p:cSld>
     <p:spTree>
@@ -14199,7 +15197,7 @@
         <p:spPr>
           <a:xfrm>
             <a:off x="2819400" y="1600200"/>
-            <a:ext cx="6096000" cy="485902"/>
+            <a:ext cx="6096000" cy="502766"/>
           </a:xfrm>
           <a:prstGeom prst="rect">
             <a:avLst/>
@@ -14228,8 +15226,15 @@
               </a:tabLst>
             </a:pPr>
             <a:r>
-              <a:rPr lang="en-GB" sz="3600" dirty="0"/>
-              <a:t>What is the error in java</a:t>
+              <a:rPr lang="en-GB" sz="3600" b="1" dirty="0">
+                <a:solidFill>
+                  <a:srgbClr val="007FA3"/>
+                </a:solidFill>
+                <a:latin typeface="+mj-lt"/>
+                <a:ea typeface="+mj-ea"/>
+                <a:cs typeface="Times New Roman"/>
+              </a:rPr>
+              <a:t>What is the error  </a:t>
             </a:r>
           </a:p>
         </p:txBody>
@@ -14240,145 +15245,6 @@
         <p14:creationId xmlns:p14="http://schemas.microsoft.com/office/powerpoint/2010/main" val="2283716893"/>
       </p:ext>
     </p:extLst>
-  </p:cSld>
-  <p:clrMapOvr>
-    <a:masterClrMapping/>
-  </p:clrMapOvr>
-</p:sld>
-</file>
-
-<file path=ppt/slides/slide9.xml><?xml version="1.0" encoding="utf-8"?>
-<p:sld xmlns:a="http://schemas.openxmlformats.org/drawingml/2006/main" xmlns:r="http://schemas.openxmlformats.org/officeDocument/2006/relationships" xmlns:p="http://schemas.openxmlformats.org/presentationml/2006/main">
-  <p:cSld>
-    <p:spTree>
-      <p:nvGrpSpPr>
-        <p:cNvPr id="1" name=""/>
-        <p:cNvGrpSpPr/>
-        <p:nvPr/>
-      </p:nvGrpSpPr>
-      <p:grpSpPr>
-        <a:xfrm>
-          <a:off x="0" y="0"/>
-          <a:ext cx="0" cy="0"/>
-          <a:chOff x="0" y="0"/>
-          <a:chExt cx="0" cy="0"/>
-        </a:xfrm>
-      </p:grpSpPr>
-      <p:pic>
-        <p:nvPicPr>
-          <p:cNvPr id="2" name="object 2"/>
-          <p:cNvPicPr/>
-          <p:nvPr/>
-        </p:nvPicPr>
-        <p:blipFill>
-          <a:blip r:embed="rId2" cstate="print"/>
-          <a:stretch>
-            <a:fillRect/>
-          </a:stretch>
-        </p:blipFill>
-        <p:spPr>
-          <a:xfrm>
-            <a:off x="1524000" y="652463"/>
-            <a:ext cx="9144000" cy="5551486"/>
-          </a:xfrm>
-          <a:prstGeom prst="rect">
-            <a:avLst/>
-          </a:prstGeom>
-        </p:spPr>
-      </p:pic>
-      <p:sp>
-        <p:nvSpPr>
-          <p:cNvPr id="3" name="object 3"/>
-          <p:cNvSpPr txBox="1">
-            <a:spLocks noGrp="1"/>
-          </p:cNvSpPr>
-          <p:nvPr>
-            <p:ph type="ftr" sz="quarter" idx="5"/>
-          </p:nvPr>
-        </p:nvSpPr>
-        <p:spPr>
-          <a:xfrm>
-            <a:off x="6094476" y="6624399"/>
-            <a:ext cx="2407284" cy="256480"/>
-          </a:xfrm>
-          <a:prstGeom prst="rect">
-            <a:avLst/>
-          </a:prstGeom>
-        </p:spPr>
-        <p:txBody>
-          <a:bodyPr vert="horz" wrap="square" lIns="0" tIns="0" rIns="0" bIns="0" rtlCol="0">
-            <a:spAutoFit/>
-          </a:bodyPr>
-          <a:lstStyle/>
-          <a:p>
-            <a:pPr marR="5715" algn="r">
-              <a:lnSpc>
-                <a:spcPts val="1090"/>
-              </a:lnSpc>
-            </a:pPr>
-            <a:r>
-              <a:rPr spc="-10" dirty="0"/>
-              <a:t>©1992-</a:t>
-            </a:r>
-            <a:r>
-              <a:rPr dirty="0"/>
-              <a:t>2015</a:t>
-            </a:r>
-            <a:r>
-              <a:rPr spc="-20" dirty="0"/>
-              <a:t> </a:t>
-            </a:r>
-            <a:r>
-              <a:rPr dirty="0"/>
-              <a:t>by</a:t>
-            </a:r>
-            <a:r>
-              <a:rPr spc="-15" dirty="0"/>
-              <a:t> </a:t>
-            </a:r>
-            <a:r>
-              <a:rPr dirty="0"/>
-              <a:t>Pearson</a:t>
-            </a:r>
-            <a:r>
-              <a:rPr spc="-20" dirty="0"/>
-              <a:t> </a:t>
-            </a:r>
-            <a:r>
-              <a:rPr dirty="0"/>
-              <a:t>Education,</a:t>
-            </a:r>
-            <a:r>
-              <a:rPr spc="-20" dirty="0"/>
-              <a:t> Inc.</a:t>
-            </a:r>
-          </a:p>
-          <a:p>
-            <a:pPr marR="5080" algn="r"/>
-            <a:r>
-              <a:rPr dirty="0"/>
-              <a:t>All</a:t>
-            </a:r>
-            <a:r>
-              <a:rPr spc="-30" dirty="0"/>
-              <a:t> </a:t>
-            </a:r>
-            <a:r>
-              <a:rPr dirty="0"/>
-              <a:t>Rights</a:t>
-            </a:r>
-            <a:r>
-              <a:rPr spc="-25" dirty="0"/>
-              <a:t> </a:t>
-            </a:r>
-            <a:r>
-              <a:rPr spc="-10" dirty="0"/>
-              <a:t>Reserved.</a:t>
-            </a:r>
-          </a:p>
-        </p:txBody>
-      </p:sp>
-    </p:spTree>
   </p:cSld>
   <p:clrMapOvr>
     <a:masterClrMapping/>
@@ -14985,21 +15851,6 @@
 </file>
 
 <file path=customXml/item1.xml><?xml version="1.0" encoding="utf-8"?>
-<?mso-contentType ?>
-<FormTemplates xmlns="http://schemas.microsoft.com/sharepoint/v3/contenttype/forms">
-  <Display>DocumentLibraryForm</Display>
-  <Edit>DocumentLibraryForm</Edit>
-  <New>DocumentLibraryForm</New>
-</FormTemplates>
-</file>
-
-<file path=customXml/item2.xml><?xml version="1.0" encoding="utf-8"?>
-<p:properties xmlns:p="http://schemas.microsoft.com/office/2006/metadata/properties" xmlns:xsi="http://www.w3.org/2001/XMLSchema-instance" xmlns:pc="http://schemas.microsoft.com/office/infopath/2007/PartnerControls">
-  <documentManagement/>
-</p:properties>
-</file>
-
-<file path=customXml/item3.xml><?xml version="1.0" encoding="utf-8"?>
 <ct:contentTypeSchema xmlns:ct="http://schemas.microsoft.com/office/2006/metadata/contentType" xmlns:ma="http://schemas.microsoft.com/office/2006/metadata/properties/metaAttributes" ct:_="" ma:_="" ma:contentTypeName="Document" ma:contentTypeID="0x010100E57D341C545B0A44A26A103333756E90" ma:contentTypeVersion="3" ma:contentTypeDescription="Create a new document." ma:contentTypeScope="" ma:versionID="a6ec9fbdc07486795f51e30fe74f98ab">
   <xsd:schema xmlns:xsd="http://www.w3.org/2001/XMLSchema" xmlns:xs="http://www.w3.org/2001/XMLSchema" xmlns:p="http://schemas.microsoft.com/office/2006/metadata/properties" xmlns:ns2="324ab4a6-501d-4b19-a031-862034374e5f" targetNamespace="http://schemas.microsoft.com/office/2006/metadata/properties" ma:root="true" ma:fieldsID="af1894268a3b1d0258822da1f8692495" ns2:_="">
     <xsd:import namespace="324ab4a6-501d-4b19-a031-862034374e5f"/>
@@ -15137,24 +15988,22 @@
 </ct:contentTypeSchema>
 </file>
 
-<file path=customXml/itemProps1.xml><?xml version="1.0" encoding="utf-8"?>
-<ds:datastoreItem xmlns:ds="http://schemas.openxmlformats.org/officeDocument/2006/customXml" ds:itemID="{77646C84-701A-4061-B977-6AA8F23187E4}">
-  <ds:schemaRefs>
-    <ds:schemaRef ds:uri="http://schemas.microsoft.com/sharepoint/v3/contenttype/forms"/>
-  </ds:schemaRefs>
-</ds:datastoreItem>
+<file path=customXml/item2.xml><?xml version="1.0" encoding="utf-8"?>
+<p:properties xmlns:p="http://schemas.microsoft.com/office/2006/metadata/properties" xmlns:xsi="http://www.w3.org/2001/XMLSchema-instance" xmlns:pc="http://schemas.microsoft.com/office/infopath/2007/PartnerControls">
+  <documentManagement/>
+</p:properties>
 </file>
 
-<file path=customXml/itemProps2.xml><?xml version="1.0" encoding="utf-8"?>
-<ds:datastoreItem xmlns:ds="http://schemas.openxmlformats.org/officeDocument/2006/customXml" ds:itemID="{551C73E0-21DE-44C0-AC09-20B6FA27554C}">
-  <ds:schemaRefs>
-    <ds:schemaRef ds:uri="http://schemas.microsoft.com/office/2006/metadata/properties"/>
-    <ds:schemaRef ds:uri="http://schemas.microsoft.com/office/infopath/2007/PartnerControls"/>
-  </ds:schemaRefs>
-</ds:datastoreItem>
+<file path=customXml/item3.xml><?xml version="1.0" encoding="utf-8"?>
+<?mso-contentType ?>
+<FormTemplates xmlns="http://schemas.microsoft.com/sharepoint/v3/contenttype/forms">
+  <Display>DocumentLibraryForm</Display>
+  <Edit>DocumentLibraryForm</Edit>
+  <New>DocumentLibraryForm</New>
+</FormTemplates>
 </file>
 
-<file path=customXml/itemProps3.xml><?xml version="1.0" encoding="utf-8"?>
+<file path=customXml/itemProps1.xml><?xml version="1.0" encoding="utf-8"?>
 <ds:datastoreItem xmlns:ds="http://schemas.openxmlformats.org/officeDocument/2006/customXml" ds:itemID="{DDC95283-C95E-4740-9B60-A5D5E7C0A0D2}">
   <ds:schemaRefs>
     <ds:schemaRef ds:uri="http://schemas.microsoft.com/office/2006/metadata/contentType"/>
@@ -15170,4 +16019,21 @@
     <ds:schemaRef ds:uri="http://schemas.microsoft.com/internal/obd"/>
   </ds:schemaRefs>
 </ds:datastoreItem>
+</file>
+
+<file path=customXml/itemProps2.xml><?xml version="1.0" encoding="utf-8"?>
+<ds:datastoreItem xmlns:ds="http://schemas.openxmlformats.org/officeDocument/2006/customXml" ds:itemID="{551C73E0-21DE-44C0-AC09-20B6FA27554C}">
+  <ds:schemaRefs>
+    <ds:schemaRef ds:uri="http://schemas.microsoft.com/office/2006/metadata/properties"/>
+    <ds:schemaRef ds:uri="http://schemas.microsoft.com/office/infopath/2007/PartnerControls"/>
+  </ds:schemaRefs>
+</ds:datastoreItem>
+</file>
+
+<file path=customXml/itemProps3.xml><?xml version="1.0" encoding="utf-8"?>
+<ds:datastoreItem xmlns:ds="http://schemas.openxmlformats.org/officeDocument/2006/customXml" ds:itemID="{77646C84-701A-4061-B977-6AA8F23187E4}">
+  <ds:schemaRefs>
+    <ds:schemaRef ds:uri="http://schemas.microsoft.com/sharepoint/v3/contenttype/forms"/>
+  </ds:schemaRefs>
+</ds:datastoreItem>
 </file>